--- a/modules/module-01-industrial-demand-generation/delivery-pack/slide-decks/exports/lesson-06-distribution-the-missing-half.pptx
+++ b/modules/module-01-industrial-demand-generation/delivery-pack/slide-decks/exports/lesson-06-distribution-the-missing-half.pptx
@@ -2,27 +2,27 @@
 <file path=ppt/presentation.xml><?xml version="1.0" encoding="utf-8"?>
 <p:presentation xmlns:p="http://schemas.openxmlformats.org/presentationml/2006/main">
   <p:sldMasterIdLst>
-    <p:sldMasterId xmlns:r="http://schemas.openxmlformats.org/officeDocument/2006/relationships" id="2147483648" r:id="R0c848829ee6b4dca"/>
+    <p:sldMasterId xmlns:r="http://schemas.openxmlformats.org/officeDocument/2006/relationships" id="2147483648" r:id="R56265ba1335a4eab"/>
   </p:sldMasterIdLst>
   <p:notesMasterIdLst>
-    <p:notesMasterId xmlns:r="http://schemas.openxmlformats.org/officeDocument/2006/relationships" r:id="R7f2305c22b7b4e2b"/>
+    <p:notesMasterId xmlns:r="http://schemas.openxmlformats.org/officeDocument/2006/relationships" r:id="Rf863d94358714ee6"/>
   </p:notesMasterIdLst>
   <p:sldIdLst>
-    <p:sldId xmlns:r="http://schemas.openxmlformats.org/officeDocument/2006/relationships" id="256" r:id="Rbe54e9e4cdb349c3"/>
-    <p:sldId xmlns:r="http://schemas.openxmlformats.org/officeDocument/2006/relationships" id="257" r:id="R8eb7535eaa83466d"/>
-    <p:sldId xmlns:r="http://schemas.openxmlformats.org/officeDocument/2006/relationships" id="258" r:id="Rb6503ff7ad37443b"/>
-    <p:sldId xmlns:r="http://schemas.openxmlformats.org/officeDocument/2006/relationships" id="259" r:id="Rbb106fdf67f945b0"/>
-    <p:sldId xmlns:r="http://schemas.openxmlformats.org/officeDocument/2006/relationships" id="260" r:id="R42b499a786a34ec2"/>
-    <p:sldId xmlns:r="http://schemas.openxmlformats.org/officeDocument/2006/relationships" id="261" r:id="R83ded2c7d74c42af"/>
-    <p:sldId xmlns:r="http://schemas.openxmlformats.org/officeDocument/2006/relationships" id="262" r:id="R6c6be09cdfa4435c"/>
-    <p:sldId xmlns:r="http://schemas.openxmlformats.org/officeDocument/2006/relationships" id="263" r:id="Rfcc2731c92e446cd"/>
-    <p:sldId xmlns:r="http://schemas.openxmlformats.org/officeDocument/2006/relationships" id="264" r:id="Re03c60c28f264a94"/>
-    <p:sldId xmlns:r="http://schemas.openxmlformats.org/officeDocument/2006/relationships" id="265" r:id="R05d9658bfed94f7a"/>
-    <p:sldId xmlns:r="http://schemas.openxmlformats.org/officeDocument/2006/relationships" id="266" r:id="R52067b39261a481d"/>
-    <p:sldId xmlns:r="http://schemas.openxmlformats.org/officeDocument/2006/relationships" id="267" r:id="R5185ad3b76bf413b"/>
-    <p:sldId xmlns:r="http://schemas.openxmlformats.org/officeDocument/2006/relationships" id="268" r:id="R137d4fc2f1ec4619"/>
-    <p:sldId xmlns:r="http://schemas.openxmlformats.org/officeDocument/2006/relationships" id="269" r:id="Rf746f77389d44162"/>
-    <p:sldId xmlns:r="http://schemas.openxmlformats.org/officeDocument/2006/relationships" id="270" r:id="R47e51299cc3c4fe8"/>
+    <p:sldId xmlns:r="http://schemas.openxmlformats.org/officeDocument/2006/relationships" id="256" r:id="R2c68858f04614213"/>
+    <p:sldId xmlns:r="http://schemas.openxmlformats.org/officeDocument/2006/relationships" id="257" r:id="R3d41c109cddd4ed1"/>
+    <p:sldId xmlns:r="http://schemas.openxmlformats.org/officeDocument/2006/relationships" id="258" r:id="R595a909d567d4ae8"/>
+    <p:sldId xmlns:r="http://schemas.openxmlformats.org/officeDocument/2006/relationships" id="259" r:id="R8e2988735af24bd1"/>
+    <p:sldId xmlns:r="http://schemas.openxmlformats.org/officeDocument/2006/relationships" id="260" r:id="Ra5c0e856d1b14b51"/>
+    <p:sldId xmlns:r="http://schemas.openxmlformats.org/officeDocument/2006/relationships" id="261" r:id="Rb622a38cb4694513"/>
+    <p:sldId xmlns:r="http://schemas.openxmlformats.org/officeDocument/2006/relationships" id="262" r:id="Rcd00cee47661415f"/>
+    <p:sldId xmlns:r="http://schemas.openxmlformats.org/officeDocument/2006/relationships" id="263" r:id="R21f3e5b18b7b4d84"/>
+    <p:sldId xmlns:r="http://schemas.openxmlformats.org/officeDocument/2006/relationships" id="264" r:id="Ra45770a29b8143ea"/>
+    <p:sldId xmlns:r="http://schemas.openxmlformats.org/officeDocument/2006/relationships" id="265" r:id="R4c9c37dc76834577"/>
+    <p:sldId xmlns:r="http://schemas.openxmlformats.org/officeDocument/2006/relationships" id="266" r:id="R4b38179584e64979"/>
+    <p:sldId xmlns:r="http://schemas.openxmlformats.org/officeDocument/2006/relationships" id="267" r:id="Read44236d7b344d1"/>
+    <p:sldId xmlns:r="http://schemas.openxmlformats.org/officeDocument/2006/relationships" id="268" r:id="Ra472652adf6a432c"/>
+    <p:sldId xmlns:r="http://schemas.openxmlformats.org/officeDocument/2006/relationships" id="269" r:id="R1b43896772884f35"/>
+    <p:sldId xmlns:r="http://schemas.openxmlformats.org/officeDocument/2006/relationships" id="270" r:id="Rfa882304f8ce4011"/>
   </p:sldIdLst>
   <p:sldSz cx="12192000" cy="6858000"/>
   <p:notesSz cx="6858000" cy="9144000"/>
@@ -1493,7 +1493,7 @@
   </p:cSld>
   <p:clrMap bg1="lt1" tx1="dk1" bg2="lt2" tx2="dk2" accent1="accent1" accent2="accent2" accent3="accent3" accent4="accent4" accent5="accent5" accent6="accent6" hlink="hlink" folHlink="folHlink"/>
   <p:sldLayoutIdLst>
-    <p:sldLayoutId xmlns:r="http://schemas.openxmlformats.org/officeDocument/2006/relationships" id="2147483649" r:id="R81a9f8313458454f"/>
+    <p:sldLayoutId xmlns:r="http://schemas.openxmlformats.org/officeDocument/2006/relationships" id="2147483649" r:id="R070ccec21af54485"/>
   </p:sldLayoutIdLst>
   <p:txStyles>
     <p:titleStyle>
@@ -1792,7 +1792,7 @@
           <p:cNvPr id="1" name="">
             <a:extLst xmlns:a="http://schemas.openxmlformats.org/drawingml/2006/main">
               <a:ext uri="{FF2B5EF4-FFF2-40B4-BE49-F238E27FC236}">
-                <a16:creationId xmlns:a16="http://schemas.microsoft.com/office/drawing/2014/main" id="{8B23C62E-59AF-4FDB-B669-2D4CCBAC4A7C}"/>
+                <a16:creationId xmlns:a16="http://schemas.microsoft.com/office/drawing/2014/main" id="{3ED97700-10EF-4B0E-8A0C-9E8C1BD219FC}"/>
               </a:ext>
             </a:extLst>
           </p:cNvPr>
@@ -1827,7 +1827,7 @@
           <p:cNvPr id="2" name="">
             <a:extLst xmlns:a="http://schemas.openxmlformats.org/drawingml/2006/main">
               <a:ext uri="{FF2B5EF4-FFF2-40B4-BE49-F238E27FC236}">
-                <a16:creationId xmlns:a16="http://schemas.microsoft.com/office/drawing/2014/main" id="{E3C42A5D-803E-4015-BDAF-A3E023F5265D}"/>
+                <a16:creationId xmlns:a16="http://schemas.microsoft.com/office/drawing/2014/main" id="{7CF21ED9-4A55-4BDB-9289-60367A6A6761}"/>
               </a:ext>
             </a:extLst>
           </p:cNvPr>
@@ -1862,7 +1862,7 @@
           <p:cNvPr id="3" name="">
             <a:extLst xmlns:a="http://schemas.openxmlformats.org/drawingml/2006/main">
               <a:ext uri="{FF2B5EF4-FFF2-40B4-BE49-F238E27FC236}">
-                <a16:creationId xmlns:a16="http://schemas.microsoft.com/office/drawing/2014/main" id="{69AEC220-89A8-4D3A-8536-32EA61B0BDC5}"/>
+                <a16:creationId xmlns:a16="http://schemas.microsoft.com/office/drawing/2014/main" id="{B938E30D-CF5E-4E63-BE39-6939EC6B5FBA}"/>
               </a:ext>
             </a:extLst>
           </p:cNvPr>
@@ -1897,7 +1897,7 @@
           <p:cNvPr id="4" name="kicker-06-marker">
             <a:extLst xmlns:a="http://schemas.openxmlformats.org/drawingml/2006/main">
               <a:ext uri="{FF2B5EF4-FFF2-40B4-BE49-F238E27FC236}">
-                <a16:creationId xmlns:a16="http://schemas.microsoft.com/office/drawing/2014/main" id="{AFCF652D-9486-495B-B201-093A3CC4FC5D}"/>
+                <a16:creationId xmlns:a16="http://schemas.microsoft.com/office/drawing/2014/main" id="{141DD913-6DDC-41A5-93A0-FACEB052C0EA}"/>
               </a:ext>
             </a:extLst>
           </p:cNvPr>
@@ -1932,7 +1932,7 @@
           <p:cNvPr id="5" name="kicker-06-label">
             <a:extLst xmlns:a="http://schemas.openxmlformats.org/drawingml/2006/main">
               <a:ext uri="{FF2B5EF4-FFF2-40B4-BE49-F238E27FC236}">
-                <a16:creationId xmlns:a16="http://schemas.microsoft.com/office/drawing/2014/main" id="{0B762FCB-F0D6-4B1B-9289-8F17AB75B26A}"/>
+                <a16:creationId xmlns:a16="http://schemas.microsoft.com/office/drawing/2014/main" id="{0E55153E-68C4-471B-A33A-C82C4230AD69}"/>
               </a:ext>
             </a:extLst>
           </p:cNvPr>
@@ -1996,7 +1996,7 @@
           <p:cNvPr id="6" name="">
             <a:extLst xmlns:a="http://schemas.openxmlformats.org/drawingml/2006/main">
               <a:ext uri="{FF2B5EF4-FFF2-40B4-BE49-F238E27FC236}">
-                <a16:creationId xmlns:a16="http://schemas.microsoft.com/office/drawing/2014/main" id="{354D0F56-3442-4024-9BAD-4CFB9E03900F}"/>
+                <a16:creationId xmlns:a16="http://schemas.microsoft.com/office/drawing/2014/main" id="{31E7F359-9400-48F2-A8ED-9D951BEAB8DC}"/>
               </a:ext>
             </a:extLst>
           </p:cNvPr>
@@ -2060,7 +2060,7 @@
           <p:cNvPr id="7" name="">
             <a:extLst xmlns:a="http://schemas.openxmlformats.org/drawingml/2006/main">
               <a:ext uri="{FF2B5EF4-FFF2-40B4-BE49-F238E27FC236}">
-                <a16:creationId xmlns:a16="http://schemas.microsoft.com/office/drawing/2014/main" id="{5F077BF5-B914-49C0-B10C-B6200A0BEC67}"/>
+                <a16:creationId xmlns:a16="http://schemas.microsoft.com/office/drawing/2014/main" id="{EB505AD1-BB59-4D02-A53E-E1B0118E8368}"/>
               </a:ext>
             </a:extLst>
           </p:cNvPr>
@@ -2124,7 +2124,7 @@
           <p:cNvPr id="8" name="">
             <a:extLst xmlns:a="http://schemas.openxmlformats.org/drawingml/2006/main">
               <a:ext uri="{FF2B5EF4-FFF2-40B4-BE49-F238E27FC236}">
-                <a16:creationId xmlns:a16="http://schemas.microsoft.com/office/drawing/2014/main" id="{7D50E36E-8AAC-41A5-89EB-86E32A045E0D}"/>
+                <a16:creationId xmlns:a16="http://schemas.microsoft.com/office/drawing/2014/main" id="{5156FCC9-F07E-45EC-B4AC-AB8DE4C827ED}"/>
               </a:ext>
             </a:extLst>
           </p:cNvPr>
@@ -2157,7 +2157,7 @@
           <p:cNvPr id="9" name="">
             <a:extLst xmlns:a="http://schemas.openxmlformats.org/drawingml/2006/main">
               <a:ext uri="{FF2B5EF4-FFF2-40B4-BE49-F238E27FC236}">
-                <a16:creationId xmlns:a16="http://schemas.microsoft.com/office/drawing/2014/main" id="{1557BEA4-F9D8-4DCE-850E-286E7433B02A}"/>
+                <a16:creationId xmlns:a16="http://schemas.microsoft.com/office/drawing/2014/main" id="{F6BA83B1-42FA-4738-AE2A-0F5EA590B347}"/>
               </a:ext>
             </a:extLst>
           </p:cNvPr>
@@ -2221,7 +2221,7 @@
           <p:cNvPr id="10" name="">
             <a:extLst xmlns:a="http://schemas.openxmlformats.org/drawingml/2006/main">
               <a:ext uri="{FF2B5EF4-FFF2-40B4-BE49-F238E27FC236}">
-                <a16:creationId xmlns:a16="http://schemas.microsoft.com/office/drawing/2014/main" id="{4B6644AB-149D-46D1-92F4-D35797D0CC38}"/>
+                <a16:creationId xmlns:a16="http://schemas.microsoft.com/office/drawing/2014/main" id="{62F22D34-AAB9-4F36-9B0F-B93D449C23F2}"/>
               </a:ext>
             </a:extLst>
           </p:cNvPr>
@@ -2254,7 +2254,7 @@
           <p:cNvPr id="11" name="">
             <a:extLst xmlns:a="http://schemas.openxmlformats.org/drawingml/2006/main">
               <a:ext uri="{FF2B5EF4-FFF2-40B4-BE49-F238E27FC236}">
-                <a16:creationId xmlns:a16="http://schemas.microsoft.com/office/drawing/2014/main" id="{80D15A84-8282-477B-93EF-59B17D74D8B0}"/>
+                <a16:creationId xmlns:a16="http://schemas.microsoft.com/office/drawing/2014/main" id="{BA2EA6AE-2B7D-4CC4-B2A8-408C8269A7FC}"/>
               </a:ext>
             </a:extLst>
           </p:cNvPr>
@@ -2318,7 +2318,7 @@
           <p:cNvPr id="12" name="">
             <a:extLst xmlns:a="http://schemas.openxmlformats.org/drawingml/2006/main">
               <a:ext uri="{FF2B5EF4-FFF2-40B4-BE49-F238E27FC236}">
-                <a16:creationId xmlns:a16="http://schemas.microsoft.com/office/drawing/2014/main" id="{D13EBD0D-8BBC-4F03-B69A-6D71AABD602E}"/>
+                <a16:creationId xmlns:a16="http://schemas.microsoft.com/office/drawing/2014/main" id="{09FDF12E-A517-40AA-9BCC-79780216AA50}"/>
               </a:ext>
             </a:extLst>
           </p:cNvPr>
@@ -2351,7 +2351,7 @@
           <p:cNvPr id="13" name="">
             <a:extLst xmlns:a="http://schemas.openxmlformats.org/drawingml/2006/main">
               <a:ext uri="{FF2B5EF4-FFF2-40B4-BE49-F238E27FC236}">
-                <a16:creationId xmlns:a16="http://schemas.microsoft.com/office/drawing/2014/main" id="{AEC3C3A8-49E8-4368-B581-0F5CE1C647D8}"/>
+                <a16:creationId xmlns:a16="http://schemas.microsoft.com/office/drawing/2014/main" id="{1BACDB28-BF01-4A30-8B4A-F0A266B11042}"/>
               </a:ext>
             </a:extLst>
           </p:cNvPr>
@@ -2415,7 +2415,7 @@
           <p:cNvPr id="14" name="">
             <a:extLst xmlns:a="http://schemas.openxmlformats.org/drawingml/2006/main">
               <a:ext uri="{FF2B5EF4-FFF2-40B4-BE49-F238E27FC236}">
-                <a16:creationId xmlns:a16="http://schemas.microsoft.com/office/drawing/2014/main" id="{D8063930-DC47-4D28-9482-F8E4A392D331}"/>
+                <a16:creationId xmlns:a16="http://schemas.microsoft.com/office/drawing/2014/main" id="{64AE9490-BCA3-46D9-8E42-7682A960E2CB}"/>
               </a:ext>
             </a:extLst>
           </p:cNvPr>
@@ -2448,7 +2448,7 @@
           <p:cNvPr id="15" name="">
             <a:extLst xmlns:a="http://schemas.openxmlformats.org/drawingml/2006/main">
               <a:ext uri="{FF2B5EF4-FFF2-40B4-BE49-F238E27FC236}">
-                <a16:creationId xmlns:a16="http://schemas.microsoft.com/office/drawing/2014/main" id="{D0D605BA-8E4A-47B6-82C6-A8A79B39D0AB}"/>
+                <a16:creationId xmlns:a16="http://schemas.microsoft.com/office/drawing/2014/main" id="{EEBDD662-45D8-4CBE-912C-90A1BC6878A1}"/>
               </a:ext>
             </a:extLst>
           </p:cNvPr>
@@ -2483,7 +2483,7 @@
           <p:cNvPr id="16" name="">
             <a:extLst xmlns:a="http://schemas.openxmlformats.org/drawingml/2006/main">
               <a:ext uri="{FF2B5EF4-FFF2-40B4-BE49-F238E27FC236}">
-                <a16:creationId xmlns:a16="http://schemas.microsoft.com/office/drawing/2014/main" id="{01336562-6F5C-4260-85A8-1E5082B89217}"/>
+                <a16:creationId xmlns:a16="http://schemas.microsoft.com/office/drawing/2014/main" id="{BEA490B7-080A-4748-AC48-C30A2053963C}"/>
               </a:ext>
             </a:extLst>
           </p:cNvPr>
@@ -2547,7 +2547,7 @@
           <p:cNvPr id="17" name="">
             <a:extLst xmlns:a="http://schemas.openxmlformats.org/drawingml/2006/main">
               <a:ext uri="{FF2B5EF4-FFF2-40B4-BE49-F238E27FC236}">
-                <a16:creationId xmlns:a16="http://schemas.microsoft.com/office/drawing/2014/main" id="{02C4DB97-9A97-484A-9F0F-84951FF2036F}"/>
+                <a16:creationId xmlns:a16="http://schemas.microsoft.com/office/drawing/2014/main" id="{7A8A5F27-0773-42D4-A424-C7E48A27A39C}"/>
               </a:ext>
             </a:extLst>
           </p:cNvPr>
@@ -2611,7 +2611,7 @@
           <p:cNvPr id="18" name="">
             <a:extLst xmlns:a="http://schemas.openxmlformats.org/drawingml/2006/main">
               <a:ext uri="{FF2B5EF4-FFF2-40B4-BE49-F238E27FC236}">
-                <a16:creationId xmlns:a16="http://schemas.microsoft.com/office/drawing/2014/main" id="{B036B3EE-D190-4B40-AFFB-2C916BE59749}"/>
+                <a16:creationId xmlns:a16="http://schemas.microsoft.com/office/drawing/2014/main" id="{6EA925C1-B69C-4D0E-AEAD-98853D9E2729}"/>
               </a:ext>
             </a:extLst>
           </p:cNvPr>
@@ -2646,7 +2646,7 @@
           <p:cNvPr id="19" name="">
             <a:extLst xmlns:a="http://schemas.openxmlformats.org/drawingml/2006/main">
               <a:ext uri="{FF2B5EF4-FFF2-40B4-BE49-F238E27FC236}">
-                <a16:creationId xmlns:a16="http://schemas.microsoft.com/office/drawing/2014/main" id="{44A4A53C-FF3D-4C88-8C6F-5D00A036E1E0}"/>
+                <a16:creationId xmlns:a16="http://schemas.microsoft.com/office/drawing/2014/main" id="{C8D707D4-FE06-4091-8FB4-B41B16C82EA9}"/>
               </a:ext>
             </a:extLst>
           </p:cNvPr>
@@ -2710,7 +2710,7 @@
           <p:cNvPr id="20" name="">
             <a:extLst xmlns:a="http://schemas.openxmlformats.org/drawingml/2006/main">
               <a:ext uri="{FF2B5EF4-FFF2-40B4-BE49-F238E27FC236}">
-                <a16:creationId xmlns:a16="http://schemas.microsoft.com/office/drawing/2014/main" id="{907C53B4-8D74-49BE-92E3-D88B80A5C84B}"/>
+                <a16:creationId xmlns:a16="http://schemas.microsoft.com/office/drawing/2014/main" id="{5520F1E9-00D2-4855-A585-DFDD720A81A9}"/>
               </a:ext>
             </a:extLst>
           </p:cNvPr>
@@ -2764,7 +2764,7 @@
                 <a:ea typeface="Aptos"/>
                 <a:cs typeface="Aptos"/>
               </a:rPr>
-              <a:t>Teach the operating decision, run the diagnostic, then force a usable artifact. The slide is a prompt, not the handout.</a:t>
+              <a:t>Teach the operating decision, run the diagnostic, then force a usable artifact. The slide is a teaching cue, not the handout.</a:t>
             </a:r>
           </a:p>
         </p:txBody>
@@ -2774,7 +2774,7 @@
           <p:cNvPr id="21" name="">
             <a:extLst xmlns:a="http://schemas.openxmlformats.org/drawingml/2006/main">
               <a:ext uri="{FF2B5EF4-FFF2-40B4-BE49-F238E27FC236}">
-                <a16:creationId xmlns:a16="http://schemas.microsoft.com/office/drawing/2014/main" id="{BBC8F7A5-E78B-4502-999E-3EC6563FDC29}"/>
+                <a16:creationId xmlns:a16="http://schemas.microsoft.com/office/drawing/2014/main" id="{6580603D-3F08-427D-B434-3B3DD12C44AD}"/>
               </a:ext>
             </a:extLst>
           </p:cNvPr>
@@ -2809,7 +2809,7 @@
           <p:cNvPr id="22" name="">
             <a:extLst xmlns:a="http://schemas.openxmlformats.org/drawingml/2006/main">
               <a:ext uri="{FF2B5EF4-FFF2-40B4-BE49-F238E27FC236}">
-                <a16:creationId xmlns:a16="http://schemas.microsoft.com/office/drawing/2014/main" id="{8BCECF6E-5CF0-4AD1-9280-DD5E4F06C160}"/>
+                <a16:creationId xmlns:a16="http://schemas.microsoft.com/office/drawing/2014/main" id="{B1FB009B-2A33-4C99-BB08-ACC2749B48EE}"/>
               </a:ext>
             </a:extLst>
           </p:cNvPr>
@@ -2873,7 +2873,7 @@
           <p:cNvPr id="23" name="">
             <a:extLst xmlns:a="http://schemas.openxmlformats.org/drawingml/2006/main">
               <a:ext uri="{FF2B5EF4-FFF2-40B4-BE49-F238E27FC236}">
-                <a16:creationId xmlns:a16="http://schemas.microsoft.com/office/drawing/2014/main" id="{0CDDA22F-3CCB-4CB3-9057-1DA61B95E311}"/>
+                <a16:creationId xmlns:a16="http://schemas.microsoft.com/office/drawing/2014/main" id="{ADAE39FF-B772-4E9F-8153-246D36E89787}"/>
               </a:ext>
             </a:extLst>
           </p:cNvPr>
@@ -2937,7 +2937,7 @@
           <p:cNvPr id="24" name="">
             <a:extLst xmlns:a="http://schemas.openxmlformats.org/drawingml/2006/main">
               <a:ext uri="{FF2B5EF4-FFF2-40B4-BE49-F238E27FC236}">
-                <a16:creationId xmlns:a16="http://schemas.microsoft.com/office/drawing/2014/main" id="{364A32F0-6915-4847-AB78-B7EFD54AA6C5}"/>
+                <a16:creationId xmlns:a16="http://schemas.microsoft.com/office/drawing/2014/main" id="{4D131DBC-7C2D-4BF2-B41E-26253AE87E68}"/>
               </a:ext>
             </a:extLst>
           </p:cNvPr>
@@ -2972,7 +2972,7 @@
           <p:cNvPr id="25" name="">
             <a:extLst xmlns:a="http://schemas.openxmlformats.org/drawingml/2006/main">
               <a:ext uri="{FF2B5EF4-FFF2-40B4-BE49-F238E27FC236}">
-                <a16:creationId xmlns:a16="http://schemas.microsoft.com/office/drawing/2014/main" id="{9F838168-4651-4FFB-A9C1-4E8EBB5BD552}"/>
+                <a16:creationId xmlns:a16="http://schemas.microsoft.com/office/drawing/2014/main" id="{8A7DAB86-760A-4594-8765-86E5B1F2389C}"/>
               </a:ext>
             </a:extLst>
           </p:cNvPr>
@@ -3036,7 +3036,7 @@
           <p:cNvPr id="26" name="">
             <a:extLst xmlns:a="http://schemas.openxmlformats.org/drawingml/2006/main">
               <a:ext uri="{FF2B5EF4-FFF2-40B4-BE49-F238E27FC236}">
-                <a16:creationId xmlns:a16="http://schemas.microsoft.com/office/drawing/2014/main" id="{DEBCF044-F117-4A29-9958-2B5230F6DE7F}"/>
+                <a16:creationId xmlns:a16="http://schemas.microsoft.com/office/drawing/2014/main" id="{F6C3912D-5512-4058-B1ED-02703209E7EB}"/>
               </a:ext>
             </a:extLst>
           </p:cNvPr>
@@ -3100,7 +3100,7 @@
           <p:cNvPr id="27" name="">
             <a:extLst xmlns:a="http://schemas.openxmlformats.org/drawingml/2006/main">
               <a:ext uri="{FF2B5EF4-FFF2-40B4-BE49-F238E27FC236}">
-                <a16:creationId xmlns:a16="http://schemas.microsoft.com/office/drawing/2014/main" id="{8FC324A5-036C-4A02-A430-9DA4716A6FA3}"/>
+                <a16:creationId xmlns:a16="http://schemas.microsoft.com/office/drawing/2014/main" id="{8AC3CF9D-8182-4D6E-AED8-F1BEA3FD0657}"/>
               </a:ext>
             </a:extLst>
           </p:cNvPr>
@@ -3162,7 +3162,7 @@
     </p:spTree>
     <p:extLst>
       <p:ext uri="{BB962C8B-B14F-4D97-AF65-F5344CB8AC3E}">
-        <p14:creationId xmlns:p14="http://schemas.microsoft.com/office/powerpoint/2010/main" val="1549193584"/>
+        <p14:creationId xmlns:p14="http://schemas.microsoft.com/office/powerpoint/2010/main" val="1600274271"/>
       </p:ext>
     </p:extLst>
   </p:cSld>
@@ -3186,7 +3186,7 @@
           <p:cNvPr id="1" name="">
             <a:extLst xmlns:a="http://schemas.openxmlformats.org/drawingml/2006/main">
               <a:ext uri="{FF2B5EF4-FFF2-40B4-BE49-F238E27FC236}">
-                <a16:creationId xmlns:a16="http://schemas.microsoft.com/office/drawing/2014/main" id="{A28357F8-A96F-491C-BB01-4DC7CE784D1C}"/>
+                <a16:creationId xmlns:a16="http://schemas.microsoft.com/office/drawing/2014/main" id="{81359053-B88A-4952-B2F8-7BC4E0D1EBBC}"/>
               </a:ext>
             </a:extLst>
           </p:cNvPr>
@@ -3221,7 +3221,7 @@
           <p:cNvPr id="2" name="">
             <a:extLst xmlns:a="http://schemas.openxmlformats.org/drawingml/2006/main">
               <a:ext uri="{FF2B5EF4-FFF2-40B4-BE49-F238E27FC236}">
-                <a16:creationId xmlns:a16="http://schemas.microsoft.com/office/drawing/2014/main" id="{C67B4381-E04B-4013-86DE-8C5C0636CAE2}"/>
+                <a16:creationId xmlns:a16="http://schemas.microsoft.com/office/drawing/2014/main" id="{7960D42E-7F02-4E33-B134-13DB7DD20B67}"/>
               </a:ext>
             </a:extLst>
           </p:cNvPr>
@@ -3256,7 +3256,7 @@
           <p:cNvPr id="3" name="">
             <a:extLst xmlns:a="http://schemas.openxmlformats.org/drawingml/2006/main">
               <a:ext uri="{FF2B5EF4-FFF2-40B4-BE49-F238E27FC236}">
-                <a16:creationId xmlns:a16="http://schemas.microsoft.com/office/drawing/2014/main" id="{20152830-821B-4C63-B6C4-61370CC5DC0B}"/>
+                <a16:creationId xmlns:a16="http://schemas.microsoft.com/office/drawing/2014/main" id="{643D2DE2-9FFA-4F8E-9FA4-BE5FB386317E}"/>
               </a:ext>
             </a:extLst>
           </p:cNvPr>
@@ -3291,7 +3291,7 @@
           <p:cNvPr id="4" name="kicker-06-marker">
             <a:extLst xmlns:a="http://schemas.openxmlformats.org/drawingml/2006/main">
               <a:ext uri="{FF2B5EF4-FFF2-40B4-BE49-F238E27FC236}">
-                <a16:creationId xmlns:a16="http://schemas.microsoft.com/office/drawing/2014/main" id="{AC73F447-A19A-464C-8141-761AF29B5E20}"/>
+                <a16:creationId xmlns:a16="http://schemas.microsoft.com/office/drawing/2014/main" id="{B6EABB4F-CDE0-40F4-9F67-38A1FA380B1C}"/>
               </a:ext>
             </a:extLst>
           </p:cNvPr>
@@ -3326,7 +3326,7 @@
           <p:cNvPr id="5" name="kicker-06-label">
             <a:extLst xmlns:a="http://schemas.openxmlformats.org/drawingml/2006/main">
               <a:ext uri="{FF2B5EF4-FFF2-40B4-BE49-F238E27FC236}">
-                <a16:creationId xmlns:a16="http://schemas.microsoft.com/office/drawing/2014/main" id="{CB636685-16A6-41B8-ACD4-80B1180E1FE9}"/>
+                <a16:creationId xmlns:a16="http://schemas.microsoft.com/office/drawing/2014/main" id="{35016F8C-3430-458D-ABA0-C93D75492D71}"/>
               </a:ext>
             </a:extLst>
           </p:cNvPr>
@@ -3380,7 +3380,7 @@
                 <a:ea typeface="Aptos"/>
                 <a:cs typeface="Aptos"/>
               </a:rPr>
-              <a:t>MODULE 1 / LESSON 06 / AI-ASSISTED EXERCISE</a:t>
+              <a:t>MODULE 1 / LESSON 06 / STRUCTURED DRAFTING DRILL</a:t>
             </a:r>
           </a:p>
         </p:txBody>
@@ -3390,7 +3390,7 @@
           <p:cNvPr id="6" name="">
             <a:extLst xmlns:a="http://schemas.openxmlformats.org/drawingml/2006/main">
               <a:ext uri="{FF2B5EF4-FFF2-40B4-BE49-F238E27FC236}">
-                <a16:creationId xmlns:a16="http://schemas.microsoft.com/office/drawing/2014/main" id="{2A0DB86D-B8E5-449B-9AE2-A1E5D39437C1}"/>
+                <a16:creationId xmlns:a16="http://schemas.microsoft.com/office/drawing/2014/main" id="{A12F282F-EE30-4549-B00A-86B1455AFD09}"/>
               </a:ext>
             </a:extLst>
           </p:cNvPr>
@@ -3444,7 +3444,7 @@
                 <a:ea typeface="Aptos Display"/>
                 <a:cs typeface="Aptos Display"/>
               </a:rPr>
-              <a:t>Use AI to structure the attempt, then make humans responsible for judgment.</a:t>
+              <a:t>Structure the first draft before the room critiques it.</a:t>
             </a:r>
           </a:p>
         </p:txBody>
@@ -3454,7 +3454,7 @@
           <p:cNvPr id="7" name="">
             <a:extLst xmlns:a="http://schemas.openxmlformats.org/drawingml/2006/main">
               <a:ext uri="{FF2B5EF4-FFF2-40B4-BE49-F238E27FC236}">
-                <a16:creationId xmlns:a16="http://schemas.microsoft.com/office/drawing/2014/main" id="{7A763D32-87B5-4022-8E4C-D0E1450C1C64}"/>
+                <a16:creationId xmlns:a16="http://schemas.microsoft.com/office/drawing/2014/main" id="{7ECB3000-15A6-473C-BE82-D1DC3A175158}"/>
               </a:ext>
             </a:extLst>
           </p:cNvPr>
@@ -3508,7 +3508,7 @@
                 <a:ea typeface="Aptos"/>
                 <a:cs typeface="Aptos"/>
               </a:rPr>
-              <a:t>The prompt is constrained by source, assumptions, output standard, and human validation.</a:t>
+              <a:t>The brief is constrained by source evidence, assumptions, output standard, and validation.</a:t>
             </a:r>
           </a:p>
         </p:txBody>
@@ -3518,7 +3518,7 @@
           <p:cNvPr id="8" name="">
             <a:extLst xmlns:a="http://schemas.openxmlformats.org/drawingml/2006/main">
               <a:ext uri="{FF2B5EF4-FFF2-40B4-BE49-F238E27FC236}">
-                <a16:creationId xmlns:a16="http://schemas.microsoft.com/office/drawing/2014/main" id="{B58B1BC2-095D-472B-A178-9BA289B93771}"/>
+                <a16:creationId xmlns:a16="http://schemas.microsoft.com/office/drawing/2014/main" id="{AC2428C8-3ACF-48D8-8113-D075F161E7CB}"/>
               </a:ext>
             </a:extLst>
           </p:cNvPr>
@@ -3553,7 +3553,7 @@
           <p:cNvPr id="9" name="">
             <a:extLst xmlns:a="http://schemas.openxmlformats.org/drawingml/2006/main">
               <a:ext uri="{FF2B5EF4-FFF2-40B4-BE49-F238E27FC236}">
-                <a16:creationId xmlns:a16="http://schemas.microsoft.com/office/drawing/2014/main" id="{4492DB46-23CE-4767-9C62-53F1A1523DCE}"/>
+                <a16:creationId xmlns:a16="http://schemas.microsoft.com/office/drawing/2014/main" id="{094FE043-F0C7-4414-8A97-4D425D388499}"/>
               </a:ext>
             </a:extLst>
           </p:cNvPr>
@@ -3617,7 +3617,7 @@
           <p:cNvPr id="10" name="">
             <a:extLst xmlns:a="http://schemas.openxmlformats.org/drawingml/2006/main">
               <a:ext uri="{FF2B5EF4-FFF2-40B4-BE49-F238E27FC236}">
-                <a16:creationId xmlns:a16="http://schemas.microsoft.com/office/drawing/2014/main" id="{C97C6007-CD05-4025-8148-6F2D90F13588}"/>
+                <a16:creationId xmlns:a16="http://schemas.microsoft.com/office/drawing/2014/main" id="{87AD17BF-A2D5-4611-AF04-7541BECE6C80}"/>
               </a:ext>
             </a:extLst>
           </p:cNvPr>
@@ -3681,7 +3681,7 @@
           <p:cNvPr id="11" name="">
             <a:extLst xmlns:a="http://schemas.openxmlformats.org/drawingml/2006/main">
               <a:ext uri="{FF2B5EF4-FFF2-40B4-BE49-F238E27FC236}">
-                <a16:creationId xmlns:a16="http://schemas.microsoft.com/office/drawing/2014/main" id="{84AC5B6E-C1E2-4FEB-9CAC-594507A19FB0}"/>
+                <a16:creationId xmlns:a16="http://schemas.microsoft.com/office/drawing/2014/main" id="{C8BB982F-3835-471A-A856-938160D7936C}"/>
               </a:ext>
             </a:extLst>
           </p:cNvPr>
@@ -3745,19 +3745,19 @@
           <p:cNvPr id="12" name="">
             <a:extLst xmlns:a="http://schemas.openxmlformats.org/drawingml/2006/main">
               <a:ext uri="{FF2B5EF4-FFF2-40B4-BE49-F238E27FC236}">
-                <a16:creationId xmlns:a16="http://schemas.microsoft.com/office/drawing/2014/main" id="{4871B5E4-8CDC-4FBC-8C6B-4F4B05998A95}"/>
-              </a:ext>
-            </a:extLst>
-          </p:cNvPr>
-          <p:cNvSpPr>
-            <a:spLocks xmlns:a="http://schemas.openxmlformats.org/drawingml/2006/main" noGrp="1"/>
-          </p:cNvSpPr>
-          <p:nvPr/>
-        </p:nvSpPr>
-        <p:spPr>
-          <a:xfrm xmlns:a="http://schemas.openxmlformats.org/drawingml/2006/main">
-            <a:off x="228600" y="1809750"/>
-            <a:ext cx="11963400" cy="4591050"/>
+                <a16:creationId xmlns:a16="http://schemas.microsoft.com/office/drawing/2014/main" id="{91E6409E-F277-461D-91B5-6D7E358A9DE1}"/>
+              </a:ext>
+            </a:extLst>
+          </p:cNvPr>
+          <p:cNvSpPr>
+            <a:spLocks xmlns:a="http://schemas.openxmlformats.org/drawingml/2006/main" noGrp="1"/>
+          </p:cNvSpPr>
+          <p:nvPr/>
+        </p:nvSpPr>
+        <p:spPr>
+          <a:xfrm xmlns:a="http://schemas.openxmlformats.org/drawingml/2006/main">
+            <a:off x="0" y="1809750"/>
+            <a:ext cx="12192000" cy="4591050"/>
           </a:xfrm>
           <a:prstGeom xmlns:a="http://schemas.openxmlformats.org/drawingml/2006/main" prst="rect">
             <a:avLst/>
@@ -3765,11 +3765,9 @@
           <a:solidFill xmlns:a="http://schemas.openxmlformats.org/drawingml/2006/main">
             <a:srgbClr val="F5F6F2"/>
           </a:solidFill>
-          <a:ln xmlns:a="http://schemas.openxmlformats.org/drawingml/2006/main" w="0">
-            <a:solidFill>
-              <a:srgbClr val="000000">
-                <a:alpha val="0"/>
-              </a:srgbClr>
+          <a:ln xmlns:a="http://schemas.openxmlformats.org/drawingml/2006/main" w="9525">
+            <a:solidFill>
+              <a:srgbClr val="F5F6F2"/>
             </a:solidFill>
             <a:prstDash val="solid"/>
           </a:ln>
@@ -3780,29 +3778,29 @@
           <p:cNvPr id="13" name="">
             <a:extLst xmlns:a="http://schemas.openxmlformats.org/drawingml/2006/main">
               <a:ext uri="{FF2B5EF4-FFF2-40B4-BE49-F238E27FC236}">
-                <a16:creationId xmlns:a16="http://schemas.microsoft.com/office/drawing/2014/main" id="{C20C041D-5236-46FB-83C2-43031BBB0339}"/>
-              </a:ext>
-            </a:extLst>
-          </p:cNvPr>
-          <p:cNvSpPr>
-            <a:spLocks xmlns:a="http://schemas.openxmlformats.org/drawingml/2006/main" noGrp="1"/>
-          </p:cNvSpPr>
-          <p:nvPr/>
-        </p:nvSpPr>
-        <p:spPr>
-          <a:xfrm xmlns:a="http://schemas.openxmlformats.org/drawingml/2006/main">
-            <a:off x="228600" y="1809750"/>
-            <a:ext cx="6096000" cy="4591050"/>
-          </a:xfrm>
-          <a:prstGeom xmlns:a="http://schemas.openxmlformats.org/drawingml/2006/main" prst="rect">
-            <a:avLst/>
-          </a:prstGeom>
-          <a:solidFill xmlns:a="http://schemas.openxmlformats.org/drawingml/2006/main">
-            <a:srgbClr val="12232B"/>
+                <a16:creationId xmlns:a16="http://schemas.microsoft.com/office/drawing/2014/main" id="{2BF495B6-D9FF-4F6A-A674-66EB34E41D22}"/>
+              </a:ext>
+            </a:extLst>
+          </p:cNvPr>
+          <p:cNvSpPr>
+            <a:spLocks xmlns:a="http://schemas.openxmlformats.org/drawingml/2006/main" noGrp="1"/>
+          </p:cNvSpPr>
+          <p:nvPr/>
+        </p:nvSpPr>
+        <p:spPr>
+          <a:xfrm xmlns:a="http://schemas.openxmlformats.org/drawingml/2006/main">
+            <a:off x="514350" y="2038350"/>
+            <a:ext cx="5619750" cy="3181350"/>
+          </a:xfrm>
+          <a:prstGeom xmlns:a="http://schemas.openxmlformats.org/drawingml/2006/main" prst="rect">
+            <a:avLst/>
+          </a:prstGeom>
+          <a:solidFill xmlns:a="http://schemas.openxmlformats.org/drawingml/2006/main">
+            <a:srgbClr val="FFFFFF"/>
           </a:solidFill>
           <a:ln xmlns:a="http://schemas.openxmlformats.org/drawingml/2006/main" w="9525">
             <a:solidFill>
-              <a:srgbClr val="12232B"/>
+              <a:srgbClr val="D9DDD6"/>
             </a:solidFill>
             <a:prstDash val="solid"/>
           </a:ln>
@@ -3813,25 +3811,25 @@
           <p:cNvPr id="14" name="">
             <a:extLst xmlns:a="http://schemas.openxmlformats.org/drawingml/2006/main">
               <a:ext uri="{FF2B5EF4-FFF2-40B4-BE49-F238E27FC236}">
-                <a16:creationId xmlns:a16="http://schemas.microsoft.com/office/drawing/2014/main" id="{0146A1D9-5117-4211-AE6F-4F54AEDE1518}"/>
-              </a:ext>
-            </a:extLst>
-          </p:cNvPr>
-          <p:cNvSpPr>
-            <a:spLocks xmlns:a="http://schemas.openxmlformats.org/drawingml/2006/main" noGrp="1"/>
-          </p:cNvSpPr>
-          <p:nvPr/>
-        </p:nvSpPr>
-        <p:spPr>
-          <a:xfrm xmlns:a="http://schemas.openxmlformats.org/drawingml/2006/main">
-            <a:off x="609600" y="2266950"/>
+                <a16:creationId xmlns:a16="http://schemas.microsoft.com/office/drawing/2014/main" id="{3CA94A41-076B-4F1C-9CF7-3DFC764861A0}"/>
+              </a:ext>
+            </a:extLst>
+          </p:cNvPr>
+          <p:cNvSpPr>
+            <a:spLocks xmlns:a="http://schemas.openxmlformats.org/drawingml/2006/main" noGrp="1"/>
+          </p:cNvSpPr>
+          <p:nvPr/>
+        </p:nvSpPr>
+        <p:spPr>
+          <a:xfrm xmlns:a="http://schemas.openxmlformats.org/drawingml/2006/main">
+            <a:off x="819150" y="2419350"/>
             <a:ext cx="266700" cy="19050"/>
           </a:xfrm>
           <a:prstGeom xmlns:a="http://schemas.openxmlformats.org/drawingml/2006/main" prst="rect">
             <a:avLst/>
           </a:prstGeom>
           <a:solidFill xmlns:a="http://schemas.openxmlformats.org/drawingml/2006/main">
-            <a:srgbClr val="B7953B"/>
+            <a:srgbClr val="A85D2A"/>
           </a:solidFill>
           <a:ln xmlns:a="http://schemas.openxmlformats.org/drawingml/2006/main" w="0">
             <a:solidFill>
@@ -3848,18 +3846,18 @@
           <p:cNvPr id="15" name="">
             <a:extLst xmlns:a="http://schemas.openxmlformats.org/drawingml/2006/main">
               <a:ext uri="{FF2B5EF4-FFF2-40B4-BE49-F238E27FC236}">
-                <a16:creationId xmlns:a16="http://schemas.microsoft.com/office/drawing/2014/main" id="{4B5FE96C-DF45-487C-BC4F-1F6B66D42197}"/>
-              </a:ext>
-            </a:extLst>
-          </p:cNvPr>
-          <p:cNvSpPr>
-            <a:spLocks xmlns:a="http://schemas.openxmlformats.org/drawingml/2006/main" noGrp="1"/>
-          </p:cNvSpPr>
-          <p:nvPr/>
-        </p:nvSpPr>
-        <p:spPr>
-          <a:xfrm xmlns:a="http://schemas.openxmlformats.org/drawingml/2006/main">
-            <a:off x="971550" y="2190750"/>
+                <a16:creationId xmlns:a16="http://schemas.microsoft.com/office/drawing/2014/main" id="{5BC69320-8E4E-4E6C-B2B0-A487B153C3B8}"/>
+              </a:ext>
+            </a:extLst>
+          </p:cNvPr>
+          <p:cNvSpPr>
+            <a:spLocks xmlns:a="http://schemas.openxmlformats.org/drawingml/2006/main" noGrp="1"/>
+          </p:cNvSpPr>
+          <p:nvPr/>
+        </p:nvSpPr>
+        <p:spPr>
+          <a:xfrm xmlns:a="http://schemas.openxmlformats.org/drawingml/2006/main">
+            <a:off x="1181100" y="2343150"/>
             <a:ext cx="2476500" cy="171450"/>
           </a:xfrm>
           <a:prstGeom xmlns:a="http://schemas.openxmlformats.org/drawingml/2006/main" prst="rect">
@@ -3902,7 +3900,7 @@
                 <a:ea typeface="Aptos"/>
                 <a:cs typeface="Aptos"/>
               </a:rPr>
-              <a:t>PROMPT TO GIVE AI</a:t>
+              <a:t>DRAFTING BRIEF</a:t>
             </a:r>
           </a:p>
         </p:txBody>
@@ -3912,19 +3910,19 @@
           <p:cNvPr id="16" name="">
             <a:extLst xmlns:a="http://schemas.openxmlformats.org/drawingml/2006/main">
               <a:ext uri="{FF2B5EF4-FFF2-40B4-BE49-F238E27FC236}">
-                <a16:creationId xmlns:a16="http://schemas.microsoft.com/office/drawing/2014/main" id="{6ACB0105-2973-4446-ABD1-A4032E6777BF}"/>
-              </a:ext>
-            </a:extLst>
-          </p:cNvPr>
-          <p:cNvSpPr>
-            <a:spLocks xmlns:a="http://schemas.openxmlformats.org/drawingml/2006/main" noGrp="1"/>
-          </p:cNvSpPr>
-          <p:nvPr/>
-        </p:nvSpPr>
-        <p:spPr>
-          <a:xfrm xmlns:a="http://schemas.openxmlformats.org/drawingml/2006/main">
-            <a:off x="609600" y="2647950"/>
-            <a:ext cx="5048250" cy="2190750"/>
+                <a16:creationId xmlns:a16="http://schemas.microsoft.com/office/drawing/2014/main" id="{21E1B651-9F43-4E03-80B7-F9B37CB37494}"/>
+              </a:ext>
+            </a:extLst>
+          </p:cNvPr>
+          <p:cNvSpPr>
+            <a:spLocks xmlns:a="http://schemas.openxmlformats.org/drawingml/2006/main" noGrp="1"/>
+          </p:cNvSpPr>
+          <p:nvPr/>
+        </p:nvSpPr>
+        <p:spPr>
+          <a:xfrm xmlns:a="http://schemas.openxmlformats.org/drawingml/2006/main">
+            <a:off x="819150" y="2762250"/>
+            <a:ext cx="4610100" cy="1752600"/>
           </a:xfrm>
           <a:prstGeom xmlns:a="http://schemas.openxmlformats.org/drawingml/2006/main" prst="rect">
             <a:avLst/>
@@ -3948,9 +3946,240 @@
           <a:lstStyle xmlns:a="http://schemas.openxmlformats.org/drawingml/2006/main"/>
           <a:p xmlns:a="http://schemas.openxmlformats.org/drawingml/2006/main">
             <a:pPr algn="l">
+              <a:defRPr sz="1200" b="0">
+                <a:solidFill>
+                  <a:srgbClr val="172026"/>
+                </a:solidFill>
+                <a:latin typeface="Aptos"/>
+                <a:ea typeface="Aptos"/>
+                <a:cs typeface="Aptos"/>
+              </a:defRPr>
+            </a:pPr>
+            <a:r>
+              <a:rPr sz="1200" b="0">
+                <a:solidFill>
+                  <a:srgbClr val="172026"/>
+                </a:solidFill>
+                <a:latin typeface="Aptos"/>
+                <a:ea typeface="Aptos"/>
+                <a:cs typeface="Aptos"/>
+              </a:rPr>
+              <a:t>Draft a channel mix for the selected ICP and first-five assets. Tie every channel to buyer trust, demand state, owner, realistic cadence, account-level signal, routing implication, and failure risk. Do not recommend more channels than the team can operate.</a:t>
+            </a:r>
+          </a:p>
+        </p:txBody>
+      </p:sp>
+      <p:sp>
+        <p:nvSpPr>
+          <p:cNvPr id="17" name="">
+            <a:extLst xmlns:a="http://schemas.openxmlformats.org/drawingml/2006/main">
+              <a:ext uri="{FF2B5EF4-FFF2-40B4-BE49-F238E27FC236}">
+                <a16:creationId xmlns:a16="http://schemas.microsoft.com/office/drawing/2014/main" id="{044BF296-C126-4AA9-8D64-0DBEF7F9CE7F}"/>
+              </a:ext>
+            </a:extLst>
+          </p:cNvPr>
+          <p:cNvSpPr>
+            <a:spLocks xmlns:a="http://schemas.openxmlformats.org/drawingml/2006/main" noGrp="1"/>
+          </p:cNvSpPr>
+          <p:nvPr/>
+        </p:nvSpPr>
+        <p:spPr>
+          <a:xfrm xmlns:a="http://schemas.openxmlformats.org/drawingml/2006/main">
+            <a:off x="6496050" y="2038350"/>
+            <a:ext cx="4933950" cy="3181350"/>
+          </a:xfrm>
+          <a:prstGeom xmlns:a="http://schemas.openxmlformats.org/drawingml/2006/main" prst="rect">
+            <a:avLst/>
+          </a:prstGeom>
+          <a:solidFill xmlns:a="http://schemas.openxmlformats.org/drawingml/2006/main">
+            <a:srgbClr val="F9FAF7"/>
+          </a:solidFill>
+          <a:ln xmlns:a="http://schemas.openxmlformats.org/drawingml/2006/main" w="9525">
+            <a:solidFill>
+              <a:srgbClr val="D9DDD6"/>
+            </a:solidFill>
+            <a:prstDash val="solid"/>
+          </a:ln>
+        </p:spPr>
+      </p:sp>
+      <p:sp>
+        <p:nvSpPr>
+          <p:cNvPr id="18" name="">
+            <a:extLst xmlns:a="http://schemas.openxmlformats.org/drawingml/2006/main">
+              <a:ext uri="{FF2B5EF4-FFF2-40B4-BE49-F238E27FC236}">
+                <a16:creationId xmlns:a16="http://schemas.microsoft.com/office/drawing/2014/main" id="{0473E95D-F345-48A6-BC59-01AD860D6E11}"/>
+              </a:ext>
+            </a:extLst>
+          </p:cNvPr>
+          <p:cNvSpPr>
+            <a:spLocks xmlns:a="http://schemas.openxmlformats.org/drawingml/2006/main" noGrp="1"/>
+          </p:cNvSpPr>
+          <p:nvPr/>
+        </p:nvSpPr>
+        <p:spPr>
+          <a:xfrm xmlns:a="http://schemas.openxmlformats.org/drawingml/2006/main">
+            <a:off x="6819900" y="2419350"/>
+            <a:ext cx="266700" cy="19050"/>
+          </a:xfrm>
+          <a:prstGeom xmlns:a="http://schemas.openxmlformats.org/drawingml/2006/main" prst="rect">
+            <a:avLst/>
+          </a:prstGeom>
+          <a:solidFill xmlns:a="http://schemas.openxmlformats.org/drawingml/2006/main">
+            <a:srgbClr val="1D6072"/>
+          </a:solidFill>
+          <a:ln xmlns:a="http://schemas.openxmlformats.org/drawingml/2006/main" w="0">
+            <a:solidFill>
+              <a:srgbClr val="000000">
+                <a:alpha val="0"/>
+              </a:srgbClr>
+            </a:solidFill>
+            <a:prstDash val="solid"/>
+          </a:ln>
+        </p:spPr>
+      </p:sp>
+      <p:sp>
+        <p:nvSpPr>
+          <p:cNvPr id="19" name="">
+            <a:extLst xmlns:a="http://schemas.openxmlformats.org/drawingml/2006/main">
+              <a:ext uri="{FF2B5EF4-FFF2-40B4-BE49-F238E27FC236}">
+                <a16:creationId xmlns:a16="http://schemas.microsoft.com/office/drawing/2014/main" id="{44EB162A-4594-430A-8CCC-3471D89A983A}"/>
+              </a:ext>
+            </a:extLst>
+          </p:cNvPr>
+          <p:cNvSpPr>
+            <a:spLocks xmlns:a="http://schemas.openxmlformats.org/drawingml/2006/main" noGrp="1"/>
+          </p:cNvSpPr>
+          <p:nvPr/>
+        </p:nvSpPr>
+        <p:spPr>
+          <a:xfrm xmlns:a="http://schemas.openxmlformats.org/drawingml/2006/main">
+            <a:off x="7181850" y="2343150"/>
+            <a:ext cx="2476500" cy="171450"/>
+          </a:xfrm>
+          <a:prstGeom xmlns:a="http://schemas.openxmlformats.org/drawingml/2006/main" prst="rect">
+            <a:avLst/>
+          </a:prstGeom>
+          <a:solidFill xmlns:a="http://schemas.openxmlformats.org/drawingml/2006/main">
+            <a:srgbClr val="000000">
+              <a:alpha val="0"/>
+            </a:srgbClr>
+          </a:solidFill>
+          <a:ln xmlns:a="http://schemas.openxmlformats.org/drawingml/2006/main" w="0">
+            <a:solidFill>
+              <a:srgbClr val="000000">
+                <a:alpha val="0"/>
+              </a:srgbClr>
+            </a:solidFill>
+            <a:prstDash val="solid"/>
+          </a:ln>
+        </p:spPr>
+        <p:txBody>
+          <a:bodyPr xmlns:a="http://schemas.openxmlformats.org/drawingml/2006/main" lIns="0" tIns="0" rIns="0" bIns="0" anchor="t"/>
+          <a:lstStyle xmlns:a="http://schemas.openxmlformats.org/drawingml/2006/main"/>
+          <a:p xmlns:a="http://schemas.openxmlformats.org/drawingml/2006/main">
+            <a:pPr algn="l">
+              <a:defRPr sz="750" b="1">
+                <a:solidFill>
+                  <a:srgbClr val="59646A"/>
+                </a:solidFill>
+                <a:latin typeface="Aptos"/>
+                <a:ea typeface="Aptos"/>
+                <a:cs typeface="Aptos"/>
+              </a:defRPr>
+            </a:pPr>
+            <a:r>
+              <a:rPr sz="750" b="1">
+                <a:solidFill>
+                  <a:srgbClr val="59646A"/>
+                </a:solidFill>
+                <a:latin typeface="Aptos"/>
+                <a:ea typeface="Aptos"/>
+                <a:cs typeface="Aptos"/>
+              </a:rPr>
+              <a:t>REQUIRED OUTPUT STANDARD</a:t>
+            </a:r>
+          </a:p>
+        </p:txBody>
+      </p:sp>
+      <p:sp>
+        <p:nvSpPr>
+          <p:cNvPr id="20" name="">
+            <a:extLst xmlns:a="http://schemas.openxmlformats.org/drawingml/2006/main">
+              <a:ext uri="{FF2B5EF4-FFF2-40B4-BE49-F238E27FC236}">
+                <a16:creationId xmlns:a16="http://schemas.microsoft.com/office/drawing/2014/main" id="{AF67A5E6-9EDA-4373-9971-49DE5D34E1A7}"/>
+              </a:ext>
+            </a:extLst>
+          </p:cNvPr>
+          <p:cNvSpPr>
+            <a:spLocks xmlns:a="http://schemas.openxmlformats.org/drawingml/2006/main" noGrp="1"/>
+          </p:cNvSpPr>
+          <p:nvPr/>
+        </p:nvSpPr>
+        <p:spPr>
+          <a:xfrm xmlns:a="http://schemas.openxmlformats.org/drawingml/2006/main">
+            <a:off x="6819900" y="2847975"/>
+            <a:ext cx="57150" cy="57150"/>
+          </a:xfrm>
+          <a:prstGeom xmlns:a="http://schemas.openxmlformats.org/drawingml/2006/main" prst="rect">
+            <a:avLst/>
+          </a:prstGeom>
+          <a:solidFill xmlns:a="http://schemas.openxmlformats.org/drawingml/2006/main">
+            <a:srgbClr val="1D6072"/>
+          </a:solidFill>
+          <a:ln xmlns:a="http://schemas.openxmlformats.org/drawingml/2006/main" w="0">
+            <a:solidFill>
+              <a:srgbClr val="000000">
+                <a:alpha val="0"/>
+              </a:srgbClr>
+            </a:solidFill>
+            <a:prstDash val="solid"/>
+          </a:ln>
+        </p:spPr>
+      </p:sp>
+      <p:sp>
+        <p:nvSpPr>
+          <p:cNvPr id="21" name="">
+            <a:extLst xmlns:a="http://schemas.openxmlformats.org/drawingml/2006/main">
+              <a:ext uri="{FF2B5EF4-FFF2-40B4-BE49-F238E27FC236}">
+                <a16:creationId xmlns:a16="http://schemas.microsoft.com/office/drawing/2014/main" id="{339A5441-671B-4BCB-934B-49DC8C25569F}"/>
+              </a:ext>
+            </a:extLst>
+          </p:cNvPr>
+          <p:cNvSpPr>
+            <a:spLocks xmlns:a="http://schemas.openxmlformats.org/drawingml/2006/main" noGrp="1"/>
+          </p:cNvSpPr>
+          <p:nvPr/>
+        </p:nvSpPr>
+        <p:spPr>
+          <a:xfrm xmlns:a="http://schemas.openxmlformats.org/drawingml/2006/main">
+            <a:off x="6991350" y="2781300"/>
+            <a:ext cx="3619500" cy="438150"/>
+          </a:xfrm>
+          <a:prstGeom xmlns:a="http://schemas.openxmlformats.org/drawingml/2006/main" prst="rect">
+            <a:avLst/>
+          </a:prstGeom>
+          <a:solidFill xmlns:a="http://schemas.openxmlformats.org/drawingml/2006/main">
+            <a:srgbClr val="000000">
+              <a:alpha val="0"/>
+            </a:srgbClr>
+          </a:solidFill>
+          <a:ln xmlns:a="http://schemas.openxmlformats.org/drawingml/2006/main" w="0">
+            <a:solidFill>
+              <a:srgbClr val="000000">
+                <a:alpha val="0"/>
+              </a:srgbClr>
+            </a:solidFill>
+            <a:prstDash val="solid"/>
+          </a:ln>
+        </p:spPr>
+        <p:txBody>
+          <a:bodyPr xmlns:a="http://schemas.openxmlformats.org/drawingml/2006/main" lIns="0" tIns="0" rIns="0" bIns="0" anchor="t"/>
+          <a:lstStyle xmlns:a="http://schemas.openxmlformats.org/drawingml/2006/main"/>
+          <a:p xmlns:a="http://schemas.openxmlformats.org/drawingml/2006/main">
+            <a:pPr algn="l">
               <a:defRPr sz="1125" b="0">
                 <a:solidFill>
-                  <a:srgbClr val="FFFFFF"/>
+                  <a:srgbClr val="172026"/>
                 </a:solidFill>
                 <a:latin typeface="Aptos"/>
                 <a:ea typeface="Aptos"/>
@@ -3960,68 +4189,35 @@
             <a:r>
               <a:rPr sz="1125" b="0">
                 <a:solidFill>
-                  <a:srgbClr val="FFFFFF"/>
+                  <a:srgbClr val="172026"/>
                 </a:solidFill>
                 <a:latin typeface="Aptos"/>
                 <a:ea typeface="Aptos"/>
                 <a:cs typeface="Aptos"/>
               </a:rPr>
-              <a:t>Recommend a channel mix for the selected ICP and first-five assets. Tie every channel to buyer trust, demand state, owner, realistic cadence, account-level signal, routing implication, and failure risk. Do not recommend more channels than the team can operate.</a:t>
+              <a:t>Channel tied to buyer trust and demand state</a:t>
             </a:r>
           </a:p>
         </p:txBody>
       </p:sp>
       <p:sp>
         <p:nvSpPr>
-          <p:cNvPr id="17" name="">
-            <a:extLst xmlns:a="http://schemas.openxmlformats.org/drawingml/2006/main">
-              <a:ext uri="{FF2B5EF4-FFF2-40B4-BE49-F238E27FC236}">
-                <a16:creationId xmlns:a16="http://schemas.microsoft.com/office/drawing/2014/main" id="{C9A69506-882E-4428-818D-73A2E7AB8444}"/>
-              </a:ext>
-            </a:extLst>
-          </p:cNvPr>
-          <p:cNvSpPr>
-            <a:spLocks xmlns:a="http://schemas.openxmlformats.org/drawingml/2006/main" noGrp="1"/>
-          </p:cNvSpPr>
-          <p:nvPr/>
-        </p:nvSpPr>
-        <p:spPr>
-          <a:xfrm xmlns:a="http://schemas.openxmlformats.org/drawingml/2006/main">
-            <a:off x="6324600" y="1809750"/>
-            <a:ext cx="5867400" cy="4591050"/>
-          </a:xfrm>
-          <a:prstGeom xmlns:a="http://schemas.openxmlformats.org/drawingml/2006/main" prst="rect">
-            <a:avLst/>
-          </a:prstGeom>
-          <a:solidFill xmlns:a="http://schemas.openxmlformats.org/drawingml/2006/main">
-            <a:srgbClr val="FFFFFF"/>
-          </a:solidFill>
-          <a:ln xmlns:a="http://schemas.openxmlformats.org/drawingml/2006/main" w="9525">
-            <a:solidFill>
-              <a:srgbClr val="D9DDD6"/>
-            </a:solidFill>
-            <a:prstDash val="solid"/>
-          </a:ln>
-        </p:spPr>
-      </p:sp>
-      <p:sp>
-        <p:nvSpPr>
-          <p:cNvPr id="18" name="">
-            <a:extLst xmlns:a="http://schemas.openxmlformats.org/drawingml/2006/main">
-              <a:ext uri="{FF2B5EF4-FFF2-40B4-BE49-F238E27FC236}">
-                <a16:creationId xmlns:a16="http://schemas.microsoft.com/office/drawing/2014/main" id="{32C75F91-AA8A-4F51-ACF0-DF74CAF4CE6C}"/>
-              </a:ext>
-            </a:extLst>
-          </p:cNvPr>
-          <p:cNvSpPr>
-            <a:spLocks xmlns:a="http://schemas.openxmlformats.org/drawingml/2006/main" noGrp="1"/>
-          </p:cNvSpPr>
-          <p:nvPr/>
-        </p:nvSpPr>
-        <p:spPr>
-          <a:xfrm xmlns:a="http://schemas.openxmlformats.org/drawingml/2006/main">
-            <a:off x="6705600" y="2266950"/>
-            <a:ext cx="266700" cy="19050"/>
+          <p:cNvPr id="22" name="">
+            <a:extLst xmlns:a="http://schemas.openxmlformats.org/drawingml/2006/main">
+              <a:ext uri="{FF2B5EF4-FFF2-40B4-BE49-F238E27FC236}">
+                <a16:creationId xmlns:a16="http://schemas.microsoft.com/office/drawing/2014/main" id="{82E590D2-B78B-4E02-90B8-DADBD55A96A0}"/>
+              </a:ext>
+            </a:extLst>
+          </p:cNvPr>
+          <p:cNvSpPr>
+            <a:spLocks xmlns:a="http://schemas.openxmlformats.org/drawingml/2006/main" noGrp="1"/>
+          </p:cNvSpPr>
+          <p:nvPr/>
+        </p:nvSpPr>
+        <p:spPr>
+          <a:xfrm xmlns:a="http://schemas.openxmlformats.org/drawingml/2006/main">
+            <a:off x="6819900" y="3324225"/>
+            <a:ext cx="57150" cy="57150"/>
           </a:xfrm>
           <a:prstGeom xmlns:a="http://schemas.openxmlformats.org/drawingml/2006/main" prst="rect">
             <a:avLst/>
@@ -4041,22 +4237,22 @@
       </p:sp>
       <p:sp>
         <p:nvSpPr>
-          <p:cNvPr id="19" name="">
-            <a:extLst xmlns:a="http://schemas.openxmlformats.org/drawingml/2006/main">
-              <a:ext uri="{FF2B5EF4-FFF2-40B4-BE49-F238E27FC236}">
-                <a16:creationId xmlns:a16="http://schemas.microsoft.com/office/drawing/2014/main" id="{F8EE012D-2C8E-4B6B-95C0-FD5C8621CF03}"/>
-              </a:ext>
-            </a:extLst>
-          </p:cNvPr>
-          <p:cNvSpPr>
-            <a:spLocks xmlns:a="http://schemas.openxmlformats.org/drawingml/2006/main" noGrp="1"/>
-          </p:cNvSpPr>
-          <p:nvPr/>
-        </p:nvSpPr>
-        <p:spPr>
-          <a:xfrm xmlns:a="http://schemas.openxmlformats.org/drawingml/2006/main">
-            <a:off x="7067550" y="2190750"/>
-            <a:ext cx="2476500" cy="171450"/>
+          <p:cNvPr id="23" name="">
+            <a:extLst xmlns:a="http://schemas.openxmlformats.org/drawingml/2006/main">
+              <a:ext uri="{FF2B5EF4-FFF2-40B4-BE49-F238E27FC236}">
+                <a16:creationId xmlns:a16="http://schemas.microsoft.com/office/drawing/2014/main" id="{28329C46-2310-4C26-A02D-BCB3BCE66E88}"/>
+              </a:ext>
+            </a:extLst>
+          </p:cNvPr>
+          <p:cNvSpPr>
+            <a:spLocks xmlns:a="http://schemas.openxmlformats.org/drawingml/2006/main" noGrp="1"/>
+          </p:cNvSpPr>
+          <p:nvPr/>
+        </p:nvSpPr>
+        <p:spPr>
+          <a:xfrm xmlns:a="http://schemas.openxmlformats.org/drawingml/2006/main">
+            <a:off x="6991350" y="3257550"/>
+            <a:ext cx="3619500" cy="438150"/>
           </a:xfrm>
           <a:prstGeom xmlns:a="http://schemas.openxmlformats.org/drawingml/2006/main" prst="rect">
             <a:avLst/>
@@ -4077,6 +4273,734 @@
         </p:spPr>
         <p:txBody>
           <a:bodyPr xmlns:a="http://schemas.openxmlformats.org/drawingml/2006/main" lIns="0" tIns="0" rIns="0" bIns="0" anchor="t"/>
+          <a:lstStyle xmlns:a="http://schemas.openxmlformats.org/drawingml/2006/main"/>
+          <a:p xmlns:a="http://schemas.openxmlformats.org/drawingml/2006/main">
+            <a:pPr algn="l">
+              <a:defRPr sz="1125" b="0">
+                <a:solidFill>
+                  <a:srgbClr val="172026"/>
+                </a:solidFill>
+                <a:latin typeface="Aptos"/>
+                <a:ea typeface="Aptos"/>
+                <a:cs typeface="Aptos"/>
+              </a:defRPr>
+            </a:pPr>
+            <a:r>
+              <a:rPr sz="1125" b="0">
+                <a:solidFill>
+                  <a:srgbClr val="172026"/>
+                </a:solidFill>
+                <a:latin typeface="Aptos"/>
+                <a:ea typeface="Aptos"/>
+                <a:cs typeface="Aptos"/>
+              </a:rPr>
+              <a:t>Owner named: sales, marketing, SME, distributor, partner, or leadership</a:t>
+            </a:r>
+          </a:p>
+        </p:txBody>
+      </p:sp>
+      <p:sp>
+        <p:nvSpPr>
+          <p:cNvPr id="24" name="">
+            <a:extLst xmlns:a="http://schemas.openxmlformats.org/drawingml/2006/main">
+              <a:ext uri="{FF2B5EF4-FFF2-40B4-BE49-F238E27FC236}">
+                <a16:creationId xmlns:a16="http://schemas.microsoft.com/office/drawing/2014/main" id="{2CD0CA3E-EA5F-48E9-9E6F-D95E7631F7A5}"/>
+              </a:ext>
+            </a:extLst>
+          </p:cNvPr>
+          <p:cNvSpPr>
+            <a:spLocks xmlns:a="http://schemas.openxmlformats.org/drawingml/2006/main" noGrp="1"/>
+          </p:cNvSpPr>
+          <p:nvPr/>
+        </p:nvSpPr>
+        <p:spPr>
+          <a:xfrm xmlns:a="http://schemas.openxmlformats.org/drawingml/2006/main">
+            <a:off x="6819900" y="3800475"/>
+            <a:ext cx="57150" cy="57150"/>
+          </a:xfrm>
+          <a:prstGeom xmlns:a="http://schemas.openxmlformats.org/drawingml/2006/main" prst="rect">
+            <a:avLst/>
+          </a:prstGeom>
+          <a:solidFill xmlns:a="http://schemas.openxmlformats.org/drawingml/2006/main">
+            <a:srgbClr val="1D6072"/>
+          </a:solidFill>
+          <a:ln xmlns:a="http://schemas.openxmlformats.org/drawingml/2006/main" w="0">
+            <a:solidFill>
+              <a:srgbClr val="000000">
+                <a:alpha val="0"/>
+              </a:srgbClr>
+            </a:solidFill>
+            <a:prstDash val="solid"/>
+          </a:ln>
+        </p:spPr>
+      </p:sp>
+      <p:sp>
+        <p:nvSpPr>
+          <p:cNvPr id="25" name="">
+            <a:extLst xmlns:a="http://schemas.openxmlformats.org/drawingml/2006/main">
+              <a:ext uri="{FF2B5EF4-FFF2-40B4-BE49-F238E27FC236}">
+                <a16:creationId xmlns:a16="http://schemas.microsoft.com/office/drawing/2014/main" id="{E97F62BD-63B7-49C8-89FB-EAE9B098F7B8}"/>
+              </a:ext>
+            </a:extLst>
+          </p:cNvPr>
+          <p:cNvSpPr>
+            <a:spLocks xmlns:a="http://schemas.openxmlformats.org/drawingml/2006/main" noGrp="1"/>
+          </p:cNvSpPr>
+          <p:nvPr/>
+        </p:nvSpPr>
+        <p:spPr>
+          <a:xfrm xmlns:a="http://schemas.openxmlformats.org/drawingml/2006/main">
+            <a:off x="6991350" y="3733800"/>
+            <a:ext cx="3619500" cy="438150"/>
+          </a:xfrm>
+          <a:prstGeom xmlns:a="http://schemas.openxmlformats.org/drawingml/2006/main" prst="rect">
+            <a:avLst/>
+          </a:prstGeom>
+          <a:solidFill xmlns:a="http://schemas.openxmlformats.org/drawingml/2006/main">
+            <a:srgbClr val="000000">
+              <a:alpha val="0"/>
+            </a:srgbClr>
+          </a:solidFill>
+          <a:ln xmlns:a="http://schemas.openxmlformats.org/drawingml/2006/main" w="0">
+            <a:solidFill>
+              <a:srgbClr val="000000">
+                <a:alpha val="0"/>
+              </a:srgbClr>
+            </a:solidFill>
+            <a:prstDash val="solid"/>
+          </a:ln>
+        </p:spPr>
+        <p:txBody>
+          <a:bodyPr xmlns:a="http://schemas.openxmlformats.org/drawingml/2006/main" lIns="0" tIns="0" rIns="0" bIns="0" anchor="t"/>
+          <a:lstStyle xmlns:a="http://schemas.openxmlformats.org/drawingml/2006/main"/>
+          <a:p xmlns:a="http://schemas.openxmlformats.org/drawingml/2006/main">
+            <a:pPr algn="l">
+              <a:defRPr sz="1125" b="0">
+                <a:solidFill>
+                  <a:srgbClr val="172026"/>
+                </a:solidFill>
+                <a:latin typeface="Aptos"/>
+                <a:ea typeface="Aptos"/>
+                <a:cs typeface="Aptos"/>
+              </a:defRPr>
+            </a:pPr>
+            <a:r>
+              <a:rPr sz="1125" b="0">
+                <a:solidFill>
+                  <a:srgbClr val="172026"/>
+                </a:solidFill>
+                <a:latin typeface="Aptos"/>
+                <a:ea typeface="Aptos"/>
+                <a:cs typeface="Aptos"/>
+              </a:rPr>
+              <a:t>Realistic cadence</a:t>
+            </a:r>
+          </a:p>
+        </p:txBody>
+      </p:sp>
+      <p:sp>
+        <p:nvSpPr>
+          <p:cNvPr id="26" name="">
+            <a:extLst xmlns:a="http://schemas.openxmlformats.org/drawingml/2006/main">
+              <a:ext uri="{FF2B5EF4-FFF2-40B4-BE49-F238E27FC236}">
+                <a16:creationId xmlns:a16="http://schemas.microsoft.com/office/drawing/2014/main" id="{27D89543-1904-4BF6-8094-7148884A294D}"/>
+              </a:ext>
+            </a:extLst>
+          </p:cNvPr>
+          <p:cNvSpPr>
+            <a:spLocks xmlns:a="http://schemas.openxmlformats.org/drawingml/2006/main" noGrp="1"/>
+          </p:cNvSpPr>
+          <p:nvPr/>
+        </p:nvSpPr>
+        <p:spPr>
+          <a:xfrm xmlns:a="http://schemas.openxmlformats.org/drawingml/2006/main">
+            <a:off x="6819900" y="4276725"/>
+            <a:ext cx="57150" cy="57150"/>
+          </a:xfrm>
+          <a:prstGeom xmlns:a="http://schemas.openxmlformats.org/drawingml/2006/main" prst="rect">
+            <a:avLst/>
+          </a:prstGeom>
+          <a:solidFill xmlns:a="http://schemas.openxmlformats.org/drawingml/2006/main">
+            <a:srgbClr val="1D6072"/>
+          </a:solidFill>
+          <a:ln xmlns:a="http://schemas.openxmlformats.org/drawingml/2006/main" w="0">
+            <a:solidFill>
+              <a:srgbClr val="000000">
+                <a:alpha val="0"/>
+              </a:srgbClr>
+            </a:solidFill>
+            <a:prstDash val="solid"/>
+          </a:ln>
+        </p:spPr>
+      </p:sp>
+      <p:sp>
+        <p:nvSpPr>
+          <p:cNvPr id="27" name="">
+            <a:extLst xmlns:a="http://schemas.openxmlformats.org/drawingml/2006/main">
+              <a:ext uri="{FF2B5EF4-FFF2-40B4-BE49-F238E27FC236}">
+                <a16:creationId xmlns:a16="http://schemas.microsoft.com/office/drawing/2014/main" id="{A33D3363-B285-4B85-972A-2EC62F5C3ADA}"/>
+              </a:ext>
+            </a:extLst>
+          </p:cNvPr>
+          <p:cNvSpPr>
+            <a:spLocks xmlns:a="http://schemas.openxmlformats.org/drawingml/2006/main" noGrp="1"/>
+          </p:cNvSpPr>
+          <p:nvPr/>
+        </p:nvSpPr>
+        <p:spPr>
+          <a:xfrm xmlns:a="http://schemas.openxmlformats.org/drawingml/2006/main">
+            <a:off x="6991350" y="4210050"/>
+            <a:ext cx="3619500" cy="438150"/>
+          </a:xfrm>
+          <a:prstGeom xmlns:a="http://schemas.openxmlformats.org/drawingml/2006/main" prst="rect">
+            <a:avLst/>
+          </a:prstGeom>
+          <a:solidFill xmlns:a="http://schemas.openxmlformats.org/drawingml/2006/main">
+            <a:srgbClr val="000000">
+              <a:alpha val="0"/>
+            </a:srgbClr>
+          </a:solidFill>
+          <a:ln xmlns:a="http://schemas.openxmlformats.org/drawingml/2006/main" w="0">
+            <a:solidFill>
+              <a:srgbClr val="000000">
+                <a:alpha val="0"/>
+              </a:srgbClr>
+            </a:solidFill>
+            <a:prstDash val="solid"/>
+          </a:ln>
+        </p:spPr>
+        <p:txBody>
+          <a:bodyPr xmlns:a="http://schemas.openxmlformats.org/drawingml/2006/main" lIns="0" tIns="0" rIns="0" bIns="0" anchor="t"/>
+          <a:lstStyle xmlns:a="http://schemas.openxmlformats.org/drawingml/2006/main"/>
+          <a:p xmlns:a="http://schemas.openxmlformats.org/drawingml/2006/main">
+            <a:pPr algn="l">
+              <a:defRPr sz="1125" b="0">
+                <a:solidFill>
+                  <a:srgbClr val="172026"/>
+                </a:solidFill>
+                <a:latin typeface="Aptos"/>
+                <a:ea typeface="Aptos"/>
+                <a:cs typeface="Aptos"/>
+              </a:defRPr>
+            </a:pPr>
+            <a:r>
+              <a:rPr sz="1125" b="0">
+                <a:solidFill>
+                  <a:srgbClr val="172026"/>
+                </a:solidFill>
+                <a:latin typeface="Aptos"/>
+                <a:ea typeface="Aptos"/>
+                <a:cs typeface="Aptos"/>
+              </a:rPr>
+              <a:t>Account-level signal</a:t>
+            </a:r>
+          </a:p>
+        </p:txBody>
+      </p:sp>
+      <p:sp>
+        <p:nvSpPr>
+          <p:cNvPr id="28" name="">
+            <a:extLst xmlns:a="http://schemas.openxmlformats.org/drawingml/2006/main">
+              <a:ext uri="{FF2B5EF4-FFF2-40B4-BE49-F238E27FC236}">
+                <a16:creationId xmlns:a16="http://schemas.microsoft.com/office/drawing/2014/main" id="{100003E3-00E8-41DD-8E18-3A10F57E4D10}"/>
+              </a:ext>
+            </a:extLst>
+          </p:cNvPr>
+          <p:cNvSpPr>
+            <a:spLocks xmlns:a="http://schemas.openxmlformats.org/drawingml/2006/main" noGrp="1"/>
+          </p:cNvSpPr>
+          <p:nvPr/>
+        </p:nvSpPr>
+        <p:spPr>
+          <a:xfrm xmlns:a="http://schemas.openxmlformats.org/drawingml/2006/main">
+            <a:off x="6819900" y="4752975"/>
+            <a:ext cx="57150" cy="57150"/>
+          </a:xfrm>
+          <a:prstGeom xmlns:a="http://schemas.openxmlformats.org/drawingml/2006/main" prst="rect">
+            <a:avLst/>
+          </a:prstGeom>
+          <a:solidFill xmlns:a="http://schemas.openxmlformats.org/drawingml/2006/main">
+            <a:srgbClr val="1D6072"/>
+          </a:solidFill>
+          <a:ln xmlns:a="http://schemas.openxmlformats.org/drawingml/2006/main" w="0">
+            <a:solidFill>
+              <a:srgbClr val="000000">
+                <a:alpha val="0"/>
+              </a:srgbClr>
+            </a:solidFill>
+            <a:prstDash val="solid"/>
+          </a:ln>
+        </p:spPr>
+      </p:sp>
+      <p:sp>
+        <p:nvSpPr>
+          <p:cNvPr id="29" name="">
+            <a:extLst xmlns:a="http://schemas.openxmlformats.org/drawingml/2006/main">
+              <a:ext uri="{FF2B5EF4-FFF2-40B4-BE49-F238E27FC236}">
+                <a16:creationId xmlns:a16="http://schemas.microsoft.com/office/drawing/2014/main" id="{9FFE541C-689D-4E5F-AD58-32D9A844F213}"/>
+              </a:ext>
+            </a:extLst>
+          </p:cNvPr>
+          <p:cNvSpPr>
+            <a:spLocks xmlns:a="http://schemas.openxmlformats.org/drawingml/2006/main" noGrp="1"/>
+          </p:cNvSpPr>
+          <p:nvPr/>
+        </p:nvSpPr>
+        <p:spPr>
+          <a:xfrm xmlns:a="http://schemas.openxmlformats.org/drawingml/2006/main">
+            <a:off x="6991350" y="4686300"/>
+            <a:ext cx="3619500" cy="438150"/>
+          </a:xfrm>
+          <a:prstGeom xmlns:a="http://schemas.openxmlformats.org/drawingml/2006/main" prst="rect">
+            <a:avLst/>
+          </a:prstGeom>
+          <a:solidFill xmlns:a="http://schemas.openxmlformats.org/drawingml/2006/main">
+            <a:srgbClr val="000000">
+              <a:alpha val="0"/>
+            </a:srgbClr>
+          </a:solidFill>
+          <a:ln xmlns:a="http://schemas.openxmlformats.org/drawingml/2006/main" w="0">
+            <a:solidFill>
+              <a:srgbClr val="000000">
+                <a:alpha val="0"/>
+              </a:srgbClr>
+            </a:solidFill>
+            <a:prstDash val="solid"/>
+          </a:ln>
+        </p:spPr>
+        <p:txBody>
+          <a:bodyPr xmlns:a="http://schemas.openxmlformats.org/drawingml/2006/main" lIns="0" tIns="0" rIns="0" bIns="0" anchor="t"/>
+          <a:lstStyle xmlns:a="http://schemas.openxmlformats.org/drawingml/2006/main"/>
+          <a:p xmlns:a="http://schemas.openxmlformats.org/drawingml/2006/main">
+            <a:pPr algn="l">
+              <a:defRPr sz="1125" b="0">
+                <a:solidFill>
+                  <a:srgbClr val="172026"/>
+                </a:solidFill>
+                <a:latin typeface="Aptos"/>
+                <a:ea typeface="Aptos"/>
+                <a:cs typeface="Aptos"/>
+              </a:defRPr>
+            </a:pPr>
+            <a:r>
+              <a:rPr sz="1125" b="0">
+                <a:solidFill>
+                  <a:srgbClr val="172026"/>
+                </a:solidFill>
+                <a:latin typeface="Aptos"/>
+                <a:ea typeface="Aptos"/>
+                <a:cs typeface="Aptos"/>
+              </a:rPr>
+              <a:t>Routing implication and risk</a:t>
+            </a:r>
+          </a:p>
+        </p:txBody>
+      </p:sp>
+      <p:sp>
+        <p:nvSpPr>
+          <p:cNvPr id="30" name="">
+            <a:extLst xmlns:a="http://schemas.openxmlformats.org/drawingml/2006/main">
+              <a:ext uri="{FF2B5EF4-FFF2-40B4-BE49-F238E27FC236}">
+                <a16:creationId xmlns:a16="http://schemas.microsoft.com/office/drawing/2014/main" id="{4A207F3F-69A8-45A3-BBB5-43008A7FA28B}"/>
+              </a:ext>
+            </a:extLst>
+          </p:cNvPr>
+          <p:cNvSpPr>
+            <a:spLocks xmlns:a="http://schemas.openxmlformats.org/drawingml/2006/main" noGrp="1"/>
+          </p:cNvSpPr>
+          <p:nvPr/>
+        </p:nvSpPr>
+        <p:spPr>
+          <a:xfrm xmlns:a="http://schemas.openxmlformats.org/drawingml/2006/main">
+            <a:off x="514350" y="6438900"/>
+            <a:ext cx="10915650" cy="9525"/>
+          </a:xfrm>
+          <a:prstGeom xmlns:a="http://schemas.openxmlformats.org/drawingml/2006/main" prst="rect">
+            <a:avLst/>
+          </a:prstGeom>
+          <a:solidFill xmlns:a="http://schemas.openxmlformats.org/drawingml/2006/main">
+            <a:srgbClr val="D9DDD6"/>
+          </a:solidFill>
+          <a:ln xmlns:a="http://schemas.openxmlformats.org/drawingml/2006/main" w="0">
+            <a:solidFill>
+              <a:srgbClr val="000000">
+                <a:alpha val="0"/>
+              </a:srgbClr>
+            </a:solidFill>
+            <a:prstDash val="solid"/>
+          </a:ln>
+        </p:spPr>
+      </p:sp>
+      <p:sp>
+        <p:nvSpPr>
+          <p:cNvPr id="31" name="">
+            <a:extLst xmlns:a="http://schemas.openxmlformats.org/drawingml/2006/main">
+              <a:ext uri="{FF2B5EF4-FFF2-40B4-BE49-F238E27FC236}">
+                <a16:creationId xmlns:a16="http://schemas.microsoft.com/office/drawing/2014/main" id="{49BBB86E-8CB6-4FE1-BF7A-896474394A80}"/>
+              </a:ext>
+            </a:extLst>
+          </p:cNvPr>
+          <p:cNvSpPr>
+            <a:spLocks xmlns:a="http://schemas.openxmlformats.org/drawingml/2006/main" noGrp="1"/>
+          </p:cNvSpPr>
+          <p:nvPr/>
+        </p:nvSpPr>
+        <p:spPr>
+          <a:xfrm xmlns:a="http://schemas.openxmlformats.org/drawingml/2006/main">
+            <a:off x="514350" y="6553200"/>
+            <a:ext cx="5905500" cy="171450"/>
+          </a:xfrm>
+          <a:prstGeom xmlns:a="http://schemas.openxmlformats.org/drawingml/2006/main" prst="rect">
+            <a:avLst/>
+          </a:prstGeom>
+          <a:solidFill xmlns:a="http://schemas.openxmlformats.org/drawingml/2006/main">
+            <a:srgbClr val="000000">
+              <a:alpha val="0"/>
+            </a:srgbClr>
+          </a:solidFill>
+          <a:ln xmlns:a="http://schemas.openxmlformats.org/drawingml/2006/main" w="0">
+            <a:solidFill>
+              <a:srgbClr val="000000">
+                <a:alpha val="0"/>
+              </a:srgbClr>
+            </a:solidFill>
+            <a:prstDash val="solid"/>
+          </a:ln>
+        </p:spPr>
+        <p:txBody>
+          <a:bodyPr xmlns:a="http://schemas.openxmlformats.org/drawingml/2006/main" lIns="0" tIns="0" rIns="0" bIns="0" anchor="t"/>
+          <a:lstStyle xmlns:a="http://schemas.openxmlformats.org/drawingml/2006/main"/>
+          <a:p xmlns:a="http://schemas.openxmlformats.org/drawingml/2006/main">
+            <a:pPr algn="l">
+              <a:defRPr sz="675" b="0">
+                <a:solidFill>
+                  <a:srgbClr val="59646A"/>
+                </a:solidFill>
+                <a:latin typeface="Aptos"/>
+                <a:ea typeface="Aptos"/>
+                <a:cs typeface="Aptos"/>
+              </a:defRPr>
+            </a:pPr>
+            <a:r>
+              <a:rPr sz="675" b="0">
+                <a:solidFill>
+                  <a:srgbClr val="59646A"/>
+                </a:solidFill>
+                <a:latin typeface="Aptos"/>
+                <a:ea typeface="Aptos"/>
+                <a:cs typeface="Aptos"/>
+              </a:rPr>
+              <a:t>Lesson 06 - Distribution: The Missing Half</a:t>
+            </a:r>
+          </a:p>
+        </p:txBody>
+      </p:sp>
+      <p:sp>
+        <p:nvSpPr>
+          <p:cNvPr id="32" name="">
+            <a:extLst xmlns:a="http://schemas.openxmlformats.org/drawingml/2006/main">
+              <a:ext uri="{FF2B5EF4-FFF2-40B4-BE49-F238E27FC236}">
+                <a16:creationId xmlns:a16="http://schemas.microsoft.com/office/drawing/2014/main" id="{9E4E20D0-9E6D-4D8B-A614-3862BD27FB72}"/>
+              </a:ext>
+            </a:extLst>
+          </p:cNvPr>
+          <p:cNvSpPr>
+            <a:spLocks xmlns:a="http://schemas.openxmlformats.org/drawingml/2006/main" noGrp="1"/>
+          </p:cNvSpPr>
+          <p:nvPr/>
+        </p:nvSpPr>
+        <p:spPr>
+          <a:xfrm xmlns:a="http://schemas.openxmlformats.org/drawingml/2006/main">
+            <a:off x="5334000" y="6553200"/>
+            <a:ext cx="4095750" cy="171450"/>
+          </a:xfrm>
+          <a:prstGeom xmlns:a="http://schemas.openxmlformats.org/drawingml/2006/main" prst="rect">
+            <a:avLst/>
+          </a:prstGeom>
+          <a:solidFill xmlns:a="http://schemas.openxmlformats.org/drawingml/2006/main">
+            <a:srgbClr val="000000">
+              <a:alpha val="0"/>
+            </a:srgbClr>
+          </a:solidFill>
+          <a:ln xmlns:a="http://schemas.openxmlformats.org/drawingml/2006/main" w="0">
+            <a:solidFill>
+              <a:srgbClr val="000000">
+                <a:alpha val="0"/>
+              </a:srgbClr>
+            </a:solidFill>
+            <a:prstDash val="solid"/>
+          </a:ln>
+        </p:spPr>
+        <p:txBody>
+          <a:bodyPr xmlns:a="http://schemas.openxmlformats.org/drawingml/2006/main" lIns="0" tIns="0" rIns="0" bIns="0" anchor="t"/>
+          <a:lstStyle xmlns:a="http://schemas.openxmlformats.org/drawingml/2006/main"/>
+          <a:p xmlns:a="http://schemas.openxmlformats.org/drawingml/2006/main">
+            <a:pPr algn="r">
+              <a:defRPr sz="600" b="0">
+                <a:solidFill>
+                  <a:srgbClr val="59646A"/>
+                </a:solidFill>
+                <a:latin typeface="Aptos"/>
+                <a:ea typeface="Aptos"/>
+                <a:cs typeface="Aptos"/>
+              </a:defRPr>
+            </a:pPr>
+            <a:r>
+              <a:rPr sz="600" b="0">
+                <a:solidFill>
+                  <a:srgbClr val="59646A"/>
+                </a:solidFill>
+                <a:latin typeface="Aptos"/>
+                <a:ea typeface="Aptos"/>
+                <a:cs typeface="Aptos"/>
+              </a:rPr>
+              <a:t>Source: modules/module-01-industrial-demand-generation/lessons/06-distribution-the-missing-half.md @ 9e28222</a:t>
+            </a:r>
+          </a:p>
+        </p:txBody>
+      </p:sp>
+      <p:sp>
+        <p:nvSpPr>
+          <p:cNvPr id="33" name="">
+            <a:extLst xmlns:a="http://schemas.openxmlformats.org/drawingml/2006/main">
+              <a:ext uri="{FF2B5EF4-FFF2-40B4-BE49-F238E27FC236}">
+                <a16:creationId xmlns:a16="http://schemas.microsoft.com/office/drawing/2014/main" id="{F2949B09-0178-4F0E-B510-98E46C02F14E}"/>
+              </a:ext>
+            </a:extLst>
+          </p:cNvPr>
+          <p:cNvSpPr>
+            <a:spLocks xmlns:a="http://schemas.openxmlformats.org/drawingml/2006/main" noGrp="1"/>
+          </p:cNvSpPr>
+          <p:nvPr/>
+        </p:nvSpPr>
+        <p:spPr>
+          <a:xfrm xmlns:a="http://schemas.openxmlformats.org/drawingml/2006/main">
+            <a:off x="10668000" y="6553200"/>
+            <a:ext cx="762000" cy="171450"/>
+          </a:xfrm>
+          <a:prstGeom xmlns:a="http://schemas.openxmlformats.org/drawingml/2006/main" prst="rect">
+            <a:avLst/>
+          </a:prstGeom>
+          <a:solidFill xmlns:a="http://schemas.openxmlformats.org/drawingml/2006/main">
+            <a:srgbClr val="000000">
+              <a:alpha val="0"/>
+            </a:srgbClr>
+          </a:solidFill>
+          <a:ln xmlns:a="http://schemas.openxmlformats.org/drawingml/2006/main" w="0">
+            <a:solidFill>
+              <a:srgbClr val="000000">
+                <a:alpha val="0"/>
+              </a:srgbClr>
+            </a:solidFill>
+            <a:prstDash val="solid"/>
+          </a:ln>
+        </p:spPr>
+        <p:txBody>
+          <a:bodyPr xmlns:a="http://schemas.openxmlformats.org/drawingml/2006/main" lIns="0" tIns="0" rIns="0" bIns="0" anchor="t"/>
+          <a:lstStyle xmlns:a="http://schemas.openxmlformats.org/drawingml/2006/main"/>
+          <a:p xmlns:a="http://schemas.openxmlformats.org/drawingml/2006/main">
+            <a:pPr algn="r">
+              <a:defRPr sz="675" b="0">
+                <a:solidFill>
+                  <a:srgbClr val="59646A"/>
+                </a:solidFill>
+                <a:latin typeface="Aptos"/>
+                <a:ea typeface="Aptos"/>
+                <a:cs typeface="Aptos"/>
+              </a:defRPr>
+            </a:pPr>
+            <a:r>
+              <a:rPr sz="675" b="0">
+                <a:solidFill>
+                  <a:srgbClr val="59646A"/>
+                </a:solidFill>
+                <a:latin typeface="Aptos"/>
+                <a:ea typeface="Aptos"/>
+                <a:cs typeface="Aptos"/>
+              </a:rPr>
+              <a:t>10/15</a:t>
+            </a:r>
+          </a:p>
+        </p:txBody>
+      </p:sp>
+      <p:sp>
+        <p:nvSpPr>
+          <p:cNvPr id="34" name="">
+            <a:extLst xmlns:a="http://schemas.openxmlformats.org/drawingml/2006/main">
+              <a:ext uri="{FF2B5EF4-FFF2-40B4-BE49-F238E27FC236}">
+                <a16:creationId xmlns:a16="http://schemas.microsoft.com/office/drawing/2014/main" id="{5F545E31-B2A8-419A-96D4-468BB8E7DA35}"/>
+              </a:ext>
+            </a:extLst>
+          </p:cNvPr>
+          <p:cNvSpPr>
+            <a:spLocks xmlns:a="http://schemas.openxmlformats.org/drawingml/2006/main" noGrp="1"/>
+          </p:cNvSpPr>
+          <p:nvPr/>
+        </p:nvSpPr>
+        <p:spPr>
+          <a:xfrm xmlns:a="http://schemas.openxmlformats.org/drawingml/2006/main">
+            <a:off x="0" y="0"/>
+            <a:ext cx="12192000" cy="1809750"/>
+          </a:xfrm>
+          <a:prstGeom xmlns:a="http://schemas.openxmlformats.org/drawingml/2006/main" prst="rect">
+            <a:avLst/>
+          </a:prstGeom>
+          <a:solidFill xmlns:a="http://schemas.openxmlformats.org/drawingml/2006/main">
+            <a:srgbClr val="F5F6F2"/>
+          </a:solidFill>
+          <a:ln xmlns:a="http://schemas.openxmlformats.org/drawingml/2006/main" w="0">
+            <a:solidFill>
+              <a:srgbClr val="000000">
+                <a:alpha val="0"/>
+              </a:srgbClr>
+            </a:solidFill>
+            <a:prstDash val="solid"/>
+          </a:ln>
+        </p:spPr>
+      </p:sp>
+      <p:sp>
+        <p:nvSpPr>
+          <p:cNvPr id="35" name="">
+            <a:extLst xmlns:a="http://schemas.openxmlformats.org/drawingml/2006/main">
+              <a:ext uri="{FF2B5EF4-FFF2-40B4-BE49-F238E27FC236}">
+                <a16:creationId xmlns:a16="http://schemas.microsoft.com/office/drawing/2014/main" id="{01FC524C-1967-439B-8DA2-56AF52AFCB85}"/>
+              </a:ext>
+            </a:extLst>
+          </p:cNvPr>
+          <p:cNvSpPr>
+            <a:spLocks xmlns:a="http://schemas.openxmlformats.org/drawingml/2006/main" noGrp="1"/>
+          </p:cNvSpPr>
+          <p:nvPr/>
+        </p:nvSpPr>
+        <p:spPr>
+          <a:xfrm xmlns:a="http://schemas.openxmlformats.org/drawingml/2006/main">
+            <a:off x="0" y="0"/>
+            <a:ext cx="171450" cy="1809750"/>
+          </a:xfrm>
+          <a:prstGeom xmlns:a="http://schemas.openxmlformats.org/drawingml/2006/main" prst="rect">
+            <a:avLst/>
+          </a:prstGeom>
+          <a:solidFill xmlns:a="http://schemas.openxmlformats.org/drawingml/2006/main">
+            <a:srgbClr val="12232B"/>
+          </a:solidFill>
+          <a:ln xmlns:a="http://schemas.openxmlformats.org/drawingml/2006/main" w="0">
+            <a:solidFill>
+              <a:srgbClr val="000000">
+                <a:alpha val="0"/>
+              </a:srgbClr>
+            </a:solidFill>
+            <a:prstDash val="solid"/>
+          </a:ln>
+        </p:spPr>
+      </p:sp>
+      <p:sp>
+        <p:nvSpPr>
+          <p:cNvPr id="36" name="">
+            <a:extLst xmlns:a="http://schemas.openxmlformats.org/drawingml/2006/main">
+              <a:ext uri="{FF2B5EF4-FFF2-40B4-BE49-F238E27FC236}">
+                <a16:creationId xmlns:a16="http://schemas.microsoft.com/office/drawing/2014/main" id="{70255577-46FB-4699-A728-81F3C805E104}"/>
+              </a:ext>
+            </a:extLst>
+          </p:cNvPr>
+          <p:cNvSpPr>
+            <a:spLocks xmlns:a="http://schemas.openxmlformats.org/drawingml/2006/main" noGrp="1"/>
+          </p:cNvSpPr>
+          <p:nvPr/>
+        </p:nvSpPr>
+        <p:spPr>
+          <a:xfrm xmlns:a="http://schemas.openxmlformats.org/drawingml/2006/main">
+            <a:off x="171450" y="0"/>
+            <a:ext cx="57150" cy="1809750"/>
+          </a:xfrm>
+          <a:prstGeom xmlns:a="http://schemas.openxmlformats.org/drawingml/2006/main" prst="rect">
+            <a:avLst/>
+          </a:prstGeom>
+          <a:solidFill xmlns:a="http://schemas.openxmlformats.org/drawingml/2006/main">
+            <a:srgbClr val="A85D2A"/>
+          </a:solidFill>
+          <a:ln xmlns:a="http://schemas.openxmlformats.org/drawingml/2006/main" w="0">
+            <a:solidFill>
+              <a:srgbClr val="000000">
+                <a:alpha val="0"/>
+              </a:srgbClr>
+            </a:solidFill>
+            <a:prstDash val="solid"/>
+          </a:ln>
+        </p:spPr>
+      </p:sp>
+      <p:sp>
+        <p:nvSpPr>
+          <p:cNvPr id="37" name="kicker-06-marker">
+            <a:extLst xmlns:a="http://schemas.openxmlformats.org/drawingml/2006/main">
+              <a:ext uri="{FF2B5EF4-FFF2-40B4-BE49-F238E27FC236}">
+                <a16:creationId xmlns:a16="http://schemas.microsoft.com/office/drawing/2014/main" id="{844EBAC0-F62C-4772-8195-53A27FC62DD9}"/>
+              </a:ext>
+            </a:extLst>
+          </p:cNvPr>
+          <p:cNvSpPr>
+            <a:spLocks xmlns:a="http://schemas.openxmlformats.org/drawingml/2006/main" noGrp="1"/>
+          </p:cNvSpPr>
+          <p:nvPr/>
+        </p:nvSpPr>
+        <p:spPr>
+          <a:xfrm xmlns:a="http://schemas.openxmlformats.org/drawingml/2006/main">
+            <a:off x="514350" y="390525"/>
+            <a:ext cx="76200" cy="76200"/>
+          </a:xfrm>
+          <a:prstGeom xmlns:a="http://schemas.openxmlformats.org/drawingml/2006/main" prst="rect">
+            <a:avLst/>
+          </a:prstGeom>
+          <a:solidFill xmlns:a="http://schemas.openxmlformats.org/drawingml/2006/main">
+            <a:srgbClr val="A85D2A"/>
+          </a:solidFill>
+          <a:ln xmlns:a="http://schemas.openxmlformats.org/drawingml/2006/main" w="0">
+            <a:solidFill>
+              <a:srgbClr val="000000">
+                <a:alpha val="0"/>
+              </a:srgbClr>
+            </a:solidFill>
+            <a:prstDash val="solid"/>
+          </a:ln>
+        </p:spPr>
+      </p:sp>
+      <p:sp>
+        <p:nvSpPr>
+          <p:cNvPr id="38" name="kicker-06-label">
+            <a:extLst xmlns:a="http://schemas.openxmlformats.org/drawingml/2006/main">
+              <a:ext uri="{FF2B5EF4-FFF2-40B4-BE49-F238E27FC236}">
+                <a16:creationId xmlns:a16="http://schemas.microsoft.com/office/drawing/2014/main" id="{5C275049-27F1-4439-990B-958692D4EB54}"/>
+              </a:ext>
+            </a:extLst>
+          </p:cNvPr>
+          <p:cNvSpPr>
+            <a:spLocks xmlns:a="http://schemas.openxmlformats.org/drawingml/2006/main" noGrp="1"/>
+          </p:cNvSpPr>
+          <p:nvPr/>
+        </p:nvSpPr>
+        <p:spPr>
+          <a:xfrm xmlns:a="http://schemas.openxmlformats.org/drawingml/2006/main">
+            <a:off x="685800" y="323850"/>
+            <a:ext cx="7524750" cy="228600"/>
+          </a:xfrm>
+          <a:prstGeom xmlns:a="http://schemas.openxmlformats.org/drawingml/2006/main" prst="rect">
+            <a:avLst/>
+          </a:prstGeom>
+          <a:solidFill xmlns:a="http://schemas.openxmlformats.org/drawingml/2006/main">
+            <a:srgbClr val="000000">
+              <a:alpha val="0"/>
+            </a:srgbClr>
+          </a:solidFill>
+          <a:ln xmlns:a="http://schemas.openxmlformats.org/drawingml/2006/main" w="0">
+            <a:solidFill>
+              <a:srgbClr val="000000">
+                <a:alpha val="0"/>
+              </a:srgbClr>
+            </a:solidFill>
+            <a:prstDash val="solid"/>
+          </a:ln>
+        </p:spPr>
+        <p:txBody>
+          <a:bodyPr xmlns:a="http://schemas.openxmlformats.org/drawingml/2006/main" lIns="0" tIns="0" rIns="0" bIns="0" anchor="ctr"/>
           <a:lstStyle xmlns:a="http://schemas.openxmlformats.org/drawingml/2006/main"/>
           <a:p xmlns:a="http://schemas.openxmlformats.org/drawingml/2006/main">
             <a:pPr algn="l">
@@ -4098,943 +5022,17 @@
                 <a:ea typeface="Aptos"/>
                 <a:cs typeface="Aptos"/>
               </a:rPr>
-              <a:t>REQUIRED OUTPUT STANDARD</a:t>
+              <a:t>MODULE 1 / LESSON 06 / STRUCTURED DRAFTING DRILL</a:t>
             </a:r>
           </a:p>
         </p:txBody>
       </p:sp>
       <p:sp>
         <p:nvSpPr>
-          <p:cNvPr id="20" name="">
-            <a:extLst xmlns:a="http://schemas.openxmlformats.org/drawingml/2006/main">
-              <a:ext uri="{FF2B5EF4-FFF2-40B4-BE49-F238E27FC236}">
-                <a16:creationId xmlns:a16="http://schemas.microsoft.com/office/drawing/2014/main" id="{93EE2374-E1C2-42B6-8607-5DA184C71345}"/>
-              </a:ext>
-            </a:extLst>
-          </p:cNvPr>
-          <p:cNvSpPr>
-            <a:spLocks xmlns:a="http://schemas.openxmlformats.org/drawingml/2006/main" noGrp="1"/>
-          </p:cNvSpPr>
-          <p:nvPr/>
-        </p:nvSpPr>
-        <p:spPr>
-          <a:xfrm xmlns:a="http://schemas.openxmlformats.org/drawingml/2006/main">
-            <a:off x="6705600" y="2714625"/>
-            <a:ext cx="57150" cy="57150"/>
-          </a:xfrm>
-          <a:prstGeom xmlns:a="http://schemas.openxmlformats.org/drawingml/2006/main" prst="rect">
-            <a:avLst/>
-          </a:prstGeom>
-          <a:solidFill xmlns:a="http://schemas.openxmlformats.org/drawingml/2006/main">
-            <a:srgbClr val="1D6072"/>
-          </a:solidFill>
-          <a:ln xmlns:a="http://schemas.openxmlformats.org/drawingml/2006/main" w="0">
-            <a:solidFill>
-              <a:srgbClr val="000000">
-                <a:alpha val="0"/>
-              </a:srgbClr>
-            </a:solidFill>
-            <a:prstDash val="solid"/>
-          </a:ln>
-        </p:spPr>
-      </p:sp>
-      <p:sp>
-        <p:nvSpPr>
-          <p:cNvPr id="21" name="">
-            <a:extLst xmlns:a="http://schemas.openxmlformats.org/drawingml/2006/main">
-              <a:ext uri="{FF2B5EF4-FFF2-40B4-BE49-F238E27FC236}">
-                <a16:creationId xmlns:a16="http://schemas.microsoft.com/office/drawing/2014/main" id="{FE7E0626-811D-449D-A376-2BE17DC9AF05}"/>
-              </a:ext>
-            </a:extLst>
-          </p:cNvPr>
-          <p:cNvSpPr>
-            <a:spLocks xmlns:a="http://schemas.openxmlformats.org/drawingml/2006/main" noGrp="1"/>
-          </p:cNvSpPr>
-          <p:nvPr/>
-        </p:nvSpPr>
-        <p:spPr>
-          <a:xfrm xmlns:a="http://schemas.openxmlformats.org/drawingml/2006/main">
-            <a:off x="6877050" y="2647950"/>
-            <a:ext cx="4210050" cy="438150"/>
-          </a:xfrm>
-          <a:prstGeom xmlns:a="http://schemas.openxmlformats.org/drawingml/2006/main" prst="rect">
-            <a:avLst/>
-          </a:prstGeom>
-          <a:solidFill xmlns:a="http://schemas.openxmlformats.org/drawingml/2006/main">
-            <a:srgbClr val="000000">
-              <a:alpha val="0"/>
-            </a:srgbClr>
-          </a:solidFill>
-          <a:ln xmlns:a="http://schemas.openxmlformats.org/drawingml/2006/main" w="0">
-            <a:solidFill>
-              <a:srgbClr val="000000">
-                <a:alpha val="0"/>
-              </a:srgbClr>
-            </a:solidFill>
-            <a:prstDash val="solid"/>
-          </a:ln>
-        </p:spPr>
-        <p:txBody>
-          <a:bodyPr xmlns:a="http://schemas.openxmlformats.org/drawingml/2006/main" lIns="0" tIns="0" rIns="0" bIns="0" anchor="t"/>
-          <a:lstStyle xmlns:a="http://schemas.openxmlformats.org/drawingml/2006/main"/>
-          <a:p xmlns:a="http://schemas.openxmlformats.org/drawingml/2006/main">
-            <a:pPr algn="l">
-              <a:defRPr sz="1125" b="0">
-                <a:solidFill>
-                  <a:srgbClr val="172026"/>
-                </a:solidFill>
-                <a:latin typeface="Aptos"/>
-                <a:ea typeface="Aptos"/>
-                <a:cs typeface="Aptos"/>
-              </a:defRPr>
-            </a:pPr>
-            <a:r>
-              <a:rPr sz="1125" b="0">
-                <a:solidFill>
-                  <a:srgbClr val="172026"/>
-                </a:solidFill>
-                <a:latin typeface="Aptos"/>
-                <a:ea typeface="Aptos"/>
-                <a:cs typeface="Aptos"/>
-              </a:rPr>
-              <a:t>Channel tied to buyer trust and demand state</a:t>
-            </a:r>
-          </a:p>
-        </p:txBody>
-      </p:sp>
-      <p:sp>
-        <p:nvSpPr>
-          <p:cNvPr id="22" name="">
-            <a:extLst xmlns:a="http://schemas.openxmlformats.org/drawingml/2006/main">
-              <a:ext uri="{FF2B5EF4-FFF2-40B4-BE49-F238E27FC236}">
-                <a16:creationId xmlns:a16="http://schemas.microsoft.com/office/drawing/2014/main" id="{AF5DCCE1-DDB7-493F-80D6-5138C2DEABF9}"/>
-              </a:ext>
-            </a:extLst>
-          </p:cNvPr>
-          <p:cNvSpPr>
-            <a:spLocks xmlns:a="http://schemas.openxmlformats.org/drawingml/2006/main" noGrp="1"/>
-          </p:cNvSpPr>
-          <p:nvPr/>
-        </p:nvSpPr>
-        <p:spPr>
-          <a:xfrm xmlns:a="http://schemas.openxmlformats.org/drawingml/2006/main">
-            <a:off x="6705600" y="3190875"/>
-            <a:ext cx="57150" cy="57150"/>
-          </a:xfrm>
-          <a:prstGeom xmlns:a="http://schemas.openxmlformats.org/drawingml/2006/main" prst="rect">
-            <a:avLst/>
-          </a:prstGeom>
-          <a:solidFill xmlns:a="http://schemas.openxmlformats.org/drawingml/2006/main">
-            <a:srgbClr val="1D6072"/>
-          </a:solidFill>
-          <a:ln xmlns:a="http://schemas.openxmlformats.org/drawingml/2006/main" w="0">
-            <a:solidFill>
-              <a:srgbClr val="000000">
-                <a:alpha val="0"/>
-              </a:srgbClr>
-            </a:solidFill>
-            <a:prstDash val="solid"/>
-          </a:ln>
-        </p:spPr>
-      </p:sp>
-      <p:sp>
-        <p:nvSpPr>
-          <p:cNvPr id="23" name="">
-            <a:extLst xmlns:a="http://schemas.openxmlformats.org/drawingml/2006/main">
-              <a:ext uri="{FF2B5EF4-FFF2-40B4-BE49-F238E27FC236}">
-                <a16:creationId xmlns:a16="http://schemas.microsoft.com/office/drawing/2014/main" id="{3AE030C0-AD1F-4D83-B4EC-6699DEAB3FB8}"/>
-              </a:ext>
-            </a:extLst>
-          </p:cNvPr>
-          <p:cNvSpPr>
-            <a:spLocks xmlns:a="http://schemas.openxmlformats.org/drawingml/2006/main" noGrp="1"/>
-          </p:cNvSpPr>
-          <p:nvPr/>
-        </p:nvSpPr>
-        <p:spPr>
-          <a:xfrm xmlns:a="http://schemas.openxmlformats.org/drawingml/2006/main">
-            <a:off x="6877050" y="3124200"/>
-            <a:ext cx="4210050" cy="438150"/>
-          </a:xfrm>
-          <a:prstGeom xmlns:a="http://schemas.openxmlformats.org/drawingml/2006/main" prst="rect">
-            <a:avLst/>
-          </a:prstGeom>
-          <a:solidFill xmlns:a="http://schemas.openxmlformats.org/drawingml/2006/main">
-            <a:srgbClr val="000000">
-              <a:alpha val="0"/>
-            </a:srgbClr>
-          </a:solidFill>
-          <a:ln xmlns:a="http://schemas.openxmlformats.org/drawingml/2006/main" w="0">
-            <a:solidFill>
-              <a:srgbClr val="000000">
-                <a:alpha val="0"/>
-              </a:srgbClr>
-            </a:solidFill>
-            <a:prstDash val="solid"/>
-          </a:ln>
-        </p:spPr>
-        <p:txBody>
-          <a:bodyPr xmlns:a="http://schemas.openxmlformats.org/drawingml/2006/main" lIns="0" tIns="0" rIns="0" bIns="0" anchor="t"/>
-          <a:lstStyle xmlns:a="http://schemas.openxmlformats.org/drawingml/2006/main"/>
-          <a:p xmlns:a="http://schemas.openxmlformats.org/drawingml/2006/main">
-            <a:pPr algn="l">
-              <a:defRPr sz="1125" b="0">
-                <a:solidFill>
-                  <a:srgbClr val="172026"/>
-                </a:solidFill>
-                <a:latin typeface="Aptos"/>
-                <a:ea typeface="Aptos"/>
-                <a:cs typeface="Aptos"/>
-              </a:defRPr>
-            </a:pPr>
-            <a:r>
-              <a:rPr sz="1125" b="0">
-                <a:solidFill>
-                  <a:srgbClr val="172026"/>
-                </a:solidFill>
-                <a:latin typeface="Aptos"/>
-                <a:ea typeface="Aptos"/>
-                <a:cs typeface="Aptos"/>
-              </a:rPr>
-              <a:t>Owner named: sales, marketing, SME, distributor, partner, or leadership</a:t>
-            </a:r>
-          </a:p>
-        </p:txBody>
-      </p:sp>
-      <p:sp>
-        <p:nvSpPr>
-          <p:cNvPr id="24" name="">
-            <a:extLst xmlns:a="http://schemas.openxmlformats.org/drawingml/2006/main">
-              <a:ext uri="{FF2B5EF4-FFF2-40B4-BE49-F238E27FC236}">
-                <a16:creationId xmlns:a16="http://schemas.microsoft.com/office/drawing/2014/main" id="{D368E89E-DF50-4901-9325-485CA0676529}"/>
-              </a:ext>
-            </a:extLst>
-          </p:cNvPr>
-          <p:cNvSpPr>
-            <a:spLocks xmlns:a="http://schemas.openxmlformats.org/drawingml/2006/main" noGrp="1"/>
-          </p:cNvSpPr>
-          <p:nvPr/>
-        </p:nvSpPr>
-        <p:spPr>
-          <a:xfrm xmlns:a="http://schemas.openxmlformats.org/drawingml/2006/main">
-            <a:off x="6705600" y="3667125"/>
-            <a:ext cx="57150" cy="57150"/>
-          </a:xfrm>
-          <a:prstGeom xmlns:a="http://schemas.openxmlformats.org/drawingml/2006/main" prst="rect">
-            <a:avLst/>
-          </a:prstGeom>
-          <a:solidFill xmlns:a="http://schemas.openxmlformats.org/drawingml/2006/main">
-            <a:srgbClr val="1D6072"/>
-          </a:solidFill>
-          <a:ln xmlns:a="http://schemas.openxmlformats.org/drawingml/2006/main" w="0">
-            <a:solidFill>
-              <a:srgbClr val="000000">
-                <a:alpha val="0"/>
-              </a:srgbClr>
-            </a:solidFill>
-            <a:prstDash val="solid"/>
-          </a:ln>
-        </p:spPr>
-      </p:sp>
-      <p:sp>
-        <p:nvSpPr>
-          <p:cNvPr id="25" name="">
-            <a:extLst xmlns:a="http://schemas.openxmlformats.org/drawingml/2006/main">
-              <a:ext uri="{FF2B5EF4-FFF2-40B4-BE49-F238E27FC236}">
-                <a16:creationId xmlns:a16="http://schemas.microsoft.com/office/drawing/2014/main" id="{0EC54B60-A42E-4DC7-8B58-92DC20D40E85}"/>
-              </a:ext>
-            </a:extLst>
-          </p:cNvPr>
-          <p:cNvSpPr>
-            <a:spLocks xmlns:a="http://schemas.openxmlformats.org/drawingml/2006/main" noGrp="1"/>
-          </p:cNvSpPr>
-          <p:nvPr/>
-        </p:nvSpPr>
-        <p:spPr>
-          <a:xfrm xmlns:a="http://schemas.openxmlformats.org/drawingml/2006/main">
-            <a:off x="6877050" y="3600450"/>
-            <a:ext cx="4210050" cy="438150"/>
-          </a:xfrm>
-          <a:prstGeom xmlns:a="http://schemas.openxmlformats.org/drawingml/2006/main" prst="rect">
-            <a:avLst/>
-          </a:prstGeom>
-          <a:solidFill xmlns:a="http://schemas.openxmlformats.org/drawingml/2006/main">
-            <a:srgbClr val="000000">
-              <a:alpha val="0"/>
-            </a:srgbClr>
-          </a:solidFill>
-          <a:ln xmlns:a="http://schemas.openxmlformats.org/drawingml/2006/main" w="0">
-            <a:solidFill>
-              <a:srgbClr val="000000">
-                <a:alpha val="0"/>
-              </a:srgbClr>
-            </a:solidFill>
-            <a:prstDash val="solid"/>
-          </a:ln>
-        </p:spPr>
-        <p:txBody>
-          <a:bodyPr xmlns:a="http://schemas.openxmlformats.org/drawingml/2006/main" lIns="0" tIns="0" rIns="0" bIns="0" anchor="t"/>
-          <a:lstStyle xmlns:a="http://schemas.openxmlformats.org/drawingml/2006/main"/>
-          <a:p xmlns:a="http://schemas.openxmlformats.org/drawingml/2006/main">
-            <a:pPr algn="l">
-              <a:defRPr sz="1125" b="0">
-                <a:solidFill>
-                  <a:srgbClr val="172026"/>
-                </a:solidFill>
-                <a:latin typeface="Aptos"/>
-                <a:ea typeface="Aptos"/>
-                <a:cs typeface="Aptos"/>
-              </a:defRPr>
-            </a:pPr>
-            <a:r>
-              <a:rPr sz="1125" b="0">
-                <a:solidFill>
-                  <a:srgbClr val="172026"/>
-                </a:solidFill>
-                <a:latin typeface="Aptos"/>
-                <a:ea typeface="Aptos"/>
-                <a:cs typeface="Aptos"/>
-              </a:rPr>
-              <a:t>Realistic cadence</a:t>
-            </a:r>
-          </a:p>
-        </p:txBody>
-      </p:sp>
-      <p:sp>
-        <p:nvSpPr>
-          <p:cNvPr id="26" name="">
-            <a:extLst xmlns:a="http://schemas.openxmlformats.org/drawingml/2006/main">
-              <a:ext uri="{FF2B5EF4-FFF2-40B4-BE49-F238E27FC236}">
-                <a16:creationId xmlns:a16="http://schemas.microsoft.com/office/drawing/2014/main" id="{E278F050-FCE9-4D07-B47C-5A051A8638E1}"/>
-              </a:ext>
-            </a:extLst>
-          </p:cNvPr>
-          <p:cNvSpPr>
-            <a:spLocks xmlns:a="http://schemas.openxmlformats.org/drawingml/2006/main" noGrp="1"/>
-          </p:cNvSpPr>
-          <p:nvPr/>
-        </p:nvSpPr>
-        <p:spPr>
-          <a:xfrm xmlns:a="http://schemas.openxmlformats.org/drawingml/2006/main">
-            <a:off x="6705600" y="4143375"/>
-            <a:ext cx="57150" cy="57150"/>
-          </a:xfrm>
-          <a:prstGeom xmlns:a="http://schemas.openxmlformats.org/drawingml/2006/main" prst="rect">
-            <a:avLst/>
-          </a:prstGeom>
-          <a:solidFill xmlns:a="http://schemas.openxmlformats.org/drawingml/2006/main">
-            <a:srgbClr val="1D6072"/>
-          </a:solidFill>
-          <a:ln xmlns:a="http://schemas.openxmlformats.org/drawingml/2006/main" w="0">
-            <a:solidFill>
-              <a:srgbClr val="000000">
-                <a:alpha val="0"/>
-              </a:srgbClr>
-            </a:solidFill>
-            <a:prstDash val="solid"/>
-          </a:ln>
-        </p:spPr>
-      </p:sp>
-      <p:sp>
-        <p:nvSpPr>
-          <p:cNvPr id="27" name="">
-            <a:extLst xmlns:a="http://schemas.openxmlformats.org/drawingml/2006/main">
-              <a:ext uri="{FF2B5EF4-FFF2-40B4-BE49-F238E27FC236}">
-                <a16:creationId xmlns:a16="http://schemas.microsoft.com/office/drawing/2014/main" id="{53763742-7968-421A-9964-A50F627B715E}"/>
-              </a:ext>
-            </a:extLst>
-          </p:cNvPr>
-          <p:cNvSpPr>
-            <a:spLocks xmlns:a="http://schemas.openxmlformats.org/drawingml/2006/main" noGrp="1"/>
-          </p:cNvSpPr>
-          <p:nvPr/>
-        </p:nvSpPr>
-        <p:spPr>
-          <a:xfrm xmlns:a="http://schemas.openxmlformats.org/drawingml/2006/main">
-            <a:off x="6877050" y="4076700"/>
-            <a:ext cx="4210050" cy="438150"/>
-          </a:xfrm>
-          <a:prstGeom xmlns:a="http://schemas.openxmlformats.org/drawingml/2006/main" prst="rect">
-            <a:avLst/>
-          </a:prstGeom>
-          <a:solidFill xmlns:a="http://schemas.openxmlformats.org/drawingml/2006/main">
-            <a:srgbClr val="000000">
-              <a:alpha val="0"/>
-            </a:srgbClr>
-          </a:solidFill>
-          <a:ln xmlns:a="http://schemas.openxmlformats.org/drawingml/2006/main" w="0">
-            <a:solidFill>
-              <a:srgbClr val="000000">
-                <a:alpha val="0"/>
-              </a:srgbClr>
-            </a:solidFill>
-            <a:prstDash val="solid"/>
-          </a:ln>
-        </p:spPr>
-        <p:txBody>
-          <a:bodyPr xmlns:a="http://schemas.openxmlformats.org/drawingml/2006/main" lIns="0" tIns="0" rIns="0" bIns="0" anchor="t"/>
-          <a:lstStyle xmlns:a="http://schemas.openxmlformats.org/drawingml/2006/main"/>
-          <a:p xmlns:a="http://schemas.openxmlformats.org/drawingml/2006/main">
-            <a:pPr algn="l">
-              <a:defRPr sz="1125" b="0">
-                <a:solidFill>
-                  <a:srgbClr val="172026"/>
-                </a:solidFill>
-                <a:latin typeface="Aptos"/>
-                <a:ea typeface="Aptos"/>
-                <a:cs typeface="Aptos"/>
-              </a:defRPr>
-            </a:pPr>
-            <a:r>
-              <a:rPr sz="1125" b="0">
-                <a:solidFill>
-                  <a:srgbClr val="172026"/>
-                </a:solidFill>
-                <a:latin typeface="Aptos"/>
-                <a:ea typeface="Aptos"/>
-                <a:cs typeface="Aptos"/>
-              </a:rPr>
-              <a:t>Account-level signal</a:t>
-            </a:r>
-          </a:p>
-        </p:txBody>
-      </p:sp>
-      <p:sp>
-        <p:nvSpPr>
-          <p:cNvPr id="28" name="">
-            <a:extLst xmlns:a="http://schemas.openxmlformats.org/drawingml/2006/main">
-              <a:ext uri="{FF2B5EF4-FFF2-40B4-BE49-F238E27FC236}">
-                <a16:creationId xmlns:a16="http://schemas.microsoft.com/office/drawing/2014/main" id="{CC8B738D-47EE-4349-A2CB-ED56C1225828}"/>
-              </a:ext>
-            </a:extLst>
-          </p:cNvPr>
-          <p:cNvSpPr>
-            <a:spLocks xmlns:a="http://schemas.openxmlformats.org/drawingml/2006/main" noGrp="1"/>
-          </p:cNvSpPr>
-          <p:nvPr/>
-        </p:nvSpPr>
-        <p:spPr>
-          <a:xfrm xmlns:a="http://schemas.openxmlformats.org/drawingml/2006/main">
-            <a:off x="6705600" y="4619625"/>
-            <a:ext cx="57150" cy="57150"/>
-          </a:xfrm>
-          <a:prstGeom xmlns:a="http://schemas.openxmlformats.org/drawingml/2006/main" prst="rect">
-            <a:avLst/>
-          </a:prstGeom>
-          <a:solidFill xmlns:a="http://schemas.openxmlformats.org/drawingml/2006/main">
-            <a:srgbClr val="1D6072"/>
-          </a:solidFill>
-          <a:ln xmlns:a="http://schemas.openxmlformats.org/drawingml/2006/main" w="0">
-            <a:solidFill>
-              <a:srgbClr val="000000">
-                <a:alpha val="0"/>
-              </a:srgbClr>
-            </a:solidFill>
-            <a:prstDash val="solid"/>
-          </a:ln>
-        </p:spPr>
-      </p:sp>
-      <p:sp>
-        <p:nvSpPr>
-          <p:cNvPr id="29" name="">
-            <a:extLst xmlns:a="http://schemas.openxmlformats.org/drawingml/2006/main">
-              <a:ext uri="{FF2B5EF4-FFF2-40B4-BE49-F238E27FC236}">
-                <a16:creationId xmlns:a16="http://schemas.microsoft.com/office/drawing/2014/main" id="{8D209411-F480-4F21-A447-5D3B927E563E}"/>
-              </a:ext>
-            </a:extLst>
-          </p:cNvPr>
-          <p:cNvSpPr>
-            <a:spLocks xmlns:a="http://schemas.openxmlformats.org/drawingml/2006/main" noGrp="1"/>
-          </p:cNvSpPr>
-          <p:nvPr/>
-        </p:nvSpPr>
-        <p:spPr>
-          <a:xfrm xmlns:a="http://schemas.openxmlformats.org/drawingml/2006/main">
-            <a:off x="6877050" y="4552950"/>
-            <a:ext cx="4210050" cy="438150"/>
-          </a:xfrm>
-          <a:prstGeom xmlns:a="http://schemas.openxmlformats.org/drawingml/2006/main" prst="rect">
-            <a:avLst/>
-          </a:prstGeom>
-          <a:solidFill xmlns:a="http://schemas.openxmlformats.org/drawingml/2006/main">
-            <a:srgbClr val="000000">
-              <a:alpha val="0"/>
-            </a:srgbClr>
-          </a:solidFill>
-          <a:ln xmlns:a="http://schemas.openxmlformats.org/drawingml/2006/main" w="0">
-            <a:solidFill>
-              <a:srgbClr val="000000">
-                <a:alpha val="0"/>
-              </a:srgbClr>
-            </a:solidFill>
-            <a:prstDash val="solid"/>
-          </a:ln>
-        </p:spPr>
-        <p:txBody>
-          <a:bodyPr xmlns:a="http://schemas.openxmlformats.org/drawingml/2006/main" lIns="0" tIns="0" rIns="0" bIns="0" anchor="t"/>
-          <a:lstStyle xmlns:a="http://schemas.openxmlformats.org/drawingml/2006/main"/>
-          <a:p xmlns:a="http://schemas.openxmlformats.org/drawingml/2006/main">
-            <a:pPr algn="l">
-              <a:defRPr sz="1125" b="0">
-                <a:solidFill>
-                  <a:srgbClr val="172026"/>
-                </a:solidFill>
-                <a:latin typeface="Aptos"/>
-                <a:ea typeface="Aptos"/>
-                <a:cs typeface="Aptos"/>
-              </a:defRPr>
-            </a:pPr>
-            <a:r>
-              <a:rPr sz="1125" b="0">
-                <a:solidFill>
-                  <a:srgbClr val="172026"/>
-                </a:solidFill>
-                <a:latin typeface="Aptos"/>
-                <a:ea typeface="Aptos"/>
-                <a:cs typeface="Aptos"/>
-              </a:rPr>
-              <a:t>Routing implication and risk</a:t>
-            </a:r>
-          </a:p>
-        </p:txBody>
-      </p:sp>
-      <p:sp>
-        <p:nvSpPr>
-          <p:cNvPr id="30" name="">
-            <a:extLst xmlns:a="http://schemas.openxmlformats.org/drawingml/2006/main">
-              <a:ext uri="{FF2B5EF4-FFF2-40B4-BE49-F238E27FC236}">
-                <a16:creationId xmlns:a16="http://schemas.microsoft.com/office/drawing/2014/main" id="{C48EEA4F-4AF1-4AED-BE21-900D3BAF6508}"/>
-              </a:ext>
-            </a:extLst>
-          </p:cNvPr>
-          <p:cNvSpPr>
-            <a:spLocks xmlns:a="http://schemas.openxmlformats.org/drawingml/2006/main" noGrp="1"/>
-          </p:cNvSpPr>
-          <p:nvPr/>
-        </p:nvSpPr>
-        <p:spPr>
-          <a:xfrm xmlns:a="http://schemas.openxmlformats.org/drawingml/2006/main">
-            <a:off x="514350" y="6438900"/>
-            <a:ext cx="10915650" cy="9525"/>
-          </a:xfrm>
-          <a:prstGeom xmlns:a="http://schemas.openxmlformats.org/drawingml/2006/main" prst="rect">
-            <a:avLst/>
-          </a:prstGeom>
-          <a:solidFill xmlns:a="http://schemas.openxmlformats.org/drawingml/2006/main">
-            <a:srgbClr val="D9DDD6"/>
-          </a:solidFill>
-          <a:ln xmlns:a="http://schemas.openxmlformats.org/drawingml/2006/main" w="0">
-            <a:solidFill>
-              <a:srgbClr val="000000">
-                <a:alpha val="0"/>
-              </a:srgbClr>
-            </a:solidFill>
-            <a:prstDash val="solid"/>
-          </a:ln>
-        </p:spPr>
-      </p:sp>
-      <p:sp>
-        <p:nvSpPr>
-          <p:cNvPr id="31" name="">
-            <a:extLst xmlns:a="http://schemas.openxmlformats.org/drawingml/2006/main">
-              <a:ext uri="{FF2B5EF4-FFF2-40B4-BE49-F238E27FC236}">
-                <a16:creationId xmlns:a16="http://schemas.microsoft.com/office/drawing/2014/main" id="{8F925040-7125-49E5-A385-D0375925A32F}"/>
-              </a:ext>
-            </a:extLst>
-          </p:cNvPr>
-          <p:cNvSpPr>
-            <a:spLocks xmlns:a="http://schemas.openxmlformats.org/drawingml/2006/main" noGrp="1"/>
-          </p:cNvSpPr>
-          <p:nvPr/>
-        </p:nvSpPr>
-        <p:spPr>
-          <a:xfrm xmlns:a="http://schemas.openxmlformats.org/drawingml/2006/main">
-            <a:off x="514350" y="6553200"/>
-            <a:ext cx="5905500" cy="171450"/>
-          </a:xfrm>
-          <a:prstGeom xmlns:a="http://schemas.openxmlformats.org/drawingml/2006/main" prst="rect">
-            <a:avLst/>
-          </a:prstGeom>
-          <a:solidFill xmlns:a="http://schemas.openxmlformats.org/drawingml/2006/main">
-            <a:srgbClr val="000000">
-              <a:alpha val="0"/>
-            </a:srgbClr>
-          </a:solidFill>
-          <a:ln xmlns:a="http://schemas.openxmlformats.org/drawingml/2006/main" w="0">
-            <a:solidFill>
-              <a:srgbClr val="000000">
-                <a:alpha val="0"/>
-              </a:srgbClr>
-            </a:solidFill>
-            <a:prstDash val="solid"/>
-          </a:ln>
-        </p:spPr>
-        <p:txBody>
-          <a:bodyPr xmlns:a="http://schemas.openxmlformats.org/drawingml/2006/main" lIns="0" tIns="0" rIns="0" bIns="0" anchor="t"/>
-          <a:lstStyle xmlns:a="http://schemas.openxmlformats.org/drawingml/2006/main"/>
-          <a:p xmlns:a="http://schemas.openxmlformats.org/drawingml/2006/main">
-            <a:pPr algn="l">
-              <a:defRPr sz="675" b="0">
-                <a:solidFill>
-                  <a:srgbClr val="59646A"/>
-                </a:solidFill>
-                <a:latin typeface="Aptos"/>
-                <a:ea typeface="Aptos"/>
-                <a:cs typeface="Aptos"/>
-              </a:defRPr>
-            </a:pPr>
-            <a:r>
-              <a:rPr sz="675" b="0">
-                <a:solidFill>
-                  <a:srgbClr val="59646A"/>
-                </a:solidFill>
-                <a:latin typeface="Aptos"/>
-                <a:ea typeface="Aptos"/>
-                <a:cs typeface="Aptos"/>
-              </a:rPr>
-              <a:t>Lesson 06 - Distribution: The Missing Half</a:t>
-            </a:r>
-          </a:p>
-        </p:txBody>
-      </p:sp>
-      <p:sp>
-        <p:nvSpPr>
-          <p:cNvPr id="32" name="">
-            <a:extLst xmlns:a="http://schemas.openxmlformats.org/drawingml/2006/main">
-              <a:ext uri="{FF2B5EF4-FFF2-40B4-BE49-F238E27FC236}">
-                <a16:creationId xmlns:a16="http://schemas.microsoft.com/office/drawing/2014/main" id="{D03ECE8E-72F2-49D5-B22C-B0E42CEC49D8}"/>
-              </a:ext>
-            </a:extLst>
-          </p:cNvPr>
-          <p:cNvSpPr>
-            <a:spLocks xmlns:a="http://schemas.openxmlformats.org/drawingml/2006/main" noGrp="1"/>
-          </p:cNvSpPr>
-          <p:nvPr/>
-        </p:nvSpPr>
-        <p:spPr>
-          <a:xfrm xmlns:a="http://schemas.openxmlformats.org/drawingml/2006/main">
-            <a:off x="5334000" y="6553200"/>
-            <a:ext cx="4095750" cy="171450"/>
-          </a:xfrm>
-          <a:prstGeom xmlns:a="http://schemas.openxmlformats.org/drawingml/2006/main" prst="rect">
-            <a:avLst/>
-          </a:prstGeom>
-          <a:solidFill xmlns:a="http://schemas.openxmlformats.org/drawingml/2006/main">
-            <a:srgbClr val="000000">
-              <a:alpha val="0"/>
-            </a:srgbClr>
-          </a:solidFill>
-          <a:ln xmlns:a="http://schemas.openxmlformats.org/drawingml/2006/main" w="0">
-            <a:solidFill>
-              <a:srgbClr val="000000">
-                <a:alpha val="0"/>
-              </a:srgbClr>
-            </a:solidFill>
-            <a:prstDash val="solid"/>
-          </a:ln>
-        </p:spPr>
-        <p:txBody>
-          <a:bodyPr xmlns:a="http://schemas.openxmlformats.org/drawingml/2006/main" lIns="0" tIns="0" rIns="0" bIns="0" anchor="t"/>
-          <a:lstStyle xmlns:a="http://schemas.openxmlformats.org/drawingml/2006/main"/>
-          <a:p xmlns:a="http://schemas.openxmlformats.org/drawingml/2006/main">
-            <a:pPr algn="r">
-              <a:defRPr sz="600" b="0">
-                <a:solidFill>
-                  <a:srgbClr val="59646A"/>
-                </a:solidFill>
-                <a:latin typeface="Aptos"/>
-                <a:ea typeface="Aptos"/>
-                <a:cs typeface="Aptos"/>
-              </a:defRPr>
-            </a:pPr>
-            <a:r>
-              <a:rPr sz="600" b="0">
-                <a:solidFill>
-                  <a:srgbClr val="59646A"/>
-                </a:solidFill>
-                <a:latin typeface="Aptos"/>
-                <a:ea typeface="Aptos"/>
-                <a:cs typeface="Aptos"/>
-              </a:rPr>
-              <a:t>Source: modules/module-01-industrial-demand-generation/lessons/06-distribution-the-missing-half.md @ 9e28222</a:t>
-            </a:r>
-          </a:p>
-        </p:txBody>
-      </p:sp>
-      <p:sp>
-        <p:nvSpPr>
-          <p:cNvPr id="33" name="">
-            <a:extLst xmlns:a="http://schemas.openxmlformats.org/drawingml/2006/main">
-              <a:ext uri="{FF2B5EF4-FFF2-40B4-BE49-F238E27FC236}">
-                <a16:creationId xmlns:a16="http://schemas.microsoft.com/office/drawing/2014/main" id="{C10EB824-4359-421B-A149-71103D20004C}"/>
-              </a:ext>
-            </a:extLst>
-          </p:cNvPr>
-          <p:cNvSpPr>
-            <a:spLocks xmlns:a="http://schemas.openxmlformats.org/drawingml/2006/main" noGrp="1"/>
-          </p:cNvSpPr>
-          <p:nvPr/>
-        </p:nvSpPr>
-        <p:spPr>
-          <a:xfrm xmlns:a="http://schemas.openxmlformats.org/drawingml/2006/main">
-            <a:off x="10668000" y="6553200"/>
-            <a:ext cx="762000" cy="171450"/>
-          </a:xfrm>
-          <a:prstGeom xmlns:a="http://schemas.openxmlformats.org/drawingml/2006/main" prst="rect">
-            <a:avLst/>
-          </a:prstGeom>
-          <a:solidFill xmlns:a="http://schemas.openxmlformats.org/drawingml/2006/main">
-            <a:srgbClr val="000000">
-              <a:alpha val="0"/>
-            </a:srgbClr>
-          </a:solidFill>
-          <a:ln xmlns:a="http://schemas.openxmlformats.org/drawingml/2006/main" w="0">
-            <a:solidFill>
-              <a:srgbClr val="000000">
-                <a:alpha val="0"/>
-              </a:srgbClr>
-            </a:solidFill>
-            <a:prstDash val="solid"/>
-          </a:ln>
-        </p:spPr>
-        <p:txBody>
-          <a:bodyPr xmlns:a="http://schemas.openxmlformats.org/drawingml/2006/main" lIns="0" tIns="0" rIns="0" bIns="0" anchor="t"/>
-          <a:lstStyle xmlns:a="http://schemas.openxmlformats.org/drawingml/2006/main"/>
-          <a:p xmlns:a="http://schemas.openxmlformats.org/drawingml/2006/main">
-            <a:pPr algn="r">
-              <a:defRPr sz="675" b="0">
-                <a:solidFill>
-                  <a:srgbClr val="59646A"/>
-                </a:solidFill>
-                <a:latin typeface="Aptos"/>
-                <a:ea typeface="Aptos"/>
-                <a:cs typeface="Aptos"/>
-              </a:defRPr>
-            </a:pPr>
-            <a:r>
-              <a:rPr sz="675" b="0">
-                <a:solidFill>
-                  <a:srgbClr val="59646A"/>
-                </a:solidFill>
-                <a:latin typeface="Aptos"/>
-                <a:ea typeface="Aptos"/>
-                <a:cs typeface="Aptos"/>
-              </a:rPr>
-              <a:t>10/15</a:t>
-            </a:r>
-          </a:p>
-        </p:txBody>
-      </p:sp>
-      <p:sp>
-        <p:nvSpPr>
-          <p:cNvPr id="34" name="">
-            <a:extLst xmlns:a="http://schemas.openxmlformats.org/drawingml/2006/main">
-              <a:ext uri="{FF2B5EF4-FFF2-40B4-BE49-F238E27FC236}">
-                <a16:creationId xmlns:a16="http://schemas.microsoft.com/office/drawing/2014/main" id="{48655DA0-B3A5-4A43-902C-6E12759E27CA}"/>
-              </a:ext>
-            </a:extLst>
-          </p:cNvPr>
-          <p:cNvSpPr>
-            <a:spLocks xmlns:a="http://schemas.openxmlformats.org/drawingml/2006/main" noGrp="1"/>
-          </p:cNvSpPr>
-          <p:nvPr/>
-        </p:nvSpPr>
-        <p:spPr>
-          <a:xfrm xmlns:a="http://schemas.openxmlformats.org/drawingml/2006/main">
-            <a:off x="0" y="0"/>
-            <a:ext cx="12192000" cy="1809750"/>
-          </a:xfrm>
-          <a:prstGeom xmlns:a="http://schemas.openxmlformats.org/drawingml/2006/main" prst="rect">
-            <a:avLst/>
-          </a:prstGeom>
-          <a:solidFill xmlns:a="http://schemas.openxmlformats.org/drawingml/2006/main">
-            <a:srgbClr val="F5F6F2"/>
-          </a:solidFill>
-          <a:ln xmlns:a="http://schemas.openxmlformats.org/drawingml/2006/main" w="0">
-            <a:solidFill>
-              <a:srgbClr val="000000">
-                <a:alpha val="0"/>
-              </a:srgbClr>
-            </a:solidFill>
-            <a:prstDash val="solid"/>
-          </a:ln>
-        </p:spPr>
-      </p:sp>
-      <p:sp>
-        <p:nvSpPr>
-          <p:cNvPr id="35" name="">
-            <a:extLst xmlns:a="http://schemas.openxmlformats.org/drawingml/2006/main">
-              <a:ext uri="{FF2B5EF4-FFF2-40B4-BE49-F238E27FC236}">
-                <a16:creationId xmlns:a16="http://schemas.microsoft.com/office/drawing/2014/main" id="{FAAB1E9A-EDBC-4BCE-8ECE-8C1CAC4678F3}"/>
-              </a:ext>
-            </a:extLst>
-          </p:cNvPr>
-          <p:cNvSpPr>
-            <a:spLocks xmlns:a="http://schemas.openxmlformats.org/drawingml/2006/main" noGrp="1"/>
-          </p:cNvSpPr>
-          <p:nvPr/>
-        </p:nvSpPr>
-        <p:spPr>
-          <a:xfrm xmlns:a="http://schemas.openxmlformats.org/drawingml/2006/main">
-            <a:off x="0" y="0"/>
-            <a:ext cx="171450" cy="1809750"/>
-          </a:xfrm>
-          <a:prstGeom xmlns:a="http://schemas.openxmlformats.org/drawingml/2006/main" prst="rect">
-            <a:avLst/>
-          </a:prstGeom>
-          <a:solidFill xmlns:a="http://schemas.openxmlformats.org/drawingml/2006/main">
-            <a:srgbClr val="12232B"/>
-          </a:solidFill>
-          <a:ln xmlns:a="http://schemas.openxmlformats.org/drawingml/2006/main" w="0">
-            <a:solidFill>
-              <a:srgbClr val="000000">
-                <a:alpha val="0"/>
-              </a:srgbClr>
-            </a:solidFill>
-            <a:prstDash val="solid"/>
-          </a:ln>
-        </p:spPr>
-      </p:sp>
-      <p:sp>
-        <p:nvSpPr>
-          <p:cNvPr id="36" name="">
-            <a:extLst xmlns:a="http://schemas.openxmlformats.org/drawingml/2006/main">
-              <a:ext uri="{FF2B5EF4-FFF2-40B4-BE49-F238E27FC236}">
-                <a16:creationId xmlns:a16="http://schemas.microsoft.com/office/drawing/2014/main" id="{065A4879-2DD3-40D3-A4FF-3F67B4E3DBBD}"/>
-              </a:ext>
-            </a:extLst>
-          </p:cNvPr>
-          <p:cNvSpPr>
-            <a:spLocks xmlns:a="http://schemas.openxmlformats.org/drawingml/2006/main" noGrp="1"/>
-          </p:cNvSpPr>
-          <p:nvPr/>
-        </p:nvSpPr>
-        <p:spPr>
-          <a:xfrm xmlns:a="http://schemas.openxmlformats.org/drawingml/2006/main">
-            <a:off x="171450" y="0"/>
-            <a:ext cx="57150" cy="1809750"/>
-          </a:xfrm>
-          <a:prstGeom xmlns:a="http://schemas.openxmlformats.org/drawingml/2006/main" prst="rect">
-            <a:avLst/>
-          </a:prstGeom>
-          <a:solidFill xmlns:a="http://schemas.openxmlformats.org/drawingml/2006/main">
-            <a:srgbClr val="A85D2A"/>
-          </a:solidFill>
-          <a:ln xmlns:a="http://schemas.openxmlformats.org/drawingml/2006/main" w="0">
-            <a:solidFill>
-              <a:srgbClr val="000000">
-                <a:alpha val="0"/>
-              </a:srgbClr>
-            </a:solidFill>
-            <a:prstDash val="solid"/>
-          </a:ln>
-        </p:spPr>
-      </p:sp>
-      <p:sp>
-        <p:nvSpPr>
-          <p:cNvPr id="37" name="kicker-06-marker">
-            <a:extLst xmlns:a="http://schemas.openxmlformats.org/drawingml/2006/main">
-              <a:ext uri="{FF2B5EF4-FFF2-40B4-BE49-F238E27FC236}">
-                <a16:creationId xmlns:a16="http://schemas.microsoft.com/office/drawing/2014/main" id="{FCE31729-FC12-4352-840E-F56210A32CFD}"/>
-              </a:ext>
-            </a:extLst>
-          </p:cNvPr>
-          <p:cNvSpPr>
-            <a:spLocks xmlns:a="http://schemas.openxmlformats.org/drawingml/2006/main" noGrp="1"/>
-          </p:cNvSpPr>
-          <p:nvPr/>
-        </p:nvSpPr>
-        <p:spPr>
-          <a:xfrm xmlns:a="http://schemas.openxmlformats.org/drawingml/2006/main">
-            <a:off x="514350" y="390525"/>
-            <a:ext cx="76200" cy="76200"/>
-          </a:xfrm>
-          <a:prstGeom xmlns:a="http://schemas.openxmlformats.org/drawingml/2006/main" prst="rect">
-            <a:avLst/>
-          </a:prstGeom>
-          <a:solidFill xmlns:a="http://schemas.openxmlformats.org/drawingml/2006/main">
-            <a:srgbClr val="A85D2A"/>
-          </a:solidFill>
-          <a:ln xmlns:a="http://schemas.openxmlformats.org/drawingml/2006/main" w="0">
-            <a:solidFill>
-              <a:srgbClr val="000000">
-                <a:alpha val="0"/>
-              </a:srgbClr>
-            </a:solidFill>
-            <a:prstDash val="solid"/>
-          </a:ln>
-        </p:spPr>
-      </p:sp>
-      <p:sp>
-        <p:nvSpPr>
-          <p:cNvPr id="38" name="kicker-06-label">
-            <a:extLst xmlns:a="http://schemas.openxmlformats.org/drawingml/2006/main">
-              <a:ext uri="{FF2B5EF4-FFF2-40B4-BE49-F238E27FC236}">
-                <a16:creationId xmlns:a16="http://schemas.microsoft.com/office/drawing/2014/main" id="{2FDFC0EA-8CC5-4E27-9527-D11BB070D865}"/>
-              </a:ext>
-            </a:extLst>
-          </p:cNvPr>
-          <p:cNvSpPr>
-            <a:spLocks xmlns:a="http://schemas.openxmlformats.org/drawingml/2006/main" noGrp="1"/>
-          </p:cNvSpPr>
-          <p:nvPr/>
-        </p:nvSpPr>
-        <p:spPr>
-          <a:xfrm xmlns:a="http://schemas.openxmlformats.org/drawingml/2006/main">
-            <a:off x="685800" y="323850"/>
-            <a:ext cx="7524750" cy="228600"/>
-          </a:xfrm>
-          <a:prstGeom xmlns:a="http://schemas.openxmlformats.org/drawingml/2006/main" prst="rect">
-            <a:avLst/>
-          </a:prstGeom>
-          <a:solidFill xmlns:a="http://schemas.openxmlformats.org/drawingml/2006/main">
-            <a:srgbClr val="000000">
-              <a:alpha val="0"/>
-            </a:srgbClr>
-          </a:solidFill>
-          <a:ln xmlns:a="http://schemas.openxmlformats.org/drawingml/2006/main" w="0">
-            <a:solidFill>
-              <a:srgbClr val="000000">
-                <a:alpha val="0"/>
-              </a:srgbClr>
-            </a:solidFill>
-            <a:prstDash val="solid"/>
-          </a:ln>
-        </p:spPr>
-        <p:txBody>
-          <a:bodyPr xmlns:a="http://schemas.openxmlformats.org/drawingml/2006/main" lIns="0" tIns="0" rIns="0" bIns="0" anchor="ctr"/>
-          <a:lstStyle xmlns:a="http://schemas.openxmlformats.org/drawingml/2006/main"/>
-          <a:p xmlns:a="http://schemas.openxmlformats.org/drawingml/2006/main">
-            <a:pPr algn="l">
-              <a:defRPr sz="750" b="1">
-                <a:solidFill>
-                  <a:srgbClr val="59646A"/>
-                </a:solidFill>
-                <a:latin typeface="Aptos"/>
-                <a:ea typeface="Aptos"/>
-                <a:cs typeface="Aptos"/>
-              </a:defRPr>
-            </a:pPr>
-            <a:r>
-              <a:rPr sz="750" b="1">
-                <a:solidFill>
-                  <a:srgbClr val="59646A"/>
-                </a:solidFill>
-                <a:latin typeface="Aptos"/>
-                <a:ea typeface="Aptos"/>
-                <a:cs typeface="Aptos"/>
-              </a:rPr>
-              <a:t>MODULE 1 / LESSON 06 / AI-ASSISTED EXERCISE</a:t>
-            </a:r>
-          </a:p>
-        </p:txBody>
-      </p:sp>
-      <p:sp>
-        <p:nvSpPr>
           <p:cNvPr id="39" name="">
             <a:extLst xmlns:a="http://schemas.openxmlformats.org/drawingml/2006/main">
               <a:ext uri="{FF2B5EF4-FFF2-40B4-BE49-F238E27FC236}">
-                <a16:creationId xmlns:a16="http://schemas.microsoft.com/office/drawing/2014/main" id="{DD960386-8159-48CA-93CF-161F46E8C076}"/>
+                <a16:creationId xmlns:a16="http://schemas.microsoft.com/office/drawing/2014/main" id="{1DD0F24E-40E7-4421-9C0C-26D2AEA7EE4E}"/>
               </a:ext>
             </a:extLst>
           </p:cNvPr>
@@ -5088,7 +5086,7 @@
                 <a:ea typeface="Aptos Display"/>
                 <a:cs typeface="Aptos Display"/>
               </a:rPr>
-              <a:t>Use AI to structure the attempt, then make humans responsible for judgment.</a:t>
+              <a:t>Structure the first draft before the room critiques it.</a:t>
             </a:r>
           </a:p>
         </p:txBody>
@@ -5098,7 +5096,7 @@
           <p:cNvPr id="40" name="">
             <a:extLst xmlns:a="http://schemas.openxmlformats.org/drawingml/2006/main">
               <a:ext uri="{FF2B5EF4-FFF2-40B4-BE49-F238E27FC236}">
-                <a16:creationId xmlns:a16="http://schemas.microsoft.com/office/drawing/2014/main" id="{B18B446A-8312-4CC1-BB8A-6600565346AD}"/>
+                <a16:creationId xmlns:a16="http://schemas.microsoft.com/office/drawing/2014/main" id="{3938E1AD-ADEC-498E-AF5B-3A4C8EE64665}"/>
               </a:ext>
             </a:extLst>
           </p:cNvPr>
@@ -5152,7 +5150,7 @@
                 <a:ea typeface="Aptos"/>
                 <a:cs typeface="Aptos"/>
               </a:rPr>
-              <a:t>The prompt is constrained by source, assumptions, output standard, and human validation.</a:t>
+              <a:t>The brief is constrained by source evidence, assumptions, output standard, and validation.</a:t>
             </a:r>
           </a:p>
         </p:txBody>
@@ -5162,7 +5160,7 @@
           <p:cNvPr id="41" name="">
             <a:extLst xmlns:a="http://schemas.openxmlformats.org/drawingml/2006/main">
               <a:ext uri="{FF2B5EF4-FFF2-40B4-BE49-F238E27FC236}">
-                <a16:creationId xmlns:a16="http://schemas.microsoft.com/office/drawing/2014/main" id="{A5777C18-89A5-4DC4-81CA-AB7A7F0DBC60}"/>
+                <a16:creationId xmlns:a16="http://schemas.microsoft.com/office/drawing/2014/main" id="{49C9EDA3-90D1-4C0D-BAE2-122D0EDE5EA6}"/>
               </a:ext>
             </a:extLst>
           </p:cNvPr>
@@ -5197,7 +5195,7 @@
           <p:cNvPr id="42" name="">
             <a:extLst xmlns:a="http://schemas.openxmlformats.org/drawingml/2006/main">
               <a:ext uri="{FF2B5EF4-FFF2-40B4-BE49-F238E27FC236}">
-                <a16:creationId xmlns:a16="http://schemas.microsoft.com/office/drawing/2014/main" id="{2C47F1A1-BB6E-4DD8-BED7-243D34EF276D}"/>
+                <a16:creationId xmlns:a16="http://schemas.microsoft.com/office/drawing/2014/main" id="{A26FCF65-381C-4DD1-9CA8-1577AA5B235B}"/>
               </a:ext>
             </a:extLst>
           </p:cNvPr>
@@ -5232,7 +5230,7 @@
           <p:cNvPr id="43" name="">
             <a:extLst xmlns:a="http://schemas.openxmlformats.org/drawingml/2006/main">
               <a:ext uri="{FF2B5EF4-FFF2-40B4-BE49-F238E27FC236}">
-                <a16:creationId xmlns:a16="http://schemas.microsoft.com/office/drawing/2014/main" id="{66C3FFA7-DA26-4148-B087-6BDC54376120}"/>
+                <a16:creationId xmlns:a16="http://schemas.microsoft.com/office/drawing/2014/main" id="{38E423AB-FD6F-4DD4-8673-63D1EF145E1A}"/>
               </a:ext>
             </a:extLst>
           </p:cNvPr>
@@ -5267,7 +5265,7 @@
           <p:cNvPr id="44" name="">
             <a:extLst xmlns:a="http://schemas.openxmlformats.org/drawingml/2006/main">
               <a:ext uri="{FF2B5EF4-FFF2-40B4-BE49-F238E27FC236}">
-                <a16:creationId xmlns:a16="http://schemas.microsoft.com/office/drawing/2014/main" id="{797D8F33-31BB-4C2C-BE53-BBDA2B7E54DD}"/>
+                <a16:creationId xmlns:a16="http://schemas.microsoft.com/office/drawing/2014/main" id="{3F036F4B-CD48-4377-97FB-65D4A5D7DF54}"/>
               </a:ext>
             </a:extLst>
           </p:cNvPr>
@@ -5302,7 +5300,7 @@
           <p:cNvPr id="45" name="">
             <a:extLst xmlns:a="http://schemas.openxmlformats.org/drawingml/2006/main">
               <a:ext uri="{FF2B5EF4-FFF2-40B4-BE49-F238E27FC236}">
-                <a16:creationId xmlns:a16="http://schemas.microsoft.com/office/drawing/2014/main" id="{050ED83B-785D-4F66-B748-5BE994F339CA}"/>
+                <a16:creationId xmlns:a16="http://schemas.microsoft.com/office/drawing/2014/main" id="{30717439-7279-459E-933B-C7A9A13CAB9F}"/>
               </a:ext>
             </a:extLst>
           </p:cNvPr>
@@ -5366,7 +5364,7 @@
           <p:cNvPr id="46" name="">
             <a:extLst xmlns:a="http://schemas.openxmlformats.org/drawingml/2006/main">
               <a:ext uri="{FF2B5EF4-FFF2-40B4-BE49-F238E27FC236}">
-                <a16:creationId xmlns:a16="http://schemas.microsoft.com/office/drawing/2014/main" id="{BEB92E0E-CCFC-469D-B935-737FD59F2FB3}"/>
+                <a16:creationId xmlns:a16="http://schemas.microsoft.com/office/drawing/2014/main" id="{C509114A-7ED6-4E63-B811-7981C48A5707}"/>
               </a:ext>
             </a:extLst>
           </p:cNvPr>
@@ -5430,7 +5428,7 @@
           <p:cNvPr id="47" name="">
             <a:extLst xmlns:a="http://schemas.openxmlformats.org/drawingml/2006/main">
               <a:ext uri="{FF2B5EF4-FFF2-40B4-BE49-F238E27FC236}">
-                <a16:creationId xmlns:a16="http://schemas.microsoft.com/office/drawing/2014/main" id="{73043B5C-D604-4737-9CE5-B716E087CD6D}"/>
+                <a16:creationId xmlns:a16="http://schemas.microsoft.com/office/drawing/2014/main" id="{E69B51A7-0A05-4C7F-9E84-2A6F4F6E9AAF}"/>
               </a:ext>
             </a:extLst>
           </p:cNvPr>
@@ -5492,7 +5490,7 @@
     </p:spTree>
     <p:extLst>
       <p:ext uri="{BB962C8B-B14F-4D97-AF65-F5344CB8AC3E}">
-        <p14:creationId xmlns:p14="http://schemas.microsoft.com/office/powerpoint/2010/main" val="697321676"/>
+        <p14:creationId xmlns:p14="http://schemas.microsoft.com/office/powerpoint/2010/main" val="640579932"/>
       </p:ext>
     </p:extLst>
   </p:cSld>
@@ -5516,7 +5514,7 @@
           <p:cNvPr id="1" name="">
             <a:extLst xmlns:a="http://schemas.openxmlformats.org/drawingml/2006/main">
               <a:ext uri="{FF2B5EF4-FFF2-40B4-BE49-F238E27FC236}">
-                <a16:creationId xmlns:a16="http://schemas.microsoft.com/office/drawing/2014/main" id="{7183D6F8-7755-41E0-9EE8-AFA0044C7947}"/>
+                <a16:creationId xmlns:a16="http://schemas.microsoft.com/office/drawing/2014/main" id="{F2038DB8-837A-4105-9F07-7AF0DD97D754}"/>
               </a:ext>
             </a:extLst>
           </p:cNvPr>
@@ -5551,7 +5549,7 @@
           <p:cNvPr id="2" name="">
             <a:extLst xmlns:a="http://schemas.openxmlformats.org/drawingml/2006/main">
               <a:ext uri="{FF2B5EF4-FFF2-40B4-BE49-F238E27FC236}">
-                <a16:creationId xmlns:a16="http://schemas.microsoft.com/office/drawing/2014/main" id="{F05AFE10-10CC-4916-BE3A-8D344C524264}"/>
+                <a16:creationId xmlns:a16="http://schemas.microsoft.com/office/drawing/2014/main" id="{05AF7684-9B26-4C99-B31A-F30BFB4E36C8}"/>
               </a:ext>
             </a:extLst>
           </p:cNvPr>
@@ -5586,7 +5584,7 @@
           <p:cNvPr id="3" name="">
             <a:extLst xmlns:a="http://schemas.openxmlformats.org/drawingml/2006/main">
               <a:ext uri="{FF2B5EF4-FFF2-40B4-BE49-F238E27FC236}">
-                <a16:creationId xmlns:a16="http://schemas.microsoft.com/office/drawing/2014/main" id="{822C9E60-BF6D-409A-AC4A-EEA1FFE413E3}"/>
+                <a16:creationId xmlns:a16="http://schemas.microsoft.com/office/drawing/2014/main" id="{16312B86-FC83-4D0E-8032-46931CB10F7C}"/>
               </a:ext>
             </a:extLst>
           </p:cNvPr>
@@ -5621,7 +5619,7 @@
           <p:cNvPr id="4" name="kicker-06-marker">
             <a:extLst xmlns:a="http://schemas.openxmlformats.org/drawingml/2006/main">
               <a:ext uri="{FF2B5EF4-FFF2-40B4-BE49-F238E27FC236}">
-                <a16:creationId xmlns:a16="http://schemas.microsoft.com/office/drawing/2014/main" id="{933F731C-21EA-416C-8C8A-1FFB5B3674AF}"/>
+                <a16:creationId xmlns:a16="http://schemas.microsoft.com/office/drawing/2014/main" id="{A03AC234-2038-468C-96FD-EBD82FEA3C56}"/>
               </a:ext>
             </a:extLst>
           </p:cNvPr>
@@ -5656,7 +5654,7 @@
           <p:cNvPr id="5" name="kicker-06-label">
             <a:extLst xmlns:a="http://schemas.openxmlformats.org/drawingml/2006/main">
               <a:ext uri="{FF2B5EF4-FFF2-40B4-BE49-F238E27FC236}">
-                <a16:creationId xmlns:a16="http://schemas.microsoft.com/office/drawing/2014/main" id="{AFB74647-DC5C-47D7-9FD3-2F3E44F93ADD}"/>
+                <a16:creationId xmlns:a16="http://schemas.microsoft.com/office/drawing/2014/main" id="{BD14134A-B8BC-48CC-8F9C-26E472A0A7E4}"/>
               </a:ext>
             </a:extLst>
           </p:cNvPr>
@@ -5710,7 +5708,7 @@
                 <a:ea typeface="Aptos"/>
                 <a:cs typeface="Aptos"/>
               </a:rPr>
-              <a:t>MODULE 1 / LESSON 06 / HUMAN CORRECTION</a:t>
+              <a:t>MODULE 1 / LESSON 06 / QUALITY CONTROL</a:t>
             </a:r>
           </a:p>
         </p:txBody>
@@ -5720,7 +5718,7 @@
           <p:cNvPr id="6" name="">
             <a:extLst xmlns:a="http://schemas.openxmlformats.org/drawingml/2006/main">
               <a:ext uri="{FF2B5EF4-FFF2-40B4-BE49-F238E27FC236}">
-                <a16:creationId xmlns:a16="http://schemas.microsoft.com/office/drawing/2014/main" id="{EBE8A3E9-E982-43CF-BC1E-8B62F90DF9C2}"/>
+                <a16:creationId xmlns:a16="http://schemas.microsoft.com/office/drawing/2014/main" id="{BCA63D22-7BAC-4931-89CA-AE45B416EAE2}"/>
               </a:ext>
             </a:extLst>
           </p:cNvPr>
@@ -5774,7 +5772,7 @@
                 <a:ea typeface="Aptos Display"/>
                 <a:cs typeface="Aptos Display"/>
               </a:rPr>
-              <a:t>AI can draft structure. Humans must repair industrial reality.</a:t>
+              <a:t>Reject weak artifacts before they become operating practice.</a:t>
             </a:r>
           </a:p>
         </p:txBody>
@@ -5784,7 +5782,7 @@
           <p:cNvPr id="7" name="">
             <a:extLst xmlns:a="http://schemas.openxmlformats.org/drawingml/2006/main">
               <a:ext uri="{FF2B5EF4-FFF2-40B4-BE49-F238E27FC236}">
-                <a16:creationId xmlns:a16="http://schemas.microsoft.com/office/drawing/2014/main" id="{FC347130-B01A-4DE7-A78C-AABF664A1587}"/>
+                <a16:creationId xmlns:a16="http://schemas.microsoft.com/office/drawing/2014/main" id="{169BD794-9246-445D-A110-B997269C161D}"/>
               </a:ext>
             </a:extLst>
           </p:cNvPr>
@@ -5848,7 +5846,7 @@
           <p:cNvPr id="8" name="">
             <a:extLst xmlns:a="http://schemas.openxmlformats.org/drawingml/2006/main">
               <a:ext uri="{FF2B5EF4-FFF2-40B4-BE49-F238E27FC236}">
-                <a16:creationId xmlns:a16="http://schemas.microsoft.com/office/drawing/2014/main" id="{30C6E445-BF84-4CFF-96D5-72F3E8F29DBC}"/>
+                <a16:creationId xmlns:a16="http://schemas.microsoft.com/office/drawing/2014/main" id="{9DF69620-8DCC-4D66-96F2-8CBF153B882A}"/>
               </a:ext>
             </a:extLst>
           </p:cNvPr>
@@ -5883,7 +5881,7 @@
           <p:cNvPr id="9" name="">
             <a:extLst xmlns:a="http://schemas.openxmlformats.org/drawingml/2006/main">
               <a:ext uri="{FF2B5EF4-FFF2-40B4-BE49-F238E27FC236}">
-                <a16:creationId xmlns:a16="http://schemas.microsoft.com/office/drawing/2014/main" id="{7C649ED7-71FD-4358-9E0A-B70BB7E6EF20}"/>
+                <a16:creationId xmlns:a16="http://schemas.microsoft.com/office/drawing/2014/main" id="{E18E5009-637D-4465-8CA9-CDA18F01B621}"/>
               </a:ext>
             </a:extLst>
           </p:cNvPr>
@@ -5947,7 +5945,7 @@
           <p:cNvPr id="10" name="">
             <a:extLst xmlns:a="http://schemas.openxmlformats.org/drawingml/2006/main">
               <a:ext uri="{FF2B5EF4-FFF2-40B4-BE49-F238E27FC236}">
-                <a16:creationId xmlns:a16="http://schemas.microsoft.com/office/drawing/2014/main" id="{99E1699D-E36D-414F-8B1F-CECABAEC3959}"/>
+                <a16:creationId xmlns:a16="http://schemas.microsoft.com/office/drawing/2014/main" id="{ED2A1121-6CF5-4CCC-9F8A-96E532A7DB27}"/>
               </a:ext>
             </a:extLst>
           </p:cNvPr>
@@ -6011,7 +6009,7 @@
           <p:cNvPr id="11" name="">
             <a:extLst xmlns:a="http://schemas.openxmlformats.org/drawingml/2006/main">
               <a:ext uri="{FF2B5EF4-FFF2-40B4-BE49-F238E27FC236}">
-                <a16:creationId xmlns:a16="http://schemas.microsoft.com/office/drawing/2014/main" id="{863C87A8-CB7F-4856-A429-4C9BFF249571}"/>
+                <a16:creationId xmlns:a16="http://schemas.microsoft.com/office/drawing/2014/main" id="{C7713EFC-5224-4579-9F27-17B447560969}"/>
               </a:ext>
             </a:extLst>
           </p:cNvPr>
@@ -6075,7 +6073,7 @@
           <p:cNvPr id="12" name="">
             <a:extLst xmlns:a="http://schemas.openxmlformats.org/drawingml/2006/main">
               <a:ext uri="{FF2B5EF4-FFF2-40B4-BE49-F238E27FC236}">
-                <a16:creationId xmlns:a16="http://schemas.microsoft.com/office/drawing/2014/main" id="{D1DB54DE-C16F-4AC0-8F06-382F40F5FFD8}"/>
+                <a16:creationId xmlns:a16="http://schemas.microsoft.com/office/drawing/2014/main" id="{BE450E95-AE78-4132-8FDD-27C766E4C3D2}"/>
               </a:ext>
             </a:extLst>
           </p:cNvPr>
@@ -6110,7 +6108,7 @@
           <p:cNvPr id="13" name="">
             <a:extLst xmlns:a="http://schemas.openxmlformats.org/drawingml/2006/main">
               <a:ext uri="{FF2B5EF4-FFF2-40B4-BE49-F238E27FC236}">
-                <a16:creationId xmlns:a16="http://schemas.microsoft.com/office/drawing/2014/main" id="{56B027D4-E7ED-4BE1-AF7B-1BDF927B0ECF}"/>
+                <a16:creationId xmlns:a16="http://schemas.microsoft.com/office/drawing/2014/main" id="{33D30DD4-830C-4F55-94B8-D016E0B4C2E0}"/>
               </a:ext>
             </a:extLst>
           </p:cNvPr>
@@ -6143,7 +6141,7 @@
           <p:cNvPr id="14" name="">
             <a:extLst xmlns:a="http://schemas.openxmlformats.org/drawingml/2006/main">
               <a:ext uri="{FF2B5EF4-FFF2-40B4-BE49-F238E27FC236}">
-                <a16:creationId xmlns:a16="http://schemas.microsoft.com/office/drawing/2014/main" id="{FCE368F3-46C8-493A-BD90-1669B51C17D5}"/>
+                <a16:creationId xmlns:a16="http://schemas.microsoft.com/office/drawing/2014/main" id="{230AF33B-3432-4F69-BE3F-8B5FA58CED1F}"/>
               </a:ext>
             </a:extLst>
           </p:cNvPr>
@@ -6178,7 +6176,7 @@
           <p:cNvPr id="15" name="">
             <a:extLst xmlns:a="http://schemas.openxmlformats.org/drawingml/2006/main">
               <a:ext uri="{FF2B5EF4-FFF2-40B4-BE49-F238E27FC236}">
-                <a16:creationId xmlns:a16="http://schemas.microsoft.com/office/drawing/2014/main" id="{319C7E03-4D87-4116-919B-E43659A5BE60}"/>
+                <a16:creationId xmlns:a16="http://schemas.microsoft.com/office/drawing/2014/main" id="{2B16AB31-ABE1-4A22-9A7C-966A2C385E44}"/>
               </a:ext>
             </a:extLst>
           </p:cNvPr>
@@ -6232,7 +6230,7 @@
                 <a:ea typeface="Aptos"/>
                 <a:cs typeface="Aptos"/>
               </a:rPr>
-              <a:t>REJECT OR REPAIR WHEN AI OUTPUT...</a:t>
+              <a:t>REJECT OR REPAIR WHEN THE ARTIFACT...</a:t>
             </a:r>
           </a:p>
         </p:txBody>
@@ -6242,7 +6240,7 @@
           <p:cNvPr id="16" name="">
             <a:extLst xmlns:a="http://schemas.openxmlformats.org/drawingml/2006/main">
               <a:ext uri="{FF2B5EF4-FFF2-40B4-BE49-F238E27FC236}">
-                <a16:creationId xmlns:a16="http://schemas.microsoft.com/office/drawing/2014/main" id="{316D229C-7ECA-4F59-85B6-383BC3EB0FB0}"/>
+                <a16:creationId xmlns:a16="http://schemas.microsoft.com/office/drawing/2014/main" id="{CD9EAFA0-CFA2-402E-98C6-0F9B0F79A242}"/>
               </a:ext>
             </a:extLst>
           </p:cNvPr>
@@ -6277,7 +6275,7 @@
           <p:cNvPr id="17" name="">
             <a:extLst xmlns:a="http://schemas.openxmlformats.org/drawingml/2006/main">
               <a:ext uri="{FF2B5EF4-FFF2-40B4-BE49-F238E27FC236}">
-                <a16:creationId xmlns:a16="http://schemas.microsoft.com/office/drawing/2014/main" id="{F8D25352-44C3-42BC-A38D-912190CB05D2}"/>
+                <a16:creationId xmlns:a16="http://schemas.microsoft.com/office/drawing/2014/main" id="{E08303F4-F6DA-4F1D-944C-E91DEEA35255}"/>
               </a:ext>
             </a:extLst>
           </p:cNvPr>
@@ -6341,7 +6339,7 @@
           <p:cNvPr id="18" name="">
             <a:extLst xmlns:a="http://schemas.openxmlformats.org/drawingml/2006/main">
               <a:ext uri="{FF2B5EF4-FFF2-40B4-BE49-F238E27FC236}">
-                <a16:creationId xmlns:a16="http://schemas.microsoft.com/office/drawing/2014/main" id="{ABF8C56D-3F64-4A0D-BB91-F0E60FC60347}"/>
+                <a16:creationId xmlns:a16="http://schemas.microsoft.com/office/drawing/2014/main" id="{2AEBE38A-3EF0-4F1F-8649-377FD373928F}"/>
               </a:ext>
             </a:extLst>
           </p:cNvPr>
@@ -6376,7 +6374,7 @@
           <p:cNvPr id="19" name="">
             <a:extLst xmlns:a="http://schemas.openxmlformats.org/drawingml/2006/main">
               <a:ext uri="{FF2B5EF4-FFF2-40B4-BE49-F238E27FC236}">
-                <a16:creationId xmlns:a16="http://schemas.microsoft.com/office/drawing/2014/main" id="{24B0894B-15B9-4128-B402-BCBCB03899FF}"/>
+                <a16:creationId xmlns:a16="http://schemas.microsoft.com/office/drawing/2014/main" id="{AB06CA5D-B105-4F6B-A209-D9724BAAAB21}"/>
               </a:ext>
             </a:extLst>
           </p:cNvPr>
@@ -6440,7 +6438,7 @@
           <p:cNvPr id="20" name="">
             <a:extLst xmlns:a="http://schemas.openxmlformats.org/drawingml/2006/main">
               <a:ext uri="{FF2B5EF4-FFF2-40B4-BE49-F238E27FC236}">
-                <a16:creationId xmlns:a16="http://schemas.microsoft.com/office/drawing/2014/main" id="{32C14780-19DC-4382-89FE-7FF7473A47BB}"/>
+                <a16:creationId xmlns:a16="http://schemas.microsoft.com/office/drawing/2014/main" id="{42D2E10D-D9B5-4E0C-B472-574BA6A700BA}"/>
               </a:ext>
             </a:extLst>
           </p:cNvPr>
@@ -6475,7 +6473,7 @@
           <p:cNvPr id="21" name="">
             <a:extLst xmlns:a="http://schemas.openxmlformats.org/drawingml/2006/main">
               <a:ext uri="{FF2B5EF4-FFF2-40B4-BE49-F238E27FC236}">
-                <a16:creationId xmlns:a16="http://schemas.microsoft.com/office/drawing/2014/main" id="{7816840C-6A6F-4C45-8156-C7F8FA061AD6}"/>
+                <a16:creationId xmlns:a16="http://schemas.microsoft.com/office/drawing/2014/main" id="{1A024985-06FA-437F-B97C-5FEE941C23E9}"/>
               </a:ext>
             </a:extLst>
           </p:cNvPr>
@@ -6539,7 +6537,7 @@
           <p:cNvPr id="22" name="">
             <a:extLst xmlns:a="http://schemas.openxmlformats.org/drawingml/2006/main">
               <a:ext uri="{FF2B5EF4-FFF2-40B4-BE49-F238E27FC236}">
-                <a16:creationId xmlns:a16="http://schemas.microsoft.com/office/drawing/2014/main" id="{D75021FA-8B2A-4E9D-868A-0250A9B1E0E9}"/>
+                <a16:creationId xmlns:a16="http://schemas.microsoft.com/office/drawing/2014/main" id="{7FE532E9-D87A-47BB-97C6-3C0AB7350DBC}"/>
               </a:ext>
             </a:extLst>
           </p:cNvPr>
@@ -6574,7 +6572,7 @@
           <p:cNvPr id="23" name="">
             <a:extLst xmlns:a="http://schemas.openxmlformats.org/drawingml/2006/main">
               <a:ext uri="{FF2B5EF4-FFF2-40B4-BE49-F238E27FC236}">
-                <a16:creationId xmlns:a16="http://schemas.microsoft.com/office/drawing/2014/main" id="{EB027D2B-3424-4516-89AF-498AE683D4A1}"/>
+                <a16:creationId xmlns:a16="http://schemas.microsoft.com/office/drawing/2014/main" id="{DBA599DF-BB8D-4B58-B036-B378630CAD36}"/>
               </a:ext>
             </a:extLst>
           </p:cNvPr>
@@ -6638,7 +6636,7 @@
           <p:cNvPr id="24" name="">
             <a:extLst xmlns:a="http://schemas.openxmlformats.org/drawingml/2006/main">
               <a:ext uri="{FF2B5EF4-FFF2-40B4-BE49-F238E27FC236}">
-                <a16:creationId xmlns:a16="http://schemas.microsoft.com/office/drawing/2014/main" id="{B5BC3292-FE56-4A4C-A389-BBF814A007F6}"/>
+                <a16:creationId xmlns:a16="http://schemas.microsoft.com/office/drawing/2014/main" id="{260D24F3-5E22-41DB-8510-F618F8B06D0D}"/>
               </a:ext>
             </a:extLst>
           </p:cNvPr>
@@ -6673,7 +6671,7 @@
           <p:cNvPr id="25" name="">
             <a:extLst xmlns:a="http://schemas.openxmlformats.org/drawingml/2006/main">
               <a:ext uri="{FF2B5EF4-FFF2-40B4-BE49-F238E27FC236}">
-                <a16:creationId xmlns:a16="http://schemas.microsoft.com/office/drawing/2014/main" id="{3C42C020-9F03-4A74-B8D3-C459E9B68DB7}"/>
+                <a16:creationId xmlns:a16="http://schemas.microsoft.com/office/drawing/2014/main" id="{FE5A1166-594A-40B0-829F-66FA0F5C60FF}"/>
               </a:ext>
             </a:extLst>
           </p:cNvPr>
@@ -6737,7 +6735,7 @@
           <p:cNvPr id="26" name="">
             <a:extLst xmlns:a="http://schemas.openxmlformats.org/drawingml/2006/main">
               <a:ext uri="{FF2B5EF4-FFF2-40B4-BE49-F238E27FC236}">
-                <a16:creationId xmlns:a16="http://schemas.microsoft.com/office/drawing/2014/main" id="{419A4F70-17E1-49A5-A66D-66634DE2C8DF}"/>
+                <a16:creationId xmlns:a16="http://schemas.microsoft.com/office/drawing/2014/main" id="{22562860-8A52-47A4-A5D3-BDEF887AC42B}"/>
               </a:ext>
             </a:extLst>
           </p:cNvPr>
@@ -6772,7 +6770,7 @@
           <p:cNvPr id="27" name="">
             <a:extLst xmlns:a="http://schemas.openxmlformats.org/drawingml/2006/main">
               <a:ext uri="{FF2B5EF4-FFF2-40B4-BE49-F238E27FC236}">
-                <a16:creationId xmlns:a16="http://schemas.microsoft.com/office/drawing/2014/main" id="{3D613102-42A3-4BDC-AA30-B272B05A2616}"/>
+                <a16:creationId xmlns:a16="http://schemas.microsoft.com/office/drawing/2014/main" id="{BBC3FDFE-5569-45FB-9AE7-82DC399053A0}"/>
               </a:ext>
             </a:extLst>
           </p:cNvPr>
@@ -6836,7 +6834,7 @@
           <p:cNvPr id="28" name="">
             <a:extLst xmlns:a="http://schemas.openxmlformats.org/drawingml/2006/main">
               <a:ext uri="{FF2B5EF4-FFF2-40B4-BE49-F238E27FC236}">
-                <a16:creationId xmlns:a16="http://schemas.microsoft.com/office/drawing/2014/main" id="{E919A443-F8F2-4E2E-B75A-D546A0E5B1DC}"/>
+                <a16:creationId xmlns:a16="http://schemas.microsoft.com/office/drawing/2014/main" id="{98B297C9-8C5A-463E-8B5D-AB9869137411}"/>
               </a:ext>
             </a:extLst>
           </p:cNvPr>
@@ -6869,7 +6867,7 @@
           <p:cNvPr id="29" name="">
             <a:extLst xmlns:a="http://schemas.openxmlformats.org/drawingml/2006/main">
               <a:ext uri="{FF2B5EF4-FFF2-40B4-BE49-F238E27FC236}">
-                <a16:creationId xmlns:a16="http://schemas.microsoft.com/office/drawing/2014/main" id="{13A3B517-D533-4F01-8074-788189527464}"/>
+                <a16:creationId xmlns:a16="http://schemas.microsoft.com/office/drawing/2014/main" id="{F186CF9F-11B7-4E6A-91CF-6FCE1CF4ACFA}"/>
               </a:ext>
             </a:extLst>
           </p:cNvPr>
@@ -6904,7 +6902,7 @@
           <p:cNvPr id="30" name="">
             <a:extLst xmlns:a="http://schemas.openxmlformats.org/drawingml/2006/main">
               <a:ext uri="{FF2B5EF4-FFF2-40B4-BE49-F238E27FC236}">
-                <a16:creationId xmlns:a16="http://schemas.microsoft.com/office/drawing/2014/main" id="{50C19B52-61F5-44E0-93B8-5A1C28549912}"/>
+                <a16:creationId xmlns:a16="http://schemas.microsoft.com/office/drawing/2014/main" id="{0831F3A8-A10C-45B2-B9D4-69CE5D9FE3E1}"/>
               </a:ext>
             </a:extLst>
           </p:cNvPr>
@@ -6968,7 +6966,7 @@
           <p:cNvPr id="31" name="">
             <a:extLst xmlns:a="http://schemas.openxmlformats.org/drawingml/2006/main">
               <a:ext uri="{FF2B5EF4-FFF2-40B4-BE49-F238E27FC236}">
-                <a16:creationId xmlns:a16="http://schemas.microsoft.com/office/drawing/2014/main" id="{CABA5B76-F20C-4685-9CF9-F8D5368E79F2}"/>
+                <a16:creationId xmlns:a16="http://schemas.microsoft.com/office/drawing/2014/main" id="{682F0914-619C-4B01-9073-ADCD8B39C279}"/>
               </a:ext>
             </a:extLst>
           </p:cNvPr>
@@ -7032,7 +7030,7 @@
           <p:cNvPr id="32" name="">
             <a:extLst xmlns:a="http://schemas.openxmlformats.org/drawingml/2006/main">
               <a:ext uri="{FF2B5EF4-FFF2-40B4-BE49-F238E27FC236}">
-                <a16:creationId xmlns:a16="http://schemas.microsoft.com/office/drawing/2014/main" id="{B15A80E5-EF0A-4415-B64B-1322C4CFF64F}"/>
+                <a16:creationId xmlns:a16="http://schemas.microsoft.com/office/drawing/2014/main" id="{514C9EC8-CD38-48FB-8E1C-DF29BF5C3093}"/>
               </a:ext>
             </a:extLst>
           </p:cNvPr>
@@ -7065,7 +7063,7 @@
           <p:cNvPr id="33" name="">
             <a:extLst xmlns:a="http://schemas.openxmlformats.org/drawingml/2006/main">
               <a:ext uri="{FF2B5EF4-FFF2-40B4-BE49-F238E27FC236}">
-                <a16:creationId xmlns:a16="http://schemas.microsoft.com/office/drawing/2014/main" id="{5BAF38A3-317C-4D3F-AAF3-4D70998FB1A9}"/>
+                <a16:creationId xmlns:a16="http://schemas.microsoft.com/office/drawing/2014/main" id="{0D0A01AD-FF34-4F44-BF6C-895FE46FCDD4}"/>
               </a:ext>
             </a:extLst>
           </p:cNvPr>
@@ -7129,7 +7127,7 @@
           <p:cNvPr id="34" name="">
             <a:extLst xmlns:a="http://schemas.openxmlformats.org/drawingml/2006/main">
               <a:ext uri="{FF2B5EF4-FFF2-40B4-BE49-F238E27FC236}">
-                <a16:creationId xmlns:a16="http://schemas.microsoft.com/office/drawing/2014/main" id="{8016E730-3186-48E2-9B5C-99A1ACDB6665}"/>
+                <a16:creationId xmlns:a16="http://schemas.microsoft.com/office/drawing/2014/main" id="{3889033C-747A-4099-82A9-9165BE621FBE}"/>
               </a:ext>
             </a:extLst>
           </p:cNvPr>
@@ -7183,7 +7181,7 @@
                 <a:ea typeface="Aptos"/>
                 <a:cs typeface="Aptos"/>
               </a:rPr>
-              <a:t>Ask what the AI is guessing.</a:t>
+              <a:t>Ask what the artifact assumes.</a:t>
             </a:r>
           </a:p>
         </p:txBody>
@@ -7193,7 +7191,7 @@
           <p:cNvPr id="35" name="">
             <a:extLst xmlns:a="http://schemas.openxmlformats.org/drawingml/2006/main">
               <a:ext uri="{FF2B5EF4-FFF2-40B4-BE49-F238E27FC236}">
-                <a16:creationId xmlns:a16="http://schemas.microsoft.com/office/drawing/2014/main" id="{F2145BE9-E2FE-4D90-B11C-DC0D0FD1FA2C}"/>
+                <a16:creationId xmlns:a16="http://schemas.microsoft.com/office/drawing/2014/main" id="{07CDA7CC-9745-48D0-9F7B-B20DBB20F92D}"/>
               </a:ext>
             </a:extLst>
           </p:cNvPr>
@@ -7228,7 +7226,7 @@
           <p:cNvPr id="36" name="">
             <a:extLst xmlns:a="http://schemas.openxmlformats.org/drawingml/2006/main">
               <a:ext uri="{FF2B5EF4-FFF2-40B4-BE49-F238E27FC236}">
-                <a16:creationId xmlns:a16="http://schemas.microsoft.com/office/drawing/2014/main" id="{E9373799-D3A6-4021-85D8-5D5016500D19}"/>
+                <a16:creationId xmlns:a16="http://schemas.microsoft.com/office/drawing/2014/main" id="{9D52F6BD-8507-48A1-806B-03835072962B}"/>
               </a:ext>
             </a:extLst>
           </p:cNvPr>
@@ -7292,7 +7290,7 @@
           <p:cNvPr id="37" name="">
             <a:extLst xmlns:a="http://schemas.openxmlformats.org/drawingml/2006/main">
               <a:ext uri="{FF2B5EF4-FFF2-40B4-BE49-F238E27FC236}">
-                <a16:creationId xmlns:a16="http://schemas.microsoft.com/office/drawing/2014/main" id="{2686FD99-6262-43DB-96CD-0389A7C3686F}"/>
+                <a16:creationId xmlns:a16="http://schemas.microsoft.com/office/drawing/2014/main" id="{0235A7E3-B882-49F2-B2A7-DE3CC5F84537}"/>
               </a:ext>
             </a:extLst>
           </p:cNvPr>
@@ -7356,7 +7354,7 @@
           <p:cNvPr id="38" name="">
             <a:extLst xmlns:a="http://schemas.openxmlformats.org/drawingml/2006/main">
               <a:ext uri="{FF2B5EF4-FFF2-40B4-BE49-F238E27FC236}">
-                <a16:creationId xmlns:a16="http://schemas.microsoft.com/office/drawing/2014/main" id="{ABADAA15-8370-4317-9B05-5D1480A77961}"/>
+                <a16:creationId xmlns:a16="http://schemas.microsoft.com/office/drawing/2014/main" id="{981CF5CB-7269-45C6-860F-28126EB2A827}"/>
               </a:ext>
             </a:extLst>
           </p:cNvPr>
@@ -7420,7 +7418,7 @@
           <p:cNvPr id="39" name="">
             <a:extLst xmlns:a="http://schemas.openxmlformats.org/drawingml/2006/main">
               <a:ext uri="{FF2B5EF4-FFF2-40B4-BE49-F238E27FC236}">
-                <a16:creationId xmlns:a16="http://schemas.microsoft.com/office/drawing/2014/main" id="{356E05BB-5F44-4B59-84D5-5CC8D2DACE96}"/>
+                <a16:creationId xmlns:a16="http://schemas.microsoft.com/office/drawing/2014/main" id="{D594DBC5-4C36-4674-9849-5A371809940D}"/>
               </a:ext>
             </a:extLst>
           </p:cNvPr>
@@ -7455,7 +7453,7 @@
           <p:cNvPr id="40" name="">
             <a:extLst xmlns:a="http://schemas.openxmlformats.org/drawingml/2006/main">
               <a:ext uri="{FF2B5EF4-FFF2-40B4-BE49-F238E27FC236}">
-                <a16:creationId xmlns:a16="http://schemas.microsoft.com/office/drawing/2014/main" id="{B464D1F0-2006-4705-8FDF-727215C4FA66}"/>
+                <a16:creationId xmlns:a16="http://schemas.microsoft.com/office/drawing/2014/main" id="{3D57E249-DE3B-4EE1-9EA0-5BA64EA0E329}"/>
               </a:ext>
             </a:extLst>
           </p:cNvPr>
@@ -7490,7 +7488,7 @@
           <p:cNvPr id="41" name="">
             <a:extLst xmlns:a="http://schemas.openxmlformats.org/drawingml/2006/main">
               <a:ext uri="{FF2B5EF4-FFF2-40B4-BE49-F238E27FC236}">
-                <a16:creationId xmlns:a16="http://schemas.microsoft.com/office/drawing/2014/main" id="{AEB5BA24-58ED-400C-B3A2-FE6881648D84}"/>
+                <a16:creationId xmlns:a16="http://schemas.microsoft.com/office/drawing/2014/main" id="{FC5D9A7D-5F46-4BE9-9DD9-2B16C9B4C53B}"/>
               </a:ext>
             </a:extLst>
           </p:cNvPr>
@@ -7525,7 +7523,7 @@
           <p:cNvPr id="42" name="kicker-06-marker">
             <a:extLst xmlns:a="http://schemas.openxmlformats.org/drawingml/2006/main">
               <a:ext uri="{FF2B5EF4-FFF2-40B4-BE49-F238E27FC236}">
-                <a16:creationId xmlns:a16="http://schemas.microsoft.com/office/drawing/2014/main" id="{D1BCFB0F-026B-4E1D-93E8-361E9FB9BBA0}"/>
+                <a16:creationId xmlns:a16="http://schemas.microsoft.com/office/drawing/2014/main" id="{C6D74918-740D-42F5-BE7F-4BA0CB03B527}"/>
               </a:ext>
             </a:extLst>
           </p:cNvPr>
@@ -7560,7 +7558,7 @@
           <p:cNvPr id="43" name="kicker-06-label">
             <a:extLst xmlns:a="http://schemas.openxmlformats.org/drawingml/2006/main">
               <a:ext uri="{FF2B5EF4-FFF2-40B4-BE49-F238E27FC236}">
-                <a16:creationId xmlns:a16="http://schemas.microsoft.com/office/drawing/2014/main" id="{69C56C92-CA74-4D99-AB6F-57E9C52A1F9F}"/>
+                <a16:creationId xmlns:a16="http://schemas.microsoft.com/office/drawing/2014/main" id="{7D9331FA-707F-4D1C-BDF4-C55B02D79527}"/>
               </a:ext>
             </a:extLst>
           </p:cNvPr>
@@ -7614,7 +7612,7 @@
                 <a:ea typeface="Aptos"/>
                 <a:cs typeface="Aptos"/>
               </a:rPr>
-              <a:t>MODULE 1 / LESSON 06 / HUMAN CORRECTION</a:t>
+              <a:t>MODULE 1 / LESSON 06 / QUALITY CONTROL</a:t>
             </a:r>
           </a:p>
         </p:txBody>
@@ -7624,7 +7622,7 @@
           <p:cNvPr id="44" name="">
             <a:extLst xmlns:a="http://schemas.openxmlformats.org/drawingml/2006/main">
               <a:ext uri="{FF2B5EF4-FFF2-40B4-BE49-F238E27FC236}">
-                <a16:creationId xmlns:a16="http://schemas.microsoft.com/office/drawing/2014/main" id="{A6C612C4-5FEB-4682-91A3-AEF09B299820}"/>
+                <a16:creationId xmlns:a16="http://schemas.microsoft.com/office/drawing/2014/main" id="{E7160903-4504-400B-B049-A310BD7945EC}"/>
               </a:ext>
             </a:extLst>
           </p:cNvPr>
@@ -7678,7 +7676,7 @@
                 <a:ea typeface="Aptos Display"/>
                 <a:cs typeface="Aptos Display"/>
               </a:rPr>
-              <a:t>AI can draft structure. Humans must repair industrial reality.</a:t>
+              <a:t>Reject weak artifacts before they become operating practice.</a:t>
             </a:r>
           </a:p>
         </p:txBody>
@@ -7688,7 +7686,7 @@
           <p:cNvPr id="45" name="">
             <a:extLst xmlns:a="http://schemas.openxmlformats.org/drawingml/2006/main">
               <a:ext uri="{FF2B5EF4-FFF2-40B4-BE49-F238E27FC236}">
-                <a16:creationId xmlns:a16="http://schemas.microsoft.com/office/drawing/2014/main" id="{7C85B19D-AFC2-4C0B-8172-F60DF90366D5}"/>
+                <a16:creationId xmlns:a16="http://schemas.microsoft.com/office/drawing/2014/main" id="{AFA1A15C-3F79-4382-9B72-FAED6C79B104}"/>
               </a:ext>
             </a:extLst>
           </p:cNvPr>
@@ -7752,7 +7750,7 @@
           <p:cNvPr id="46" name="">
             <a:extLst xmlns:a="http://schemas.openxmlformats.org/drawingml/2006/main">
               <a:ext uri="{FF2B5EF4-FFF2-40B4-BE49-F238E27FC236}">
-                <a16:creationId xmlns:a16="http://schemas.microsoft.com/office/drawing/2014/main" id="{60C2529E-F297-4E12-8843-535135105C2C}"/>
+                <a16:creationId xmlns:a16="http://schemas.microsoft.com/office/drawing/2014/main" id="{E75010D8-6732-46D9-A530-C9E747D265A8}"/>
               </a:ext>
             </a:extLst>
           </p:cNvPr>
@@ -7787,7 +7785,7 @@
           <p:cNvPr id="47" name="">
             <a:extLst xmlns:a="http://schemas.openxmlformats.org/drawingml/2006/main">
               <a:ext uri="{FF2B5EF4-FFF2-40B4-BE49-F238E27FC236}">
-                <a16:creationId xmlns:a16="http://schemas.microsoft.com/office/drawing/2014/main" id="{0BD60D05-A6D1-4A14-B60D-D07104095649}"/>
+                <a16:creationId xmlns:a16="http://schemas.microsoft.com/office/drawing/2014/main" id="{E0800D0D-E6F4-448C-86E3-653A267A9442}"/>
               </a:ext>
             </a:extLst>
           </p:cNvPr>
@@ -7822,7 +7820,7 @@
           <p:cNvPr id="48" name="">
             <a:extLst xmlns:a="http://schemas.openxmlformats.org/drawingml/2006/main">
               <a:ext uri="{FF2B5EF4-FFF2-40B4-BE49-F238E27FC236}">
-                <a16:creationId xmlns:a16="http://schemas.microsoft.com/office/drawing/2014/main" id="{C0B43E5D-68DE-4B5B-8D18-2D2453810F65}"/>
+                <a16:creationId xmlns:a16="http://schemas.microsoft.com/office/drawing/2014/main" id="{11341EDB-B77D-428A-A159-09C746EDF7FD}"/>
               </a:ext>
             </a:extLst>
           </p:cNvPr>
@@ -7857,7 +7855,7 @@
           <p:cNvPr id="49" name="">
             <a:extLst xmlns:a="http://schemas.openxmlformats.org/drawingml/2006/main">
               <a:ext uri="{FF2B5EF4-FFF2-40B4-BE49-F238E27FC236}">
-                <a16:creationId xmlns:a16="http://schemas.microsoft.com/office/drawing/2014/main" id="{49D25776-EB6B-4F73-90CD-29DA5113612B}"/>
+                <a16:creationId xmlns:a16="http://schemas.microsoft.com/office/drawing/2014/main" id="{C6B23CA8-09EB-482D-9FB3-08AE7F2716FC}"/>
               </a:ext>
             </a:extLst>
           </p:cNvPr>
@@ -7892,7 +7890,7 @@
           <p:cNvPr id="50" name="">
             <a:extLst xmlns:a="http://schemas.openxmlformats.org/drawingml/2006/main">
               <a:ext uri="{FF2B5EF4-FFF2-40B4-BE49-F238E27FC236}">
-                <a16:creationId xmlns:a16="http://schemas.microsoft.com/office/drawing/2014/main" id="{FA8C29C7-29A6-4556-A165-DFDD4041424C}"/>
+                <a16:creationId xmlns:a16="http://schemas.microsoft.com/office/drawing/2014/main" id="{1DC71BDA-426A-4528-A404-70A353CB70E5}"/>
               </a:ext>
             </a:extLst>
           </p:cNvPr>
@@ -7956,7 +7954,7 @@
           <p:cNvPr id="51" name="">
             <a:extLst xmlns:a="http://schemas.openxmlformats.org/drawingml/2006/main">
               <a:ext uri="{FF2B5EF4-FFF2-40B4-BE49-F238E27FC236}">
-                <a16:creationId xmlns:a16="http://schemas.microsoft.com/office/drawing/2014/main" id="{81D7278D-FDD3-4BD8-82A4-47B6F932596F}"/>
+                <a16:creationId xmlns:a16="http://schemas.microsoft.com/office/drawing/2014/main" id="{B87D096E-4280-4EA5-9217-6D8F29761599}"/>
               </a:ext>
             </a:extLst>
           </p:cNvPr>
@@ -8020,7 +8018,7 @@
           <p:cNvPr id="52" name="">
             <a:extLst xmlns:a="http://schemas.openxmlformats.org/drawingml/2006/main">
               <a:ext uri="{FF2B5EF4-FFF2-40B4-BE49-F238E27FC236}">
-                <a16:creationId xmlns:a16="http://schemas.microsoft.com/office/drawing/2014/main" id="{08A2356C-4D9E-4163-9451-5B297A6A9903}"/>
+                <a16:creationId xmlns:a16="http://schemas.microsoft.com/office/drawing/2014/main" id="{8A121B06-8E25-4295-A3F7-59AB9F8A149E}"/>
               </a:ext>
             </a:extLst>
           </p:cNvPr>
@@ -8082,7 +8080,7 @@
     </p:spTree>
     <p:extLst>
       <p:ext uri="{BB962C8B-B14F-4D97-AF65-F5344CB8AC3E}">
-        <p14:creationId xmlns:p14="http://schemas.microsoft.com/office/powerpoint/2010/main" val="1501992312"/>
+        <p14:creationId xmlns:p14="http://schemas.microsoft.com/office/powerpoint/2010/main" val="1510447164"/>
       </p:ext>
     </p:extLst>
   </p:cSld>
@@ -8106,7 +8104,7 @@
           <p:cNvPr id="1" name="">
             <a:extLst xmlns:a="http://schemas.openxmlformats.org/drawingml/2006/main">
               <a:ext uri="{FF2B5EF4-FFF2-40B4-BE49-F238E27FC236}">
-                <a16:creationId xmlns:a16="http://schemas.microsoft.com/office/drawing/2014/main" id="{E6F929B0-0397-4BED-8FCF-FC3FC5B3A64D}"/>
+                <a16:creationId xmlns:a16="http://schemas.microsoft.com/office/drawing/2014/main" id="{DB9B4858-2143-4999-A482-A385937B6E3E}"/>
               </a:ext>
             </a:extLst>
           </p:cNvPr>
@@ -8141,7 +8139,7 @@
           <p:cNvPr id="2" name="">
             <a:extLst xmlns:a="http://schemas.openxmlformats.org/drawingml/2006/main">
               <a:ext uri="{FF2B5EF4-FFF2-40B4-BE49-F238E27FC236}">
-                <a16:creationId xmlns:a16="http://schemas.microsoft.com/office/drawing/2014/main" id="{CCCDEDD9-F748-426F-B16E-40E40D0A2B6C}"/>
+                <a16:creationId xmlns:a16="http://schemas.microsoft.com/office/drawing/2014/main" id="{274648EE-059D-4446-A958-248F30B626D0}"/>
               </a:ext>
             </a:extLst>
           </p:cNvPr>
@@ -8176,7 +8174,7 @@
           <p:cNvPr id="3" name="">
             <a:extLst xmlns:a="http://schemas.openxmlformats.org/drawingml/2006/main">
               <a:ext uri="{FF2B5EF4-FFF2-40B4-BE49-F238E27FC236}">
-                <a16:creationId xmlns:a16="http://schemas.microsoft.com/office/drawing/2014/main" id="{DAD67236-6A1E-43B2-8730-91730AD7A19C}"/>
+                <a16:creationId xmlns:a16="http://schemas.microsoft.com/office/drawing/2014/main" id="{AC4ACC9A-F4DE-4E29-BDB9-334F736BE4A1}"/>
               </a:ext>
             </a:extLst>
           </p:cNvPr>
@@ -8211,7 +8209,7 @@
           <p:cNvPr id="4" name="kicker-06-marker">
             <a:extLst xmlns:a="http://schemas.openxmlformats.org/drawingml/2006/main">
               <a:ext uri="{FF2B5EF4-FFF2-40B4-BE49-F238E27FC236}">
-                <a16:creationId xmlns:a16="http://schemas.microsoft.com/office/drawing/2014/main" id="{6966EAAC-CCEA-4BB3-B492-B9E999AE5033}"/>
+                <a16:creationId xmlns:a16="http://schemas.microsoft.com/office/drawing/2014/main" id="{0D71C5C6-5742-40A2-A64C-7B93B3BBD6A6}"/>
               </a:ext>
             </a:extLst>
           </p:cNvPr>
@@ -8246,7 +8244,7 @@
           <p:cNvPr id="5" name="kicker-06-label">
             <a:extLst xmlns:a="http://schemas.openxmlformats.org/drawingml/2006/main">
               <a:ext uri="{FF2B5EF4-FFF2-40B4-BE49-F238E27FC236}">
-                <a16:creationId xmlns:a16="http://schemas.microsoft.com/office/drawing/2014/main" id="{D1287BCB-1F1B-46E7-810E-2B09A2550DC4}"/>
+                <a16:creationId xmlns:a16="http://schemas.microsoft.com/office/drawing/2014/main" id="{5FF3C6BE-1AA7-491A-A835-52611CEDD99B}"/>
               </a:ext>
             </a:extLst>
           </p:cNvPr>
@@ -8310,7 +8308,7 @@
           <p:cNvPr id="6" name="">
             <a:extLst xmlns:a="http://schemas.openxmlformats.org/drawingml/2006/main">
               <a:ext uri="{FF2B5EF4-FFF2-40B4-BE49-F238E27FC236}">
-                <a16:creationId xmlns:a16="http://schemas.microsoft.com/office/drawing/2014/main" id="{7B2F7536-649F-4133-A672-F393F81D8899}"/>
+                <a16:creationId xmlns:a16="http://schemas.microsoft.com/office/drawing/2014/main" id="{6CCB7A0A-08A1-4749-9119-916DCC0F2896}"/>
               </a:ext>
             </a:extLst>
           </p:cNvPr>
@@ -8374,7 +8372,7 @@
           <p:cNvPr id="7" name="">
             <a:extLst xmlns:a="http://schemas.openxmlformats.org/drawingml/2006/main">
               <a:ext uri="{FF2B5EF4-FFF2-40B4-BE49-F238E27FC236}">
-                <a16:creationId xmlns:a16="http://schemas.microsoft.com/office/drawing/2014/main" id="{59FAACD1-4B64-47AE-A42E-75F428A87419}"/>
+                <a16:creationId xmlns:a16="http://schemas.microsoft.com/office/drawing/2014/main" id="{42BF2D4E-BC8E-4126-B133-F983067F132F}"/>
               </a:ext>
             </a:extLst>
           </p:cNvPr>
@@ -8438,7 +8436,7 @@
           <p:cNvPr id="8" name="">
             <a:extLst xmlns:a="http://schemas.openxmlformats.org/drawingml/2006/main">
               <a:ext uri="{FF2B5EF4-FFF2-40B4-BE49-F238E27FC236}">
-                <a16:creationId xmlns:a16="http://schemas.microsoft.com/office/drawing/2014/main" id="{C5EC285A-C5E5-4422-A38A-D3637B95D09D}"/>
+                <a16:creationId xmlns:a16="http://schemas.microsoft.com/office/drawing/2014/main" id="{3A117531-C3AE-42F1-8E59-46A9180D6C76}"/>
               </a:ext>
             </a:extLst>
           </p:cNvPr>
@@ -8473,7 +8471,7 @@
           <p:cNvPr id="9" name="">
             <a:extLst xmlns:a="http://schemas.openxmlformats.org/drawingml/2006/main">
               <a:ext uri="{FF2B5EF4-FFF2-40B4-BE49-F238E27FC236}">
-                <a16:creationId xmlns:a16="http://schemas.microsoft.com/office/drawing/2014/main" id="{45976497-7D47-44E9-A8BA-72277C9004D9}"/>
+                <a16:creationId xmlns:a16="http://schemas.microsoft.com/office/drawing/2014/main" id="{DF75184A-9B7B-460C-8594-A3A961162D14}"/>
               </a:ext>
             </a:extLst>
           </p:cNvPr>
@@ -8537,7 +8535,7 @@
           <p:cNvPr id="10" name="">
             <a:extLst xmlns:a="http://schemas.openxmlformats.org/drawingml/2006/main">
               <a:ext uri="{FF2B5EF4-FFF2-40B4-BE49-F238E27FC236}">
-                <a16:creationId xmlns:a16="http://schemas.microsoft.com/office/drawing/2014/main" id="{8335C074-DE21-4531-B714-9B20057DF6F7}"/>
+                <a16:creationId xmlns:a16="http://schemas.microsoft.com/office/drawing/2014/main" id="{B83B8432-41CD-4E50-BDB1-A31AC20ABC33}"/>
               </a:ext>
             </a:extLst>
           </p:cNvPr>
@@ -8601,7 +8599,7 @@
           <p:cNvPr id="11" name="">
             <a:extLst xmlns:a="http://schemas.openxmlformats.org/drawingml/2006/main">
               <a:ext uri="{FF2B5EF4-FFF2-40B4-BE49-F238E27FC236}">
-                <a16:creationId xmlns:a16="http://schemas.microsoft.com/office/drawing/2014/main" id="{8D347EDD-E1B4-45DA-883F-2070E28FD683}"/>
+                <a16:creationId xmlns:a16="http://schemas.microsoft.com/office/drawing/2014/main" id="{518DA69B-4B6D-481B-8EA3-F4F26ACD90D0}"/>
               </a:ext>
             </a:extLst>
           </p:cNvPr>
@@ -8665,7 +8663,7 @@
           <p:cNvPr id="12" name="">
             <a:extLst xmlns:a="http://schemas.openxmlformats.org/drawingml/2006/main">
               <a:ext uri="{FF2B5EF4-FFF2-40B4-BE49-F238E27FC236}">
-                <a16:creationId xmlns:a16="http://schemas.microsoft.com/office/drawing/2014/main" id="{821CA360-D51A-485A-B0A6-2F27246ADAB5}"/>
+                <a16:creationId xmlns:a16="http://schemas.microsoft.com/office/drawing/2014/main" id="{B3EF1EF8-BAFB-4F88-9DAC-1D0C1726BD5F}"/>
               </a:ext>
             </a:extLst>
           </p:cNvPr>
@@ -8698,7 +8696,7 @@
           <p:cNvPr id="13" name="">
             <a:extLst xmlns:a="http://schemas.openxmlformats.org/drawingml/2006/main">
               <a:ext uri="{FF2B5EF4-FFF2-40B4-BE49-F238E27FC236}">
-                <a16:creationId xmlns:a16="http://schemas.microsoft.com/office/drawing/2014/main" id="{E9DD1516-2BE7-410A-BFEA-BA4EFF501FCE}"/>
+                <a16:creationId xmlns:a16="http://schemas.microsoft.com/office/drawing/2014/main" id="{0409B82E-9174-4A2E-87CA-5A7C9A3453E8}"/>
               </a:ext>
             </a:extLst>
           </p:cNvPr>
@@ -8733,7 +8731,7 @@
           <p:cNvPr id="14" name="">
             <a:extLst xmlns:a="http://schemas.openxmlformats.org/drawingml/2006/main">
               <a:ext uri="{FF2B5EF4-FFF2-40B4-BE49-F238E27FC236}">
-                <a16:creationId xmlns:a16="http://schemas.microsoft.com/office/drawing/2014/main" id="{54933590-CCE3-4549-95E5-04217A507069}"/>
+                <a16:creationId xmlns:a16="http://schemas.microsoft.com/office/drawing/2014/main" id="{AC65108C-C1BE-413F-AE07-78DB0AC54407}"/>
               </a:ext>
             </a:extLst>
           </p:cNvPr>
@@ -8797,7 +8795,7 @@
           <p:cNvPr id="15" name="">
             <a:extLst xmlns:a="http://schemas.openxmlformats.org/drawingml/2006/main">
               <a:ext uri="{FF2B5EF4-FFF2-40B4-BE49-F238E27FC236}">
-                <a16:creationId xmlns:a16="http://schemas.microsoft.com/office/drawing/2014/main" id="{40F4C45B-765A-438F-A5B5-F60DA76310DE}"/>
+                <a16:creationId xmlns:a16="http://schemas.microsoft.com/office/drawing/2014/main" id="{41BA1907-4A32-42A5-978D-C253899143C7}"/>
               </a:ext>
             </a:extLst>
           </p:cNvPr>
@@ -8830,7 +8828,7 @@
           <p:cNvPr id="16" name="">
             <a:extLst xmlns:a="http://schemas.openxmlformats.org/drawingml/2006/main">
               <a:ext uri="{FF2B5EF4-FFF2-40B4-BE49-F238E27FC236}">
-                <a16:creationId xmlns:a16="http://schemas.microsoft.com/office/drawing/2014/main" id="{E141FEC6-BE4E-48C6-916C-2369351CEBBD}"/>
+                <a16:creationId xmlns:a16="http://schemas.microsoft.com/office/drawing/2014/main" id="{EBB1210D-D90A-44E1-BCCC-05B3DFC12378}"/>
               </a:ext>
             </a:extLst>
           </p:cNvPr>
@@ -8865,7 +8863,7 @@
           <p:cNvPr id="17" name="">
             <a:extLst xmlns:a="http://schemas.openxmlformats.org/drawingml/2006/main">
               <a:ext uri="{FF2B5EF4-FFF2-40B4-BE49-F238E27FC236}">
-                <a16:creationId xmlns:a16="http://schemas.microsoft.com/office/drawing/2014/main" id="{D2B672B0-839B-4EEA-B3FF-A800884CEE2A}"/>
+                <a16:creationId xmlns:a16="http://schemas.microsoft.com/office/drawing/2014/main" id="{40A5C767-5881-4D4D-ACC4-AD2F5F3BB0B2}"/>
               </a:ext>
             </a:extLst>
           </p:cNvPr>
@@ -8929,7 +8927,7 @@
           <p:cNvPr id="18" name="">
             <a:extLst xmlns:a="http://schemas.openxmlformats.org/drawingml/2006/main">
               <a:ext uri="{FF2B5EF4-FFF2-40B4-BE49-F238E27FC236}">
-                <a16:creationId xmlns:a16="http://schemas.microsoft.com/office/drawing/2014/main" id="{8CD49C16-E097-4F68-9332-81563D8A8FCC}"/>
+                <a16:creationId xmlns:a16="http://schemas.microsoft.com/office/drawing/2014/main" id="{229AB397-CE90-4C77-969C-FC5392B807EF}"/>
               </a:ext>
             </a:extLst>
           </p:cNvPr>
@@ -8962,7 +8960,7 @@
           <p:cNvPr id="19" name="">
             <a:extLst xmlns:a="http://schemas.openxmlformats.org/drawingml/2006/main">
               <a:ext uri="{FF2B5EF4-FFF2-40B4-BE49-F238E27FC236}">
-                <a16:creationId xmlns:a16="http://schemas.microsoft.com/office/drawing/2014/main" id="{8E1B2F5F-98E3-421B-9CEA-00D01BDE3982}"/>
+                <a16:creationId xmlns:a16="http://schemas.microsoft.com/office/drawing/2014/main" id="{00DD213B-8815-4745-A993-5EC2CA1E6796}"/>
               </a:ext>
             </a:extLst>
           </p:cNvPr>
@@ -8997,7 +8995,7 @@
           <p:cNvPr id="20" name="">
             <a:extLst xmlns:a="http://schemas.openxmlformats.org/drawingml/2006/main">
               <a:ext uri="{FF2B5EF4-FFF2-40B4-BE49-F238E27FC236}">
-                <a16:creationId xmlns:a16="http://schemas.microsoft.com/office/drawing/2014/main" id="{06B5C274-AAF0-4677-B7B3-FBA41CBD9AA3}"/>
+                <a16:creationId xmlns:a16="http://schemas.microsoft.com/office/drawing/2014/main" id="{3561CF4B-EFFA-4BDB-A044-84461C3DF08C}"/>
               </a:ext>
             </a:extLst>
           </p:cNvPr>
@@ -9061,7 +9059,7 @@
           <p:cNvPr id="21" name="">
             <a:extLst xmlns:a="http://schemas.openxmlformats.org/drawingml/2006/main">
               <a:ext uri="{FF2B5EF4-FFF2-40B4-BE49-F238E27FC236}">
-                <a16:creationId xmlns:a16="http://schemas.microsoft.com/office/drawing/2014/main" id="{4170EB74-258F-4095-9CB4-61694B85802D}"/>
+                <a16:creationId xmlns:a16="http://schemas.microsoft.com/office/drawing/2014/main" id="{E92828EA-9147-4804-872B-AD95933CE1AB}"/>
               </a:ext>
             </a:extLst>
           </p:cNvPr>
@@ -9094,7 +9092,7 @@
           <p:cNvPr id="22" name="">
             <a:extLst xmlns:a="http://schemas.openxmlformats.org/drawingml/2006/main">
               <a:ext uri="{FF2B5EF4-FFF2-40B4-BE49-F238E27FC236}">
-                <a16:creationId xmlns:a16="http://schemas.microsoft.com/office/drawing/2014/main" id="{B98047A6-6DF0-4C51-96A2-4F489E02B87D}"/>
+                <a16:creationId xmlns:a16="http://schemas.microsoft.com/office/drawing/2014/main" id="{59A2754F-C3D8-421C-97A9-246EF70F44AF}"/>
               </a:ext>
             </a:extLst>
           </p:cNvPr>
@@ -9129,7 +9127,7 @@
           <p:cNvPr id="23" name="">
             <a:extLst xmlns:a="http://schemas.openxmlformats.org/drawingml/2006/main">
               <a:ext uri="{FF2B5EF4-FFF2-40B4-BE49-F238E27FC236}">
-                <a16:creationId xmlns:a16="http://schemas.microsoft.com/office/drawing/2014/main" id="{BE685A95-A311-40EE-B8A2-88DD259B2F70}"/>
+                <a16:creationId xmlns:a16="http://schemas.microsoft.com/office/drawing/2014/main" id="{92482600-60D0-4E3D-8AFF-C8A9ECC873ED}"/>
               </a:ext>
             </a:extLst>
           </p:cNvPr>
@@ -9193,7 +9191,7 @@
           <p:cNvPr id="24" name="">
             <a:extLst xmlns:a="http://schemas.openxmlformats.org/drawingml/2006/main">
               <a:ext uri="{FF2B5EF4-FFF2-40B4-BE49-F238E27FC236}">
-                <a16:creationId xmlns:a16="http://schemas.microsoft.com/office/drawing/2014/main" id="{C9C38C3C-A4A1-4BD1-913E-66745DE9FE0E}"/>
+                <a16:creationId xmlns:a16="http://schemas.microsoft.com/office/drawing/2014/main" id="{B735F965-17A4-45FB-83C9-82DE66B2E107}"/>
               </a:ext>
             </a:extLst>
           </p:cNvPr>
@@ -9226,7 +9224,7 @@
           <p:cNvPr id="25" name="">
             <a:extLst xmlns:a="http://schemas.openxmlformats.org/drawingml/2006/main">
               <a:ext uri="{FF2B5EF4-FFF2-40B4-BE49-F238E27FC236}">
-                <a16:creationId xmlns:a16="http://schemas.microsoft.com/office/drawing/2014/main" id="{7CC1D441-43F3-4F41-9FEF-915AD1EA7A70}"/>
+                <a16:creationId xmlns:a16="http://schemas.microsoft.com/office/drawing/2014/main" id="{77D8CD0B-F8A5-4435-AE08-CDFCBF7FCC28}"/>
               </a:ext>
             </a:extLst>
           </p:cNvPr>
@@ -9261,7 +9259,7 @@
           <p:cNvPr id="26" name="">
             <a:extLst xmlns:a="http://schemas.openxmlformats.org/drawingml/2006/main">
               <a:ext uri="{FF2B5EF4-FFF2-40B4-BE49-F238E27FC236}">
-                <a16:creationId xmlns:a16="http://schemas.microsoft.com/office/drawing/2014/main" id="{04492204-2F15-42BC-905C-10E2D94AB6DE}"/>
+                <a16:creationId xmlns:a16="http://schemas.microsoft.com/office/drawing/2014/main" id="{AC6A8B01-6985-4A5E-8CA0-8474C9FF8B07}"/>
               </a:ext>
             </a:extLst>
           </p:cNvPr>
@@ -9325,7 +9323,7 @@
           <p:cNvPr id="27" name="">
             <a:extLst xmlns:a="http://schemas.openxmlformats.org/drawingml/2006/main">
               <a:ext uri="{FF2B5EF4-FFF2-40B4-BE49-F238E27FC236}">
-                <a16:creationId xmlns:a16="http://schemas.microsoft.com/office/drawing/2014/main" id="{D213852B-9667-4AD6-A2CB-B452991716F1}"/>
+                <a16:creationId xmlns:a16="http://schemas.microsoft.com/office/drawing/2014/main" id="{3BCE502C-87ED-43A5-BA4B-6674913EAA76}"/>
               </a:ext>
             </a:extLst>
           </p:cNvPr>
@@ -9358,7 +9356,7 @@
           <p:cNvPr id="28" name="">
             <a:extLst xmlns:a="http://schemas.openxmlformats.org/drawingml/2006/main">
               <a:ext uri="{FF2B5EF4-FFF2-40B4-BE49-F238E27FC236}">
-                <a16:creationId xmlns:a16="http://schemas.microsoft.com/office/drawing/2014/main" id="{D7570636-FEF4-4ED5-84BC-5173BDD1C28D}"/>
+                <a16:creationId xmlns:a16="http://schemas.microsoft.com/office/drawing/2014/main" id="{B8ED8FE8-2025-4512-B7AD-57CCA010473D}"/>
               </a:ext>
             </a:extLst>
           </p:cNvPr>
@@ -9393,7 +9391,7 @@
           <p:cNvPr id="29" name="">
             <a:extLst xmlns:a="http://schemas.openxmlformats.org/drawingml/2006/main">
               <a:ext uri="{FF2B5EF4-FFF2-40B4-BE49-F238E27FC236}">
-                <a16:creationId xmlns:a16="http://schemas.microsoft.com/office/drawing/2014/main" id="{380A07BE-3942-4696-8235-FF27117ED1DB}"/>
+                <a16:creationId xmlns:a16="http://schemas.microsoft.com/office/drawing/2014/main" id="{F59A6705-0FB5-49D8-9FDB-ADC44A88605A}"/>
               </a:ext>
             </a:extLst>
           </p:cNvPr>
@@ -9457,7 +9455,7 @@
           <p:cNvPr id="30" name="">
             <a:extLst xmlns:a="http://schemas.openxmlformats.org/drawingml/2006/main">
               <a:ext uri="{FF2B5EF4-FFF2-40B4-BE49-F238E27FC236}">
-                <a16:creationId xmlns:a16="http://schemas.microsoft.com/office/drawing/2014/main" id="{8EB99FE9-5275-487A-A89F-C504ACEFFD40}"/>
+                <a16:creationId xmlns:a16="http://schemas.microsoft.com/office/drawing/2014/main" id="{C0538F36-83F1-450F-8C83-BA44EF291005}"/>
               </a:ext>
             </a:extLst>
           </p:cNvPr>
@@ -9490,7 +9488,7 @@
           <p:cNvPr id="31" name="">
             <a:extLst xmlns:a="http://schemas.openxmlformats.org/drawingml/2006/main">
               <a:ext uri="{FF2B5EF4-FFF2-40B4-BE49-F238E27FC236}">
-                <a16:creationId xmlns:a16="http://schemas.microsoft.com/office/drawing/2014/main" id="{1626BEA8-84BA-48EE-83AF-E9F6B4605963}"/>
+                <a16:creationId xmlns:a16="http://schemas.microsoft.com/office/drawing/2014/main" id="{93BDE2A3-BB18-425B-963B-D4B9DA5BDE70}"/>
               </a:ext>
             </a:extLst>
           </p:cNvPr>
@@ -9525,7 +9523,7 @@
           <p:cNvPr id="32" name="">
             <a:extLst xmlns:a="http://schemas.openxmlformats.org/drawingml/2006/main">
               <a:ext uri="{FF2B5EF4-FFF2-40B4-BE49-F238E27FC236}">
-                <a16:creationId xmlns:a16="http://schemas.microsoft.com/office/drawing/2014/main" id="{131B338D-D80A-4A67-97BF-D1061148E205}"/>
+                <a16:creationId xmlns:a16="http://schemas.microsoft.com/office/drawing/2014/main" id="{3033CE18-503F-493D-A90D-C50FD6C8291A}"/>
               </a:ext>
             </a:extLst>
           </p:cNvPr>
@@ -9589,7 +9587,7 @@
           <p:cNvPr id="33" name="">
             <a:extLst xmlns:a="http://schemas.openxmlformats.org/drawingml/2006/main">
               <a:ext uri="{FF2B5EF4-FFF2-40B4-BE49-F238E27FC236}">
-                <a16:creationId xmlns:a16="http://schemas.microsoft.com/office/drawing/2014/main" id="{A8F4C346-F049-4F3A-8A64-4FC9D64F892C}"/>
+                <a16:creationId xmlns:a16="http://schemas.microsoft.com/office/drawing/2014/main" id="{82645A6F-01E1-4D7A-BC0A-F70919F89F11}"/>
               </a:ext>
             </a:extLst>
           </p:cNvPr>
@@ -9622,7 +9620,7 @@
           <p:cNvPr id="34" name="">
             <a:extLst xmlns:a="http://schemas.openxmlformats.org/drawingml/2006/main">
               <a:ext uri="{FF2B5EF4-FFF2-40B4-BE49-F238E27FC236}">
-                <a16:creationId xmlns:a16="http://schemas.microsoft.com/office/drawing/2014/main" id="{60092261-0728-40ED-A141-EAD1F675B6DE}"/>
+                <a16:creationId xmlns:a16="http://schemas.microsoft.com/office/drawing/2014/main" id="{7C937E00-9DB7-4ACF-9412-3B7A3D937F66}"/>
               </a:ext>
             </a:extLst>
           </p:cNvPr>
@@ -9657,7 +9655,7 @@
           <p:cNvPr id="35" name="">
             <a:extLst xmlns:a="http://schemas.openxmlformats.org/drawingml/2006/main">
               <a:ext uri="{FF2B5EF4-FFF2-40B4-BE49-F238E27FC236}">
-                <a16:creationId xmlns:a16="http://schemas.microsoft.com/office/drawing/2014/main" id="{6C60A2D0-3821-43B4-80C0-4A8E78D2623D}"/>
+                <a16:creationId xmlns:a16="http://schemas.microsoft.com/office/drawing/2014/main" id="{C2C16CAD-D23A-44D5-8E97-3817722EF052}"/>
               </a:ext>
             </a:extLst>
           </p:cNvPr>
@@ -9721,7 +9719,7 @@
           <p:cNvPr id="36" name="">
             <a:extLst xmlns:a="http://schemas.openxmlformats.org/drawingml/2006/main">
               <a:ext uri="{FF2B5EF4-FFF2-40B4-BE49-F238E27FC236}">
-                <a16:creationId xmlns:a16="http://schemas.microsoft.com/office/drawing/2014/main" id="{7691A053-90D3-49A7-A687-95AF6E2D5625}"/>
+                <a16:creationId xmlns:a16="http://schemas.microsoft.com/office/drawing/2014/main" id="{3ABBF87E-1E93-4A96-85D0-D86233F78D23}"/>
               </a:ext>
             </a:extLst>
           </p:cNvPr>
@@ -9754,7 +9752,7 @@
           <p:cNvPr id="37" name="">
             <a:extLst xmlns:a="http://schemas.openxmlformats.org/drawingml/2006/main">
               <a:ext uri="{FF2B5EF4-FFF2-40B4-BE49-F238E27FC236}">
-                <a16:creationId xmlns:a16="http://schemas.microsoft.com/office/drawing/2014/main" id="{8ABA01C1-DA71-4EFC-8E5D-5489A8FC497C}"/>
+                <a16:creationId xmlns:a16="http://schemas.microsoft.com/office/drawing/2014/main" id="{40B7465C-F94D-440D-A21F-533E28694210}"/>
               </a:ext>
             </a:extLst>
           </p:cNvPr>
@@ -9818,7 +9816,7 @@
           <p:cNvPr id="38" name="">
             <a:extLst xmlns:a="http://schemas.openxmlformats.org/drawingml/2006/main">
               <a:ext uri="{FF2B5EF4-FFF2-40B4-BE49-F238E27FC236}">
-                <a16:creationId xmlns:a16="http://schemas.microsoft.com/office/drawing/2014/main" id="{C68DCC4F-5646-4E59-B041-C8AA6BC6E0FC}"/>
+                <a16:creationId xmlns:a16="http://schemas.microsoft.com/office/drawing/2014/main" id="{EA848BAE-E9AB-4CD5-9E42-759F4DA960EC}"/>
               </a:ext>
             </a:extLst>
           </p:cNvPr>
@@ -9882,7 +9880,7 @@
           <p:cNvPr id="39" name="">
             <a:extLst xmlns:a="http://schemas.openxmlformats.org/drawingml/2006/main">
               <a:ext uri="{FF2B5EF4-FFF2-40B4-BE49-F238E27FC236}">
-                <a16:creationId xmlns:a16="http://schemas.microsoft.com/office/drawing/2014/main" id="{1FA82D4E-6248-46D5-8A7E-B2104AA812E5}"/>
+                <a16:creationId xmlns:a16="http://schemas.microsoft.com/office/drawing/2014/main" id="{7205F9DF-A0BD-49F5-AD67-FB289F7E57B6}"/>
               </a:ext>
             </a:extLst>
           </p:cNvPr>
@@ -9917,7 +9915,7 @@
           <p:cNvPr id="40" name="">
             <a:extLst xmlns:a="http://schemas.openxmlformats.org/drawingml/2006/main">
               <a:ext uri="{FF2B5EF4-FFF2-40B4-BE49-F238E27FC236}">
-                <a16:creationId xmlns:a16="http://schemas.microsoft.com/office/drawing/2014/main" id="{E0BD65B8-FC68-41E2-8307-DE37D3330E51}"/>
+                <a16:creationId xmlns:a16="http://schemas.microsoft.com/office/drawing/2014/main" id="{BA68BDE2-10C4-4A84-998F-FE59AD385B21}"/>
               </a:ext>
             </a:extLst>
           </p:cNvPr>
@@ -9981,7 +9979,7 @@
           <p:cNvPr id="41" name="">
             <a:extLst xmlns:a="http://schemas.openxmlformats.org/drawingml/2006/main">
               <a:ext uri="{FF2B5EF4-FFF2-40B4-BE49-F238E27FC236}">
-                <a16:creationId xmlns:a16="http://schemas.microsoft.com/office/drawing/2014/main" id="{4A18EFBD-CB53-455C-8767-64B37E49028F}"/>
+                <a16:creationId xmlns:a16="http://schemas.microsoft.com/office/drawing/2014/main" id="{1E7630BB-967E-4E42-B4A8-0BB79450B4A4}"/>
               </a:ext>
             </a:extLst>
           </p:cNvPr>
@@ -10045,7 +10043,7 @@
           <p:cNvPr id="42" name="">
             <a:extLst xmlns:a="http://schemas.openxmlformats.org/drawingml/2006/main">
               <a:ext uri="{FF2B5EF4-FFF2-40B4-BE49-F238E27FC236}">
-                <a16:creationId xmlns:a16="http://schemas.microsoft.com/office/drawing/2014/main" id="{311B2933-80F5-49DE-9C53-C6326C2A8384}"/>
+                <a16:creationId xmlns:a16="http://schemas.microsoft.com/office/drawing/2014/main" id="{6C654D4C-3ACC-4B6B-B19C-2A3AA6CECBF3}"/>
               </a:ext>
             </a:extLst>
           </p:cNvPr>
@@ -10107,7 +10105,7 @@
     </p:spTree>
     <p:extLst>
       <p:ext uri="{BB962C8B-B14F-4D97-AF65-F5344CB8AC3E}">
-        <p14:creationId xmlns:p14="http://schemas.microsoft.com/office/powerpoint/2010/main" val="1752341551"/>
+        <p14:creationId xmlns:p14="http://schemas.microsoft.com/office/powerpoint/2010/main" val="578561468"/>
       </p:ext>
     </p:extLst>
   </p:cSld>
@@ -10131,7 +10129,7 @@
           <p:cNvPr id="1" name="">
             <a:extLst xmlns:a="http://schemas.openxmlformats.org/drawingml/2006/main">
               <a:ext uri="{FF2B5EF4-FFF2-40B4-BE49-F238E27FC236}">
-                <a16:creationId xmlns:a16="http://schemas.microsoft.com/office/drawing/2014/main" id="{4FE7B0FA-F700-40D8-9A0D-FF85370D8ED7}"/>
+                <a16:creationId xmlns:a16="http://schemas.microsoft.com/office/drawing/2014/main" id="{7F98A9CF-3D8B-40F1-913C-9ABE2FACB8A9}"/>
               </a:ext>
             </a:extLst>
           </p:cNvPr>
@@ -10166,7 +10164,7 @@
           <p:cNvPr id="2" name="">
             <a:extLst xmlns:a="http://schemas.openxmlformats.org/drawingml/2006/main">
               <a:ext uri="{FF2B5EF4-FFF2-40B4-BE49-F238E27FC236}">
-                <a16:creationId xmlns:a16="http://schemas.microsoft.com/office/drawing/2014/main" id="{E0567474-F928-4BC0-98C0-B9E4A12D7CE1}"/>
+                <a16:creationId xmlns:a16="http://schemas.microsoft.com/office/drawing/2014/main" id="{6088C2F3-8FC5-4460-B61A-DD2F2126F3DD}"/>
               </a:ext>
             </a:extLst>
           </p:cNvPr>
@@ -10201,7 +10199,7 @@
           <p:cNvPr id="3" name="">
             <a:extLst xmlns:a="http://schemas.openxmlformats.org/drawingml/2006/main">
               <a:ext uri="{FF2B5EF4-FFF2-40B4-BE49-F238E27FC236}">
-                <a16:creationId xmlns:a16="http://schemas.microsoft.com/office/drawing/2014/main" id="{FA1D2310-95FA-41A6-B46E-3D749678AC16}"/>
+                <a16:creationId xmlns:a16="http://schemas.microsoft.com/office/drawing/2014/main" id="{6C7445CE-DAD5-41AC-9324-81A7E31D24A8}"/>
               </a:ext>
             </a:extLst>
           </p:cNvPr>
@@ -10236,7 +10234,7 @@
           <p:cNvPr id="4" name="kicker-06-marker">
             <a:extLst xmlns:a="http://schemas.openxmlformats.org/drawingml/2006/main">
               <a:ext uri="{FF2B5EF4-FFF2-40B4-BE49-F238E27FC236}">
-                <a16:creationId xmlns:a16="http://schemas.microsoft.com/office/drawing/2014/main" id="{2F0077A1-8500-4191-93D6-5E29782D5172}"/>
+                <a16:creationId xmlns:a16="http://schemas.microsoft.com/office/drawing/2014/main" id="{D0D01220-EAF1-40C3-AAFA-B18821CCDDD7}"/>
               </a:ext>
             </a:extLst>
           </p:cNvPr>
@@ -10271,7 +10269,7 @@
           <p:cNvPr id="5" name="kicker-06-label">
             <a:extLst xmlns:a="http://schemas.openxmlformats.org/drawingml/2006/main">
               <a:ext uri="{FF2B5EF4-FFF2-40B4-BE49-F238E27FC236}">
-                <a16:creationId xmlns:a16="http://schemas.microsoft.com/office/drawing/2014/main" id="{29E917A2-8E73-45ED-869F-D1969D5696AF}"/>
+                <a16:creationId xmlns:a16="http://schemas.microsoft.com/office/drawing/2014/main" id="{FF4A88E2-2A43-451D-B8A2-BC249EB1F30F}"/>
               </a:ext>
             </a:extLst>
           </p:cNvPr>
@@ -10335,7 +10333,7 @@
           <p:cNvPr id="6" name="">
             <a:extLst xmlns:a="http://schemas.openxmlformats.org/drawingml/2006/main">
               <a:ext uri="{FF2B5EF4-FFF2-40B4-BE49-F238E27FC236}">
-                <a16:creationId xmlns:a16="http://schemas.microsoft.com/office/drawing/2014/main" id="{A4D43C0D-ECF5-41AE-B3B1-0241AFE25512}"/>
+                <a16:creationId xmlns:a16="http://schemas.microsoft.com/office/drawing/2014/main" id="{FA74AD5D-5921-45BE-B738-758D4CEB3B9F}"/>
               </a:ext>
             </a:extLst>
           </p:cNvPr>
@@ -10399,7 +10397,7 @@
           <p:cNvPr id="7" name="">
             <a:extLst xmlns:a="http://schemas.openxmlformats.org/drawingml/2006/main">
               <a:ext uri="{FF2B5EF4-FFF2-40B4-BE49-F238E27FC236}">
-                <a16:creationId xmlns:a16="http://schemas.microsoft.com/office/drawing/2014/main" id="{7AEBF444-53C4-4AD2-A3F1-868BC4AC17BB}"/>
+                <a16:creationId xmlns:a16="http://schemas.microsoft.com/office/drawing/2014/main" id="{236CE533-C5DF-44B9-95C7-98E35EB74584}"/>
               </a:ext>
             </a:extLst>
           </p:cNvPr>
@@ -10463,7 +10461,7 @@
           <p:cNvPr id="8" name="">
             <a:extLst xmlns:a="http://schemas.openxmlformats.org/drawingml/2006/main">
               <a:ext uri="{FF2B5EF4-FFF2-40B4-BE49-F238E27FC236}">
-                <a16:creationId xmlns:a16="http://schemas.microsoft.com/office/drawing/2014/main" id="{2826563C-8D8A-40FD-9EB1-BD5ADB615A92}"/>
+                <a16:creationId xmlns:a16="http://schemas.microsoft.com/office/drawing/2014/main" id="{C5276E56-55BC-4382-B1F5-1A7CC18AF20F}"/>
               </a:ext>
             </a:extLst>
           </p:cNvPr>
@@ -10498,7 +10496,7 @@
           <p:cNvPr id="9" name="">
             <a:extLst xmlns:a="http://schemas.openxmlformats.org/drawingml/2006/main">
               <a:ext uri="{FF2B5EF4-FFF2-40B4-BE49-F238E27FC236}">
-                <a16:creationId xmlns:a16="http://schemas.microsoft.com/office/drawing/2014/main" id="{DCF9F52F-9DBC-4330-88E0-0038D4F5F284}"/>
+                <a16:creationId xmlns:a16="http://schemas.microsoft.com/office/drawing/2014/main" id="{95CEB5F7-FC7C-4DAA-8906-F37C4D16CAEC}"/>
               </a:ext>
             </a:extLst>
           </p:cNvPr>
@@ -10562,7 +10560,7 @@
           <p:cNvPr id="10" name="">
             <a:extLst xmlns:a="http://schemas.openxmlformats.org/drawingml/2006/main">
               <a:ext uri="{FF2B5EF4-FFF2-40B4-BE49-F238E27FC236}">
-                <a16:creationId xmlns:a16="http://schemas.microsoft.com/office/drawing/2014/main" id="{4B7F3EB3-2A92-42B9-A913-0FE45A111EBB}"/>
+                <a16:creationId xmlns:a16="http://schemas.microsoft.com/office/drawing/2014/main" id="{A339B4A5-1F55-4558-B806-2B652C01D001}"/>
               </a:ext>
             </a:extLst>
           </p:cNvPr>
@@ -10626,7 +10624,7 @@
           <p:cNvPr id="11" name="">
             <a:extLst xmlns:a="http://schemas.openxmlformats.org/drawingml/2006/main">
               <a:ext uri="{FF2B5EF4-FFF2-40B4-BE49-F238E27FC236}">
-                <a16:creationId xmlns:a16="http://schemas.microsoft.com/office/drawing/2014/main" id="{1A043902-9C6A-4E9D-B0AF-7500B42E8829}"/>
+                <a16:creationId xmlns:a16="http://schemas.microsoft.com/office/drawing/2014/main" id="{24B24A2A-CAF1-4F17-A297-53884A404A42}"/>
               </a:ext>
             </a:extLst>
           </p:cNvPr>
@@ -10690,7 +10688,7 @@
           <p:cNvPr id="12" name="">
             <a:extLst xmlns:a="http://schemas.openxmlformats.org/drawingml/2006/main">
               <a:ext uri="{FF2B5EF4-FFF2-40B4-BE49-F238E27FC236}">
-                <a16:creationId xmlns:a16="http://schemas.microsoft.com/office/drawing/2014/main" id="{9D7DEDC0-BE00-4F73-BEB0-891665DEB6DC}"/>
+                <a16:creationId xmlns:a16="http://schemas.microsoft.com/office/drawing/2014/main" id="{5354B5D6-DC4E-4EAA-A76E-7DEC5EAB8B37}"/>
               </a:ext>
             </a:extLst>
           </p:cNvPr>
@@ -10725,7 +10723,7 @@
           <p:cNvPr id="13" name="">
             <a:extLst xmlns:a="http://schemas.openxmlformats.org/drawingml/2006/main">
               <a:ext uri="{FF2B5EF4-FFF2-40B4-BE49-F238E27FC236}">
-                <a16:creationId xmlns:a16="http://schemas.microsoft.com/office/drawing/2014/main" id="{4BB23490-7ED3-4AAF-9059-12FDCFFD59FB}"/>
+                <a16:creationId xmlns:a16="http://schemas.microsoft.com/office/drawing/2014/main" id="{A51A0B2E-CE95-4611-A11F-55F4BB9FEC62}"/>
               </a:ext>
             </a:extLst>
           </p:cNvPr>
@@ -10758,7 +10756,7 @@
           <p:cNvPr id="14" name="">
             <a:extLst xmlns:a="http://schemas.openxmlformats.org/drawingml/2006/main">
               <a:ext uri="{FF2B5EF4-FFF2-40B4-BE49-F238E27FC236}">
-                <a16:creationId xmlns:a16="http://schemas.microsoft.com/office/drawing/2014/main" id="{75EDBBD4-3C86-4F06-B94D-5E00BC6D1050}"/>
+                <a16:creationId xmlns:a16="http://schemas.microsoft.com/office/drawing/2014/main" id="{93232BDB-386E-4EBE-93DB-3BA89E7E9F5A}"/>
               </a:ext>
             </a:extLst>
           </p:cNvPr>
@@ -10791,7 +10789,7 @@
           <p:cNvPr id="15" name="">
             <a:extLst xmlns:a="http://schemas.openxmlformats.org/drawingml/2006/main">
               <a:ext uri="{FF2B5EF4-FFF2-40B4-BE49-F238E27FC236}">
-                <a16:creationId xmlns:a16="http://schemas.microsoft.com/office/drawing/2014/main" id="{330469F5-D43F-48D7-BF81-B7D85F2CE1C9}"/>
+                <a16:creationId xmlns:a16="http://schemas.microsoft.com/office/drawing/2014/main" id="{28691F6B-AABD-4A28-82E1-BDA43015F99C}"/>
               </a:ext>
             </a:extLst>
           </p:cNvPr>
@@ -10855,7 +10853,7 @@
           <p:cNvPr id="16" name="">
             <a:extLst xmlns:a="http://schemas.openxmlformats.org/drawingml/2006/main">
               <a:ext uri="{FF2B5EF4-FFF2-40B4-BE49-F238E27FC236}">
-                <a16:creationId xmlns:a16="http://schemas.microsoft.com/office/drawing/2014/main" id="{6091C3F0-50D9-493B-B0F8-341FB6C09543}"/>
+                <a16:creationId xmlns:a16="http://schemas.microsoft.com/office/drawing/2014/main" id="{B726970F-5827-4402-A6BF-709A16ACC387}"/>
               </a:ext>
             </a:extLst>
           </p:cNvPr>
@@ -10919,7 +10917,7 @@
           <p:cNvPr id="17" name="">
             <a:extLst xmlns:a="http://schemas.openxmlformats.org/drawingml/2006/main">
               <a:ext uri="{FF2B5EF4-FFF2-40B4-BE49-F238E27FC236}">
-                <a16:creationId xmlns:a16="http://schemas.microsoft.com/office/drawing/2014/main" id="{1883E635-ADA8-486E-AB7A-43A220CDB656}"/>
+                <a16:creationId xmlns:a16="http://schemas.microsoft.com/office/drawing/2014/main" id="{4C0AFD5E-4739-481C-A4AB-34C852D4A065}"/>
               </a:ext>
             </a:extLst>
           </p:cNvPr>
@@ -10983,7 +10981,7 @@
           <p:cNvPr id="18" name="">
             <a:extLst xmlns:a="http://schemas.openxmlformats.org/drawingml/2006/main">
               <a:ext uri="{FF2B5EF4-FFF2-40B4-BE49-F238E27FC236}">
-                <a16:creationId xmlns:a16="http://schemas.microsoft.com/office/drawing/2014/main" id="{5657EE00-F3C7-4463-A3BE-642E04B85447}"/>
+                <a16:creationId xmlns:a16="http://schemas.microsoft.com/office/drawing/2014/main" id="{30AAB266-A177-4DE4-A1EF-67A3AA4583BB}"/>
               </a:ext>
             </a:extLst>
           </p:cNvPr>
@@ -11018,7 +11016,7 @@
           <p:cNvPr id="19" name="">
             <a:extLst xmlns:a="http://schemas.openxmlformats.org/drawingml/2006/main">
               <a:ext uri="{FF2B5EF4-FFF2-40B4-BE49-F238E27FC236}">
-                <a16:creationId xmlns:a16="http://schemas.microsoft.com/office/drawing/2014/main" id="{62DA74D0-7B72-4AB6-8A65-0B1997302112}"/>
+                <a16:creationId xmlns:a16="http://schemas.microsoft.com/office/drawing/2014/main" id="{032F16F3-F015-4F9D-ABAD-B6DC815F21C3}"/>
               </a:ext>
             </a:extLst>
           </p:cNvPr>
@@ -11082,7 +11080,7 @@
           <p:cNvPr id="20" name="">
             <a:extLst xmlns:a="http://schemas.openxmlformats.org/drawingml/2006/main">
               <a:ext uri="{FF2B5EF4-FFF2-40B4-BE49-F238E27FC236}">
-                <a16:creationId xmlns:a16="http://schemas.microsoft.com/office/drawing/2014/main" id="{5FDFC5F4-8179-4236-8731-5DB121D2396A}"/>
+                <a16:creationId xmlns:a16="http://schemas.microsoft.com/office/drawing/2014/main" id="{2D96D4FA-B47A-4524-B5C9-C07CF3E381CF}"/>
               </a:ext>
             </a:extLst>
           </p:cNvPr>
@@ -11146,7 +11144,7 @@
           <p:cNvPr id="21" name="">
             <a:extLst xmlns:a="http://schemas.openxmlformats.org/drawingml/2006/main">
               <a:ext uri="{FF2B5EF4-FFF2-40B4-BE49-F238E27FC236}">
-                <a16:creationId xmlns:a16="http://schemas.microsoft.com/office/drawing/2014/main" id="{C19A56AA-081C-430A-A7A9-1B62C5E262C7}"/>
+                <a16:creationId xmlns:a16="http://schemas.microsoft.com/office/drawing/2014/main" id="{9860F0BA-6715-4E4E-A95E-19D98DC18374}"/>
               </a:ext>
             </a:extLst>
           </p:cNvPr>
@@ -11210,7 +11208,7 @@
           <p:cNvPr id="22" name="">
             <a:extLst xmlns:a="http://schemas.openxmlformats.org/drawingml/2006/main">
               <a:ext uri="{FF2B5EF4-FFF2-40B4-BE49-F238E27FC236}">
-                <a16:creationId xmlns:a16="http://schemas.microsoft.com/office/drawing/2014/main" id="{DCB90AC0-1124-40C9-B3BC-851CEAEEA8CF}"/>
+                <a16:creationId xmlns:a16="http://schemas.microsoft.com/office/drawing/2014/main" id="{0C958B2D-4B67-412C-A5C4-E561F603D7EA}"/>
               </a:ext>
             </a:extLst>
           </p:cNvPr>
@@ -11245,7 +11243,7 @@
           <p:cNvPr id="23" name="">
             <a:extLst xmlns:a="http://schemas.openxmlformats.org/drawingml/2006/main">
               <a:ext uri="{FF2B5EF4-FFF2-40B4-BE49-F238E27FC236}">
-                <a16:creationId xmlns:a16="http://schemas.microsoft.com/office/drawing/2014/main" id="{71158968-6841-4E0F-8336-DEFB496A63D1}"/>
+                <a16:creationId xmlns:a16="http://schemas.microsoft.com/office/drawing/2014/main" id="{62E0CC7B-67BF-4837-B54A-89EF73246FC9}"/>
               </a:ext>
             </a:extLst>
           </p:cNvPr>
@@ -11280,7 +11278,7 @@
           <p:cNvPr id="24" name="">
             <a:extLst xmlns:a="http://schemas.openxmlformats.org/drawingml/2006/main">
               <a:ext uri="{FF2B5EF4-FFF2-40B4-BE49-F238E27FC236}">
-                <a16:creationId xmlns:a16="http://schemas.microsoft.com/office/drawing/2014/main" id="{9ACC0CB4-9534-42F4-8C69-39B0192784F6}"/>
+                <a16:creationId xmlns:a16="http://schemas.microsoft.com/office/drawing/2014/main" id="{0CE698CC-588A-4F52-A460-A2EACBB07695}"/>
               </a:ext>
             </a:extLst>
           </p:cNvPr>
@@ -11344,7 +11342,7 @@
           <p:cNvPr id="25" name="">
             <a:extLst xmlns:a="http://schemas.openxmlformats.org/drawingml/2006/main">
               <a:ext uri="{FF2B5EF4-FFF2-40B4-BE49-F238E27FC236}">
-                <a16:creationId xmlns:a16="http://schemas.microsoft.com/office/drawing/2014/main" id="{4BB0FF00-11A8-4312-8EDE-1C8E5C2FFF9F}"/>
+                <a16:creationId xmlns:a16="http://schemas.microsoft.com/office/drawing/2014/main" id="{2ED583A3-0E36-4DAF-97DD-717787D66F9A}"/>
               </a:ext>
             </a:extLst>
           </p:cNvPr>
@@ -11408,7 +11406,7 @@
           <p:cNvPr id="26" name="">
             <a:extLst xmlns:a="http://schemas.openxmlformats.org/drawingml/2006/main">
               <a:ext uri="{FF2B5EF4-FFF2-40B4-BE49-F238E27FC236}">
-                <a16:creationId xmlns:a16="http://schemas.microsoft.com/office/drawing/2014/main" id="{94A48065-436F-4A5D-A3BE-0F4EAB94F465}"/>
+                <a16:creationId xmlns:a16="http://schemas.microsoft.com/office/drawing/2014/main" id="{F052B324-1C29-4C4F-A13E-8F3CA2401495}"/>
               </a:ext>
             </a:extLst>
           </p:cNvPr>
@@ -11472,7 +11470,7 @@
           <p:cNvPr id="27" name="">
             <a:extLst xmlns:a="http://schemas.openxmlformats.org/drawingml/2006/main">
               <a:ext uri="{FF2B5EF4-FFF2-40B4-BE49-F238E27FC236}">
-                <a16:creationId xmlns:a16="http://schemas.microsoft.com/office/drawing/2014/main" id="{920F0BBD-2278-43A3-A4C0-45AAC642E572}"/>
+                <a16:creationId xmlns:a16="http://schemas.microsoft.com/office/drawing/2014/main" id="{FDAEC555-BFB4-4B8D-943D-BA4F2F5A31B8}"/>
               </a:ext>
             </a:extLst>
           </p:cNvPr>
@@ -11507,7 +11505,7 @@
           <p:cNvPr id="28" name="">
             <a:extLst xmlns:a="http://schemas.openxmlformats.org/drawingml/2006/main">
               <a:ext uri="{FF2B5EF4-FFF2-40B4-BE49-F238E27FC236}">
-                <a16:creationId xmlns:a16="http://schemas.microsoft.com/office/drawing/2014/main" id="{87A3E7DB-FB40-4215-8500-6A2049D6E5FF}"/>
+                <a16:creationId xmlns:a16="http://schemas.microsoft.com/office/drawing/2014/main" id="{91C3D264-DD55-47AF-8B64-C4BBE4C3DDF1}"/>
               </a:ext>
             </a:extLst>
           </p:cNvPr>
@@ -11571,7 +11569,7 @@
           <p:cNvPr id="29" name="">
             <a:extLst xmlns:a="http://schemas.openxmlformats.org/drawingml/2006/main">
               <a:ext uri="{FF2B5EF4-FFF2-40B4-BE49-F238E27FC236}">
-                <a16:creationId xmlns:a16="http://schemas.microsoft.com/office/drawing/2014/main" id="{925B0B42-BBD7-42A7-B5B0-4643FCBB969E}"/>
+                <a16:creationId xmlns:a16="http://schemas.microsoft.com/office/drawing/2014/main" id="{912C3FB1-E95D-4E58-869A-C100ABFFAFC0}"/>
               </a:ext>
             </a:extLst>
           </p:cNvPr>
@@ -11635,7 +11633,7 @@
           <p:cNvPr id="30" name="">
             <a:extLst xmlns:a="http://schemas.openxmlformats.org/drawingml/2006/main">
               <a:ext uri="{FF2B5EF4-FFF2-40B4-BE49-F238E27FC236}">
-                <a16:creationId xmlns:a16="http://schemas.microsoft.com/office/drawing/2014/main" id="{EEA57D67-1F23-471D-8424-2F7007D19721}"/>
+                <a16:creationId xmlns:a16="http://schemas.microsoft.com/office/drawing/2014/main" id="{CCE923EB-2D15-4268-9D67-B745499A7397}"/>
               </a:ext>
             </a:extLst>
           </p:cNvPr>
@@ -11699,7 +11697,7 @@
           <p:cNvPr id="31" name="">
             <a:extLst xmlns:a="http://schemas.openxmlformats.org/drawingml/2006/main">
               <a:ext uri="{FF2B5EF4-FFF2-40B4-BE49-F238E27FC236}">
-                <a16:creationId xmlns:a16="http://schemas.microsoft.com/office/drawing/2014/main" id="{131AA1EC-AFE8-4EA3-904C-203932E842A8}"/>
+                <a16:creationId xmlns:a16="http://schemas.microsoft.com/office/drawing/2014/main" id="{4522D804-59CD-4F54-8860-CB2EB6AE3002}"/>
               </a:ext>
             </a:extLst>
           </p:cNvPr>
@@ -11734,7 +11732,7 @@
           <p:cNvPr id="32" name="">
             <a:extLst xmlns:a="http://schemas.openxmlformats.org/drawingml/2006/main">
               <a:ext uri="{FF2B5EF4-FFF2-40B4-BE49-F238E27FC236}">
-                <a16:creationId xmlns:a16="http://schemas.microsoft.com/office/drawing/2014/main" id="{A55F2B5B-FADF-4A61-81AC-0801DC1F54DC}"/>
+                <a16:creationId xmlns:a16="http://schemas.microsoft.com/office/drawing/2014/main" id="{1931B068-DA4A-47FE-B951-5BF04D749E4F}"/>
               </a:ext>
             </a:extLst>
           </p:cNvPr>
@@ -11769,7 +11767,7 @@
           <p:cNvPr id="33" name="">
             <a:extLst xmlns:a="http://schemas.openxmlformats.org/drawingml/2006/main">
               <a:ext uri="{FF2B5EF4-FFF2-40B4-BE49-F238E27FC236}">
-                <a16:creationId xmlns:a16="http://schemas.microsoft.com/office/drawing/2014/main" id="{3EC178AD-579B-4776-9C4B-2B09EFD20F4C}"/>
+                <a16:creationId xmlns:a16="http://schemas.microsoft.com/office/drawing/2014/main" id="{C0EF6F72-8623-4C6B-863A-1ACD99BD44FA}"/>
               </a:ext>
             </a:extLst>
           </p:cNvPr>
@@ -11833,7 +11831,7 @@
           <p:cNvPr id="34" name="">
             <a:extLst xmlns:a="http://schemas.openxmlformats.org/drawingml/2006/main">
               <a:ext uri="{FF2B5EF4-FFF2-40B4-BE49-F238E27FC236}">
-                <a16:creationId xmlns:a16="http://schemas.microsoft.com/office/drawing/2014/main" id="{06781570-B046-46E8-8D32-B09738173F6C}"/>
+                <a16:creationId xmlns:a16="http://schemas.microsoft.com/office/drawing/2014/main" id="{3FA9EDC4-8D64-41B7-B689-0F6CFF8D35C4}"/>
               </a:ext>
             </a:extLst>
           </p:cNvPr>
@@ -11897,7 +11895,7 @@
           <p:cNvPr id="35" name="">
             <a:extLst xmlns:a="http://schemas.openxmlformats.org/drawingml/2006/main">
               <a:ext uri="{FF2B5EF4-FFF2-40B4-BE49-F238E27FC236}">
-                <a16:creationId xmlns:a16="http://schemas.microsoft.com/office/drawing/2014/main" id="{13B784D5-A901-4B4A-AFC4-89EF58275EA5}"/>
+                <a16:creationId xmlns:a16="http://schemas.microsoft.com/office/drawing/2014/main" id="{C58E438B-97E6-4F01-92D5-2C65FE616F3F}"/>
               </a:ext>
             </a:extLst>
           </p:cNvPr>
@@ -11961,7 +11959,7 @@
           <p:cNvPr id="36" name="">
             <a:extLst xmlns:a="http://schemas.openxmlformats.org/drawingml/2006/main">
               <a:ext uri="{FF2B5EF4-FFF2-40B4-BE49-F238E27FC236}">
-                <a16:creationId xmlns:a16="http://schemas.microsoft.com/office/drawing/2014/main" id="{EAE427C9-9368-4043-A81B-EF7EA19CB394}"/>
+                <a16:creationId xmlns:a16="http://schemas.microsoft.com/office/drawing/2014/main" id="{07677302-4378-4EEC-801E-AE552A1E6E75}"/>
               </a:ext>
             </a:extLst>
           </p:cNvPr>
@@ -11996,7 +11994,7 @@
           <p:cNvPr id="37" name="">
             <a:extLst xmlns:a="http://schemas.openxmlformats.org/drawingml/2006/main">
               <a:ext uri="{FF2B5EF4-FFF2-40B4-BE49-F238E27FC236}">
-                <a16:creationId xmlns:a16="http://schemas.microsoft.com/office/drawing/2014/main" id="{FEA9469C-B9C5-4927-B269-CE37C7250B55}"/>
+                <a16:creationId xmlns:a16="http://schemas.microsoft.com/office/drawing/2014/main" id="{61C46706-6CB3-427D-857D-FD7EFC14AB2F}"/>
               </a:ext>
             </a:extLst>
           </p:cNvPr>
@@ -12060,7 +12058,7 @@
           <p:cNvPr id="38" name="">
             <a:extLst xmlns:a="http://schemas.openxmlformats.org/drawingml/2006/main">
               <a:ext uri="{FF2B5EF4-FFF2-40B4-BE49-F238E27FC236}">
-                <a16:creationId xmlns:a16="http://schemas.microsoft.com/office/drawing/2014/main" id="{E91D0F39-B6CC-404B-9E42-D63C9B6D1F6A}"/>
+                <a16:creationId xmlns:a16="http://schemas.microsoft.com/office/drawing/2014/main" id="{B1329BB4-9C8B-4363-B7E3-9E27526494BE}"/>
               </a:ext>
             </a:extLst>
           </p:cNvPr>
@@ -12124,7 +12122,7 @@
           <p:cNvPr id="39" name="">
             <a:extLst xmlns:a="http://schemas.openxmlformats.org/drawingml/2006/main">
               <a:ext uri="{FF2B5EF4-FFF2-40B4-BE49-F238E27FC236}">
-                <a16:creationId xmlns:a16="http://schemas.microsoft.com/office/drawing/2014/main" id="{F6D61D87-501F-40C3-A590-52F04172CAC0}"/>
+                <a16:creationId xmlns:a16="http://schemas.microsoft.com/office/drawing/2014/main" id="{5C9941B4-69C6-4434-95F4-1E681ACB1010}"/>
               </a:ext>
             </a:extLst>
           </p:cNvPr>
@@ -12188,7 +12186,7 @@
           <p:cNvPr id="40" name="">
             <a:extLst xmlns:a="http://schemas.openxmlformats.org/drawingml/2006/main">
               <a:ext uri="{FF2B5EF4-FFF2-40B4-BE49-F238E27FC236}">
-                <a16:creationId xmlns:a16="http://schemas.microsoft.com/office/drawing/2014/main" id="{753808A3-C735-4231-AD29-7DA9ED66AC4F}"/>
+                <a16:creationId xmlns:a16="http://schemas.microsoft.com/office/drawing/2014/main" id="{B7D3C9FB-930A-4C37-ABE2-6AB2F1D9D7E2}"/>
               </a:ext>
             </a:extLst>
           </p:cNvPr>
@@ -12223,7 +12221,7 @@
           <p:cNvPr id="41" name="">
             <a:extLst xmlns:a="http://schemas.openxmlformats.org/drawingml/2006/main">
               <a:ext uri="{FF2B5EF4-FFF2-40B4-BE49-F238E27FC236}">
-                <a16:creationId xmlns:a16="http://schemas.microsoft.com/office/drawing/2014/main" id="{F91D2DBF-B1D1-4C0E-9CF8-D015C1618238}"/>
+                <a16:creationId xmlns:a16="http://schemas.microsoft.com/office/drawing/2014/main" id="{D984C0E0-0180-492B-B758-A3BD3B4DE2D8}"/>
               </a:ext>
             </a:extLst>
           </p:cNvPr>
@@ -12258,7 +12256,7 @@
           <p:cNvPr id="42" name="">
             <a:extLst xmlns:a="http://schemas.openxmlformats.org/drawingml/2006/main">
               <a:ext uri="{FF2B5EF4-FFF2-40B4-BE49-F238E27FC236}">
-                <a16:creationId xmlns:a16="http://schemas.microsoft.com/office/drawing/2014/main" id="{8AB2F1AD-35DA-4015-857A-2362C8EC6EBA}"/>
+                <a16:creationId xmlns:a16="http://schemas.microsoft.com/office/drawing/2014/main" id="{5837A3C7-5FCC-42B9-99A4-95F50ECD1294}"/>
               </a:ext>
             </a:extLst>
           </p:cNvPr>
@@ -12293,7 +12291,7 @@
           <p:cNvPr id="43" name="kicker-06-marker">
             <a:extLst xmlns:a="http://schemas.openxmlformats.org/drawingml/2006/main">
               <a:ext uri="{FF2B5EF4-FFF2-40B4-BE49-F238E27FC236}">
-                <a16:creationId xmlns:a16="http://schemas.microsoft.com/office/drawing/2014/main" id="{15D9927B-AD80-4DBE-84B5-3E54BBCF098E}"/>
+                <a16:creationId xmlns:a16="http://schemas.microsoft.com/office/drawing/2014/main" id="{4ECEEF8B-59A4-4C22-BB6C-6485E8542B1A}"/>
               </a:ext>
             </a:extLst>
           </p:cNvPr>
@@ -12328,7 +12326,7 @@
           <p:cNvPr id="44" name="kicker-06-label">
             <a:extLst xmlns:a="http://schemas.openxmlformats.org/drawingml/2006/main">
               <a:ext uri="{FF2B5EF4-FFF2-40B4-BE49-F238E27FC236}">
-                <a16:creationId xmlns:a16="http://schemas.microsoft.com/office/drawing/2014/main" id="{7EEAD078-1627-4CFE-BE38-01F75F8BC58A}"/>
+                <a16:creationId xmlns:a16="http://schemas.microsoft.com/office/drawing/2014/main" id="{3957D0A0-9A14-4611-A22A-0947E9BCAD08}"/>
               </a:ext>
             </a:extLst>
           </p:cNvPr>
@@ -12392,7 +12390,7 @@
           <p:cNvPr id="45" name="">
             <a:extLst xmlns:a="http://schemas.openxmlformats.org/drawingml/2006/main">
               <a:ext uri="{FF2B5EF4-FFF2-40B4-BE49-F238E27FC236}">
-                <a16:creationId xmlns:a16="http://schemas.microsoft.com/office/drawing/2014/main" id="{2B648053-17EF-453C-91AD-402E69BFE318}"/>
+                <a16:creationId xmlns:a16="http://schemas.microsoft.com/office/drawing/2014/main" id="{05FF6AD6-4BA4-4A6A-A26D-9FAF6DC3E80B}"/>
               </a:ext>
             </a:extLst>
           </p:cNvPr>
@@ -12456,7 +12454,7 @@
           <p:cNvPr id="46" name="">
             <a:extLst xmlns:a="http://schemas.openxmlformats.org/drawingml/2006/main">
               <a:ext uri="{FF2B5EF4-FFF2-40B4-BE49-F238E27FC236}">
-                <a16:creationId xmlns:a16="http://schemas.microsoft.com/office/drawing/2014/main" id="{0DEAB684-48E0-4125-B9B8-A6C2A6238535}"/>
+                <a16:creationId xmlns:a16="http://schemas.microsoft.com/office/drawing/2014/main" id="{55F63386-98CB-4F5A-885A-FAC5BEAF0807}"/>
               </a:ext>
             </a:extLst>
           </p:cNvPr>
@@ -12520,7 +12518,7 @@
           <p:cNvPr id="47" name="">
             <a:extLst xmlns:a="http://schemas.openxmlformats.org/drawingml/2006/main">
               <a:ext uri="{FF2B5EF4-FFF2-40B4-BE49-F238E27FC236}">
-                <a16:creationId xmlns:a16="http://schemas.microsoft.com/office/drawing/2014/main" id="{8A4906D6-BF6D-437E-92E5-5DB3C3B0FBD5}"/>
+                <a16:creationId xmlns:a16="http://schemas.microsoft.com/office/drawing/2014/main" id="{AC2A22ED-B945-427E-87EC-C59586C01B39}"/>
               </a:ext>
             </a:extLst>
           </p:cNvPr>
@@ -12555,7 +12553,7 @@
           <p:cNvPr id="48" name="">
             <a:extLst xmlns:a="http://schemas.openxmlformats.org/drawingml/2006/main">
               <a:ext uri="{FF2B5EF4-FFF2-40B4-BE49-F238E27FC236}">
-                <a16:creationId xmlns:a16="http://schemas.microsoft.com/office/drawing/2014/main" id="{145A7072-75F6-4ACE-A432-43108FFC3C2C}"/>
+                <a16:creationId xmlns:a16="http://schemas.microsoft.com/office/drawing/2014/main" id="{450013A2-8E79-4501-8CD0-5545C160ED03}"/>
               </a:ext>
             </a:extLst>
           </p:cNvPr>
@@ -12590,7 +12588,7 @@
           <p:cNvPr id="49" name="">
             <a:extLst xmlns:a="http://schemas.openxmlformats.org/drawingml/2006/main">
               <a:ext uri="{FF2B5EF4-FFF2-40B4-BE49-F238E27FC236}">
-                <a16:creationId xmlns:a16="http://schemas.microsoft.com/office/drawing/2014/main" id="{CF6CF04D-E841-4626-AA45-682BD662F411}"/>
+                <a16:creationId xmlns:a16="http://schemas.microsoft.com/office/drawing/2014/main" id="{186634A5-4888-4616-B2F9-E32FE89BF6A8}"/>
               </a:ext>
             </a:extLst>
           </p:cNvPr>
@@ -12625,7 +12623,7 @@
           <p:cNvPr id="50" name="">
             <a:extLst xmlns:a="http://schemas.openxmlformats.org/drawingml/2006/main">
               <a:ext uri="{FF2B5EF4-FFF2-40B4-BE49-F238E27FC236}">
-                <a16:creationId xmlns:a16="http://schemas.microsoft.com/office/drawing/2014/main" id="{97F99186-7813-4951-83BC-8B2842CB8CF8}"/>
+                <a16:creationId xmlns:a16="http://schemas.microsoft.com/office/drawing/2014/main" id="{710AD536-7FCB-4B45-97A8-C7A0A30ACA84}"/>
               </a:ext>
             </a:extLst>
           </p:cNvPr>
@@ -12660,7 +12658,7 @@
           <p:cNvPr id="51" name="">
             <a:extLst xmlns:a="http://schemas.openxmlformats.org/drawingml/2006/main">
               <a:ext uri="{FF2B5EF4-FFF2-40B4-BE49-F238E27FC236}">
-                <a16:creationId xmlns:a16="http://schemas.microsoft.com/office/drawing/2014/main" id="{F9C057A5-018C-48C8-9DC8-EDBD2588CB84}"/>
+                <a16:creationId xmlns:a16="http://schemas.microsoft.com/office/drawing/2014/main" id="{DA4E93AA-784C-4A39-AEFE-D6418BAB567D}"/>
               </a:ext>
             </a:extLst>
           </p:cNvPr>
@@ -12724,7 +12722,7 @@
           <p:cNvPr id="52" name="">
             <a:extLst xmlns:a="http://schemas.openxmlformats.org/drawingml/2006/main">
               <a:ext uri="{FF2B5EF4-FFF2-40B4-BE49-F238E27FC236}">
-                <a16:creationId xmlns:a16="http://schemas.microsoft.com/office/drawing/2014/main" id="{D8CDFD94-23B5-4B43-AD12-9C2F77376DD8}"/>
+                <a16:creationId xmlns:a16="http://schemas.microsoft.com/office/drawing/2014/main" id="{6C42642F-FAB9-4385-AEE7-E9E88FEC420E}"/>
               </a:ext>
             </a:extLst>
           </p:cNvPr>
@@ -12788,7 +12786,7 @@
           <p:cNvPr id="53" name="">
             <a:extLst xmlns:a="http://schemas.openxmlformats.org/drawingml/2006/main">
               <a:ext uri="{FF2B5EF4-FFF2-40B4-BE49-F238E27FC236}">
-                <a16:creationId xmlns:a16="http://schemas.microsoft.com/office/drawing/2014/main" id="{BE152609-9062-4180-A5D1-95EC73D159A8}"/>
+                <a16:creationId xmlns:a16="http://schemas.microsoft.com/office/drawing/2014/main" id="{0ABBA026-352A-45C1-9C2F-30079A25158E}"/>
               </a:ext>
             </a:extLst>
           </p:cNvPr>
@@ -12850,7 +12848,7 @@
     </p:spTree>
     <p:extLst>
       <p:ext uri="{BB962C8B-B14F-4D97-AF65-F5344CB8AC3E}">
-        <p14:creationId xmlns:p14="http://schemas.microsoft.com/office/powerpoint/2010/main" val="994125332"/>
+        <p14:creationId xmlns:p14="http://schemas.microsoft.com/office/powerpoint/2010/main" val="294930387"/>
       </p:ext>
     </p:extLst>
   </p:cSld>
@@ -12874,7 +12872,7 @@
           <p:cNvPr id="1" name="">
             <a:extLst xmlns:a="http://schemas.openxmlformats.org/drawingml/2006/main">
               <a:ext uri="{FF2B5EF4-FFF2-40B4-BE49-F238E27FC236}">
-                <a16:creationId xmlns:a16="http://schemas.microsoft.com/office/drawing/2014/main" id="{9BFED101-48A0-4109-B88E-5C94683658F9}"/>
+                <a16:creationId xmlns:a16="http://schemas.microsoft.com/office/drawing/2014/main" id="{8D0C1EC6-A81D-46FB-9BB1-6A6B546DE2C6}"/>
               </a:ext>
             </a:extLst>
           </p:cNvPr>
@@ -12909,7 +12907,7 @@
           <p:cNvPr id="2" name="">
             <a:extLst xmlns:a="http://schemas.openxmlformats.org/drawingml/2006/main">
               <a:ext uri="{FF2B5EF4-FFF2-40B4-BE49-F238E27FC236}">
-                <a16:creationId xmlns:a16="http://schemas.microsoft.com/office/drawing/2014/main" id="{BD10725C-3597-445A-86D1-3A2C2F26AD96}"/>
+                <a16:creationId xmlns:a16="http://schemas.microsoft.com/office/drawing/2014/main" id="{EC90B8A6-B45C-45E6-BD05-5E8887D5A609}"/>
               </a:ext>
             </a:extLst>
           </p:cNvPr>
@@ -12944,7 +12942,7 @@
           <p:cNvPr id="3" name="">
             <a:extLst xmlns:a="http://schemas.openxmlformats.org/drawingml/2006/main">
               <a:ext uri="{FF2B5EF4-FFF2-40B4-BE49-F238E27FC236}">
-                <a16:creationId xmlns:a16="http://schemas.microsoft.com/office/drawing/2014/main" id="{801AE3C1-8F96-4574-AD3C-A837F49FE005}"/>
+                <a16:creationId xmlns:a16="http://schemas.microsoft.com/office/drawing/2014/main" id="{F63A0B5F-24F0-4CD6-84A0-1B5583E400C7}"/>
               </a:ext>
             </a:extLst>
           </p:cNvPr>
@@ -12979,7 +12977,7 @@
           <p:cNvPr id="4" name="kicker-06-marker">
             <a:extLst xmlns:a="http://schemas.openxmlformats.org/drawingml/2006/main">
               <a:ext uri="{FF2B5EF4-FFF2-40B4-BE49-F238E27FC236}">
-                <a16:creationId xmlns:a16="http://schemas.microsoft.com/office/drawing/2014/main" id="{45821B9F-F9DD-4F39-BA30-0125B471778E}"/>
+                <a16:creationId xmlns:a16="http://schemas.microsoft.com/office/drawing/2014/main" id="{B509D230-3825-4F10-BE1D-DD61DD6F2D67}"/>
               </a:ext>
             </a:extLst>
           </p:cNvPr>
@@ -13014,7 +13012,7 @@
           <p:cNvPr id="5" name="kicker-06-label">
             <a:extLst xmlns:a="http://schemas.openxmlformats.org/drawingml/2006/main">
               <a:ext uri="{FF2B5EF4-FFF2-40B4-BE49-F238E27FC236}">
-                <a16:creationId xmlns:a16="http://schemas.microsoft.com/office/drawing/2014/main" id="{474CD67E-9A32-4EEF-86B0-2F582BC45565}"/>
+                <a16:creationId xmlns:a16="http://schemas.microsoft.com/office/drawing/2014/main" id="{50E195D5-DCC1-4D46-B167-3C2093FBFFC1}"/>
               </a:ext>
             </a:extLst>
           </p:cNvPr>
@@ -13078,7 +13076,7 @@
           <p:cNvPr id="6" name="">
             <a:extLst xmlns:a="http://schemas.openxmlformats.org/drawingml/2006/main">
               <a:ext uri="{FF2B5EF4-FFF2-40B4-BE49-F238E27FC236}">
-                <a16:creationId xmlns:a16="http://schemas.microsoft.com/office/drawing/2014/main" id="{9B92A41D-4F2A-4B04-A107-A6D0ADB980BB}"/>
+                <a16:creationId xmlns:a16="http://schemas.microsoft.com/office/drawing/2014/main" id="{A68EACFC-805C-4228-9AC9-AD4FEB0F8EFB}"/>
               </a:ext>
             </a:extLst>
           </p:cNvPr>
@@ -13142,7 +13140,7 @@
           <p:cNvPr id="7" name="">
             <a:extLst xmlns:a="http://schemas.openxmlformats.org/drawingml/2006/main">
               <a:ext uri="{FF2B5EF4-FFF2-40B4-BE49-F238E27FC236}">
-                <a16:creationId xmlns:a16="http://schemas.microsoft.com/office/drawing/2014/main" id="{62AE01AB-C945-4FFF-8D73-823FC9181CE4}"/>
+                <a16:creationId xmlns:a16="http://schemas.microsoft.com/office/drawing/2014/main" id="{86F7AE4A-A35F-4550-BC33-03FE1375BCC0}"/>
               </a:ext>
             </a:extLst>
           </p:cNvPr>
@@ -13206,7 +13204,7 @@
           <p:cNvPr id="8" name="">
             <a:extLst xmlns:a="http://schemas.openxmlformats.org/drawingml/2006/main">
               <a:ext uri="{FF2B5EF4-FFF2-40B4-BE49-F238E27FC236}">
-                <a16:creationId xmlns:a16="http://schemas.microsoft.com/office/drawing/2014/main" id="{6FC60E6E-7962-4F02-A5F7-C37F3ACDDD28}"/>
+                <a16:creationId xmlns:a16="http://schemas.microsoft.com/office/drawing/2014/main" id="{5B93AB3B-A207-42A9-9B7C-3B83E350C317}"/>
               </a:ext>
             </a:extLst>
           </p:cNvPr>
@@ -13241,7 +13239,7 @@
           <p:cNvPr id="9" name="">
             <a:extLst xmlns:a="http://schemas.openxmlformats.org/drawingml/2006/main">
               <a:ext uri="{FF2B5EF4-FFF2-40B4-BE49-F238E27FC236}">
-                <a16:creationId xmlns:a16="http://schemas.microsoft.com/office/drawing/2014/main" id="{DEEA341C-7D77-41BB-8BF9-9DE21B31C4F5}"/>
+                <a16:creationId xmlns:a16="http://schemas.microsoft.com/office/drawing/2014/main" id="{E899C1AD-1DB6-4880-B465-4EE59634947B}"/>
               </a:ext>
             </a:extLst>
           </p:cNvPr>
@@ -13305,7 +13303,7 @@
           <p:cNvPr id="10" name="">
             <a:extLst xmlns:a="http://schemas.openxmlformats.org/drawingml/2006/main">
               <a:ext uri="{FF2B5EF4-FFF2-40B4-BE49-F238E27FC236}">
-                <a16:creationId xmlns:a16="http://schemas.microsoft.com/office/drawing/2014/main" id="{6277A790-9806-4768-BA85-D81F166159AD}"/>
+                <a16:creationId xmlns:a16="http://schemas.microsoft.com/office/drawing/2014/main" id="{A6F9431B-2DE1-4CE4-A8B8-A3F2416CEA87}"/>
               </a:ext>
             </a:extLst>
           </p:cNvPr>
@@ -13369,7 +13367,7 @@
           <p:cNvPr id="11" name="">
             <a:extLst xmlns:a="http://schemas.openxmlformats.org/drawingml/2006/main">
               <a:ext uri="{FF2B5EF4-FFF2-40B4-BE49-F238E27FC236}">
-                <a16:creationId xmlns:a16="http://schemas.microsoft.com/office/drawing/2014/main" id="{D6B48FAA-5750-4AEE-8CFF-D79D338FCE24}"/>
+                <a16:creationId xmlns:a16="http://schemas.microsoft.com/office/drawing/2014/main" id="{9F0FB4C5-4344-4464-BAE7-1FDAE593801D}"/>
               </a:ext>
             </a:extLst>
           </p:cNvPr>
@@ -13433,7 +13431,7 @@
           <p:cNvPr id="12" name="">
             <a:extLst xmlns:a="http://schemas.openxmlformats.org/drawingml/2006/main">
               <a:ext uri="{FF2B5EF4-FFF2-40B4-BE49-F238E27FC236}">
-                <a16:creationId xmlns:a16="http://schemas.microsoft.com/office/drawing/2014/main" id="{52428C86-EB09-4265-ADE6-CEF68CA5602A}"/>
+                <a16:creationId xmlns:a16="http://schemas.microsoft.com/office/drawing/2014/main" id="{6470381F-3C6A-4023-BD82-4A8299D21D56}"/>
               </a:ext>
             </a:extLst>
           </p:cNvPr>
@@ -13468,7 +13466,7 @@
           <p:cNvPr id="13" name="">
             <a:extLst xmlns:a="http://schemas.openxmlformats.org/drawingml/2006/main">
               <a:ext uri="{FF2B5EF4-FFF2-40B4-BE49-F238E27FC236}">
-                <a16:creationId xmlns:a16="http://schemas.microsoft.com/office/drawing/2014/main" id="{B8BED535-5695-4B3A-9794-022C41391AB8}"/>
+                <a16:creationId xmlns:a16="http://schemas.microsoft.com/office/drawing/2014/main" id="{E8938E0B-749A-4447-B7F9-F4BE3D84A069}"/>
               </a:ext>
             </a:extLst>
           </p:cNvPr>
@@ -13501,7 +13499,7 @@
           <p:cNvPr id="14" name="">
             <a:extLst xmlns:a="http://schemas.openxmlformats.org/drawingml/2006/main">
               <a:ext uri="{FF2B5EF4-FFF2-40B4-BE49-F238E27FC236}">
-                <a16:creationId xmlns:a16="http://schemas.microsoft.com/office/drawing/2014/main" id="{880E9846-779B-446C-9EEE-3550674C5723}"/>
+                <a16:creationId xmlns:a16="http://schemas.microsoft.com/office/drawing/2014/main" id="{88A1B753-9EBD-4450-AD15-AED59B57D465}"/>
               </a:ext>
             </a:extLst>
           </p:cNvPr>
@@ -13536,7 +13534,7 @@
           <p:cNvPr id="15" name="">
             <a:extLst xmlns:a="http://schemas.openxmlformats.org/drawingml/2006/main">
               <a:ext uri="{FF2B5EF4-FFF2-40B4-BE49-F238E27FC236}">
-                <a16:creationId xmlns:a16="http://schemas.microsoft.com/office/drawing/2014/main" id="{3F0BC5F3-37A6-4432-9752-672B4C4CB223}"/>
+                <a16:creationId xmlns:a16="http://schemas.microsoft.com/office/drawing/2014/main" id="{9B4C1DBA-30EF-4677-A7B4-D5E594D8888A}"/>
               </a:ext>
             </a:extLst>
           </p:cNvPr>
@@ -13600,7 +13598,7 @@
           <p:cNvPr id="16" name="">
             <a:extLst xmlns:a="http://schemas.openxmlformats.org/drawingml/2006/main">
               <a:ext uri="{FF2B5EF4-FFF2-40B4-BE49-F238E27FC236}">
-                <a16:creationId xmlns:a16="http://schemas.microsoft.com/office/drawing/2014/main" id="{EB0BF965-05A3-4115-9E0A-1F8AA9318C6F}"/>
+                <a16:creationId xmlns:a16="http://schemas.microsoft.com/office/drawing/2014/main" id="{4B305B05-27E3-4965-88C6-1DC1D91860D3}"/>
               </a:ext>
             </a:extLst>
           </p:cNvPr>
@@ -13635,7 +13633,7 @@
           <p:cNvPr id="17" name="">
             <a:extLst xmlns:a="http://schemas.openxmlformats.org/drawingml/2006/main">
               <a:ext uri="{FF2B5EF4-FFF2-40B4-BE49-F238E27FC236}">
-                <a16:creationId xmlns:a16="http://schemas.microsoft.com/office/drawing/2014/main" id="{F1706E8D-9886-4E9B-A2DC-FED2BC557EE8}"/>
+                <a16:creationId xmlns:a16="http://schemas.microsoft.com/office/drawing/2014/main" id="{85F9802B-A237-4EAA-9380-225847EAC700}"/>
               </a:ext>
             </a:extLst>
           </p:cNvPr>
@@ -13699,7 +13697,7 @@
           <p:cNvPr id="18" name="">
             <a:extLst xmlns:a="http://schemas.openxmlformats.org/drawingml/2006/main">
               <a:ext uri="{FF2B5EF4-FFF2-40B4-BE49-F238E27FC236}">
-                <a16:creationId xmlns:a16="http://schemas.microsoft.com/office/drawing/2014/main" id="{91AC0B8F-2376-4AB0-9407-1C2B041A6CA5}"/>
+                <a16:creationId xmlns:a16="http://schemas.microsoft.com/office/drawing/2014/main" id="{70071C15-4D2E-4A49-AC07-DF4E39AEBA9B}"/>
               </a:ext>
             </a:extLst>
           </p:cNvPr>
@@ -13734,7 +13732,7 @@
           <p:cNvPr id="19" name="">
             <a:extLst xmlns:a="http://schemas.openxmlformats.org/drawingml/2006/main">
               <a:ext uri="{FF2B5EF4-FFF2-40B4-BE49-F238E27FC236}">
-                <a16:creationId xmlns:a16="http://schemas.microsoft.com/office/drawing/2014/main" id="{68C91ED9-75FF-4435-A00D-143FBD1D99E9}"/>
+                <a16:creationId xmlns:a16="http://schemas.microsoft.com/office/drawing/2014/main" id="{CBB9A655-F014-4559-AEF8-B7A22E3BCD6F}"/>
               </a:ext>
             </a:extLst>
           </p:cNvPr>
@@ -13798,7 +13796,7 @@
           <p:cNvPr id="20" name="">
             <a:extLst xmlns:a="http://schemas.openxmlformats.org/drawingml/2006/main">
               <a:ext uri="{FF2B5EF4-FFF2-40B4-BE49-F238E27FC236}">
-                <a16:creationId xmlns:a16="http://schemas.microsoft.com/office/drawing/2014/main" id="{0E902CF8-6E67-4237-8793-29A7FD7E999E}"/>
+                <a16:creationId xmlns:a16="http://schemas.microsoft.com/office/drawing/2014/main" id="{B56EF0BA-6CD4-4A33-9F54-A450F9AA74A2}"/>
               </a:ext>
             </a:extLst>
           </p:cNvPr>
@@ -13833,7 +13831,7 @@
           <p:cNvPr id="21" name="">
             <a:extLst xmlns:a="http://schemas.openxmlformats.org/drawingml/2006/main">
               <a:ext uri="{FF2B5EF4-FFF2-40B4-BE49-F238E27FC236}">
-                <a16:creationId xmlns:a16="http://schemas.microsoft.com/office/drawing/2014/main" id="{EE59751E-1A07-4671-9EAE-DA77257FB052}"/>
+                <a16:creationId xmlns:a16="http://schemas.microsoft.com/office/drawing/2014/main" id="{764484EB-A881-4244-9728-D90113D77E6C}"/>
               </a:ext>
             </a:extLst>
           </p:cNvPr>
@@ -13897,7 +13895,7 @@
           <p:cNvPr id="22" name="">
             <a:extLst xmlns:a="http://schemas.openxmlformats.org/drawingml/2006/main">
               <a:ext uri="{FF2B5EF4-FFF2-40B4-BE49-F238E27FC236}">
-                <a16:creationId xmlns:a16="http://schemas.microsoft.com/office/drawing/2014/main" id="{23E61992-6B22-4032-A4CF-C005FB0279A5}"/>
+                <a16:creationId xmlns:a16="http://schemas.microsoft.com/office/drawing/2014/main" id="{64E50D3A-4B7C-4C60-962B-0F2D7A6A211F}"/>
               </a:ext>
             </a:extLst>
           </p:cNvPr>
@@ -13932,7 +13930,7 @@
           <p:cNvPr id="23" name="">
             <a:extLst xmlns:a="http://schemas.openxmlformats.org/drawingml/2006/main">
               <a:ext uri="{FF2B5EF4-FFF2-40B4-BE49-F238E27FC236}">
-                <a16:creationId xmlns:a16="http://schemas.microsoft.com/office/drawing/2014/main" id="{AEE71B73-DCDA-4A5F-BDD4-3EA2C7603DD4}"/>
+                <a16:creationId xmlns:a16="http://schemas.microsoft.com/office/drawing/2014/main" id="{68D95064-73CC-4A9F-9DE6-582E1D3F7ED1}"/>
               </a:ext>
             </a:extLst>
           </p:cNvPr>
@@ -13996,7 +13994,7 @@
           <p:cNvPr id="24" name="">
             <a:extLst xmlns:a="http://schemas.openxmlformats.org/drawingml/2006/main">
               <a:ext uri="{FF2B5EF4-FFF2-40B4-BE49-F238E27FC236}">
-                <a16:creationId xmlns:a16="http://schemas.microsoft.com/office/drawing/2014/main" id="{B4BBB140-45BE-4B45-B73A-4914ECD7F4E1}"/>
+                <a16:creationId xmlns:a16="http://schemas.microsoft.com/office/drawing/2014/main" id="{4585CCB8-1936-4B0D-BE34-4A10CDB747C5}"/>
               </a:ext>
             </a:extLst>
           </p:cNvPr>
@@ -14031,7 +14029,7 @@
           <p:cNvPr id="25" name="">
             <a:extLst xmlns:a="http://schemas.openxmlformats.org/drawingml/2006/main">
               <a:ext uri="{FF2B5EF4-FFF2-40B4-BE49-F238E27FC236}">
-                <a16:creationId xmlns:a16="http://schemas.microsoft.com/office/drawing/2014/main" id="{348B1DB0-8E88-4CDB-A163-FFC4A76B92DF}"/>
+                <a16:creationId xmlns:a16="http://schemas.microsoft.com/office/drawing/2014/main" id="{1D4813ED-BDF7-43D6-9D49-57AAB8241FA0}"/>
               </a:ext>
             </a:extLst>
           </p:cNvPr>
@@ -14095,7 +14093,7 @@
           <p:cNvPr id="26" name="">
             <a:extLst xmlns:a="http://schemas.openxmlformats.org/drawingml/2006/main">
               <a:ext uri="{FF2B5EF4-FFF2-40B4-BE49-F238E27FC236}">
-                <a16:creationId xmlns:a16="http://schemas.microsoft.com/office/drawing/2014/main" id="{F835D33B-627A-4126-9795-89D361CF49B4}"/>
+                <a16:creationId xmlns:a16="http://schemas.microsoft.com/office/drawing/2014/main" id="{04AE5831-5E39-43A3-BA1B-2E85DEA6DA59}"/>
               </a:ext>
             </a:extLst>
           </p:cNvPr>
@@ -14130,7 +14128,7 @@
           <p:cNvPr id="27" name="">
             <a:extLst xmlns:a="http://schemas.openxmlformats.org/drawingml/2006/main">
               <a:ext uri="{FF2B5EF4-FFF2-40B4-BE49-F238E27FC236}">
-                <a16:creationId xmlns:a16="http://schemas.microsoft.com/office/drawing/2014/main" id="{F5912855-E691-4355-A598-70756CA9685B}"/>
+                <a16:creationId xmlns:a16="http://schemas.microsoft.com/office/drawing/2014/main" id="{8F7BD300-1BA2-48CA-BFBD-247EA71423B0}"/>
               </a:ext>
             </a:extLst>
           </p:cNvPr>
@@ -14194,7 +14192,7 @@
           <p:cNvPr id="28" name="">
             <a:extLst xmlns:a="http://schemas.openxmlformats.org/drawingml/2006/main">
               <a:ext uri="{FF2B5EF4-FFF2-40B4-BE49-F238E27FC236}">
-                <a16:creationId xmlns:a16="http://schemas.microsoft.com/office/drawing/2014/main" id="{4E128524-9348-483A-8BCE-36F5F7E5DB6E}"/>
+                <a16:creationId xmlns:a16="http://schemas.microsoft.com/office/drawing/2014/main" id="{6211E0CB-0E1B-4319-8748-C6399B595237}"/>
               </a:ext>
             </a:extLst>
           </p:cNvPr>
@@ -14229,7 +14227,7 @@
           <p:cNvPr id="29" name="">
             <a:extLst xmlns:a="http://schemas.openxmlformats.org/drawingml/2006/main">
               <a:ext uri="{FF2B5EF4-FFF2-40B4-BE49-F238E27FC236}">
-                <a16:creationId xmlns:a16="http://schemas.microsoft.com/office/drawing/2014/main" id="{81AD84FB-20F3-4E31-BE82-EDE766C0CB8C}"/>
+                <a16:creationId xmlns:a16="http://schemas.microsoft.com/office/drawing/2014/main" id="{0DB2CF20-58C1-4F2B-9DFF-CD451ADB7741}"/>
               </a:ext>
             </a:extLst>
           </p:cNvPr>
@@ -14293,7 +14291,7 @@
           <p:cNvPr id="30" name="">
             <a:extLst xmlns:a="http://schemas.openxmlformats.org/drawingml/2006/main">
               <a:ext uri="{FF2B5EF4-FFF2-40B4-BE49-F238E27FC236}">
-                <a16:creationId xmlns:a16="http://schemas.microsoft.com/office/drawing/2014/main" id="{A579694A-1B30-4440-93EA-2EEAF6FE93D9}"/>
+                <a16:creationId xmlns:a16="http://schemas.microsoft.com/office/drawing/2014/main" id="{644CFF70-0C9F-4087-A128-9C44A5753ADA}"/>
               </a:ext>
             </a:extLst>
           </p:cNvPr>
@@ -14326,7 +14324,7 @@
           <p:cNvPr id="31" name="">
             <a:extLst xmlns:a="http://schemas.openxmlformats.org/drawingml/2006/main">
               <a:ext uri="{FF2B5EF4-FFF2-40B4-BE49-F238E27FC236}">
-                <a16:creationId xmlns:a16="http://schemas.microsoft.com/office/drawing/2014/main" id="{6EC4BCA4-ECE7-4FF7-8AE0-99780DB25B9C}"/>
+                <a16:creationId xmlns:a16="http://schemas.microsoft.com/office/drawing/2014/main" id="{E88F21A8-C128-465D-A9DB-60115D67DA44}"/>
               </a:ext>
             </a:extLst>
           </p:cNvPr>
@@ -14361,7 +14359,7 @@
           <p:cNvPr id="32" name="">
             <a:extLst xmlns:a="http://schemas.openxmlformats.org/drawingml/2006/main">
               <a:ext uri="{FF2B5EF4-FFF2-40B4-BE49-F238E27FC236}">
-                <a16:creationId xmlns:a16="http://schemas.microsoft.com/office/drawing/2014/main" id="{8B9BA772-4BD9-4F77-B5BB-D3F994454B94}"/>
+                <a16:creationId xmlns:a16="http://schemas.microsoft.com/office/drawing/2014/main" id="{724B8D98-2075-4A12-8FA9-048BA0018998}"/>
               </a:ext>
             </a:extLst>
           </p:cNvPr>
@@ -14425,7 +14423,7 @@
           <p:cNvPr id="33" name="">
             <a:extLst xmlns:a="http://schemas.openxmlformats.org/drawingml/2006/main">
               <a:ext uri="{FF2B5EF4-FFF2-40B4-BE49-F238E27FC236}">
-                <a16:creationId xmlns:a16="http://schemas.microsoft.com/office/drawing/2014/main" id="{5CEAA98E-60ED-49BE-A850-D75DE31C0131}"/>
+                <a16:creationId xmlns:a16="http://schemas.microsoft.com/office/drawing/2014/main" id="{6CEFF2CE-E4C0-4777-B3FA-04D9B793B66F}"/>
               </a:ext>
             </a:extLst>
           </p:cNvPr>
@@ -14479,7 +14477,7 @@
                 <a:ea typeface="Aptos Display"/>
                 <a:cs typeface="Aptos Display"/>
               </a:rPr>
-              <a:t>The artifact passes only if sales, marketing, RevOps, leadership, and an AI agent could inspect it and know what to do next.</a:t>
+              <a:t>The artifact passes only if sales, marketing, RevOps, and leadership can inspect it and know what to do next.</a:t>
             </a:r>
           </a:p>
         </p:txBody>
@@ -14489,7 +14487,7 @@
           <p:cNvPr id="34" name="">
             <a:extLst xmlns:a="http://schemas.openxmlformats.org/drawingml/2006/main">
               <a:ext uri="{FF2B5EF4-FFF2-40B4-BE49-F238E27FC236}">
-                <a16:creationId xmlns:a16="http://schemas.microsoft.com/office/drawing/2014/main" id="{FCFE47E0-6D04-4356-8234-5F27130DD000}"/>
+                <a16:creationId xmlns:a16="http://schemas.microsoft.com/office/drawing/2014/main" id="{88FE8350-D873-415D-9EAD-DB39C91800D3}"/>
               </a:ext>
             </a:extLst>
           </p:cNvPr>
@@ -14553,7 +14551,7 @@
           <p:cNvPr id="35" name="">
             <a:extLst xmlns:a="http://schemas.openxmlformats.org/drawingml/2006/main">
               <a:ext uri="{FF2B5EF4-FFF2-40B4-BE49-F238E27FC236}">
-                <a16:creationId xmlns:a16="http://schemas.microsoft.com/office/drawing/2014/main" id="{78986B46-928A-483A-B024-D9805E7CAC5F}"/>
+                <a16:creationId xmlns:a16="http://schemas.microsoft.com/office/drawing/2014/main" id="{C02195A8-00A9-471F-894D-BC6A0FE3C46A}"/>
               </a:ext>
             </a:extLst>
           </p:cNvPr>
@@ -14588,7 +14586,7 @@
           <p:cNvPr id="36" name="">
             <a:extLst xmlns:a="http://schemas.openxmlformats.org/drawingml/2006/main">
               <a:ext uri="{FF2B5EF4-FFF2-40B4-BE49-F238E27FC236}">
-                <a16:creationId xmlns:a16="http://schemas.microsoft.com/office/drawing/2014/main" id="{391AB8D6-6F1A-4E11-9308-8613D628A7EE}"/>
+                <a16:creationId xmlns:a16="http://schemas.microsoft.com/office/drawing/2014/main" id="{B6FD760A-041C-41A6-B691-F2AF4776B2BC}"/>
               </a:ext>
             </a:extLst>
           </p:cNvPr>
@@ -14652,7 +14650,7 @@
           <p:cNvPr id="37" name="">
             <a:extLst xmlns:a="http://schemas.openxmlformats.org/drawingml/2006/main">
               <a:ext uri="{FF2B5EF4-FFF2-40B4-BE49-F238E27FC236}">
-                <a16:creationId xmlns:a16="http://schemas.microsoft.com/office/drawing/2014/main" id="{849FBF9B-18EF-4E90-859E-6F56F5022860}"/>
+                <a16:creationId xmlns:a16="http://schemas.microsoft.com/office/drawing/2014/main" id="{FC89BFFB-E2EC-4A11-BD56-1EF5C4F9C90F}"/>
               </a:ext>
             </a:extLst>
           </p:cNvPr>
@@ -14716,7 +14714,7 @@
           <p:cNvPr id="38" name="">
             <a:extLst xmlns:a="http://schemas.openxmlformats.org/drawingml/2006/main">
               <a:ext uri="{FF2B5EF4-FFF2-40B4-BE49-F238E27FC236}">
-                <a16:creationId xmlns:a16="http://schemas.microsoft.com/office/drawing/2014/main" id="{F0038E68-3DD7-4FA0-BEAC-174C47508517}"/>
+                <a16:creationId xmlns:a16="http://schemas.microsoft.com/office/drawing/2014/main" id="{4374D1FE-5DB9-4FE9-A712-C9EEB638F8C6}"/>
               </a:ext>
             </a:extLst>
           </p:cNvPr>
@@ -14780,7 +14778,7 @@
           <p:cNvPr id="39" name="">
             <a:extLst xmlns:a="http://schemas.openxmlformats.org/drawingml/2006/main">
               <a:ext uri="{FF2B5EF4-FFF2-40B4-BE49-F238E27FC236}">
-                <a16:creationId xmlns:a16="http://schemas.microsoft.com/office/drawing/2014/main" id="{CAAE5754-058D-40AB-9D5D-7FD78927FEE5}"/>
+                <a16:creationId xmlns:a16="http://schemas.microsoft.com/office/drawing/2014/main" id="{313BA884-82B3-461E-AF8D-597F2E079957}"/>
               </a:ext>
             </a:extLst>
           </p:cNvPr>
@@ -14815,7 +14813,7 @@
           <p:cNvPr id="40" name="">
             <a:extLst xmlns:a="http://schemas.openxmlformats.org/drawingml/2006/main">
               <a:ext uri="{FF2B5EF4-FFF2-40B4-BE49-F238E27FC236}">
-                <a16:creationId xmlns:a16="http://schemas.microsoft.com/office/drawing/2014/main" id="{4D835CFF-4602-403B-8093-F60AEA2F3150}"/>
+                <a16:creationId xmlns:a16="http://schemas.microsoft.com/office/drawing/2014/main" id="{19ABA00F-57F6-4AB2-8F88-24D4DA6278F3}"/>
               </a:ext>
             </a:extLst>
           </p:cNvPr>
@@ -14850,7 +14848,7 @@
           <p:cNvPr id="41" name="">
             <a:extLst xmlns:a="http://schemas.openxmlformats.org/drawingml/2006/main">
               <a:ext uri="{FF2B5EF4-FFF2-40B4-BE49-F238E27FC236}">
-                <a16:creationId xmlns:a16="http://schemas.microsoft.com/office/drawing/2014/main" id="{B85F0EF2-CC4E-4241-9D8C-797D9B2629A3}"/>
+                <a16:creationId xmlns:a16="http://schemas.microsoft.com/office/drawing/2014/main" id="{D946F57F-2540-4A7A-B6F2-0698EEDF6AC7}"/>
               </a:ext>
             </a:extLst>
           </p:cNvPr>
@@ -14885,7 +14883,7 @@
           <p:cNvPr id="42" name="kicker-06-marker">
             <a:extLst xmlns:a="http://schemas.openxmlformats.org/drawingml/2006/main">
               <a:ext uri="{FF2B5EF4-FFF2-40B4-BE49-F238E27FC236}">
-                <a16:creationId xmlns:a16="http://schemas.microsoft.com/office/drawing/2014/main" id="{318C9FF1-1409-485D-81EE-FD6B509E1029}"/>
+                <a16:creationId xmlns:a16="http://schemas.microsoft.com/office/drawing/2014/main" id="{B540FC1B-FDF4-4908-A37C-2FE50E11BE70}"/>
               </a:ext>
             </a:extLst>
           </p:cNvPr>
@@ -14920,7 +14918,7 @@
           <p:cNvPr id="43" name="kicker-06-label">
             <a:extLst xmlns:a="http://schemas.openxmlformats.org/drawingml/2006/main">
               <a:ext uri="{FF2B5EF4-FFF2-40B4-BE49-F238E27FC236}">
-                <a16:creationId xmlns:a16="http://schemas.microsoft.com/office/drawing/2014/main" id="{2720F34E-4CD4-4EEA-AC81-D65AF7D25EDD}"/>
+                <a16:creationId xmlns:a16="http://schemas.microsoft.com/office/drawing/2014/main" id="{89975243-ACBC-498A-9501-92D25C5C5674}"/>
               </a:ext>
             </a:extLst>
           </p:cNvPr>
@@ -14984,7 +14982,7 @@
           <p:cNvPr id="44" name="">
             <a:extLst xmlns:a="http://schemas.openxmlformats.org/drawingml/2006/main">
               <a:ext uri="{FF2B5EF4-FFF2-40B4-BE49-F238E27FC236}">
-                <a16:creationId xmlns:a16="http://schemas.microsoft.com/office/drawing/2014/main" id="{C4B5F8DF-5990-48A5-A079-5A9CE5AC28EC}"/>
+                <a16:creationId xmlns:a16="http://schemas.microsoft.com/office/drawing/2014/main" id="{3FA7135F-F946-4120-BD7E-BF5EC29EDC45}"/>
               </a:ext>
             </a:extLst>
           </p:cNvPr>
@@ -15048,7 +15046,7 @@
           <p:cNvPr id="45" name="">
             <a:extLst xmlns:a="http://schemas.openxmlformats.org/drawingml/2006/main">
               <a:ext uri="{FF2B5EF4-FFF2-40B4-BE49-F238E27FC236}">
-                <a16:creationId xmlns:a16="http://schemas.microsoft.com/office/drawing/2014/main" id="{C5710EE9-32B5-45DF-A306-60C82047A44F}"/>
+                <a16:creationId xmlns:a16="http://schemas.microsoft.com/office/drawing/2014/main" id="{F705A737-7D8C-4C3E-9914-40CCCD31C50F}"/>
               </a:ext>
             </a:extLst>
           </p:cNvPr>
@@ -15112,7 +15110,7 @@
           <p:cNvPr id="46" name="">
             <a:extLst xmlns:a="http://schemas.openxmlformats.org/drawingml/2006/main">
               <a:ext uri="{FF2B5EF4-FFF2-40B4-BE49-F238E27FC236}">
-                <a16:creationId xmlns:a16="http://schemas.microsoft.com/office/drawing/2014/main" id="{7DD7655C-5DEE-48DC-BD46-B08608B1023C}"/>
+                <a16:creationId xmlns:a16="http://schemas.microsoft.com/office/drawing/2014/main" id="{C37AD8BF-0786-48A1-A0E4-339DAA795565}"/>
               </a:ext>
             </a:extLst>
           </p:cNvPr>
@@ -15147,7 +15145,7 @@
           <p:cNvPr id="47" name="">
             <a:extLst xmlns:a="http://schemas.openxmlformats.org/drawingml/2006/main">
               <a:ext uri="{FF2B5EF4-FFF2-40B4-BE49-F238E27FC236}">
-                <a16:creationId xmlns:a16="http://schemas.microsoft.com/office/drawing/2014/main" id="{62257E0B-E234-4390-B6CC-0E3D9BAC6687}"/>
+                <a16:creationId xmlns:a16="http://schemas.microsoft.com/office/drawing/2014/main" id="{73EF7692-42A8-4BA0-AC0C-8CD8FB53B5BE}"/>
               </a:ext>
             </a:extLst>
           </p:cNvPr>
@@ -15182,7 +15180,7 @@
           <p:cNvPr id="48" name="">
             <a:extLst xmlns:a="http://schemas.openxmlformats.org/drawingml/2006/main">
               <a:ext uri="{FF2B5EF4-FFF2-40B4-BE49-F238E27FC236}">
-                <a16:creationId xmlns:a16="http://schemas.microsoft.com/office/drawing/2014/main" id="{8D0E4F94-B7FD-4FBC-A1FD-5B14ABF36AFA}"/>
+                <a16:creationId xmlns:a16="http://schemas.microsoft.com/office/drawing/2014/main" id="{3C46FEE3-3A90-427E-B774-B7FCC795EF51}"/>
               </a:ext>
             </a:extLst>
           </p:cNvPr>
@@ -15217,7 +15215,7 @@
           <p:cNvPr id="49" name="">
             <a:extLst xmlns:a="http://schemas.openxmlformats.org/drawingml/2006/main">
               <a:ext uri="{FF2B5EF4-FFF2-40B4-BE49-F238E27FC236}">
-                <a16:creationId xmlns:a16="http://schemas.microsoft.com/office/drawing/2014/main" id="{ABD360AD-753E-441E-A323-723DD53279F1}"/>
+                <a16:creationId xmlns:a16="http://schemas.microsoft.com/office/drawing/2014/main" id="{9FE8300E-BADF-43D5-BADD-1BA34D20D490}"/>
               </a:ext>
             </a:extLst>
           </p:cNvPr>
@@ -15252,7 +15250,7 @@
           <p:cNvPr id="50" name="">
             <a:extLst xmlns:a="http://schemas.openxmlformats.org/drawingml/2006/main">
               <a:ext uri="{FF2B5EF4-FFF2-40B4-BE49-F238E27FC236}">
-                <a16:creationId xmlns:a16="http://schemas.microsoft.com/office/drawing/2014/main" id="{DC81FF1D-B4FB-4B6C-9A92-E5A38A108CA4}"/>
+                <a16:creationId xmlns:a16="http://schemas.microsoft.com/office/drawing/2014/main" id="{5D8CAF71-8A24-49D3-BE72-F9B42B64262E}"/>
               </a:ext>
             </a:extLst>
           </p:cNvPr>
@@ -15316,7 +15314,7 @@
           <p:cNvPr id="51" name="">
             <a:extLst xmlns:a="http://schemas.openxmlformats.org/drawingml/2006/main">
               <a:ext uri="{FF2B5EF4-FFF2-40B4-BE49-F238E27FC236}">
-                <a16:creationId xmlns:a16="http://schemas.microsoft.com/office/drawing/2014/main" id="{B3C8A4DB-15B3-4CB8-9B5A-B36E51670508}"/>
+                <a16:creationId xmlns:a16="http://schemas.microsoft.com/office/drawing/2014/main" id="{F03155D3-AAB3-46D1-8210-6371582FDF2B}"/>
               </a:ext>
             </a:extLst>
           </p:cNvPr>
@@ -15380,7 +15378,7 @@
           <p:cNvPr id="52" name="">
             <a:extLst xmlns:a="http://schemas.openxmlformats.org/drawingml/2006/main">
               <a:ext uri="{FF2B5EF4-FFF2-40B4-BE49-F238E27FC236}">
-                <a16:creationId xmlns:a16="http://schemas.microsoft.com/office/drawing/2014/main" id="{D66C314C-B741-4144-91F2-E8B1B49FACF4}"/>
+                <a16:creationId xmlns:a16="http://schemas.microsoft.com/office/drawing/2014/main" id="{10761537-F648-475E-9ADF-FAA619BFBD60}"/>
               </a:ext>
             </a:extLst>
           </p:cNvPr>
@@ -15442,7 +15440,7 @@
     </p:spTree>
     <p:extLst>
       <p:ext uri="{BB962C8B-B14F-4D97-AF65-F5344CB8AC3E}">
-        <p14:creationId xmlns:p14="http://schemas.microsoft.com/office/powerpoint/2010/main" val="774985209"/>
+        <p14:creationId xmlns:p14="http://schemas.microsoft.com/office/powerpoint/2010/main" val="948324374"/>
       </p:ext>
     </p:extLst>
   </p:cSld>
@@ -15466,7 +15464,7 @@
           <p:cNvPr id="1" name="">
             <a:extLst xmlns:a="http://schemas.openxmlformats.org/drawingml/2006/main">
               <a:ext uri="{FF2B5EF4-FFF2-40B4-BE49-F238E27FC236}">
-                <a16:creationId xmlns:a16="http://schemas.microsoft.com/office/drawing/2014/main" id="{460C77D3-10F4-4BF6-86BC-CBD1CEF40315}"/>
+                <a16:creationId xmlns:a16="http://schemas.microsoft.com/office/drawing/2014/main" id="{F15925E3-6F54-4A73-B8F6-91C842F66ABC}"/>
               </a:ext>
             </a:extLst>
           </p:cNvPr>
@@ -15501,7 +15499,7 @@
           <p:cNvPr id="2" name="">
             <a:extLst xmlns:a="http://schemas.openxmlformats.org/drawingml/2006/main">
               <a:ext uri="{FF2B5EF4-FFF2-40B4-BE49-F238E27FC236}">
-                <a16:creationId xmlns:a16="http://schemas.microsoft.com/office/drawing/2014/main" id="{6939ED85-CCE0-4EE2-857E-B52294EF5082}"/>
+                <a16:creationId xmlns:a16="http://schemas.microsoft.com/office/drawing/2014/main" id="{7E4DA3B2-D223-4A2F-BAFC-4A75ACC5F96D}"/>
               </a:ext>
             </a:extLst>
           </p:cNvPr>
@@ -15536,7 +15534,7 @@
           <p:cNvPr id="3" name="">
             <a:extLst xmlns:a="http://schemas.openxmlformats.org/drawingml/2006/main">
               <a:ext uri="{FF2B5EF4-FFF2-40B4-BE49-F238E27FC236}">
-                <a16:creationId xmlns:a16="http://schemas.microsoft.com/office/drawing/2014/main" id="{48EAEE55-CB39-4983-B50C-049878AB3E07}"/>
+                <a16:creationId xmlns:a16="http://schemas.microsoft.com/office/drawing/2014/main" id="{05A40375-0717-4CA4-AE01-3DFC73DB397F}"/>
               </a:ext>
             </a:extLst>
           </p:cNvPr>
@@ -15571,7 +15569,7 @@
           <p:cNvPr id="4" name="kicker-06-marker">
             <a:extLst xmlns:a="http://schemas.openxmlformats.org/drawingml/2006/main">
               <a:ext uri="{FF2B5EF4-FFF2-40B4-BE49-F238E27FC236}">
-                <a16:creationId xmlns:a16="http://schemas.microsoft.com/office/drawing/2014/main" id="{C471F963-BD1A-4E6A-B64E-84781B51E72B}"/>
+                <a16:creationId xmlns:a16="http://schemas.microsoft.com/office/drawing/2014/main" id="{65B51CE7-BD6C-4A34-A563-2EBC6B0853BE}"/>
               </a:ext>
             </a:extLst>
           </p:cNvPr>
@@ -15606,7 +15604,7 @@
           <p:cNvPr id="5" name="kicker-06-label">
             <a:extLst xmlns:a="http://schemas.openxmlformats.org/drawingml/2006/main">
               <a:ext uri="{FF2B5EF4-FFF2-40B4-BE49-F238E27FC236}">
-                <a16:creationId xmlns:a16="http://schemas.microsoft.com/office/drawing/2014/main" id="{8E473573-E535-43BD-B84F-2CFB04E76E39}"/>
+                <a16:creationId xmlns:a16="http://schemas.microsoft.com/office/drawing/2014/main" id="{4872DD3F-02C6-4461-BCD9-18B012ADB4E5}"/>
               </a:ext>
             </a:extLst>
           </p:cNvPr>
@@ -15670,7 +15668,7 @@
           <p:cNvPr id="6" name="">
             <a:extLst xmlns:a="http://schemas.openxmlformats.org/drawingml/2006/main">
               <a:ext uri="{FF2B5EF4-FFF2-40B4-BE49-F238E27FC236}">
-                <a16:creationId xmlns:a16="http://schemas.microsoft.com/office/drawing/2014/main" id="{4348C3A7-1008-4809-8993-217C12EAA5A1}"/>
+                <a16:creationId xmlns:a16="http://schemas.microsoft.com/office/drawing/2014/main" id="{926C36D7-1586-4D97-B42E-AAF8952CC12D}"/>
               </a:ext>
             </a:extLst>
           </p:cNvPr>
@@ -15734,7 +15732,7 @@
           <p:cNvPr id="7" name="">
             <a:extLst xmlns:a="http://schemas.openxmlformats.org/drawingml/2006/main">
               <a:ext uri="{FF2B5EF4-FFF2-40B4-BE49-F238E27FC236}">
-                <a16:creationId xmlns:a16="http://schemas.microsoft.com/office/drawing/2014/main" id="{3C36E5F4-7E85-43F6-9863-D036C569BDAF}"/>
+                <a16:creationId xmlns:a16="http://schemas.microsoft.com/office/drawing/2014/main" id="{78EFA711-975C-488F-9A6F-0A450D6C3FF5}"/>
               </a:ext>
             </a:extLst>
           </p:cNvPr>
@@ -15767,7 +15765,7 @@
           <p:cNvPr id="8" name="">
             <a:extLst xmlns:a="http://schemas.openxmlformats.org/drawingml/2006/main">
               <a:ext uri="{FF2B5EF4-FFF2-40B4-BE49-F238E27FC236}">
-                <a16:creationId xmlns:a16="http://schemas.microsoft.com/office/drawing/2014/main" id="{FACDDE64-B5EB-411D-8068-74B2530277B8}"/>
+                <a16:creationId xmlns:a16="http://schemas.microsoft.com/office/drawing/2014/main" id="{D7CCA5EC-9566-4CFD-910B-F6A86368289E}"/>
               </a:ext>
             </a:extLst>
           </p:cNvPr>
@@ -15802,7 +15800,7 @@
           <p:cNvPr id="9" name="">
             <a:extLst xmlns:a="http://schemas.openxmlformats.org/drawingml/2006/main">
               <a:ext uri="{FF2B5EF4-FFF2-40B4-BE49-F238E27FC236}">
-                <a16:creationId xmlns:a16="http://schemas.microsoft.com/office/drawing/2014/main" id="{B589E57A-F48A-4B26-B5AB-B4612EAE788F}"/>
+                <a16:creationId xmlns:a16="http://schemas.microsoft.com/office/drawing/2014/main" id="{2FE2A50D-B368-4A32-8DE8-603381A514DC}"/>
               </a:ext>
             </a:extLst>
           </p:cNvPr>
@@ -15866,7 +15864,7 @@
           <p:cNvPr id="10" name="">
             <a:extLst xmlns:a="http://schemas.openxmlformats.org/drawingml/2006/main">
               <a:ext uri="{FF2B5EF4-FFF2-40B4-BE49-F238E27FC236}">
-                <a16:creationId xmlns:a16="http://schemas.microsoft.com/office/drawing/2014/main" id="{95AA3039-08A4-4B3A-BE33-EFCBF9D04899}"/>
+                <a16:creationId xmlns:a16="http://schemas.microsoft.com/office/drawing/2014/main" id="{79D40063-0488-4876-9F06-49251BA6D90E}"/>
               </a:ext>
             </a:extLst>
           </p:cNvPr>
@@ -15930,7 +15928,7 @@
           <p:cNvPr id="11" name="">
             <a:extLst xmlns:a="http://schemas.openxmlformats.org/drawingml/2006/main">
               <a:ext uri="{FF2B5EF4-FFF2-40B4-BE49-F238E27FC236}">
-                <a16:creationId xmlns:a16="http://schemas.microsoft.com/office/drawing/2014/main" id="{EAB4DC4F-9D52-4F3D-B3EC-EB236FA472FF}"/>
+                <a16:creationId xmlns:a16="http://schemas.microsoft.com/office/drawing/2014/main" id="{980CB638-6017-479A-B82F-11C811E453A1}"/>
               </a:ext>
             </a:extLst>
           </p:cNvPr>
@@ -15963,7 +15961,7 @@
           <p:cNvPr id="12" name="">
             <a:extLst xmlns:a="http://schemas.openxmlformats.org/drawingml/2006/main">
               <a:ext uri="{FF2B5EF4-FFF2-40B4-BE49-F238E27FC236}">
-                <a16:creationId xmlns:a16="http://schemas.microsoft.com/office/drawing/2014/main" id="{6D197D88-1D7B-4DA0-B66C-3C5EDE55271F}"/>
+                <a16:creationId xmlns:a16="http://schemas.microsoft.com/office/drawing/2014/main" id="{73FC753F-C18F-4D25-BAF4-D373E8B625C4}"/>
               </a:ext>
             </a:extLst>
           </p:cNvPr>
@@ -15998,7 +15996,7 @@
           <p:cNvPr id="13" name="">
             <a:extLst xmlns:a="http://schemas.openxmlformats.org/drawingml/2006/main">
               <a:ext uri="{FF2B5EF4-FFF2-40B4-BE49-F238E27FC236}">
-                <a16:creationId xmlns:a16="http://schemas.microsoft.com/office/drawing/2014/main" id="{157BF7A1-4D60-48B9-9218-C45CE9E7D6F0}"/>
+                <a16:creationId xmlns:a16="http://schemas.microsoft.com/office/drawing/2014/main" id="{88834ADF-1402-490F-BA22-E41D82357E19}"/>
               </a:ext>
             </a:extLst>
           </p:cNvPr>
@@ -16062,7 +16060,7 @@
           <p:cNvPr id="14" name="">
             <a:extLst xmlns:a="http://schemas.openxmlformats.org/drawingml/2006/main">
               <a:ext uri="{FF2B5EF4-FFF2-40B4-BE49-F238E27FC236}">
-                <a16:creationId xmlns:a16="http://schemas.microsoft.com/office/drawing/2014/main" id="{C12C459D-F6F6-43A5-BBC8-4A390EB7E8B8}"/>
+                <a16:creationId xmlns:a16="http://schemas.microsoft.com/office/drawing/2014/main" id="{CBC7EA92-B239-4FB8-9E99-A7B047430443}"/>
               </a:ext>
             </a:extLst>
           </p:cNvPr>
@@ -16126,7 +16124,7 @@
           <p:cNvPr id="15" name="">
             <a:extLst xmlns:a="http://schemas.openxmlformats.org/drawingml/2006/main">
               <a:ext uri="{FF2B5EF4-FFF2-40B4-BE49-F238E27FC236}">
-                <a16:creationId xmlns:a16="http://schemas.microsoft.com/office/drawing/2014/main" id="{FEEE0249-9718-4A3D-8A0B-E978D466E9D2}"/>
+                <a16:creationId xmlns:a16="http://schemas.microsoft.com/office/drawing/2014/main" id="{5B418A72-507A-408C-91A3-C36B2257F641}"/>
               </a:ext>
             </a:extLst>
           </p:cNvPr>
@@ -16159,7 +16157,7 @@
           <p:cNvPr id="16" name="">
             <a:extLst xmlns:a="http://schemas.openxmlformats.org/drawingml/2006/main">
               <a:ext uri="{FF2B5EF4-FFF2-40B4-BE49-F238E27FC236}">
-                <a16:creationId xmlns:a16="http://schemas.microsoft.com/office/drawing/2014/main" id="{E0DE4ABA-D01E-4EAF-8D71-50E3549CB8B8}"/>
+                <a16:creationId xmlns:a16="http://schemas.microsoft.com/office/drawing/2014/main" id="{BC27BB0F-8225-41FD-8103-C1E71E5A0496}"/>
               </a:ext>
             </a:extLst>
           </p:cNvPr>
@@ -16213,7 +16211,7 @@
                 <a:ea typeface="Aptos"/>
                 <a:cs typeface="Aptos"/>
               </a:rPr>
-              <a:t>Recurring instructor check: sales impact / signal / RevOps field / buyer content / AI risk / industrial failure mode</a:t>
+              <a:t>Recurring instructor check: sales impact / signal / RevOps field / buyer content / review risk / industrial failure mode</a:t>
             </a:r>
           </a:p>
         </p:txBody>
@@ -16223,7 +16221,7 @@
           <p:cNvPr id="17" name="">
             <a:extLst xmlns:a="http://schemas.openxmlformats.org/drawingml/2006/main">
               <a:ext uri="{FF2B5EF4-FFF2-40B4-BE49-F238E27FC236}">
-                <a16:creationId xmlns:a16="http://schemas.microsoft.com/office/drawing/2014/main" id="{4BABF99A-3743-4F3F-ADEA-73AD5C658AAC}"/>
+                <a16:creationId xmlns:a16="http://schemas.microsoft.com/office/drawing/2014/main" id="{7BF8E182-9F35-4738-B541-F693FA075B45}"/>
               </a:ext>
             </a:extLst>
           </p:cNvPr>
@@ -16258,7 +16256,7 @@
           <p:cNvPr id="18" name="">
             <a:extLst xmlns:a="http://schemas.openxmlformats.org/drawingml/2006/main">
               <a:ext uri="{FF2B5EF4-FFF2-40B4-BE49-F238E27FC236}">
-                <a16:creationId xmlns:a16="http://schemas.microsoft.com/office/drawing/2014/main" id="{3D972E11-5238-4FEA-B262-DA5231CCFB99}"/>
+                <a16:creationId xmlns:a16="http://schemas.microsoft.com/office/drawing/2014/main" id="{91E66D9A-05FD-4D61-B262-E61D240F90DA}"/>
               </a:ext>
             </a:extLst>
           </p:cNvPr>
@@ -16322,7 +16320,7 @@
           <p:cNvPr id="19" name="">
             <a:extLst xmlns:a="http://schemas.openxmlformats.org/drawingml/2006/main">
               <a:ext uri="{FF2B5EF4-FFF2-40B4-BE49-F238E27FC236}">
-                <a16:creationId xmlns:a16="http://schemas.microsoft.com/office/drawing/2014/main" id="{95B8495B-4788-489E-9B4F-AF08ABEE55DE}"/>
+                <a16:creationId xmlns:a16="http://schemas.microsoft.com/office/drawing/2014/main" id="{5E4E669A-ED91-4300-ABD5-EF3C09FA2E69}"/>
               </a:ext>
             </a:extLst>
           </p:cNvPr>
@@ -16386,7 +16384,7 @@
           <p:cNvPr id="20" name="">
             <a:extLst xmlns:a="http://schemas.openxmlformats.org/drawingml/2006/main">
               <a:ext uri="{FF2B5EF4-FFF2-40B4-BE49-F238E27FC236}">
-                <a16:creationId xmlns:a16="http://schemas.microsoft.com/office/drawing/2014/main" id="{333ABC2B-2B50-4650-919F-7B1BE154A7D9}"/>
+                <a16:creationId xmlns:a16="http://schemas.microsoft.com/office/drawing/2014/main" id="{0FD7BC98-7A5F-4CBA-9696-CF904274A77E}"/>
               </a:ext>
             </a:extLst>
           </p:cNvPr>
@@ -16448,7 +16446,7 @@
     </p:spTree>
     <p:extLst>
       <p:ext uri="{BB962C8B-B14F-4D97-AF65-F5344CB8AC3E}">
-        <p14:creationId xmlns:p14="http://schemas.microsoft.com/office/powerpoint/2010/main" val="95212833"/>
+        <p14:creationId xmlns:p14="http://schemas.microsoft.com/office/powerpoint/2010/main" val="1002575653"/>
       </p:ext>
     </p:extLst>
   </p:cSld>
@@ -16472,7 +16470,7 @@
           <p:cNvPr id="1" name="">
             <a:extLst xmlns:a="http://schemas.openxmlformats.org/drawingml/2006/main">
               <a:ext uri="{FF2B5EF4-FFF2-40B4-BE49-F238E27FC236}">
-                <a16:creationId xmlns:a16="http://schemas.microsoft.com/office/drawing/2014/main" id="{54905B10-45A7-4147-9DEA-45C62E9F9B5E}"/>
+                <a16:creationId xmlns:a16="http://schemas.microsoft.com/office/drawing/2014/main" id="{1BEC8594-177D-4566-BB70-577B6C2C6C4B}"/>
               </a:ext>
             </a:extLst>
           </p:cNvPr>
@@ -16507,7 +16505,7 @@
           <p:cNvPr id="2" name="">
             <a:extLst xmlns:a="http://schemas.openxmlformats.org/drawingml/2006/main">
               <a:ext uri="{FF2B5EF4-FFF2-40B4-BE49-F238E27FC236}">
-                <a16:creationId xmlns:a16="http://schemas.microsoft.com/office/drawing/2014/main" id="{00E17386-1AB2-4E32-AF18-EA40F017764D}"/>
+                <a16:creationId xmlns:a16="http://schemas.microsoft.com/office/drawing/2014/main" id="{69A0B603-1107-4E6C-94F7-EFF8D32FAD42}"/>
               </a:ext>
             </a:extLst>
           </p:cNvPr>
@@ -16542,7 +16540,7 @@
           <p:cNvPr id="3" name="">
             <a:extLst xmlns:a="http://schemas.openxmlformats.org/drawingml/2006/main">
               <a:ext uri="{FF2B5EF4-FFF2-40B4-BE49-F238E27FC236}">
-                <a16:creationId xmlns:a16="http://schemas.microsoft.com/office/drawing/2014/main" id="{76C5B658-64D1-4F96-82D4-E82A7CAAB8D8}"/>
+                <a16:creationId xmlns:a16="http://schemas.microsoft.com/office/drawing/2014/main" id="{A2E21315-F05C-4727-8B03-FAD15E842952}"/>
               </a:ext>
             </a:extLst>
           </p:cNvPr>
@@ -16577,7 +16575,7 @@
           <p:cNvPr id="4" name="kicker-06-marker">
             <a:extLst xmlns:a="http://schemas.openxmlformats.org/drawingml/2006/main">
               <a:ext uri="{FF2B5EF4-FFF2-40B4-BE49-F238E27FC236}">
-                <a16:creationId xmlns:a16="http://schemas.microsoft.com/office/drawing/2014/main" id="{C7D15FD7-3E47-4ECB-BABF-FB0101C95DB5}"/>
+                <a16:creationId xmlns:a16="http://schemas.microsoft.com/office/drawing/2014/main" id="{94FBCF59-227F-417F-A29B-C1996527692B}"/>
               </a:ext>
             </a:extLst>
           </p:cNvPr>
@@ -16612,7 +16610,7 @@
           <p:cNvPr id="5" name="kicker-06-label">
             <a:extLst xmlns:a="http://schemas.openxmlformats.org/drawingml/2006/main">
               <a:ext uri="{FF2B5EF4-FFF2-40B4-BE49-F238E27FC236}">
-                <a16:creationId xmlns:a16="http://schemas.microsoft.com/office/drawing/2014/main" id="{C56E2956-D1D0-4942-B842-DAD2ADB6B539}"/>
+                <a16:creationId xmlns:a16="http://schemas.microsoft.com/office/drawing/2014/main" id="{AA9CA867-F14B-4B6D-8BE1-5E67ECE53919}"/>
               </a:ext>
             </a:extLst>
           </p:cNvPr>
@@ -16676,7 +16674,7 @@
           <p:cNvPr id="6" name="">
             <a:extLst xmlns:a="http://schemas.openxmlformats.org/drawingml/2006/main">
               <a:ext uri="{FF2B5EF4-FFF2-40B4-BE49-F238E27FC236}">
-                <a16:creationId xmlns:a16="http://schemas.microsoft.com/office/drawing/2014/main" id="{3EB0E0AC-1D0A-4E87-AE72-60ADCF8BECEA}"/>
+                <a16:creationId xmlns:a16="http://schemas.microsoft.com/office/drawing/2014/main" id="{62092C53-A1D6-439B-B630-534E61F4D6DA}"/>
               </a:ext>
             </a:extLst>
           </p:cNvPr>
@@ -16740,7 +16738,7 @@
           <p:cNvPr id="7" name="">
             <a:extLst xmlns:a="http://schemas.openxmlformats.org/drawingml/2006/main">
               <a:ext uri="{FF2B5EF4-FFF2-40B4-BE49-F238E27FC236}">
-                <a16:creationId xmlns:a16="http://schemas.microsoft.com/office/drawing/2014/main" id="{49A51C1F-1BFD-4588-A405-E3A8DF27B3D2}"/>
+                <a16:creationId xmlns:a16="http://schemas.microsoft.com/office/drawing/2014/main" id="{A107B31C-84A0-4567-8FB0-5C4BAAF5C91D}"/>
               </a:ext>
             </a:extLst>
           </p:cNvPr>
@@ -16804,7 +16802,7 @@
           <p:cNvPr id="8" name="">
             <a:extLst xmlns:a="http://schemas.openxmlformats.org/drawingml/2006/main">
               <a:ext uri="{FF2B5EF4-FFF2-40B4-BE49-F238E27FC236}">
-                <a16:creationId xmlns:a16="http://schemas.microsoft.com/office/drawing/2014/main" id="{BA3EED69-A8DF-40F7-B698-936D646F63BB}"/>
+                <a16:creationId xmlns:a16="http://schemas.microsoft.com/office/drawing/2014/main" id="{0F4F9033-12DE-485A-A61A-D329E5A24E6A}"/>
               </a:ext>
             </a:extLst>
           </p:cNvPr>
@@ -16839,7 +16837,7 @@
           <p:cNvPr id="9" name="">
             <a:extLst xmlns:a="http://schemas.openxmlformats.org/drawingml/2006/main">
               <a:ext uri="{FF2B5EF4-FFF2-40B4-BE49-F238E27FC236}">
-                <a16:creationId xmlns:a16="http://schemas.microsoft.com/office/drawing/2014/main" id="{05C0421D-6D53-4443-B81E-1C42B992CDF6}"/>
+                <a16:creationId xmlns:a16="http://schemas.microsoft.com/office/drawing/2014/main" id="{F82D2A6A-09E0-4470-9071-4E663DED9375}"/>
               </a:ext>
             </a:extLst>
           </p:cNvPr>
@@ -16903,7 +16901,7 @@
           <p:cNvPr id="10" name="">
             <a:extLst xmlns:a="http://schemas.openxmlformats.org/drawingml/2006/main">
               <a:ext uri="{FF2B5EF4-FFF2-40B4-BE49-F238E27FC236}">
-                <a16:creationId xmlns:a16="http://schemas.microsoft.com/office/drawing/2014/main" id="{368C2D4B-AC8F-42D1-8246-F52D2E0E5B71}"/>
+                <a16:creationId xmlns:a16="http://schemas.microsoft.com/office/drawing/2014/main" id="{2B4CE423-CE72-4D32-B1EA-D70D1C2F7996}"/>
               </a:ext>
             </a:extLst>
           </p:cNvPr>
@@ -16967,7 +16965,7 @@
           <p:cNvPr id="11" name="">
             <a:extLst xmlns:a="http://schemas.openxmlformats.org/drawingml/2006/main">
               <a:ext uri="{FF2B5EF4-FFF2-40B4-BE49-F238E27FC236}">
-                <a16:creationId xmlns:a16="http://schemas.microsoft.com/office/drawing/2014/main" id="{7D37DFBF-053A-44C9-B0C8-246E0B85DAF4}"/>
+                <a16:creationId xmlns:a16="http://schemas.microsoft.com/office/drawing/2014/main" id="{FF885DF6-7391-43F3-B69F-FC3B5597A317}"/>
               </a:ext>
             </a:extLst>
           </p:cNvPr>
@@ -17031,7 +17029,7 @@
           <p:cNvPr id="12" name="">
             <a:extLst xmlns:a="http://schemas.openxmlformats.org/drawingml/2006/main">
               <a:ext uri="{FF2B5EF4-FFF2-40B4-BE49-F238E27FC236}">
-                <a16:creationId xmlns:a16="http://schemas.microsoft.com/office/drawing/2014/main" id="{26D2F155-B51A-49C0-8194-23A717734272}"/>
+                <a16:creationId xmlns:a16="http://schemas.microsoft.com/office/drawing/2014/main" id="{DF9D7F87-8F79-4811-AC1B-30F61AAAB4B4}"/>
               </a:ext>
             </a:extLst>
           </p:cNvPr>
@@ -17064,7 +17062,7 @@
           <p:cNvPr id="13" name="">
             <a:extLst xmlns:a="http://schemas.openxmlformats.org/drawingml/2006/main">
               <a:ext uri="{FF2B5EF4-FFF2-40B4-BE49-F238E27FC236}">
-                <a16:creationId xmlns:a16="http://schemas.microsoft.com/office/drawing/2014/main" id="{FFFB85CD-8099-45A9-80F7-FAAA25DC9412}"/>
+                <a16:creationId xmlns:a16="http://schemas.microsoft.com/office/drawing/2014/main" id="{95F29FC0-090D-46B9-ACDA-D37CB201214D}"/>
               </a:ext>
             </a:extLst>
           </p:cNvPr>
@@ -17128,7 +17126,7 @@
           <p:cNvPr id="14" name="">
             <a:extLst xmlns:a="http://schemas.openxmlformats.org/drawingml/2006/main">
               <a:ext uri="{FF2B5EF4-FFF2-40B4-BE49-F238E27FC236}">
-                <a16:creationId xmlns:a16="http://schemas.microsoft.com/office/drawing/2014/main" id="{044C490C-1871-42F6-BAC9-29DBB075C75C}"/>
+                <a16:creationId xmlns:a16="http://schemas.microsoft.com/office/drawing/2014/main" id="{9EC08917-F561-49A5-8B44-45E8FBD07867}"/>
               </a:ext>
             </a:extLst>
           </p:cNvPr>
@@ -17163,7 +17161,7 @@
           <p:cNvPr id="15" name="">
             <a:extLst xmlns:a="http://schemas.openxmlformats.org/drawingml/2006/main">
               <a:ext uri="{FF2B5EF4-FFF2-40B4-BE49-F238E27FC236}">
-                <a16:creationId xmlns:a16="http://schemas.microsoft.com/office/drawing/2014/main" id="{D20AB3AC-85BD-442E-8233-84FE516FCD6B}"/>
+                <a16:creationId xmlns:a16="http://schemas.microsoft.com/office/drawing/2014/main" id="{6364A94D-1729-48B3-ABC0-76A33042A9FC}"/>
               </a:ext>
             </a:extLst>
           </p:cNvPr>
@@ -17227,7 +17225,7 @@
           <p:cNvPr id="16" name="">
             <a:extLst xmlns:a="http://schemas.openxmlformats.org/drawingml/2006/main">
               <a:ext uri="{FF2B5EF4-FFF2-40B4-BE49-F238E27FC236}">
-                <a16:creationId xmlns:a16="http://schemas.microsoft.com/office/drawing/2014/main" id="{63C4EC50-D3AF-4E9D-ABA1-39CDEA119644}"/>
+                <a16:creationId xmlns:a16="http://schemas.microsoft.com/office/drawing/2014/main" id="{5DC184DE-A94F-410E-B81B-6845D3B7E238}"/>
               </a:ext>
             </a:extLst>
           </p:cNvPr>
@@ -17260,7 +17258,7 @@
           <p:cNvPr id="17" name="">
             <a:extLst xmlns:a="http://schemas.openxmlformats.org/drawingml/2006/main">
               <a:ext uri="{FF2B5EF4-FFF2-40B4-BE49-F238E27FC236}">
-                <a16:creationId xmlns:a16="http://schemas.microsoft.com/office/drawing/2014/main" id="{528C026D-126A-42DC-ACE2-8D96AA49EC11}"/>
+                <a16:creationId xmlns:a16="http://schemas.microsoft.com/office/drawing/2014/main" id="{4D60FCA9-75C0-40EB-AB3A-21C6791154D2}"/>
               </a:ext>
             </a:extLst>
           </p:cNvPr>
@@ -17295,7 +17293,7 @@
           <p:cNvPr id="18" name="">
             <a:extLst xmlns:a="http://schemas.openxmlformats.org/drawingml/2006/main">
               <a:ext uri="{FF2B5EF4-FFF2-40B4-BE49-F238E27FC236}">
-                <a16:creationId xmlns:a16="http://schemas.microsoft.com/office/drawing/2014/main" id="{F90367EE-6EBD-4055-B4E0-5D1A476ACDD6}"/>
+                <a16:creationId xmlns:a16="http://schemas.microsoft.com/office/drawing/2014/main" id="{C8C9CA7D-688E-4D3B-A26C-F62362F2F62A}"/>
               </a:ext>
             </a:extLst>
           </p:cNvPr>
@@ -17359,7 +17357,7 @@
           <p:cNvPr id="19" name="">
             <a:extLst xmlns:a="http://schemas.openxmlformats.org/drawingml/2006/main">
               <a:ext uri="{FF2B5EF4-FFF2-40B4-BE49-F238E27FC236}">
-                <a16:creationId xmlns:a16="http://schemas.microsoft.com/office/drawing/2014/main" id="{814754B8-6718-40DF-B96D-4BAF79E0EF72}"/>
+                <a16:creationId xmlns:a16="http://schemas.microsoft.com/office/drawing/2014/main" id="{30293609-23A7-4716-8B71-E4022E4CF9F8}"/>
               </a:ext>
             </a:extLst>
           </p:cNvPr>
@@ -17394,7 +17392,7 @@
           <p:cNvPr id="20" name="">
             <a:extLst xmlns:a="http://schemas.openxmlformats.org/drawingml/2006/main">
               <a:ext uri="{FF2B5EF4-FFF2-40B4-BE49-F238E27FC236}">
-                <a16:creationId xmlns:a16="http://schemas.microsoft.com/office/drawing/2014/main" id="{99B19126-AD84-4539-89CD-EDCA6863E10D}"/>
+                <a16:creationId xmlns:a16="http://schemas.microsoft.com/office/drawing/2014/main" id="{148F168E-31A9-4FB9-B849-24670A5BFA20}"/>
               </a:ext>
             </a:extLst>
           </p:cNvPr>
@@ -17458,7 +17456,7 @@
           <p:cNvPr id="21" name="">
             <a:extLst xmlns:a="http://schemas.openxmlformats.org/drawingml/2006/main">
               <a:ext uri="{FF2B5EF4-FFF2-40B4-BE49-F238E27FC236}">
-                <a16:creationId xmlns:a16="http://schemas.microsoft.com/office/drawing/2014/main" id="{4519ABB4-0E62-4232-BA7B-B40BB1428D69}"/>
+                <a16:creationId xmlns:a16="http://schemas.microsoft.com/office/drawing/2014/main" id="{63A568A8-278B-4703-84FF-E704031F2134}"/>
               </a:ext>
             </a:extLst>
           </p:cNvPr>
@@ -17493,7 +17491,7 @@
           <p:cNvPr id="22" name="">
             <a:extLst xmlns:a="http://schemas.openxmlformats.org/drawingml/2006/main">
               <a:ext uri="{FF2B5EF4-FFF2-40B4-BE49-F238E27FC236}">
-                <a16:creationId xmlns:a16="http://schemas.microsoft.com/office/drawing/2014/main" id="{6949F886-E80E-47E3-8C8E-F76508A8CD16}"/>
+                <a16:creationId xmlns:a16="http://schemas.microsoft.com/office/drawing/2014/main" id="{68F6CF75-426B-47F4-9D0A-8A495642CE66}"/>
               </a:ext>
             </a:extLst>
           </p:cNvPr>
@@ -17557,7 +17555,7 @@
           <p:cNvPr id="23" name="">
             <a:extLst xmlns:a="http://schemas.openxmlformats.org/drawingml/2006/main">
               <a:ext uri="{FF2B5EF4-FFF2-40B4-BE49-F238E27FC236}">
-                <a16:creationId xmlns:a16="http://schemas.microsoft.com/office/drawing/2014/main" id="{EB0089EA-092C-421C-B1D7-4D3EC07BFB63}"/>
+                <a16:creationId xmlns:a16="http://schemas.microsoft.com/office/drawing/2014/main" id="{3103F9EC-E92C-4E81-A1A5-CA2B9A5BE7E7}"/>
               </a:ext>
             </a:extLst>
           </p:cNvPr>
@@ -17592,7 +17590,7 @@
           <p:cNvPr id="24" name="">
             <a:extLst xmlns:a="http://schemas.openxmlformats.org/drawingml/2006/main">
               <a:ext uri="{FF2B5EF4-FFF2-40B4-BE49-F238E27FC236}">
-                <a16:creationId xmlns:a16="http://schemas.microsoft.com/office/drawing/2014/main" id="{11C94E83-12AD-4288-BF6D-CE9319CBCB46}"/>
+                <a16:creationId xmlns:a16="http://schemas.microsoft.com/office/drawing/2014/main" id="{A6F15E02-7DF6-40EA-A316-A2607CCCAE65}"/>
               </a:ext>
             </a:extLst>
           </p:cNvPr>
@@ -17646,7 +17644,7 @@
                 <a:ea typeface="Aptos"/>
                 <a:cs typeface="Aptos"/>
               </a:rPr>
-              <a:t>Keep AI useful but subordinate to human correction.</a:t>
+              <a:t>Keep first drafts subordinate to human correction.</a:t>
             </a:r>
           </a:p>
         </p:txBody>
@@ -17656,7 +17654,7 @@
           <p:cNvPr id="25" name="">
             <a:extLst xmlns:a="http://schemas.openxmlformats.org/drawingml/2006/main">
               <a:ext uri="{FF2B5EF4-FFF2-40B4-BE49-F238E27FC236}">
-                <a16:creationId xmlns:a16="http://schemas.microsoft.com/office/drawing/2014/main" id="{C9AF250D-5FBE-45EF-9F50-55F07DAB744F}"/>
+                <a16:creationId xmlns:a16="http://schemas.microsoft.com/office/drawing/2014/main" id="{19CC6459-70E8-488B-B6D0-8A52A45D63A9}"/>
               </a:ext>
             </a:extLst>
           </p:cNvPr>
@@ -17691,7 +17689,7 @@
           <p:cNvPr id="26" name="">
             <a:extLst xmlns:a="http://schemas.openxmlformats.org/drawingml/2006/main">
               <a:ext uri="{FF2B5EF4-FFF2-40B4-BE49-F238E27FC236}">
-                <a16:creationId xmlns:a16="http://schemas.microsoft.com/office/drawing/2014/main" id="{9548A798-8ACC-4C02-B0E2-E68FACBE9063}"/>
+                <a16:creationId xmlns:a16="http://schemas.microsoft.com/office/drawing/2014/main" id="{114660A1-1D36-40E3-80C5-48A32842EC4A}"/>
               </a:ext>
             </a:extLst>
           </p:cNvPr>
@@ -17755,7 +17753,7 @@
           <p:cNvPr id="27" name="">
             <a:extLst xmlns:a="http://schemas.openxmlformats.org/drawingml/2006/main">
               <a:ext uri="{FF2B5EF4-FFF2-40B4-BE49-F238E27FC236}">
-                <a16:creationId xmlns:a16="http://schemas.microsoft.com/office/drawing/2014/main" id="{88EB9C2E-DFB7-42BD-B072-1122693E64A1}"/>
+                <a16:creationId xmlns:a16="http://schemas.microsoft.com/office/drawing/2014/main" id="{00F25D1C-745B-4FF2-8524-716FB4E2C777}"/>
               </a:ext>
             </a:extLst>
           </p:cNvPr>
@@ -17790,7 +17788,7 @@
           <p:cNvPr id="28" name="">
             <a:extLst xmlns:a="http://schemas.openxmlformats.org/drawingml/2006/main">
               <a:ext uri="{FF2B5EF4-FFF2-40B4-BE49-F238E27FC236}">
-                <a16:creationId xmlns:a16="http://schemas.microsoft.com/office/drawing/2014/main" id="{778C33FF-8FB7-4F83-840A-7C4DE8523C00}"/>
+                <a16:creationId xmlns:a16="http://schemas.microsoft.com/office/drawing/2014/main" id="{032F89F1-AEAA-467A-918F-B3DAFCB7270D}"/>
               </a:ext>
             </a:extLst>
           </p:cNvPr>
@@ -17854,7 +17852,7 @@
           <p:cNvPr id="29" name="">
             <a:extLst xmlns:a="http://schemas.openxmlformats.org/drawingml/2006/main">
               <a:ext uri="{FF2B5EF4-FFF2-40B4-BE49-F238E27FC236}">
-                <a16:creationId xmlns:a16="http://schemas.microsoft.com/office/drawing/2014/main" id="{1ADD16FF-3E16-432F-B899-1643D13BDCF4}"/>
+                <a16:creationId xmlns:a16="http://schemas.microsoft.com/office/drawing/2014/main" id="{6660C191-08B4-4591-8DFC-3A3AA7B5FB97}"/>
               </a:ext>
             </a:extLst>
           </p:cNvPr>
@@ -17918,7 +17916,7 @@
           <p:cNvPr id="30" name="">
             <a:extLst xmlns:a="http://schemas.openxmlformats.org/drawingml/2006/main">
               <a:ext uri="{FF2B5EF4-FFF2-40B4-BE49-F238E27FC236}">
-                <a16:creationId xmlns:a16="http://schemas.microsoft.com/office/drawing/2014/main" id="{CFBDA3D3-E437-44D0-9056-4E9F5F00D787}"/>
+                <a16:creationId xmlns:a16="http://schemas.microsoft.com/office/drawing/2014/main" id="{A7371793-51EB-4E68-B813-567040E5FF5F}"/>
               </a:ext>
             </a:extLst>
           </p:cNvPr>
@@ -17980,7 +17978,7 @@
     </p:spTree>
     <p:extLst>
       <p:ext uri="{BB962C8B-B14F-4D97-AF65-F5344CB8AC3E}">
-        <p14:creationId xmlns:p14="http://schemas.microsoft.com/office/powerpoint/2010/main" val="1593469903"/>
+        <p14:creationId xmlns:p14="http://schemas.microsoft.com/office/powerpoint/2010/main" val="856821102"/>
       </p:ext>
     </p:extLst>
   </p:cSld>
@@ -18004,7 +18002,7 @@
           <p:cNvPr id="1" name="">
             <a:extLst xmlns:a="http://schemas.openxmlformats.org/drawingml/2006/main">
               <a:ext uri="{FF2B5EF4-FFF2-40B4-BE49-F238E27FC236}">
-                <a16:creationId xmlns:a16="http://schemas.microsoft.com/office/drawing/2014/main" id="{CE7ACD89-1D89-4166-A4C1-75067284357F}"/>
+                <a16:creationId xmlns:a16="http://schemas.microsoft.com/office/drawing/2014/main" id="{1C2C53A0-D0C6-467D-8E4B-1E09EE1B6AF9}"/>
               </a:ext>
             </a:extLst>
           </p:cNvPr>
@@ -18039,7 +18037,7 @@
           <p:cNvPr id="2" name="">
             <a:extLst xmlns:a="http://schemas.openxmlformats.org/drawingml/2006/main">
               <a:ext uri="{FF2B5EF4-FFF2-40B4-BE49-F238E27FC236}">
-                <a16:creationId xmlns:a16="http://schemas.microsoft.com/office/drawing/2014/main" id="{C2B929C4-64CF-4201-ADAB-78B2D6D75E8A}"/>
+                <a16:creationId xmlns:a16="http://schemas.microsoft.com/office/drawing/2014/main" id="{4CBF0D72-51AE-4100-A82D-63265433743A}"/>
               </a:ext>
             </a:extLst>
           </p:cNvPr>
@@ -18074,7 +18072,7 @@
           <p:cNvPr id="3" name="">
             <a:extLst xmlns:a="http://schemas.openxmlformats.org/drawingml/2006/main">
               <a:ext uri="{FF2B5EF4-FFF2-40B4-BE49-F238E27FC236}">
-                <a16:creationId xmlns:a16="http://schemas.microsoft.com/office/drawing/2014/main" id="{ACD26D22-F327-4E9F-901E-E69CF94D74B6}"/>
+                <a16:creationId xmlns:a16="http://schemas.microsoft.com/office/drawing/2014/main" id="{336BDC91-23EF-4CAA-8BBF-318DF2E6CD37}"/>
               </a:ext>
             </a:extLst>
           </p:cNvPr>
@@ -18109,7 +18107,7 @@
           <p:cNvPr id="4" name="kicker-06-marker">
             <a:extLst xmlns:a="http://schemas.openxmlformats.org/drawingml/2006/main">
               <a:ext uri="{FF2B5EF4-FFF2-40B4-BE49-F238E27FC236}">
-                <a16:creationId xmlns:a16="http://schemas.microsoft.com/office/drawing/2014/main" id="{EEF4FB33-B6E4-46A8-90D9-B10A41BEBB4F}"/>
+                <a16:creationId xmlns:a16="http://schemas.microsoft.com/office/drawing/2014/main" id="{DACF437B-EF3D-4D49-9E28-E1A3AF08E14F}"/>
               </a:ext>
             </a:extLst>
           </p:cNvPr>
@@ -18144,7 +18142,7 @@
           <p:cNvPr id="5" name="kicker-06-label">
             <a:extLst xmlns:a="http://schemas.openxmlformats.org/drawingml/2006/main">
               <a:ext uri="{FF2B5EF4-FFF2-40B4-BE49-F238E27FC236}">
-                <a16:creationId xmlns:a16="http://schemas.microsoft.com/office/drawing/2014/main" id="{25ED9BF2-633D-4311-9E46-09D7729A2EE8}"/>
+                <a16:creationId xmlns:a16="http://schemas.microsoft.com/office/drawing/2014/main" id="{640A476F-45D6-4607-96E1-9C9AB2FDEB45}"/>
               </a:ext>
             </a:extLst>
           </p:cNvPr>
@@ -18208,7 +18206,7 @@
           <p:cNvPr id="6" name="">
             <a:extLst xmlns:a="http://schemas.openxmlformats.org/drawingml/2006/main">
               <a:ext uri="{FF2B5EF4-FFF2-40B4-BE49-F238E27FC236}">
-                <a16:creationId xmlns:a16="http://schemas.microsoft.com/office/drawing/2014/main" id="{0F5F68C4-9D5E-444B-9EF9-8BBF970548E4}"/>
+                <a16:creationId xmlns:a16="http://schemas.microsoft.com/office/drawing/2014/main" id="{7B8350CC-AF0D-4389-8E45-6CDED7B0857A}"/>
               </a:ext>
             </a:extLst>
           </p:cNvPr>
@@ -18272,7 +18270,7 @@
           <p:cNvPr id="7" name="">
             <a:extLst xmlns:a="http://schemas.openxmlformats.org/drawingml/2006/main">
               <a:ext uri="{FF2B5EF4-FFF2-40B4-BE49-F238E27FC236}">
-                <a16:creationId xmlns:a16="http://schemas.microsoft.com/office/drawing/2014/main" id="{93A98751-31C5-42BF-814E-4001FCD8FADE}"/>
+                <a16:creationId xmlns:a16="http://schemas.microsoft.com/office/drawing/2014/main" id="{0A6A39D4-D203-4731-8DA3-4D41891A9BC1}"/>
               </a:ext>
             </a:extLst>
           </p:cNvPr>
@@ -18336,7 +18334,7 @@
           <p:cNvPr id="8" name="">
             <a:extLst xmlns:a="http://schemas.openxmlformats.org/drawingml/2006/main">
               <a:ext uri="{FF2B5EF4-FFF2-40B4-BE49-F238E27FC236}">
-                <a16:creationId xmlns:a16="http://schemas.microsoft.com/office/drawing/2014/main" id="{2ACE11CD-869E-48D5-AB32-010073DC5329}"/>
+                <a16:creationId xmlns:a16="http://schemas.microsoft.com/office/drawing/2014/main" id="{EDF79BBD-D5A9-4F67-9C8B-EB579D60124D}"/>
               </a:ext>
             </a:extLst>
           </p:cNvPr>
@@ -18371,7 +18369,7 @@
           <p:cNvPr id="9" name="">
             <a:extLst xmlns:a="http://schemas.openxmlformats.org/drawingml/2006/main">
               <a:ext uri="{FF2B5EF4-FFF2-40B4-BE49-F238E27FC236}">
-                <a16:creationId xmlns:a16="http://schemas.microsoft.com/office/drawing/2014/main" id="{6959D5D8-B074-450F-AA2B-C22C3F271131}"/>
+                <a16:creationId xmlns:a16="http://schemas.microsoft.com/office/drawing/2014/main" id="{CBA4938F-8778-4CBF-8FFF-C65DC51D7A29}"/>
               </a:ext>
             </a:extLst>
           </p:cNvPr>
@@ -18435,7 +18433,7 @@
           <p:cNvPr id="10" name="">
             <a:extLst xmlns:a="http://schemas.openxmlformats.org/drawingml/2006/main">
               <a:ext uri="{FF2B5EF4-FFF2-40B4-BE49-F238E27FC236}">
-                <a16:creationId xmlns:a16="http://schemas.microsoft.com/office/drawing/2014/main" id="{DC20DB40-52BD-4590-AA86-CB3CD720D2C9}"/>
+                <a16:creationId xmlns:a16="http://schemas.microsoft.com/office/drawing/2014/main" id="{3128D601-2F9B-4717-AA8D-E6774B5150B9}"/>
               </a:ext>
             </a:extLst>
           </p:cNvPr>
@@ -18499,7 +18497,7 @@
           <p:cNvPr id="11" name="">
             <a:extLst xmlns:a="http://schemas.openxmlformats.org/drawingml/2006/main">
               <a:ext uri="{FF2B5EF4-FFF2-40B4-BE49-F238E27FC236}">
-                <a16:creationId xmlns:a16="http://schemas.microsoft.com/office/drawing/2014/main" id="{38670B7A-0F2E-42FC-990B-F1CCD80D9B8A}"/>
+                <a16:creationId xmlns:a16="http://schemas.microsoft.com/office/drawing/2014/main" id="{C82CF88D-DC0E-4A0C-B977-539D01687EAB}"/>
               </a:ext>
             </a:extLst>
           </p:cNvPr>
@@ -18563,7 +18561,7 @@
           <p:cNvPr id="12" name="">
             <a:extLst xmlns:a="http://schemas.openxmlformats.org/drawingml/2006/main">
               <a:ext uri="{FF2B5EF4-FFF2-40B4-BE49-F238E27FC236}">
-                <a16:creationId xmlns:a16="http://schemas.microsoft.com/office/drawing/2014/main" id="{D1D79392-2D09-44F6-B615-571A591A3BF0}"/>
+                <a16:creationId xmlns:a16="http://schemas.microsoft.com/office/drawing/2014/main" id="{C93D97F2-75A0-419C-9877-25D3935BF7AD}"/>
               </a:ext>
             </a:extLst>
           </p:cNvPr>
@@ -18596,7 +18594,7 @@
           <p:cNvPr id="13" name="">
             <a:extLst xmlns:a="http://schemas.openxmlformats.org/drawingml/2006/main">
               <a:ext uri="{FF2B5EF4-FFF2-40B4-BE49-F238E27FC236}">
-                <a16:creationId xmlns:a16="http://schemas.microsoft.com/office/drawing/2014/main" id="{B0582712-1D4E-486B-948A-B5024E27CEA3}"/>
+                <a16:creationId xmlns:a16="http://schemas.microsoft.com/office/drawing/2014/main" id="{12FB4AC0-FC0C-47D0-8036-7015B5062028}"/>
               </a:ext>
             </a:extLst>
           </p:cNvPr>
@@ -18631,7 +18629,7 @@
           <p:cNvPr id="14" name="">
             <a:extLst xmlns:a="http://schemas.openxmlformats.org/drawingml/2006/main">
               <a:ext uri="{FF2B5EF4-FFF2-40B4-BE49-F238E27FC236}">
-                <a16:creationId xmlns:a16="http://schemas.microsoft.com/office/drawing/2014/main" id="{EFC831A5-5C30-4DEA-9A25-F0304FD88F7F}"/>
+                <a16:creationId xmlns:a16="http://schemas.microsoft.com/office/drawing/2014/main" id="{4FDA3A33-EADC-4477-9082-9C90F4152E2A}"/>
               </a:ext>
             </a:extLst>
           </p:cNvPr>
@@ -18695,7 +18693,7 @@
           <p:cNvPr id="15" name="">
             <a:extLst xmlns:a="http://schemas.openxmlformats.org/drawingml/2006/main">
               <a:ext uri="{FF2B5EF4-FFF2-40B4-BE49-F238E27FC236}">
-                <a16:creationId xmlns:a16="http://schemas.microsoft.com/office/drawing/2014/main" id="{1E16942B-78D1-43B1-BC99-727D4AE42AD3}"/>
+                <a16:creationId xmlns:a16="http://schemas.microsoft.com/office/drawing/2014/main" id="{5001B2C6-4F97-4C64-A6B9-078847744E43}"/>
               </a:ext>
             </a:extLst>
           </p:cNvPr>
@@ -18730,7 +18728,7 @@
           <p:cNvPr id="16" name="">
             <a:extLst xmlns:a="http://schemas.openxmlformats.org/drawingml/2006/main">
               <a:ext uri="{FF2B5EF4-FFF2-40B4-BE49-F238E27FC236}">
-                <a16:creationId xmlns:a16="http://schemas.microsoft.com/office/drawing/2014/main" id="{146F575D-3EDC-4505-B611-C380DF950793}"/>
+                <a16:creationId xmlns:a16="http://schemas.microsoft.com/office/drawing/2014/main" id="{1938ED4F-260C-48B3-A2AD-27535B0EFFA8}"/>
               </a:ext>
             </a:extLst>
           </p:cNvPr>
@@ -18794,7 +18792,7 @@
           <p:cNvPr id="17" name="">
             <a:extLst xmlns:a="http://schemas.openxmlformats.org/drawingml/2006/main">
               <a:ext uri="{FF2B5EF4-FFF2-40B4-BE49-F238E27FC236}">
-                <a16:creationId xmlns:a16="http://schemas.microsoft.com/office/drawing/2014/main" id="{3E6A7BE3-0453-4C07-955D-AE02324084E0}"/>
+                <a16:creationId xmlns:a16="http://schemas.microsoft.com/office/drawing/2014/main" id="{9D13F25E-993E-49F3-8043-326974C1B397}"/>
               </a:ext>
             </a:extLst>
           </p:cNvPr>
@@ -18829,7 +18827,7 @@
           <p:cNvPr id="18" name="">
             <a:extLst xmlns:a="http://schemas.openxmlformats.org/drawingml/2006/main">
               <a:ext uri="{FF2B5EF4-FFF2-40B4-BE49-F238E27FC236}">
-                <a16:creationId xmlns:a16="http://schemas.microsoft.com/office/drawing/2014/main" id="{5A41C670-AE9D-4C17-A55A-56BE4A438AC3}"/>
+                <a16:creationId xmlns:a16="http://schemas.microsoft.com/office/drawing/2014/main" id="{4A9C34C3-7B63-40C1-8437-C815B229D38B}"/>
               </a:ext>
             </a:extLst>
           </p:cNvPr>
@@ -18893,7 +18891,7 @@
           <p:cNvPr id="19" name="">
             <a:extLst xmlns:a="http://schemas.openxmlformats.org/drawingml/2006/main">
               <a:ext uri="{FF2B5EF4-FFF2-40B4-BE49-F238E27FC236}">
-                <a16:creationId xmlns:a16="http://schemas.microsoft.com/office/drawing/2014/main" id="{A6935FF2-80D0-4A91-8FDE-C02F7058593A}"/>
+                <a16:creationId xmlns:a16="http://schemas.microsoft.com/office/drawing/2014/main" id="{9924BA49-71BE-4AC7-AE5C-C47FA7B6B3F0}"/>
               </a:ext>
             </a:extLst>
           </p:cNvPr>
@@ -18928,7 +18926,7 @@
           <p:cNvPr id="20" name="">
             <a:extLst xmlns:a="http://schemas.openxmlformats.org/drawingml/2006/main">
               <a:ext uri="{FF2B5EF4-FFF2-40B4-BE49-F238E27FC236}">
-                <a16:creationId xmlns:a16="http://schemas.microsoft.com/office/drawing/2014/main" id="{725960C8-50D3-4953-96A2-A1730DA2566F}"/>
+                <a16:creationId xmlns:a16="http://schemas.microsoft.com/office/drawing/2014/main" id="{BD37BEB8-FC40-4EE7-B0A9-553022675596}"/>
               </a:ext>
             </a:extLst>
           </p:cNvPr>
@@ -18992,7 +18990,7 @@
           <p:cNvPr id="21" name="">
             <a:extLst xmlns:a="http://schemas.openxmlformats.org/drawingml/2006/main">
               <a:ext uri="{FF2B5EF4-FFF2-40B4-BE49-F238E27FC236}">
-                <a16:creationId xmlns:a16="http://schemas.microsoft.com/office/drawing/2014/main" id="{52BC0305-29C8-4FB1-98EE-DA1438A1F98B}"/>
+                <a16:creationId xmlns:a16="http://schemas.microsoft.com/office/drawing/2014/main" id="{A41FA07E-532B-4191-A046-B1B3ADDDA9CD}"/>
               </a:ext>
             </a:extLst>
           </p:cNvPr>
@@ -19027,7 +19025,7 @@
           <p:cNvPr id="22" name="">
             <a:extLst xmlns:a="http://schemas.openxmlformats.org/drawingml/2006/main">
               <a:ext uri="{FF2B5EF4-FFF2-40B4-BE49-F238E27FC236}">
-                <a16:creationId xmlns:a16="http://schemas.microsoft.com/office/drawing/2014/main" id="{3A88303F-FA44-4A6A-8F4E-761D7A3BC0B9}"/>
+                <a16:creationId xmlns:a16="http://schemas.microsoft.com/office/drawing/2014/main" id="{2DB0D2B3-FB6D-4B5A-9868-270B12A79B58}"/>
               </a:ext>
             </a:extLst>
           </p:cNvPr>
@@ -19091,7 +19089,7 @@
           <p:cNvPr id="23" name="">
             <a:extLst xmlns:a="http://schemas.openxmlformats.org/drawingml/2006/main">
               <a:ext uri="{FF2B5EF4-FFF2-40B4-BE49-F238E27FC236}">
-                <a16:creationId xmlns:a16="http://schemas.microsoft.com/office/drawing/2014/main" id="{FAB9F8EB-F82E-444C-9A22-278E54B3C223}"/>
+                <a16:creationId xmlns:a16="http://schemas.microsoft.com/office/drawing/2014/main" id="{A37AD5B0-59FF-4688-9BC7-8765A36822C6}"/>
               </a:ext>
             </a:extLst>
           </p:cNvPr>
@@ -19124,7 +19122,7 @@
           <p:cNvPr id="24" name="">
             <a:extLst xmlns:a="http://schemas.openxmlformats.org/drawingml/2006/main">
               <a:ext uri="{FF2B5EF4-FFF2-40B4-BE49-F238E27FC236}">
-                <a16:creationId xmlns:a16="http://schemas.microsoft.com/office/drawing/2014/main" id="{D4D3B936-BDB8-492B-9773-AE12BBDF8053}"/>
+                <a16:creationId xmlns:a16="http://schemas.microsoft.com/office/drawing/2014/main" id="{45D6A21C-EF43-4753-AF3C-E58881EE0CB1}"/>
               </a:ext>
             </a:extLst>
           </p:cNvPr>
@@ -19159,7 +19157,7 @@
           <p:cNvPr id="25" name="">
             <a:extLst xmlns:a="http://schemas.openxmlformats.org/drawingml/2006/main">
               <a:ext uri="{FF2B5EF4-FFF2-40B4-BE49-F238E27FC236}">
-                <a16:creationId xmlns:a16="http://schemas.microsoft.com/office/drawing/2014/main" id="{8C673E47-F5C5-472C-9843-489F5B9A52A1}"/>
+                <a16:creationId xmlns:a16="http://schemas.microsoft.com/office/drawing/2014/main" id="{92C662C2-25CA-4470-BA2F-639E517861D3}"/>
               </a:ext>
             </a:extLst>
           </p:cNvPr>
@@ -19223,7 +19221,7 @@
           <p:cNvPr id="26" name="">
             <a:extLst xmlns:a="http://schemas.openxmlformats.org/drawingml/2006/main">
               <a:ext uri="{FF2B5EF4-FFF2-40B4-BE49-F238E27FC236}">
-                <a16:creationId xmlns:a16="http://schemas.microsoft.com/office/drawing/2014/main" id="{8B58E608-5C6B-41BD-8ED6-D3B1CD36C75B}"/>
+                <a16:creationId xmlns:a16="http://schemas.microsoft.com/office/drawing/2014/main" id="{327F71D4-5148-40F2-9F16-C71FC47D1164}"/>
               </a:ext>
             </a:extLst>
           </p:cNvPr>
@@ -19256,7 +19254,7 @@
           <p:cNvPr id="27" name="">
             <a:extLst xmlns:a="http://schemas.openxmlformats.org/drawingml/2006/main">
               <a:ext uri="{FF2B5EF4-FFF2-40B4-BE49-F238E27FC236}">
-                <a16:creationId xmlns:a16="http://schemas.microsoft.com/office/drawing/2014/main" id="{BA6EE8F1-5543-436E-A273-5CA98CF62AAB}"/>
+                <a16:creationId xmlns:a16="http://schemas.microsoft.com/office/drawing/2014/main" id="{CCEC60EF-81EB-4AD7-9A9D-90190785D071}"/>
               </a:ext>
             </a:extLst>
           </p:cNvPr>
@@ -19320,7 +19318,7 @@
           <p:cNvPr id="28" name="">
             <a:extLst xmlns:a="http://schemas.openxmlformats.org/drawingml/2006/main">
               <a:ext uri="{FF2B5EF4-FFF2-40B4-BE49-F238E27FC236}">
-                <a16:creationId xmlns:a16="http://schemas.microsoft.com/office/drawing/2014/main" id="{0A3DF685-ED16-4FD3-A29E-10AEA0D3F7AA}"/>
+                <a16:creationId xmlns:a16="http://schemas.microsoft.com/office/drawing/2014/main" id="{425AD1BF-D84B-4900-A001-5247D2B13FA2}"/>
               </a:ext>
             </a:extLst>
           </p:cNvPr>
@@ -19384,7 +19382,7 @@
           <p:cNvPr id="29" name="">
             <a:extLst xmlns:a="http://schemas.openxmlformats.org/drawingml/2006/main">
               <a:ext uri="{FF2B5EF4-FFF2-40B4-BE49-F238E27FC236}">
-                <a16:creationId xmlns:a16="http://schemas.microsoft.com/office/drawing/2014/main" id="{8627868C-50A0-4DCC-8FA5-CD3E29603A3F}"/>
+                <a16:creationId xmlns:a16="http://schemas.microsoft.com/office/drawing/2014/main" id="{0CBC3C50-CDF7-453C-9BC1-C35F612B7314}"/>
               </a:ext>
             </a:extLst>
           </p:cNvPr>
@@ -19417,7 +19415,7 @@
           <p:cNvPr id="30" name="">
             <a:extLst xmlns:a="http://schemas.openxmlformats.org/drawingml/2006/main">
               <a:ext uri="{FF2B5EF4-FFF2-40B4-BE49-F238E27FC236}">
-                <a16:creationId xmlns:a16="http://schemas.microsoft.com/office/drawing/2014/main" id="{CCF74D1F-360B-43C3-AA1D-4E8ADDE248DC}"/>
+                <a16:creationId xmlns:a16="http://schemas.microsoft.com/office/drawing/2014/main" id="{83BE7417-A2B6-48AA-A676-0F1ADC38C4FF}"/>
               </a:ext>
             </a:extLst>
           </p:cNvPr>
@@ -19481,7 +19479,7 @@
           <p:cNvPr id="31" name="">
             <a:extLst xmlns:a="http://schemas.openxmlformats.org/drawingml/2006/main">
               <a:ext uri="{FF2B5EF4-FFF2-40B4-BE49-F238E27FC236}">
-                <a16:creationId xmlns:a16="http://schemas.microsoft.com/office/drawing/2014/main" id="{E1C8991F-EB55-426C-A0C2-F6EE7945B801}"/>
+                <a16:creationId xmlns:a16="http://schemas.microsoft.com/office/drawing/2014/main" id="{81A4EF98-2D30-4209-AF63-AA60EF2B431D}"/>
               </a:ext>
             </a:extLst>
           </p:cNvPr>
@@ -19545,7 +19543,7 @@
           <p:cNvPr id="32" name="">
             <a:extLst xmlns:a="http://schemas.openxmlformats.org/drawingml/2006/main">
               <a:ext uri="{FF2B5EF4-FFF2-40B4-BE49-F238E27FC236}">
-                <a16:creationId xmlns:a16="http://schemas.microsoft.com/office/drawing/2014/main" id="{68E62D2A-C22B-4303-8A0D-535A3AFB2CB9}"/>
+                <a16:creationId xmlns:a16="http://schemas.microsoft.com/office/drawing/2014/main" id="{40CFE35D-6CC3-4831-AB5B-B53264866B20}"/>
               </a:ext>
             </a:extLst>
           </p:cNvPr>
@@ -19578,7 +19576,7 @@
           <p:cNvPr id="33" name="">
             <a:extLst xmlns:a="http://schemas.openxmlformats.org/drawingml/2006/main">
               <a:ext uri="{FF2B5EF4-FFF2-40B4-BE49-F238E27FC236}">
-                <a16:creationId xmlns:a16="http://schemas.microsoft.com/office/drawing/2014/main" id="{CBD402A7-8AED-435B-BCA3-76BC71F68529}"/>
+                <a16:creationId xmlns:a16="http://schemas.microsoft.com/office/drawing/2014/main" id="{30C5F4B1-9822-4B21-8E97-F35E35F4A8C5}"/>
               </a:ext>
             </a:extLst>
           </p:cNvPr>
@@ -19642,7 +19640,7 @@
           <p:cNvPr id="34" name="">
             <a:extLst xmlns:a="http://schemas.openxmlformats.org/drawingml/2006/main">
               <a:ext uri="{FF2B5EF4-FFF2-40B4-BE49-F238E27FC236}">
-                <a16:creationId xmlns:a16="http://schemas.microsoft.com/office/drawing/2014/main" id="{A908B06D-50AB-4969-8AA2-59643A650A46}"/>
+                <a16:creationId xmlns:a16="http://schemas.microsoft.com/office/drawing/2014/main" id="{927ED8F8-7C7B-48B9-8F12-936A66289E37}"/>
               </a:ext>
             </a:extLst>
           </p:cNvPr>
@@ -19706,7 +19704,7 @@
           <p:cNvPr id="35" name="">
             <a:extLst xmlns:a="http://schemas.openxmlformats.org/drawingml/2006/main">
               <a:ext uri="{FF2B5EF4-FFF2-40B4-BE49-F238E27FC236}">
-                <a16:creationId xmlns:a16="http://schemas.microsoft.com/office/drawing/2014/main" id="{E751C956-3CD3-4DB7-91B2-D4637EAE86A8}"/>
+                <a16:creationId xmlns:a16="http://schemas.microsoft.com/office/drawing/2014/main" id="{86668DBE-89AB-4454-BB33-4AE589F1E01D}"/>
               </a:ext>
             </a:extLst>
           </p:cNvPr>
@@ -19739,7 +19737,7 @@
           <p:cNvPr id="36" name="">
             <a:extLst xmlns:a="http://schemas.openxmlformats.org/drawingml/2006/main">
               <a:ext uri="{FF2B5EF4-FFF2-40B4-BE49-F238E27FC236}">
-                <a16:creationId xmlns:a16="http://schemas.microsoft.com/office/drawing/2014/main" id="{077CAD69-84D8-4863-AD24-A7AE48988E61}"/>
+                <a16:creationId xmlns:a16="http://schemas.microsoft.com/office/drawing/2014/main" id="{6E2013B1-9777-4B4B-ADD6-BCB2BFAEE967}"/>
               </a:ext>
             </a:extLst>
           </p:cNvPr>
@@ -19803,7 +19801,7 @@
           <p:cNvPr id="37" name="">
             <a:extLst xmlns:a="http://schemas.openxmlformats.org/drawingml/2006/main">
               <a:ext uri="{FF2B5EF4-FFF2-40B4-BE49-F238E27FC236}">
-                <a16:creationId xmlns:a16="http://schemas.microsoft.com/office/drawing/2014/main" id="{F00379A9-6D18-4E87-AA57-D1242ABCC942}"/>
+                <a16:creationId xmlns:a16="http://schemas.microsoft.com/office/drawing/2014/main" id="{346DF62C-1982-4E1B-AA5C-6B45B383EACB}"/>
               </a:ext>
             </a:extLst>
           </p:cNvPr>
@@ -19867,7 +19865,7 @@
           <p:cNvPr id="38" name="">
             <a:extLst xmlns:a="http://schemas.openxmlformats.org/drawingml/2006/main">
               <a:ext uri="{FF2B5EF4-FFF2-40B4-BE49-F238E27FC236}">
-                <a16:creationId xmlns:a16="http://schemas.microsoft.com/office/drawing/2014/main" id="{2303940B-2D9E-4048-8DE7-763D4A120E9A}"/>
+                <a16:creationId xmlns:a16="http://schemas.microsoft.com/office/drawing/2014/main" id="{DF12534F-8428-4E62-9A66-D8B5B12F6A74}"/>
               </a:ext>
             </a:extLst>
           </p:cNvPr>
@@ -19900,7 +19898,7 @@
           <p:cNvPr id="39" name="">
             <a:extLst xmlns:a="http://schemas.openxmlformats.org/drawingml/2006/main">
               <a:ext uri="{FF2B5EF4-FFF2-40B4-BE49-F238E27FC236}">
-                <a16:creationId xmlns:a16="http://schemas.microsoft.com/office/drawing/2014/main" id="{A8942CCE-E32F-4E9F-8CC9-7CA94848E5D0}"/>
+                <a16:creationId xmlns:a16="http://schemas.microsoft.com/office/drawing/2014/main" id="{0D7CDE38-C0C7-4DBF-ADC2-CD2CE68D2F7F}"/>
               </a:ext>
             </a:extLst>
           </p:cNvPr>
@@ -19964,7 +19962,7 @@
           <p:cNvPr id="40" name="">
             <a:extLst xmlns:a="http://schemas.openxmlformats.org/drawingml/2006/main">
               <a:ext uri="{FF2B5EF4-FFF2-40B4-BE49-F238E27FC236}">
-                <a16:creationId xmlns:a16="http://schemas.microsoft.com/office/drawing/2014/main" id="{8D889F5A-509C-4290-BECE-D2B60381F3A9}"/>
+                <a16:creationId xmlns:a16="http://schemas.microsoft.com/office/drawing/2014/main" id="{69107A9A-AA65-4C26-B940-67DA4307D7DD}"/>
               </a:ext>
             </a:extLst>
           </p:cNvPr>
@@ -20028,7 +20026,7 @@
           <p:cNvPr id="41" name="">
             <a:extLst xmlns:a="http://schemas.openxmlformats.org/drawingml/2006/main">
               <a:ext uri="{FF2B5EF4-FFF2-40B4-BE49-F238E27FC236}">
-                <a16:creationId xmlns:a16="http://schemas.microsoft.com/office/drawing/2014/main" id="{0EEA1C8F-14B6-4D00-9FA3-B7FD8ABFFC8C}"/>
+                <a16:creationId xmlns:a16="http://schemas.microsoft.com/office/drawing/2014/main" id="{093C6DD8-B582-4A3B-B271-9ED6D2D36F3B}"/>
               </a:ext>
             </a:extLst>
           </p:cNvPr>
@@ -20063,7 +20061,7 @@
           <p:cNvPr id="42" name="">
             <a:extLst xmlns:a="http://schemas.openxmlformats.org/drawingml/2006/main">
               <a:ext uri="{FF2B5EF4-FFF2-40B4-BE49-F238E27FC236}">
-                <a16:creationId xmlns:a16="http://schemas.microsoft.com/office/drawing/2014/main" id="{EFC085B2-9FD3-48A5-B900-B7DBE9415B62}"/>
+                <a16:creationId xmlns:a16="http://schemas.microsoft.com/office/drawing/2014/main" id="{63F92229-8DC8-4833-BE03-316305077E58}"/>
               </a:ext>
             </a:extLst>
           </p:cNvPr>
@@ -20127,7 +20125,7 @@
           <p:cNvPr id="43" name="">
             <a:extLst xmlns:a="http://schemas.openxmlformats.org/drawingml/2006/main">
               <a:ext uri="{FF2B5EF4-FFF2-40B4-BE49-F238E27FC236}">
-                <a16:creationId xmlns:a16="http://schemas.microsoft.com/office/drawing/2014/main" id="{68A4DC58-6248-443E-B2CA-F20E33E6972B}"/>
+                <a16:creationId xmlns:a16="http://schemas.microsoft.com/office/drawing/2014/main" id="{76B1B512-F227-4B33-B6F3-39C6859D7E20}"/>
               </a:ext>
             </a:extLst>
           </p:cNvPr>
@@ -20191,7 +20189,7 @@
           <p:cNvPr id="44" name="">
             <a:extLst xmlns:a="http://schemas.openxmlformats.org/drawingml/2006/main">
               <a:ext uri="{FF2B5EF4-FFF2-40B4-BE49-F238E27FC236}">
-                <a16:creationId xmlns:a16="http://schemas.microsoft.com/office/drawing/2014/main" id="{9B002B5B-7EC7-486D-ACC8-AFE61AD96407}"/>
+                <a16:creationId xmlns:a16="http://schemas.microsoft.com/office/drawing/2014/main" id="{6EE510A6-661E-43CD-81C3-64FF83AE9781}"/>
               </a:ext>
             </a:extLst>
           </p:cNvPr>
@@ -20253,7 +20251,7 @@
     </p:spTree>
     <p:extLst>
       <p:ext uri="{BB962C8B-B14F-4D97-AF65-F5344CB8AC3E}">
-        <p14:creationId xmlns:p14="http://schemas.microsoft.com/office/powerpoint/2010/main" val="546399812"/>
+        <p14:creationId xmlns:p14="http://schemas.microsoft.com/office/powerpoint/2010/main" val="1966904113"/>
       </p:ext>
     </p:extLst>
   </p:cSld>
@@ -20277,7 +20275,7 @@
           <p:cNvPr id="1" name="">
             <a:extLst xmlns:a="http://schemas.openxmlformats.org/drawingml/2006/main">
               <a:ext uri="{FF2B5EF4-FFF2-40B4-BE49-F238E27FC236}">
-                <a16:creationId xmlns:a16="http://schemas.microsoft.com/office/drawing/2014/main" id="{62C8CC5A-1DDB-4F66-AF3F-D558DA952DCC}"/>
+                <a16:creationId xmlns:a16="http://schemas.microsoft.com/office/drawing/2014/main" id="{EEE01A57-ADDB-4139-8A2A-7729465E3EF7}"/>
               </a:ext>
             </a:extLst>
           </p:cNvPr>
@@ -20312,7 +20310,7 @@
           <p:cNvPr id="2" name="">
             <a:extLst xmlns:a="http://schemas.openxmlformats.org/drawingml/2006/main">
               <a:ext uri="{FF2B5EF4-FFF2-40B4-BE49-F238E27FC236}">
-                <a16:creationId xmlns:a16="http://schemas.microsoft.com/office/drawing/2014/main" id="{7AF18196-9C10-4FB9-AEF2-56776C47361A}"/>
+                <a16:creationId xmlns:a16="http://schemas.microsoft.com/office/drawing/2014/main" id="{B75A0AE2-7C8B-474F-AF14-4C09343F204E}"/>
               </a:ext>
             </a:extLst>
           </p:cNvPr>
@@ -20347,7 +20345,7 @@
           <p:cNvPr id="3" name="">
             <a:extLst xmlns:a="http://schemas.openxmlformats.org/drawingml/2006/main">
               <a:ext uri="{FF2B5EF4-FFF2-40B4-BE49-F238E27FC236}">
-                <a16:creationId xmlns:a16="http://schemas.microsoft.com/office/drawing/2014/main" id="{A0295A00-B1AD-42B4-97DF-1A9F2F432040}"/>
+                <a16:creationId xmlns:a16="http://schemas.microsoft.com/office/drawing/2014/main" id="{949AC7D8-03E1-49D7-916F-9A7E7C1EE2C1}"/>
               </a:ext>
             </a:extLst>
           </p:cNvPr>
@@ -20382,7 +20380,7 @@
           <p:cNvPr id="4" name="kicker-06-marker">
             <a:extLst xmlns:a="http://schemas.openxmlformats.org/drawingml/2006/main">
               <a:ext uri="{FF2B5EF4-FFF2-40B4-BE49-F238E27FC236}">
-                <a16:creationId xmlns:a16="http://schemas.microsoft.com/office/drawing/2014/main" id="{8E0EF7A8-7B8D-4C33-A03C-AC6925CA6FAC}"/>
+                <a16:creationId xmlns:a16="http://schemas.microsoft.com/office/drawing/2014/main" id="{ABB8ED90-BB99-4FB8-9101-5833BBA14B4A}"/>
               </a:ext>
             </a:extLst>
           </p:cNvPr>
@@ -20417,7 +20415,7 @@
           <p:cNvPr id="5" name="kicker-06-label">
             <a:extLst xmlns:a="http://schemas.openxmlformats.org/drawingml/2006/main">
               <a:ext uri="{FF2B5EF4-FFF2-40B4-BE49-F238E27FC236}">
-                <a16:creationId xmlns:a16="http://schemas.microsoft.com/office/drawing/2014/main" id="{8F2CF691-AB81-4829-9D4D-D1416AD02EDA}"/>
+                <a16:creationId xmlns:a16="http://schemas.microsoft.com/office/drawing/2014/main" id="{3449DD8C-DB60-46BD-8328-EC5BBEDDEF18}"/>
               </a:ext>
             </a:extLst>
           </p:cNvPr>
@@ -20481,7 +20479,7 @@
           <p:cNvPr id="6" name="">
             <a:extLst xmlns:a="http://schemas.openxmlformats.org/drawingml/2006/main">
               <a:ext uri="{FF2B5EF4-FFF2-40B4-BE49-F238E27FC236}">
-                <a16:creationId xmlns:a16="http://schemas.microsoft.com/office/drawing/2014/main" id="{6E17275E-59E9-4DB0-8C18-C85846269160}"/>
+                <a16:creationId xmlns:a16="http://schemas.microsoft.com/office/drawing/2014/main" id="{10D9F91D-FDB8-42B7-9571-E085EDAFEDD8}"/>
               </a:ext>
             </a:extLst>
           </p:cNvPr>
@@ -20545,7 +20543,7 @@
           <p:cNvPr id="7" name="">
             <a:extLst xmlns:a="http://schemas.openxmlformats.org/drawingml/2006/main">
               <a:ext uri="{FF2B5EF4-FFF2-40B4-BE49-F238E27FC236}">
-                <a16:creationId xmlns:a16="http://schemas.microsoft.com/office/drawing/2014/main" id="{B40CF753-DDF2-4962-A1EC-90B13FE57609}"/>
+                <a16:creationId xmlns:a16="http://schemas.microsoft.com/office/drawing/2014/main" id="{806B279B-7ED6-4417-839F-69B7877F8A72}"/>
               </a:ext>
             </a:extLst>
           </p:cNvPr>
@@ -20609,7 +20607,7 @@
           <p:cNvPr id="8" name="">
             <a:extLst xmlns:a="http://schemas.openxmlformats.org/drawingml/2006/main">
               <a:ext uri="{FF2B5EF4-FFF2-40B4-BE49-F238E27FC236}">
-                <a16:creationId xmlns:a16="http://schemas.microsoft.com/office/drawing/2014/main" id="{22C78FC4-AE69-4438-A51F-1AA8CC22E593}"/>
+                <a16:creationId xmlns:a16="http://schemas.microsoft.com/office/drawing/2014/main" id="{BC01AABF-D440-48B5-A4F2-AAC3A65BA1B9}"/>
               </a:ext>
             </a:extLst>
           </p:cNvPr>
@@ -20644,7 +20642,7 @@
           <p:cNvPr id="9" name="">
             <a:extLst xmlns:a="http://schemas.openxmlformats.org/drawingml/2006/main">
               <a:ext uri="{FF2B5EF4-FFF2-40B4-BE49-F238E27FC236}">
-                <a16:creationId xmlns:a16="http://schemas.microsoft.com/office/drawing/2014/main" id="{13DFD30E-94E2-493E-BFB2-5CFF941DDE0A}"/>
+                <a16:creationId xmlns:a16="http://schemas.microsoft.com/office/drawing/2014/main" id="{8037B5A8-79D7-47B9-939C-FB56273A4A46}"/>
               </a:ext>
             </a:extLst>
           </p:cNvPr>
@@ -20708,7 +20706,7 @@
           <p:cNvPr id="10" name="">
             <a:extLst xmlns:a="http://schemas.openxmlformats.org/drawingml/2006/main">
               <a:ext uri="{FF2B5EF4-FFF2-40B4-BE49-F238E27FC236}">
-                <a16:creationId xmlns:a16="http://schemas.microsoft.com/office/drawing/2014/main" id="{D9CB4AD6-14B6-44CC-BCAD-A1FDE668FF71}"/>
+                <a16:creationId xmlns:a16="http://schemas.microsoft.com/office/drawing/2014/main" id="{C7FFD54B-F2EC-4FF1-AC45-0AC63ADC999C}"/>
               </a:ext>
             </a:extLst>
           </p:cNvPr>
@@ -20772,7 +20770,7 @@
           <p:cNvPr id="11" name="">
             <a:extLst xmlns:a="http://schemas.openxmlformats.org/drawingml/2006/main">
               <a:ext uri="{FF2B5EF4-FFF2-40B4-BE49-F238E27FC236}">
-                <a16:creationId xmlns:a16="http://schemas.microsoft.com/office/drawing/2014/main" id="{ADFA45B0-4130-4DE2-BE4F-D2BED329985E}"/>
+                <a16:creationId xmlns:a16="http://schemas.microsoft.com/office/drawing/2014/main" id="{6358AF4B-66F2-4A28-BF50-79E59439CCC2}"/>
               </a:ext>
             </a:extLst>
           </p:cNvPr>
@@ -20836,7 +20834,7 @@
           <p:cNvPr id="12" name="">
             <a:extLst xmlns:a="http://schemas.openxmlformats.org/drawingml/2006/main">
               <a:ext uri="{FF2B5EF4-FFF2-40B4-BE49-F238E27FC236}">
-                <a16:creationId xmlns:a16="http://schemas.microsoft.com/office/drawing/2014/main" id="{963B5D6D-86D9-45B8-B4E9-8EA27808128F}"/>
+                <a16:creationId xmlns:a16="http://schemas.microsoft.com/office/drawing/2014/main" id="{BE2FAA67-9704-4703-91EC-5386E3472616}"/>
               </a:ext>
             </a:extLst>
           </p:cNvPr>
@@ -20871,7 +20869,7 @@
           <p:cNvPr id="13" name="">
             <a:extLst xmlns:a="http://schemas.openxmlformats.org/drawingml/2006/main">
               <a:ext uri="{FF2B5EF4-FFF2-40B4-BE49-F238E27FC236}">
-                <a16:creationId xmlns:a16="http://schemas.microsoft.com/office/drawing/2014/main" id="{DDC41CDE-21CC-43F2-90E0-070A8A01ADE2}"/>
+                <a16:creationId xmlns:a16="http://schemas.microsoft.com/office/drawing/2014/main" id="{607BE6F3-960D-45DD-95A9-B06E6EEDADAD}"/>
               </a:ext>
             </a:extLst>
           </p:cNvPr>
@@ -20904,7 +20902,7 @@
           <p:cNvPr id="14" name="">
             <a:extLst xmlns:a="http://schemas.openxmlformats.org/drawingml/2006/main">
               <a:ext uri="{FF2B5EF4-FFF2-40B4-BE49-F238E27FC236}">
-                <a16:creationId xmlns:a16="http://schemas.microsoft.com/office/drawing/2014/main" id="{33F7B3B8-38E2-4BC6-A22A-E4A4AFC6A267}"/>
+                <a16:creationId xmlns:a16="http://schemas.microsoft.com/office/drawing/2014/main" id="{F0E32E87-F05B-4A9F-9F70-2CD488D0FE39}"/>
               </a:ext>
             </a:extLst>
           </p:cNvPr>
@@ -20939,7 +20937,7 @@
           <p:cNvPr id="15" name="">
             <a:extLst xmlns:a="http://schemas.openxmlformats.org/drawingml/2006/main">
               <a:ext uri="{FF2B5EF4-FFF2-40B4-BE49-F238E27FC236}">
-                <a16:creationId xmlns:a16="http://schemas.microsoft.com/office/drawing/2014/main" id="{3D1DE9DD-C5F7-43F4-9E72-57DE17F0300E}"/>
+                <a16:creationId xmlns:a16="http://schemas.microsoft.com/office/drawing/2014/main" id="{D4D5DE92-C9E8-41AE-B064-8BCFC8153883}"/>
               </a:ext>
             </a:extLst>
           </p:cNvPr>
@@ -21003,7 +21001,7 @@
           <p:cNvPr id="16" name="">
             <a:extLst xmlns:a="http://schemas.openxmlformats.org/drawingml/2006/main">
               <a:ext uri="{FF2B5EF4-FFF2-40B4-BE49-F238E27FC236}">
-                <a16:creationId xmlns:a16="http://schemas.microsoft.com/office/drawing/2014/main" id="{BA1E4C64-41B7-49CE-B948-D2344EBAD4FB}"/>
+                <a16:creationId xmlns:a16="http://schemas.microsoft.com/office/drawing/2014/main" id="{ABF1DD84-429E-453F-87EA-F60D7F5F0CC2}"/>
               </a:ext>
             </a:extLst>
           </p:cNvPr>
@@ -21036,7 +21034,7 @@
           <p:cNvPr id="17" name="">
             <a:extLst xmlns:a="http://schemas.openxmlformats.org/drawingml/2006/main">
               <a:ext uri="{FF2B5EF4-FFF2-40B4-BE49-F238E27FC236}">
-                <a16:creationId xmlns:a16="http://schemas.microsoft.com/office/drawing/2014/main" id="{4FFC2775-9FF3-4AC9-A537-4DE47A71B3B5}"/>
+                <a16:creationId xmlns:a16="http://schemas.microsoft.com/office/drawing/2014/main" id="{6BF50F83-C3E4-4B9F-9539-446AE8CF93DC}"/>
               </a:ext>
             </a:extLst>
           </p:cNvPr>
@@ -21071,7 +21069,7 @@
           <p:cNvPr id="18" name="">
             <a:extLst xmlns:a="http://schemas.openxmlformats.org/drawingml/2006/main">
               <a:ext uri="{FF2B5EF4-FFF2-40B4-BE49-F238E27FC236}">
-                <a16:creationId xmlns:a16="http://schemas.microsoft.com/office/drawing/2014/main" id="{C4FB8C0A-1398-42B6-B2D6-7CAB89F8A825}"/>
+                <a16:creationId xmlns:a16="http://schemas.microsoft.com/office/drawing/2014/main" id="{85D43053-17D8-41E4-9415-48FEE665517B}"/>
               </a:ext>
             </a:extLst>
           </p:cNvPr>
@@ -21135,7 +21133,7 @@
           <p:cNvPr id="19" name="">
             <a:extLst xmlns:a="http://schemas.openxmlformats.org/drawingml/2006/main">
               <a:ext uri="{FF2B5EF4-FFF2-40B4-BE49-F238E27FC236}">
-                <a16:creationId xmlns:a16="http://schemas.microsoft.com/office/drawing/2014/main" id="{C491097E-72B2-498C-9EB9-214753EB3D87}"/>
+                <a16:creationId xmlns:a16="http://schemas.microsoft.com/office/drawing/2014/main" id="{E3B50323-C2EE-4B62-9ACD-22F5D7D1EEB1}"/>
               </a:ext>
             </a:extLst>
           </p:cNvPr>
@@ -21199,7 +21197,7 @@
           <p:cNvPr id="20" name="">
             <a:extLst xmlns:a="http://schemas.openxmlformats.org/drawingml/2006/main">
               <a:ext uri="{FF2B5EF4-FFF2-40B4-BE49-F238E27FC236}">
-                <a16:creationId xmlns:a16="http://schemas.microsoft.com/office/drawing/2014/main" id="{682C78FF-973C-482E-B347-9F196B0132E4}"/>
+                <a16:creationId xmlns:a16="http://schemas.microsoft.com/office/drawing/2014/main" id="{3D554193-2AC5-43D7-BBF6-47688A52FB04}"/>
               </a:ext>
             </a:extLst>
           </p:cNvPr>
@@ -21234,7 +21232,7 @@
           <p:cNvPr id="21" name="">
             <a:extLst xmlns:a="http://schemas.openxmlformats.org/drawingml/2006/main">
               <a:ext uri="{FF2B5EF4-FFF2-40B4-BE49-F238E27FC236}">
-                <a16:creationId xmlns:a16="http://schemas.microsoft.com/office/drawing/2014/main" id="{A42E32A4-392A-4716-9EF3-95C04701613B}"/>
+                <a16:creationId xmlns:a16="http://schemas.microsoft.com/office/drawing/2014/main" id="{1996AEE1-6350-4E6A-A9C5-6D4C53BA20FF}"/>
               </a:ext>
             </a:extLst>
           </p:cNvPr>
@@ -21267,7 +21265,7 @@
           <p:cNvPr id="22" name="">
             <a:extLst xmlns:a="http://schemas.openxmlformats.org/drawingml/2006/main">
               <a:ext uri="{FF2B5EF4-FFF2-40B4-BE49-F238E27FC236}">
-                <a16:creationId xmlns:a16="http://schemas.microsoft.com/office/drawing/2014/main" id="{FCF1E68F-E11D-42E9-9205-1318FF2F12FA}"/>
+                <a16:creationId xmlns:a16="http://schemas.microsoft.com/office/drawing/2014/main" id="{0A082FA5-7313-426E-9676-5FF75E0CC949}"/>
               </a:ext>
             </a:extLst>
           </p:cNvPr>
@@ -21302,7 +21300,7 @@
           <p:cNvPr id="23" name="">
             <a:extLst xmlns:a="http://schemas.openxmlformats.org/drawingml/2006/main">
               <a:ext uri="{FF2B5EF4-FFF2-40B4-BE49-F238E27FC236}">
-                <a16:creationId xmlns:a16="http://schemas.microsoft.com/office/drawing/2014/main" id="{8CFBB8B2-54DB-4516-8D87-B7730E9F20C9}"/>
+                <a16:creationId xmlns:a16="http://schemas.microsoft.com/office/drawing/2014/main" id="{D229914A-3126-4F0D-940E-D6C69F624276}"/>
               </a:ext>
             </a:extLst>
           </p:cNvPr>
@@ -21366,7 +21364,7 @@
           <p:cNvPr id="24" name="">
             <a:extLst xmlns:a="http://schemas.openxmlformats.org/drawingml/2006/main">
               <a:ext uri="{FF2B5EF4-FFF2-40B4-BE49-F238E27FC236}">
-                <a16:creationId xmlns:a16="http://schemas.microsoft.com/office/drawing/2014/main" id="{E5019E46-D51A-43B7-8889-389D09301305}"/>
+                <a16:creationId xmlns:a16="http://schemas.microsoft.com/office/drawing/2014/main" id="{5F669265-11CA-40BA-9DDC-C0CB0C3CEFA1}"/>
               </a:ext>
             </a:extLst>
           </p:cNvPr>
@@ -21430,7 +21428,7 @@
           <p:cNvPr id="25" name="">
             <a:extLst xmlns:a="http://schemas.openxmlformats.org/drawingml/2006/main">
               <a:ext uri="{FF2B5EF4-FFF2-40B4-BE49-F238E27FC236}">
-                <a16:creationId xmlns:a16="http://schemas.microsoft.com/office/drawing/2014/main" id="{78D094FF-0B00-44DE-8FDD-8A17405074C4}"/>
+                <a16:creationId xmlns:a16="http://schemas.microsoft.com/office/drawing/2014/main" id="{BBAF09D8-3726-4658-A939-6FD02E6C13E2}"/>
               </a:ext>
             </a:extLst>
           </p:cNvPr>
@@ -21465,7 +21463,7 @@
           <p:cNvPr id="26" name="">
             <a:extLst xmlns:a="http://schemas.openxmlformats.org/drawingml/2006/main">
               <a:ext uri="{FF2B5EF4-FFF2-40B4-BE49-F238E27FC236}">
-                <a16:creationId xmlns:a16="http://schemas.microsoft.com/office/drawing/2014/main" id="{ED95DAAC-C557-4E25-A45C-3FDF8F53F2FC}"/>
+                <a16:creationId xmlns:a16="http://schemas.microsoft.com/office/drawing/2014/main" id="{77275723-4270-4D14-A300-FB31461D6A81}"/>
               </a:ext>
             </a:extLst>
           </p:cNvPr>
@@ -21498,7 +21496,7 @@
           <p:cNvPr id="27" name="">
             <a:extLst xmlns:a="http://schemas.openxmlformats.org/drawingml/2006/main">
               <a:ext uri="{FF2B5EF4-FFF2-40B4-BE49-F238E27FC236}">
-                <a16:creationId xmlns:a16="http://schemas.microsoft.com/office/drawing/2014/main" id="{C17230B9-4907-4101-BD62-021C2490265F}"/>
+                <a16:creationId xmlns:a16="http://schemas.microsoft.com/office/drawing/2014/main" id="{01E7C027-F2D5-4BD8-8EE8-939D3E299E3F}"/>
               </a:ext>
             </a:extLst>
           </p:cNvPr>
@@ -21533,7 +21531,7 @@
           <p:cNvPr id="28" name="">
             <a:extLst xmlns:a="http://schemas.openxmlformats.org/drawingml/2006/main">
               <a:ext uri="{FF2B5EF4-FFF2-40B4-BE49-F238E27FC236}">
-                <a16:creationId xmlns:a16="http://schemas.microsoft.com/office/drawing/2014/main" id="{111D36FC-50F8-4F27-9A0B-4EB6642C079D}"/>
+                <a16:creationId xmlns:a16="http://schemas.microsoft.com/office/drawing/2014/main" id="{C96F9C7B-B447-4777-A0E1-9E212ADD0FB9}"/>
               </a:ext>
             </a:extLst>
           </p:cNvPr>
@@ -21597,7 +21595,7 @@
           <p:cNvPr id="29" name="">
             <a:extLst xmlns:a="http://schemas.openxmlformats.org/drawingml/2006/main">
               <a:ext uri="{FF2B5EF4-FFF2-40B4-BE49-F238E27FC236}">
-                <a16:creationId xmlns:a16="http://schemas.microsoft.com/office/drawing/2014/main" id="{7EA0F21F-96C2-4B42-8A71-A084C2F3FFE1}"/>
+                <a16:creationId xmlns:a16="http://schemas.microsoft.com/office/drawing/2014/main" id="{3D49B6EF-E799-4F00-87D4-05B76A933663}"/>
               </a:ext>
             </a:extLst>
           </p:cNvPr>
@@ -21661,7 +21659,7 @@
           <p:cNvPr id="30" name="">
             <a:extLst xmlns:a="http://schemas.openxmlformats.org/drawingml/2006/main">
               <a:ext uri="{FF2B5EF4-FFF2-40B4-BE49-F238E27FC236}">
-                <a16:creationId xmlns:a16="http://schemas.microsoft.com/office/drawing/2014/main" id="{EFA53EEA-8D83-4ACD-9961-B4D7CE1D764C}"/>
+                <a16:creationId xmlns:a16="http://schemas.microsoft.com/office/drawing/2014/main" id="{5E9D1E95-2412-4EC2-9D2E-03C390217429}"/>
               </a:ext>
             </a:extLst>
           </p:cNvPr>
@@ -21696,7 +21694,7 @@
           <p:cNvPr id="31" name="">
             <a:extLst xmlns:a="http://schemas.openxmlformats.org/drawingml/2006/main">
               <a:ext uri="{FF2B5EF4-FFF2-40B4-BE49-F238E27FC236}">
-                <a16:creationId xmlns:a16="http://schemas.microsoft.com/office/drawing/2014/main" id="{6D952E09-8C79-4A8D-9968-B210911FE495}"/>
+                <a16:creationId xmlns:a16="http://schemas.microsoft.com/office/drawing/2014/main" id="{479583E1-8919-4317-9B85-A817374B0EEF}"/>
               </a:ext>
             </a:extLst>
           </p:cNvPr>
@@ -21729,7 +21727,7 @@
           <p:cNvPr id="32" name="">
             <a:extLst xmlns:a="http://schemas.openxmlformats.org/drawingml/2006/main">
               <a:ext uri="{FF2B5EF4-FFF2-40B4-BE49-F238E27FC236}">
-                <a16:creationId xmlns:a16="http://schemas.microsoft.com/office/drawing/2014/main" id="{32F12C11-8F53-4036-B09C-B13650283F77}"/>
+                <a16:creationId xmlns:a16="http://schemas.microsoft.com/office/drawing/2014/main" id="{3605437A-6019-4469-9C2B-97200709493B}"/>
               </a:ext>
             </a:extLst>
           </p:cNvPr>
@@ -21764,7 +21762,7 @@
           <p:cNvPr id="33" name="">
             <a:extLst xmlns:a="http://schemas.openxmlformats.org/drawingml/2006/main">
               <a:ext uri="{FF2B5EF4-FFF2-40B4-BE49-F238E27FC236}">
-                <a16:creationId xmlns:a16="http://schemas.microsoft.com/office/drawing/2014/main" id="{D279378D-4451-4B33-B191-C09FD909E792}"/>
+                <a16:creationId xmlns:a16="http://schemas.microsoft.com/office/drawing/2014/main" id="{3FEBFBE1-7844-42B3-9D24-2009450F2F65}"/>
               </a:ext>
             </a:extLst>
           </p:cNvPr>
@@ -21828,7 +21826,7 @@
           <p:cNvPr id="34" name="">
             <a:extLst xmlns:a="http://schemas.openxmlformats.org/drawingml/2006/main">
               <a:ext uri="{FF2B5EF4-FFF2-40B4-BE49-F238E27FC236}">
-                <a16:creationId xmlns:a16="http://schemas.microsoft.com/office/drawing/2014/main" id="{3D046B80-9780-48DB-96F4-A15A94F0850D}"/>
+                <a16:creationId xmlns:a16="http://schemas.microsoft.com/office/drawing/2014/main" id="{B6C3059A-26F8-4AB2-8E17-1840023E003A}"/>
               </a:ext>
             </a:extLst>
           </p:cNvPr>
@@ -21892,7 +21890,7 @@
           <p:cNvPr id="35" name="">
             <a:extLst xmlns:a="http://schemas.openxmlformats.org/drawingml/2006/main">
               <a:ext uri="{FF2B5EF4-FFF2-40B4-BE49-F238E27FC236}">
-                <a16:creationId xmlns:a16="http://schemas.microsoft.com/office/drawing/2014/main" id="{B61CA597-BCAA-49D3-B811-07BA458CA59A}"/>
+                <a16:creationId xmlns:a16="http://schemas.microsoft.com/office/drawing/2014/main" id="{80DA8148-7505-4821-A4F4-B6E6EEF20221}"/>
               </a:ext>
             </a:extLst>
           </p:cNvPr>
@@ -21925,7 +21923,7 @@
           <p:cNvPr id="36" name="">
             <a:extLst xmlns:a="http://schemas.openxmlformats.org/drawingml/2006/main">
               <a:ext uri="{FF2B5EF4-FFF2-40B4-BE49-F238E27FC236}">
-                <a16:creationId xmlns:a16="http://schemas.microsoft.com/office/drawing/2014/main" id="{6329E0B5-CE90-46EE-AEA5-38C5493B69FA}"/>
+                <a16:creationId xmlns:a16="http://schemas.microsoft.com/office/drawing/2014/main" id="{B7747931-0CB5-4C7B-950E-53814C2537CB}"/>
               </a:ext>
             </a:extLst>
           </p:cNvPr>
@@ -21960,7 +21958,7 @@
           <p:cNvPr id="37" name="">
             <a:extLst xmlns:a="http://schemas.openxmlformats.org/drawingml/2006/main">
               <a:ext uri="{FF2B5EF4-FFF2-40B4-BE49-F238E27FC236}">
-                <a16:creationId xmlns:a16="http://schemas.microsoft.com/office/drawing/2014/main" id="{351BE2C3-59EB-4B04-8E73-57B2596F119C}"/>
+                <a16:creationId xmlns:a16="http://schemas.microsoft.com/office/drawing/2014/main" id="{6C9ADBBE-AC7A-42A2-8564-9B05E5F424D8}"/>
               </a:ext>
             </a:extLst>
           </p:cNvPr>
@@ -22024,7 +22022,7 @@
           <p:cNvPr id="38" name="">
             <a:extLst xmlns:a="http://schemas.openxmlformats.org/drawingml/2006/main">
               <a:ext uri="{FF2B5EF4-FFF2-40B4-BE49-F238E27FC236}">
-                <a16:creationId xmlns:a16="http://schemas.microsoft.com/office/drawing/2014/main" id="{24BA38DD-EBFB-445F-A3B3-1DE1BFA76C93}"/>
+                <a16:creationId xmlns:a16="http://schemas.microsoft.com/office/drawing/2014/main" id="{82357899-9E9A-4809-A271-6F04107DE0F5}"/>
               </a:ext>
             </a:extLst>
           </p:cNvPr>
@@ -22088,7 +22086,7 @@
           <p:cNvPr id="39" name="">
             <a:extLst xmlns:a="http://schemas.openxmlformats.org/drawingml/2006/main">
               <a:ext uri="{FF2B5EF4-FFF2-40B4-BE49-F238E27FC236}">
-                <a16:creationId xmlns:a16="http://schemas.microsoft.com/office/drawing/2014/main" id="{8EED8400-7633-4404-90B9-FFB3EED01A15}"/>
+                <a16:creationId xmlns:a16="http://schemas.microsoft.com/office/drawing/2014/main" id="{3D067D45-9BB7-42DA-BA2B-4C0692757852}"/>
               </a:ext>
             </a:extLst>
           </p:cNvPr>
@@ -22123,7 +22121,7 @@
           <p:cNvPr id="40" name="">
             <a:extLst xmlns:a="http://schemas.openxmlformats.org/drawingml/2006/main">
               <a:ext uri="{FF2B5EF4-FFF2-40B4-BE49-F238E27FC236}">
-                <a16:creationId xmlns:a16="http://schemas.microsoft.com/office/drawing/2014/main" id="{D0AE7AD4-04C8-420F-A6DE-7F2BC32F29D7}"/>
+                <a16:creationId xmlns:a16="http://schemas.microsoft.com/office/drawing/2014/main" id="{29433B6E-0895-4570-90B3-3D0B903C78F8}"/>
               </a:ext>
             </a:extLst>
           </p:cNvPr>
@@ -22156,7 +22154,7 @@
           <p:cNvPr id="41" name="">
             <a:extLst xmlns:a="http://schemas.openxmlformats.org/drawingml/2006/main">
               <a:ext uri="{FF2B5EF4-FFF2-40B4-BE49-F238E27FC236}">
-                <a16:creationId xmlns:a16="http://schemas.microsoft.com/office/drawing/2014/main" id="{A30DAAA0-8015-4A2B-B7B1-7277FB505218}"/>
+                <a16:creationId xmlns:a16="http://schemas.microsoft.com/office/drawing/2014/main" id="{3810C8B5-F037-404B-A810-0646D4C7E2EF}"/>
               </a:ext>
             </a:extLst>
           </p:cNvPr>
@@ -22191,7 +22189,7 @@
           <p:cNvPr id="42" name="">
             <a:extLst xmlns:a="http://schemas.openxmlformats.org/drawingml/2006/main">
               <a:ext uri="{FF2B5EF4-FFF2-40B4-BE49-F238E27FC236}">
-                <a16:creationId xmlns:a16="http://schemas.microsoft.com/office/drawing/2014/main" id="{41027CC4-E073-41F4-9B5D-99FA7EB7B6D3}"/>
+                <a16:creationId xmlns:a16="http://schemas.microsoft.com/office/drawing/2014/main" id="{8C44052D-DFB2-4FA5-B6E0-376B1BA0BD88}"/>
               </a:ext>
             </a:extLst>
           </p:cNvPr>
@@ -22255,7 +22253,7 @@
           <p:cNvPr id="43" name="">
             <a:extLst xmlns:a="http://schemas.openxmlformats.org/drawingml/2006/main">
               <a:ext uri="{FF2B5EF4-FFF2-40B4-BE49-F238E27FC236}">
-                <a16:creationId xmlns:a16="http://schemas.microsoft.com/office/drawing/2014/main" id="{6E59F70D-6970-4EA3-890D-C3E2CA31F804}"/>
+                <a16:creationId xmlns:a16="http://schemas.microsoft.com/office/drawing/2014/main" id="{85200A26-ADEB-41B7-8E2B-E7AC7E5811B9}"/>
               </a:ext>
             </a:extLst>
           </p:cNvPr>
@@ -22319,7 +22317,7 @@
           <p:cNvPr id="44" name="">
             <a:extLst xmlns:a="http://schemas.openxmlformats.org/drawingml/2006/main">
               <a:ext uri="{FF2B5EF4-FFF2-40B4-BE49-F238E27FC236}">
-                <a16:creationId xmlns:a16="http://schemas.microsoft.com/office/drawing/2014/main" id="{FC709A4C-C6EA-4CB5-9231-5DB59658D634}"/>
+                <a16:creationId xmlns:a16="http://schemas.microsoft.com/office/drawing/2014/main" id="{89BF3E39-972B-461D-8F48-010B6CAF5E91}"/>
               </a:ext>
             </a:extLst>
           </p:cNvPr>
@@ -22354,7 +22352,7 @@
           <p:cNvPr id="45" name="">
             <a:extLst xmlns:a="http://schemas.openxmlformats.org/drawingml/2006/main">
               <a:ext uri="{FF2B5EF4-FFF2-40B4-BE49-F238E27FC236}">
-                <a16:creationId xmlns:a16="http://schemas.microsoft.com/office/drawing/2014/main" id="{1BC47465-507B-4117-952D-A5DDB9D9E3F4}"/>
+                <a16:creationId xmlns:a16="http://schemas.microsoft.com/office/drawing/2014/main" id="{5068B4CE-8D87-4095-8992-8C3CC0BC7CB5}"/>
               </a:ext>
             </a:extLst>
           </p:cNvPr>
@@ -22387,7 +22385,7 @@
           <p:cNvPr id="46" name="">
             <a:extLst xmlns:a="http://schemas.openxmlformats.org/drawingml/2006/main">
               <a:ext uri="{FF2B5EF4-FFF2-40B4-BE49-F238E27FC236}">
-                <a16:creationId xmlns:a16="http://schemas.microsoft.com/office/drawing/2014/main" id="{71482504-A31F-495C-91F2-2DC6F142F449}"/>
+                <a16:creationId xmlns:a16="http://schemas.microsoft.com/office/drawing/2014/main" id="{0861E276-7915-4BF6-B0DB-B0E2185D47E4}"/>
               </a:ext>
             </a:extLst>
           </p:cNvPr>
@@ -22422,7 +22420,7 @@
           <p:cNvPr id="47" name="">
             <a:extLst xmlns:a="http://schemas.openxmlformats.org/drawingml/2006/main">
               <a:ext uri="{FF2B5EF4-FFF2-40B4-BE49-F238E27FC236}">
-                <a16:creationId xmlns:a16="http://schemas.microsoft.com/office/drawing/2014/main" id="{7F6D6930-BC60-40BA-A81A-08459EA9F0E0}"/>
+                <a16:creationId xmlns:a16="http://schemas.microsoft.com/office/drawing/2014/main" id="{9CB70342-56B9-40C4-BCDB-B6288D36A05E}"/>
               </a:ext>
             </a:extLst>
           </p:cNvPr>
@@ -22486,7 +22484,7 @@
           <p:cNvPr id="48" name="">
             <a:extLst xmlns:a="http://schemas.openxmlformats.org/drawingml/2006/main">
               <a:ext uri="{FF2B5EF4-FFF2-40B4-BE49-F238E27FC236}">
-                <a16:creationId xmlns:a16="http://schemas.microsoft.com/office/drawing/2014/main" id="{335DC560-AF6B-47B9-86AE-55776233D13C}"/>
+                <a16:creationId xmlns:a16="http://schemas.microsoft.com/office/drawing/2014/main" id="{2DABA7CF-54DC-4903-A169-1DEF685561D1}"/>
               </a:ext>
             </a:extLst>
           </p:cNvPr>
@@ -22550,7 +22548,7 @@
           <p:cNvPr id="49" name="">
             <a:extLst xmlns:a="http://schemas.openxmlformats.org/drawingml/2006/main">
               <a:ext uri="{FF2B5EF4-FFF2-40B4-BE49-F238E27FC236}">
-                <a16:creationId xmlns:a16="http://schemas.microsoft.com/office/drawing/2014/main" id="{E186F9FE-B89A-44C8-92A4-3A8F1F71238D}"/>
+                <a16:creationId xmlns:a16="http://schemas.microsoft.com/office/drawing/2014/main" id="{1FFB372F-71D0-4C7A-90C2-BF2DF19BA8DC}"/>
               </a:ext>
             </a:extLst>
           </p:cNvPr>
@@ -22583,7 +22581,7 @@
           <p:cNvPr id="50" name="">
             <a:extLst xmlns:a="http://schemas.openxmlformats.org/drawingml/2006/main">
               <a:ext uri="{FF2B5EF4-FFF2-40B4-BE49-F238E27FC236}">
-                <a16:creationId xmlns:a16="http://schemas.microsoft.com/office/drawing/2014/main" id="{95E6FD6C-32D1-4358-B1FD-4E70290C2127}"/>
+                <a16:creationId xmlns:a16="http://schemas.microsoft.com/office/drawing/2014/main" id="{ED7528F8-3564-41BD-8A71-AFFD14ACD395}"/>
               </a:ext>
             </a:extLst>
           </p:cNvPr>
@@ -22647,7 +22645,7 @@
           <p:cNvPr id="51" name="">
             <a:extLst xmlns:a="http://schemas.openxmlformats.org/drawingml/2006/main">
               <a:ext uri="{FF2B5EF4-FFF2-40B4-BE49-F238E27FC236}">
-                <a16:creationId xmlns:a16="http://schemas.microsoft.com/office/drawing/2014/main" id="{FC698F6E-B736-4D7C-8D81-7D049B261318}"/>
+                <a16:creationId xmlns:a16="http://schemas.microsoft.com/office/drawing/2014/main" id="{2C723618-021C-48EE-843E-A2F6213E3D7D}"/>
               </a:ext>
             </a:extLst>
           </p:cNvPr>
@@ -22682,7 +22680,7 @@
           <p:cNvPr id="52" name="">
             <a:extLst xmlns:a="http://schemas.openxmlformats.org/drawingml/2006/main">
               <a:ext uri="{FF2B5EF4-FFF2-40B4-BE49-F238E27FC236}">
-                <a16:creationId xmlns:a16="http://schemas.microsoft.com/office/drawing/2014/main" id="{F38D287D-70F6-473C-9BD5-C48A4338CD54}"/>
+                <a16:creationId xmlns:a16="http://schemas.microsoft.com/office/drawing/2014/main" id="{7AF1EDE3-BD5D-4D88-8E08-4B1F78E45186}"/>
               </a:ext>
             </a:extLst>
           </p:cNvPr>
@@ -22746,7 +22744,7 @@
           <p:cNvPr id="53" name="">
             <a:extLst xmlns:a="http://schemas.openxmlformats.org/drawingml/2006/main">
               <a:ext uri="{FF2B5EF4-FFF2-40B4-BE49-F238E27FC236}">
-                <a16:creationId xmlns:a16="http://schemas.microsoft.com/office/drawing/2014/main" id="{77069B37-AF64-46B3-9302-19FCE61C1FEA}"/>
+                <a16:creationId xmlns:a16="http://schemas.microsoft.com/office/drawing/2014/main" id="{8CBD01DF-53A3-4BA5-AF29-A4F964571D83}"/>
               </a:ext>
             </a:extLst>
           </p:cNvPr>
@@ -22810,7 +22808,7 @@
           <p:cNvPr id="54" name="">
             <a:extLst xmlns:a="http://schemas.openxmlformats.org/drawingml/2006/main">
               <a:ext uri="{FF2B5EF4-FFF2-40B4-BE49-F238E27FC236}">
-                <a16:creationId xmlns:a16="http://schemas.microsoft.com/office/drawing/2014/main" id="{E3B3D64F-8A27-47B2-B34A-FFC6A4F9CC32}"/>
+                <a16:creationId xmlns:a16="http://schemas.microsoft.com/office/drawing/2014/main" id="{22485D26-9711-47B6-84A1-3A8E896218C5}"/>
               </a:ext>
             </a:extLst>
           </p:cNvPr>
@@ -22874,7 +22872,7 @@
           <p:cNvPr id="55" name="">
             <a:extLst xmlns:a="http://schemas.openxmlformats.org/drawingml/2006/main">
               <a:ext uri="{FF2B5EF4-FFF2-40B4-BE49-F238E27FC236}">
-                <a16:creationId xmlns:a16="http://schemas.microsoft.com/office/drawing/2014/main" id="{E3F76F9D-3686-451F-9D81-79449A35CAA0}"/>
+                <a16:creationId xmlns:a16="http://schemas.microsoft.com/office/drawing/2014/main" id="{68C6FD6F-79FE-4C94-9E9C-66E8F603838F}"/>
               </a:ext>
             </a:extLst>
           </p:cNvPr>
@@ -22909,7 +22907,7 @@
           <p:cNvPr id="56" name="">
             <a:extLst xmlns:a="http://schemas.openxmlformats.org/drawingml/2006/main">
               <a:ext uri="{FF2B5EF4-FFF2-40B4-BE49-F238E27FC236}">
-                <a16:creationId xmlns:a16="http://schemas.microsoft.com/office/drawing/2014/main" id="{789B3CC8-8708-493E-98AE-3A3308B7ED15}"/>
+                <a16:creationId xmlns:a16="http://schemas.microsoft.com/office/drawing/2014/main" id="{6695ED39-5677-4DD3-9FC9-526DA485F7F6}"/>
               </a:ext>
             </a:extLst>
           </p:cNvPr>
@@ -22944,7 +22942,7 @@
           <p:cNvPr id="57" name="">
             <a:extLst xmlns:a="http://schemas.openxmlformats.org/drawingml/2006/main">
               <a:ext uri="{FF2B5EF4-FFF2-40B4-BE49-F238E27FC236}">
-                <a16:creationId xmlns:a16="http://schemas.microsoft.com/office/drawing/2014/main" id="{ED97B877-7F39-44FA-BECD-6A446188983B}"/>
+                <a16:creationId xmlns:a16="http://schemas.microsoft.com/office/drawing/2014/main" id="{4EEB55EE-AB18-4CD5-9CF6-28D1EEE25E3A}"/>
               </a:ext>
             </a:extLst>
           </p:cNvPr>
@@ -22979,7 +22977,7 @@
           <p:cNvPr id="58" name="kicker-06-marker">
             <a:extLst xmlns:a="http://schemas.openxmlformats.org/drawingml/2006/main">
               <a:ext uri="{FF2B5EF4-FFF2-40B4-BE49-F238E27FC236}">
-                <a16:creationId xmlns:a16="http://schemas.microsoft.com/office/drawing/2014/main" id="{83047176-27A0-4D21-B04A-CD2176C968A1}"/>
+                <a16:creationId xmlns:a16="http://schemas.microsoft.com/office/drawing/2014/main" id="{9EEFB00A-28E3-47FD-88F1-C22889EDB473}"/>
               </a:ext>
             </a:extLst>
           </p:cNvPr>
@@ -23014,7 +23012,7 @@
           <p:cNvPr id="59" name="kicker-06-label">
             <a:extLst xmlns:a="http://schemas.openxmlformats.org/drawingml/2006/main">
               <a:ext uri="{FF2B5EF4-FFF2-40B4-BE49-F238E27FC236}">
-                <a16:creationId xmlns:a16="http://schemas.microsoft.com/office/drawing/2014/main" id="{50CE4FAA-F889-41CD-A733-9D700C0A6DB7}"/>
+                <a16:creationId xmlns:a16="http://schemas.microsoft.com/office/drawing/2014/main" id="{4BFA9694-0292-4553-84E1-28F2205AA9C8}"/>
               </a:ext>
             </a:extLst>
           </p:cNvPr>
@@ -23078,7 +23076,7 @@
           <p:cNvPr id="60" name="">
             <a:extLst xmlns:a="http://schemas.openxmlformats.org/drawingml/2006/main">
               <a:ext uri="{FF2B5EF4-FFF2-40B4-BE49-F238E27FC236}">
-                <a16:creationId xmlns:a16="http://schemas.microsoft.com/office/drawing/2014/main" id="{36F2E877-FA57-4BB0-8A50-6CE24DA0E38E}"/>
+                <a16:creationId xmlns:a16="http://schemas.microsoft.com/office/drawing/2014/main" id="{DF4C0F53-CC3C-4800-8133-2D446DB2E4EC}"/>
               </a:ext>
             </a:extLst>
           </p:cNvPr>
@@ -23142,7 +23140,7 @@
           <p:cNvPr id="61" name="">
             <a:extLst xmlns:a="http://schemas.openxmlformats.org/drawingml/2006/main">
               <a:ext uri="{FF2B5EF4-FFF2-40B4-BE49-F238E27FC236}">
-                <a16:creationId xmlns:a16="http://schemas.microsoft.com/office/drawing/2014/main" id="{B75D2B3F-A580-453A-8042-762BB8011AED}"/>
+                <a16:creationId xmlns:a16="http://schemas.microsoft.com/office/drawing/2014/main" id="{9C2BF7A3-52C8-4461-ACD7-B6D68B1A5D24}"/>
               </a:ext>
             </a:extLst>
           </p:cNvPr>
@@ -23206,7 +23204,7 @@
           <p:cNvPr id="62" name="">
             <a:extLst xmlns:a="http://schemas.openxmlformats.org/drawingml/2006/main">
               <a:ext uri="{FF2B5EF4-FFF2-40B4-BE49-F238E27FC236}">
-                <a16:creationId xmlns:a16="http://schemas.microsoft.com/office/drawing/2014/main" id="{9D0AE05E-DB35-4CA7-A6CC-CF09D3753B04}"/>
+                <a16:creationId xmlns:a16="http://schemas.microsoft.com/office/drawing/2014/main" id="{10083727-258E-42A2-8754-7CEB64FF6FC5}"/>
               </a:ext>
             </a:extLst>
           </p:cNvPr>
@@ -23241,7 +23239,7 @@
           <p:cNvPr id="63" name="">
             <a:extLst xmlns:a="http://schemas.openxmlformats.org/drawingml/2006/main">
               <a:ext uri="{FF2B5EF4-FFF2-40B4-BE49-F238E27FC236}">
-                <a16:creationId xmlns:a16="http://schemas.microsoft.com/office/drawing/2014/main" id="{B69F5540-2505-416B-8802-09E94F52D329}"/>
+                <a16:creationId xmlns:a16="http://schemas.microsoft.com/office/drawing/2014/main" id="{6EDC4585-6261-4A31-8ED5-CF5EFD68E71F}"/>
               </a:ext>
             </a:extLst>
           </p:cNvPr>
@@ -23276,7 +23274,7 @@
           <p:cNvPr id="64" name="">
             <a:extLst xmlns:a="http://schemas.openxmlformats.org/drawingml/2006/main">
               <a:ext uri="{FF2B5EF4-FFF2-40B4-BE49-F238E27FC236}">
-                <a16:creationId xmlns:a16="http://schemas.microsoft.com/office/drawing/2014/main" id="{5D02C8C4-CDB7-4B14-B0CF-DAF69E2D48D8}"/>
+                <a16:creationId xmlns:a16="http://schemas.microsoft.com/office/drawing/2014/main" id="{313DB0C3-9425-46FD-891D-B793903C46C9}"/>
               </a:ext>
             </a:extLst>
           </p:cNvPr>
@@ -23311,7 +23309,7 @@
           <p:cNvPr id="65" name="">
             <a:extLst xmlns:a="http://schemas.openxmlformats.org/drawingml/2006/main">
               <a:ext uri="{FF2B5EF4-FFF2-40B4-BE49-F238E27FC236}">
-                <a16:creationId xmlns:a16="http://schemas.microsoft.com/office/drawing/2014/main" id="{6A7A553D-2E13-4CDE-80BA-CEC4E81FF086}"/>
+                <a16:creationId xmlns:a16="http://schemas.microsoft.com/office/drawing/2014/main" id="{5F7431AD-45C9-4817-A9D9-7844BF97CD9F}"/>
               </a:ext>
             </a:extLst>
           </p:cNvPr>
@@ -23346,7 +23344,7 @@
           <p:cNvPr id="66" name="">
             <a:extLst xmlns:a="http://schemas.openxmlformats.org/drawingml/2006/main">
               <a:ext uri="{FF2B5EF4-FFF2-40B4-BE49-F238E27FC236}">
-                <a16:creationId xmlns:a16="http://schemas.microsoft.com/office/drawing/2014/main" id="{882904D0-0229-4007-9E8D-39BE4F21984C}"/>
+                <a16:creationId xmlns:a16="http://schemas.microsoft.com/office/drawing/2014/main" id="{F4452FF4-3FFA-4B80-AAA4-9CF113A183A1}"/>
               </a:ext>
             </a:extLst>
           </p:cNvPr>
@@ -23410,7 +23408,7 @@
           <p:cNvPr id="67" name="">
             <a:extLst xmlns:a="http://schemas.openxmlformats.org/drawingml/2006/main">
               <a:ext uri="{FF2B5EF4-FFF2-40B4-BE49-F238E27FC236}">
-                <a16:creationId xmlns:a16="http://schemas.microsoft.com/office/drawing/2014/main" id="{1781D484-12BD-4D97-958D-0443EC3AA886}"/>
+                <a16:creationId xmlns:a16="http://schemas.microsoft.com/office/drawing/2014/main" id="{15A59B65-AB04-48AC-8920-41AB635568A3}"/>
               </a:ext>
             </a:extLst>
           </p:cNvPr>
@@ -23474,7 +23472,7 @@
           <p:cNvPr id="68" name="">
             <a:extLst xmlns:a="http://schemas.openxmlformats.org/drawingml/2006/main">
               <a:ext uri="{FF2B5EF4-FFF2-40B4-BE49-F238E27FC236}">
-                <a16:creationId xmlns:a16="http://schemas.microsoft.com/office/drawing/2014/main" id="{CE9D9D97-AA48-4493-A8AB-E48B404032A1}"/>
+                <a16:creationId xmlns:a16="http://schemas.microsoft.com/office/drawing/2014/main" id="{08E3E981-2CDF-4381-B45C-9D2D1D2B591F}"/>
               </a:ext>
             </a:extLst>
           </p:cNvPr>
@@ -23536,7 +23534,7 @@
     </p:spTree>
     <p:extLst>
       <p:ext uri="{BB962C8B-B14F-4D97-AF65-F5344CB8AC3E}">
-        <p14:creationId xmlns:p14="http://schemas.microsoft.com/office/powerpoint/2010/main" val="840635544"/>
+        <p14:creationId xmlns:p14="http://schemas.microsoft.com/office/powerpoint/2010/main" val="1812769875"/>
       </p:ext>
     </p:extLst>
   </p:cSld>
@@ -23560,7 +23558,7 @@
           <p:cNvPr id="1" name="">
             <a:extLst xmlns:a="http://schemas.openxmlformats.org/drawingml/2006/main">
               <a:ext uri="{FF2B5EF4-FFF2-40B4-BE49-F238E27FC236}">
-                <a16:creationId xmlns:a16="http://schemas.microsoft.com/office/drawing/2014/main" id="{9C900C5A-5A42-499B-BDFC-E724A8B67C32}"/>
+                <a16:creationId xmlns:a16="http://schemas.microsoft.com/office/drawing/2014/main" id="{FFC4BEB2-E92A-4C20-B9C3-9ED4BB0524C7}"/>
               </a:ext>
             </a:extLst>
           </p:cNvPr>
@@ -23595,7 +23593,7 @@
           <p:cNvPr id="2" name="">
             <a:extLst xmlns:a="http://schemas.openxmlformats.org/drawingml/2006/main">
               <a:ext uri="{FF2B5EF4-FFF2-40B4-BE49-F238E27FC236}">
-                <a16:creationId xmlns:a16="http://schemas.microsoft.com/office/drawing/2014/main" id="{0D788855-3BCD-49FF-9125-5C6FF4F95010}"/>
+                <a16:creationId xmlns:a16="http://schemas.microsoft.com/office/drawing/2014/main" id="{45F7829C-4B88-407D-B933-E6F0B34716B1}"/>
               </a:ext>
             </a:extLst>
           </p:cNvPr>
@@ -23630,7 +23628,7 @@
           <p:cNvPr id="3" name="">
             <a:extLst xmlns:a="http://schemas.openxmlformats.org/drawingml/2006/main">
               <a:ext uri="{FF2B5EF4-FFF2-40B4-BE49-F238E27FC236}">
-                <a16:creationId xmlns:a16="http://schemas.microsoft.com/office/drawing/2014/main" id="{6C5AF5CD-BF50-4F24-8085-BD4399B6CDCF}"/>
+                <a16:creationId xmlns:a16="http://schemas.microsoft.com/office/drawing/2014/main" id="{130A4B00-D94E-4A8A-8802-2F3EA88C64AB}"/>
               </a:ext>
             </a:extLst>
           </p:cNvPr>
@@ -23665,7 +23663,7 @@
           <p:cNvPr id="4" name="kicker-06-marker">
             <a:extLst xmlns:a="http://schemas.openxmlformats.org/drawingml/2006/main">
               <a:ext uri="{FF2B5EF4-FFF2-40B4-BE49-F238E27FC236}">
-                <a16:creationId xmlns:a16="http://schemas.microsoft.com/office/drawing/2014/main" id="{1E78EC5A-ABA6-4533-9082-A42C13F1280D}"/>
+                <a16:creationId xmlns:a16="http://schemas.microsoft.com/office/drawing/2014/main" id="{02DEA39B-F00B-4656-98EB-4EC656282FC8}"/>
               </a:ext>
             </a:extLst>
           </p:cNvPr>
@@ -23700,7 +23698,7 @@
           <p:cNvPr id="5" name="kicker-06-label">
             <a:extLst xmlns:a="http://schemas.openxmlformats.org/drawingml/2006/main">
               <a:ext uri="{FF2B5EF4-FFF2-40B4-BE49-F238E27FC236}">
-                <a16:creationId xmlns:a16="http://schemas.microsoft.com/office/drawing/2014/main" id="{5FD7D135-50C8-4758-9B4B-28BAAE86C620}"/>
+                <a16:creationId xmlns:a16="http://schemas.microsoft.com/office/drawing/2014/main" id="{0BC90273-0F97-4EE2-95A6-C1069F101F27}"/>
               </a:ext>
             </a:extLst>
           </p:cNvPr>
@@ -23764,7 +23762,7 @@
           <p:cNvPr id="6" name="">
             <a:extLst xmlns:a="http://schemas.openxmlformats.org/drawingml/2006/main">
               <a:ext uri="{FF2B5EF4-FFF2-40B4-BE49-F238E27FC236}">
-                <a16:creationId xmlns:a16="http://schemas.microsoft.com/office/drawing/2014/main" id="{D9E2BEA1-2CFB-4231-B112-91BFE774793D}"/>
+                <a16:creationId xmlns:a16="http://schemas.microsoft.com/office/drawing/2014/main" id="{BFAA45B5-3F9F-4841-A1EF-9BFB90E17EDD}"/>
               </a:ext>
             </a:extLst>
           </p:cNvPr>
@@ -23828,7 +23826,7 @@
           <p:cNvPr id="7" name="">
             <a:extLst xmlns:a="http://schemas.openxmlformats.org/drawingml/2006/main">
               <a:ext uri="{FF2B5EF4-FFF2-40B4-BE49-F238E27FC236}">
-                <a16:creationId xmlns:a16="http://schemas.microsoft.com/office/drawing/2014/main" id="{43A64E47-7569-4418-AEA0-9ABC8259FF53}"/>
+                <a16:creationId xmlns:a16="http://schemas.microsoft.com/office/drawing/2014/main" id="{653E66FD-F175-4E61-A662-79FC6331C59C}"/>
               </a:ext>
             </a:extLst>
           </p:cNvPr>
@@ -23892,7 +23890,7 @@
           <p:cNvPr id="8" name="">
             <a:extLst xmlns:a="http://schemas.openxmlformats.org/drawingml/2006/main">
               <a:ext uri="{FF2B5EF4-FFF2-40B4-BE49-F238E27FC236}">
-                <a16:creationId xmlns:a16="http://schemas.microsoft.com/office/drawing/2014/main" id="{F1872CA7-9F3A-4DE9-86F2-7375F42B16DD}"/>
+                <a16:creationId xmlns:a16="http://schemas.microsoft.com/office/drawing/2014/main" id="{35EE4849-D25C-4FA9-925C-6C0E9D3AE768}"/>
               </a:ext>
             </a:extLst>
           </p:cNvPr>
@@ -23927,7 +23925,7 @@
           <p:cNvPr id="9" name="">
             <a:extLst xmlns:a="http://schemas.openxmlformats.org/drawingml/2006/main">
               <a:ext uri="{FF2B5EF4-FFF2-40B4-BE49-F238E27FC236}">
-                <a16:creationId xmlns:a16="http://schemas.microsoft.com/office/drawing/2014/main" id="{2A2C164A-EC0E-4189-94FB-F5FAC18C3F5E}"/>
+                <a16:creationId xmlns:a16="http://schemas.microsoft.com/office/drawing/2014/main" id="{26B428F8-4776-4B58-888B-92CF49DD3BDE}"/>
               </a:ext>
             </a:extLst>
           </p:cNvPr>
@@ -23991,7 +23989,7 @@
           <p:cNvPr id="10" name="">
             <a:extLst xmlns:a="http://schemas.openxmlformats.org/drawingml/2006/main">
               <a:ext uri="{FF2B5EF4-FFF2-40B4-BE49-F238E27FC236}">
-                <a16:creationId xmlns:a16="http://schemas.microsoft.com/office/drawing/2014/main" id="{A5952CFE-1703-4557-AE32-5677A6A267B9}"/>
+                <a16:creationId xmlns:a16="http://schemas.microsoft.com/office/drawing/2014/main" id="{EF113C30-5465-4D9A-A525-16428CEF509A}"/>
               </a:ext>
             </a:extLst>
           </p:cNvPr>
@@ -24055,7 +24053,7 @@
           <p:cNvPr id="11" name="">
             <a:extLst xmlns:a="http://schemas.openxmlformats.org/drawingml/2006/main">
               <a:ext uri="{FF2B5EF4-FFF2-40B4-BE49-F238E27FC236}">
-                <a16:creationId xmlns:a16="http://schemas.microsoft.com/office/drawing/2014/main" id="{9312A657-8624-4ED6-ACC5-F55047F4496E}"/>
+                <a16:creationId xmlns:a16="http://schemas.microsoft.com/office/drawing/2014/main" id="{B7E23D09-3DA3-462B-8EDE-E44991BF9F19}"/>
               </a:ext>
             </a:extLst>
           </p:cNvPr>
@@ -24119,7 +24117,7 @@
           <p:cNvPr id="12" name="">
             <a:extLst xmlns:a="http://schemas.openxmlformats.org/drawingml/2006/main">
               <a:ext uri="{FF2B5EF4-FFF2-40B4-BE49-F238E27FC236}">
-                <a16:creationId xmlns:a16="http://schemas.microsoft.com/office/drawing/2014/main" id="{3E4D435E-9443-4A7C-91EC-575D2DA71E7A}"/>
+                <a16:creationId xmlns:a16="http://schemas.microsoft.com/office/drawing/2014/main" id="{C835C483-75EB-4B4F-94F9-9361C1EEEAD0}"/>
               </a:ext>
             </a:extLst>
           </p:cNvPr>
@@ -24152,7 +24150,7 @@
           <p:cNvPr id="13" name="">
             <a:extLst xmlns:a="http://schemas.openxmlformats.org/drawingml/2006/main">
               <a:ext uri="{FF2B5EF4-FFF2-40B4-BE49-F238E27FC236}">
-                <a16:creationId xmlns:a16="http://schemas.microsoft.com/office/drawing/2014/main" id="{A794DD21-10D9-4094-A2F0-6465C9C6540B}"/>
+                <a16:creationId xmlns:a16="http://schemas.microsoft.com/office/drawing/2014/main" id="{F2D9B388-379D-496D-9577-80171E3AAE05}"/>
               </a:ext>
             </a:extLst>
           </p:cNvPr>
@@ -24187,7 +24185,7 @@
           <p:cNvPr id="14" name="">
             <a:extLst xmlns:a="http://schemas.openxmlformats.org/drawingml/2006/main">
               <a:ext uri="{FF2B5EF4-FFF2-40B4-BE49-F238E27FC236}">
-                <a16:creationId xmlns:a16="http://schemas.microsoft.com/office/drawing/2014/main" id="{4E7BA562-0ED1-4098-B202-DA8792E36638}"/>
+                <a16:creationId xmlns:a16="http://schemas.microsoft.com/office/drawing/2014/main" id="{DD13B898-BB5B-404E-8318-5B35A3225245}"/>
               </a:ext>
             </a:extLst>
           </p:cNvPr>
@@ -24251,7 +24249,7 @@
           <p:cNvPr id="15" name="">
             <a:extLst xmlns:a="http://schemas.openxmlformats.org/drawingml/2006/main">
               <a:ext uri="{FF2B5EF4-FFF2-40B4-BE49-F238E27FC236}">
-                <a16:creationId xmlns:a16="http://schemas.microsoft.com/office/drawing/2014/main" id="{1543B374-48D2-4344-A966-289B9AE535CB}"/>
+                <a16:creationId xmlns:a16="http://schemas.microsoft.com/office/drawing/2014/main" id="{2A25A853-1411-4EA6-9159-F339B36EA084}"/>
               </a:ext>
             </a:extLst>
           </p:cNvPr>
@@ -24315,7 +24313,7 @@
           <p:cNvPr id="16" name="">
             <a:extLst xmlns:a="http://schemas.openxmlformats.org/drawingml/2006/main">
               <a:ext uri="{FF2B5EF4-FFF2-40B4-BE49-F238E27FC236}">
-                <a16:creationId xmlns:a16="http://schemas.microsoft.com/office/drawing/2014/main" id="{344170FE-76E4-447E-B189-6FC8A37C1968}"/>
+                <a16:creationId xmlns:a16="http://schemas.microsoft.com/office/drawing/2014/main" id="{36E8C5BC-ED65-4EC4-B90C-6320D6B18FE2}"/>
               </a:ext>
             </a:extLst>
           </p:cNvPr>
@@ -24348,7 +24346,7 @@
           <p:cNvPr id="17" name="">
             <a:extLst xmlns:a="http://schemas.openxmlformats.org/drawingml/2006/main">
               <a:ext uri="{FF2B5EF4-FFF2-40B4-BE49-F238E27FC236}">
-                <a16:creationId xmlns:a16="http://schemas.microsoft.com/office/drawing/2014/main" id="{C084212A-555E-4B2D-A147-3AC47F164F6D}"/>
+                <a16:creationId xmlns:a16="http://schemas.microsoft.com/office/drawing/2014/main" id="{9B52D454-7591-4205-B09F-B4BDD9FF275C}"/>
               </a:ext>
             </a:extLst>
           </p:cNvPr>
@@ -24383,7 +24381,7 @@
           <p:cNvPr id="18" name="">
             <a:extLst xmlns:a="http://schemas.openxmlformats.org/drawingml/2006/main">
               <a:ext uri="{FF2B5EF4-FFF2-40B4-BE49-F238E27FC236}">
-                <a16:creationId xmlns:a16="http://schemas.microsoft.com/office/drawing/2014/main" id="{20F9DDAB-8187-4B3E-996E-647F2D00C12C}"/>
+                <a16:creationId xmlns:a16="http://schemas.microsoft.com/office/drawing/2014/main" id="{8EFC30FB-F747-4B00-A2CB-D02D753B45E7}"/>
               </a:ext>
             </a:extLst>
           </p:cNvPr>
@@ -24447,7 +24445,7 @@
           <p:cNvPr id="19" name="">
             <a:extLst xmlns:a="http://schemas.openxmlformats.org/drawingml/2006/main">
               <a:ext uri="{FF2B5EF4-FFF2-40B4-BE49-F238E27FC236}">
-                <a16:creationId xmlns:a16="http://schemas.microsoft.com/office/drawing/2014/main" id="{202A935E-51AD-4D0F-9850-D92BF274B9D8}"/>
+                <a16:creationId xmlns:a16="http://schemas.microsoft.com/office/drawing/2014/main" id="{21F61DD6-4975-477D-9AFB-6F0EC12A546E}"/>
               </a:ext>
             </a:extLst>
           </p:cNvPr>
@@ -24511,7 +24509,7 @@
           <p:cNvPr id="20" name="">
             <a:extLst xmlns:a="http://schemas.openxmlformats.org/drawingml/2006/main">
               <a:ext uri="{FF2B5EF4-FFF2-40B4-BE49-F238E27FC236}">
-                <a16:creationId xmlns:a16="http://schemas.microsoft.com/office/drawing/2014/main" id="{4D482F19-7FA2-410F-9D96-FF9A580119F0}"/>
+                <a16:creationId xmlns:a16="http://schemas.microsoft.com/office/drawing/2014/main" id="{4DB0FCFE-EFFB-445B-B4CB-232A39400556}"/>
               </a:ext>
             </a:extLst>
           </p:cNvPr>
@@ -24544,7 +24542,7 @@
           <p:cNvPr id="21" name="">
             <a:extLst xmlns:a="http://schemas.openxmlformats.org/drawingml/2006/main">
               <a:ext uri="{FF2B5EF4-FFF2-40B4-BE49-F238E27FC236}">
-                <a16:creationId xmlns:a16="http://schemas.microsoft.com/office/drawing/2014/main" id="{C26EC20B-F438-42E8-881F-E5E149DE607E}"/>
+                <a16:creationId xmlns:a16="http://schemas.microsoft.com/office/drawing/2014/main" id="{D466A64A-CF06-4683-902C-392D20C87C15}"/>
               </a:ext>
             </a:extLst>
           </p:cNvPr>
@@ -24579,7 +24577,7 @@
           <p:cNvPr id="22" name="">
             <a:extLst xmlns:a="http://schemas.openxmlformats.org/drawingml/2006/main">
               <a:ext uri="{FF2B5EF4-FFF2-40B4-BE49-F238E27FC236}">
-                <a16:creationId xmlns:a16="http://schemas.microsoft.com/office/drawing/2014/main" id="{0232A6FA-CDD2-4FB2-9940-62DAD90396D6}"/>
+                <a16:creationId xmlns:a16="http://schemas.microsoft.com/office/drawing/2014/main" id="{396D9EA0-4BE2-40FF-99A6-BE2559C7E355}"/>
               </a:ext>
             </a:extLst>
           </p:cNvPr>
@@ -24643,7 +24641,7 @@
           <p:cNvPr id="23" name="">
             <a:extLst xmlns:a="http://schemas.openxmlformats.org/drawingml/2006/main">
               <a:ext uri="{FF2B5EF4-FFF2-40B4-BE49-F238E27FC236}">
-                <a16:creationId xmlns:a16="http://schemas.microsoft.com/office/drawing/2014/main" id="{75D730C8-72B9-4EB6-8E5E-34840A9302BD}"/>
+                <a16:creationId xmlns:a16="http://schemas.microsoft.com/office/drawing/2014/main" id="{3B4DFEE1-2676-4068-ACFD-76A80F54624A}"/>
               </a:ext>
             </a:extLst>
           </p:cNvPr>
@@ -24707,7 +24705,7 @@
           <p:cNvPr id="24" name="">
             <a:extLst xmlns:a="http://schemas.openxmlformats.org/drawingml/2006/main">
               <a:ext uri="{FF2B5EF4-FFF2-40B4-BE49-F238E27FC236}">
-                <a16:creationId xmlns:a16="http://schemas.microsoft.com/office/drawing/2014/main" id="{22EE6B6E-831C-4D34-B8A3-93BEC61B5DFF}"/>
+                <a16:creationId xmlns:a16="http://schemas.microsoft.com/office/drawing/2014/main" id="{5011472E-9822-4F66-978F-F3CDC06F2E73}"/>
               </a:ext>
             </a:extLst>
           </p:cNvPr>
@@ -24740,7 +24738,7 @@
           <p:cNvPr id="25" name="">
             <a:extLst xmlns:a="http://schemas.openxmlformats.org/drawingml/2006/main">
               <a:ext uri="{FF2B5EF4-FFF2-40B4-BE49-F238E27FC236}">
-                <a16:creationId xmlns:a16="http://schemas.microsoft.com/office/drawing/2014/main" id="{37E78084-4E48-4635-B157-72EB5B47B67D}"/>
+                <a16:creationId xmlns:a16="http://schemas.microsoft.com/office/drawing/2014/main" id="{D6703750-72D4-4419-B4CB-A2A0D641F70C}"/>
               </a:ext>
             </a:extLst>
           </p:cNvPr>
@@ -24775,7 +24773,7 @@
           <p:cNvPr id="26" name="">
             <a:extLst xmlns:a="http://schemas.openxmlformats.org/drawingml/2006/main">
               <a:ext uri="{FF2B5EF4-FFF2-40B4-BE49-F238E27FC236}">
-                <a16:creationId xmlns:a16="http://schemas.microsoft.com/office/drawing/2014/main" id="{C3381DA8-09F2-4CC0-A451-1E05A4F533A2}"/>
+                <a16:creationId xmlns:a16="http://schemas.microsoft.com/office/drawing/2014/main" id="{B5DE22DA-FE2D-40A4-AE0C-5D9BAB3BC6CA}"/>
               </a:ext>
             </a:extLst>
           </p:cNvPr>
@@ -24839,7 +24837,7 @@
           <p:cNvPr id="27" name="">
             <a:extLst xmlns:a="http://schemas.openxmlformats.org/drawingml/2006/main">
               <a:ext uri="{FF2B5EF4-FFF2-40B4-BE49-F238E27FC236}">
-                <a16:creationId xmlns:a16="http://schemas.microsoft.com/office/drawing/2014/main" id="{5FA789BF-9672-4A20-8D4E-419A53F3F4E4}"/>
+                <a16:creationId xmlns:a16="http://schemas.microsoft.com/office/drawing/2014/main" id="{79A56EB1-0EE4-446A-97FC-965F3C8C14D4}"/>
               </a:ext>
             </a:extLst>
           </p:cNvPr>
@@ -24903,7 +24901,7 @@
           <p:cNvPr id="28" name="">
             <a:extLst xmlns:a="http://schemas.openxmlformats.org/drawingml/2006/main">
               <a:ext uri="{FF2B5EF4-FFF2-40B4-BE49-F238E27FC236}">
-                <a16:creationId xmlns:a16="http://schemas.microsoft.com/office/drawing/2014/main" id="{15E4E73D-65AF-476A-9EE6-0F95404C1AE6}"/>
+                <a16:creationId xmlns:a16="http://schemas.microsoft.com/office/drawing/2014/main" id="{4C811D52-0575-4DC2-B410-F53EC66B6517}"/>
               </a:ext>
             </a:extLst>
           </p:cNvPr>
@@ -24936,7 +24934,7 @@
           <p:cNvPr id="29" name="">
             <a:extLst xmlns:a="http://schemas.openxmlformats.org/drawingml/2006/main">
               <a:ext uri="{FF2B5EF4-FFF2-40B4-BE49-F238E27FC236}">
-                <a16:creationId xmlns:a16="http://schemas.microsoft.com/office/drawing/2014/main" id="{F07A8E1F-05EA-45D2-B778-A0852CE546FD}"/>
+                <a16:creationId xmlns:a16="http://schemas.microsoft.com/office/drawing/2014/main" id="{6B1AF01F-CFBB-47C7-8946-8FF56B9D990A}"/>
               </a:ext>
             </a:extLst>
           </p:cNvPr>
@@ -25000,7 +24998,7 @@
           <p:cNvPr id="30" name="">
             <a:extLst xmlns:a="http://schemas.openxmlformats.org/drawingml/2006/main">
               <a:ext uri="{FF2B5EF4-FFF2-40B4-BE49-F238E27FC236}">
-                <a16:creationId xmlns:a16="http://schemas.microsoft.com/office/drawing/2014/main" id="{A71C7602-BD4C-4C8A-9442-2339646AF926}"/>
+                <a16:creationId xmlns:a16="http://schemas.microsoft.com/office/drawing/2014/main" id="{346B2CAE-3FF6-4740-9156-F03101B2E090}"/>
               </a:ext>
             </a:extLst>
           </p:cNvPr>
@@ -25064,7 +25062,7 @@
           <p:cNvPr id="31" name="">
             <a:extLst xmlns:a="http://schemas.openxmlformats.org/drawingml/2006/main">
               <a:ext uri="{FF2B5EF4-FFF2-40B4-BE49-F238E27FC236}">
-                <a16:creationId xmlns:a16="http://schemas.microsoft.com/office/drawing/2014/main" id="{9F219998-FA54-44E5-959A-2175B24727CC}"/>
+                <a16:creationId xmlns:a16="http://schemas.microsoft.com/office/drawing/2014/main" id="{DD013E6C-2D63-4BC2-9AA7-1A696A6294FB}"/>
               </a:ext>
             </a:extLst>
           </p:cNvPr>
@@ -25099,7 +25097,7 @@
           <p:cNvPr id="32" name="">
             <a:extLst xmlns:a="http://schemas.openxmlformats.org/drawingml/2006/main">
               <a:ext uri="{FF2B5EF4-FFF2-40B4-BE49-F238E27FC236}">
-                <a16:creationId xmlns:a16="http://schemas.microsoft.com/office/drawing/2014/main" id="{FB04169A-D8C3-4710-B082-A83CD4FBBA27}"/>
+                <a16:creationId xmlns:a16="http://schemas.microsoft.com/office/drawing/2014/main" id="{7B2D6969-43C9-41ED-A5D7-57E26A5BA46A}"/>
               </a:ext>
             </a:extLst>
           </p:cNvPr>
@@ -25163,7 +25161,7 @@
           <p:cNvPr id="33" name="">
             <a:extLst xmlns:a="http://schemas.openxmlformats.org/drawingml/2006/main">
               <a:ext uri="{FF2B5EF4-FFF2-40B4-BE49-F238E27FC236}">
-                <a16:creationId xmlns:a16="http://schemas.microsoft.com/office/drawing/2014/main" id="{390AEA87-DA1A-4DA4-8C5A-D98A4A38FE05}"/>
+                <a16:creationId xmlns:a16="http://schemas.microsoft.com/office/drawing/2014/main" id="{238FD56B-5F14-4630-8118-9B8501F007C8}"/>
               </a:ext>
             </a:extLst>
           </p:cNvPr>
@@ -25227,7 +25225,7 @@
           <p:cNvPr id="34" name="">
             <a:extLst xmlns:a="http://schemas.openxmlformats.org/drawingml/2006/main">
               <a:ext uri="{FF2B5EF4-FFF2-40B4-BE49-F238E27FC236}">
-                <a16:creationId xmlns:a16="http://schemas.microsoft.com/office/drawing/2014/main" id="{595442E6-8C5C-4153-8748-D014CB38518A}"/>
+                <a16:creationId xmlns:a16="http://schemas.microsoft.com/office/drawing/2014/main" id="{9A5A5CDA-2F21-4694-B2A6-A4F246439D00}"/>
               </a:ext>
             </a:extLst>
           </p:cNvPr>
@@ -25289,7 +25287,7 @@
     </p:spTree>
     <p:extLst>
       <p:ext uri="{BB962C8B-B14F-4D97-AF65-F5344CB8AC3E}">
-        <p14:creationId xmlns:p14="http://schemas.microsoft.com/office/powerpoint/2010/main" val="661153235"/>
+        <p14:creationId xmlns:p14="http://schemas.microsoft.com/office/powerpoint/2010/main" val="1419471673"/>
       </p:ext>
     </p:extLst>
   </p:cSld>
@@ -25313,7 +25311,7 @@
           <p:cNvPr id="1" name="">
             <a:extLst xmlns:a="http://schemas.openxmlformats.org/drawingml/2006/main">
               <a:ext uri="{FF2B5EF4-FFF2-40B4-BE49-F238E27FC236}">
-                <a16:creationId xmlns:a16="http://schemas.microsoft.com/office/drawing/2014/main" id="{4D2FEF85-E06D-446A-8398-3ADEC5C64505}"/>
+                <a16:creationId xmlns:a16="http://schemas.microsoft.com/office/drawing/2014/main" id="{F29C1B1F-196F-47FC-AD07-BE3A7D51BA9E}"/>
               </a:ext>
             </a:extLst>
           </p:cNvPr>
@@ -25348,7 +25346,7 @@
           <p:cNvPr id="2" name="">
             <a:extLst xmlns:a="http://schemas.openxmlformats.org/drawingml/2006/main">
               <a:ext uri="{FF2B5EF4-FFF2-40B4-BE49-F238E27FC236}">
-                <a16:creationId xmlns:a16="http://schemas.microsoft.com/office/drawing/2014/main" id="{A7FC2479-3E30-4BD8-8D8C-33E2113DC59E}"/>
+                <a16:creationId xmlns:a16="http://schemas.microsoft.com/office/drawing/2014/main" id="{253FE4E6-54F7-4E22-9A54-D9387A4B49D6}"/>
               </a:ext>
             </a:extLst>
           </p:cNvPr>
@@ -25383,7 +25381,7 @@
           <p:cNvPr id="3" name="">
             <a:extLst xmlns:a="http://schemas.openxmlformats.org/drawingml/2006/main">
               <a:ext uri="{FF2B5EF4-FFF2-40B4-BE49-F238E27FC236}">
-                <a16:creationId xmlns:a16="http://schemas.microsoft.com/office/drawing/2014/main" id="{AF950902-FDCB-4337-B3DC-342DC6F01656}"/>
+                <a16:creationId xmlns:a16="http://schemas.microsoft.com/office/drawing/2014/main" id="{72F07BF9-320D-43C0-81E3-3BFA8895BA47}"/>
               </a:ext>
             </a:extLst>
           </p:cNvPr>
@@ -25418,7 +25416,7 @@
           <p:cNvPr id="4" name="kicker-06-marker">
             <a:extLst xmlns:a="http://schemas.openxmlformats.org/drawingml/2006/main">
               <a:ext uri="{FF2B5EF4-FFF2-40B4-BE49-F238E27FC236}">
-                <a16:creationId xmlns:a16="http://schemas.microsoft.com/office/drawing/2014/main" id="{407ADADF-8341-4209-A7DA-866190C39381}"/>
+                <a16:creationId xmlns:a16="http://schemas.microsoft.com/office/drawing/2014/main" id="{A61FEDCC-8ED1-4D82-8502-697CF07771CE}"/>
               </a:ext>
             </a:extLst>
           </p:cNvPr>
@@ -25453,7 +25451,7 @@
           <p:cNvPr id="5" name="kicker-06-label">
             <a:extLst xmlns:a="http://schemas.openxmlformats.org/drawingml/2006/main">
               <a:ext uri="{FF2B5EF4-FFF2-40B4-BE49-F238E27FC236}">
-                <a16:creationId xmlns:a16="http://schemas.microsoft.com/office/drawing/2014/main" id="{C2AFBE91-2433-4F37-B6AB-D55C50156C63}"/>
+                <a16:creationId xmlns:a16="http://schemas.microsoft.com/office/drawing/2014/main" id="{33BBE40D-9E00-4E44-839C-8BBBBA0B168A}"/>
               </a:ext>
             </a:extLst>
           </p:cNvPr>
@@ -25517,7 +25515,7 @@
           <p:cNvPr id="6" name="">
             <a:extLst xmlns:a="http://schemas.openxmlformats.org/drawingml/2006/main">
               <a:ext uri="{FF2B5EF4-FFF2-40B4-BE49-F238E27FC236}">
-                <a16:creationId xmlns:a16="http://schemas.microsoft.com/office/drawing/2014/main" id="{B5D818F2-3C99-4DE4-A235-D3247EF5BDA8}"/>
+                <a16:creationId xmlns:a16="http://schemas.microsoft.com/office/drawing/2014/main" id="{08D73770-0576-4457-B3EE-685758686E00}"/>
               </a:ext>
             </a:extLst>
           </p:cNvPr>
@@ -25581,7 +25579,7 @@
           <p:cNvPr id="7" name="">
             <a:extLst xmlns:a="http://schemas.openxmlformats.org/drawingml/2006/main">
               <a:ext uri="{FF2B5EF4-FFF2-40B4-BE49-F238E27FC236}">
-                <a16:creationId xmlns:a16="http://schemas.microsoft.com/office/drawing/2014/main" id="{6BEAE6DD-315C-4EDF-955D-460449CC1041}"/>
+                <a16:creationId xmlns:a16="http://schemas.microsoft.com/office/drawing/2014/main" id="{5CE592E7-E70D-440A-BE6C-DCB9DE299B74}"/>
               </a:ext>
             </a:extLst>
           </p:cNvPr>
@@ -25645,7 +25643,7 @@
           <p:cNvPr id="8" name="">
             <a:extLst xmlns:a="http://schemas.openxmlformats.org/drawingml/2006/main">
               <a:ext uri="{FF2B5EF4-FFF2-40B4-BE49-F238E27FC236}">
-                <a16:creationId xmlns:a16="http://schemas.microsoft.com/office/drawing/2014/main" id="{4C446884-34A0-4C96-93DE-878E99DD7A9F}"/>
+                <a16:creationId xmlns:a16="http://schemas.microsoft.com/office/drawing/2014/main" id="{24B0EEAB-F047-4FA2-9702-940F025152FC}"/>
               </a:ext>
             </a:extLst>
           </p:cNvPr>
@@ -25680,7 +25678,7 @@
           <p:cNvPr id="9" name="">
             <a:extLst xmlns:a="http://schemas.openxmlformats.org/drawingml/2006/main">
               <a:ext uri="{FF2B5EF4-FFF2-40B4-BE49-F238E27FC236}">
-                <a16:creationId xmlns:a16="http://schemas.microsoft.com/office/drawing/2014/main" id="{155F64BE-6C5F-4BC8-85F2-F293027A18FC}"/>
+                <a16:creationId xmlns:a16="http://schemas.microsoft.com/office/drawing/2014/main" id="{05CBA5D2-5950-4A35-B9D0-5BFC175A0D60}"/>
               </a:ext>
             </a:extLst>
           </p:cNvPr>
@@ -25744,7 +25742,7 @@
           <p:cNvPr id="10" name="">
             <a:extLst xmlns:a="http://schemas.openxmlformats.org/drawingml/2006/main">
               <a:ext uri="{FF2B5EF4-FFF2-40B4-BE49-F238E27FC236}">
-                <a16:creationId xmlns:a16="http://schemas.microsoft.com/office/drawing/2014/main" id="{AE53449F-1850-4376-959C-676AD08697E9}"/>
+                <a16:creationId xmlns:a16="http://schemas.microsoft.com/office/drawing/2014/main" id="{F6148CC5-A58F-4AA4-9BA5-68A8FAB1AE55}"/>
               </a:ext>
             </a:extLst>
           </p:cNvPr>
@@ -25808,7 +25806,7 @@
           <p:cNvPr id="11" name="">
             <a:extLst xmlns:a="http://schemas.openxmlformats.org/drawingml/2006/main">
               <a:ext uri="{FF2B5EF4-FFF2-40B4-BE49-F238E27FC236}">
-                <a16:creationId xmlns:a16="http://schemas.microsoft.com/office/drawing/2014/main" id="{8835871F-0217-4C79-8477-EA7E459B442D}"/>
+                <a16:creationId xmlns:a16="http://schemas.microsoft.com/office/drawing/2014/main" id="{1397A4AC-7D8F-41C6-9215-A663D860C537}"/>
               </a:ext>
             </a:extLst>
           </p:cNvPr>
@@ -25872,7 +25870,7 @@
           <p:cNvPr id="12" name="">
             <a:extLst xmlns:a="http://schemas.openxmlformats.org/drawingml/2006/main">
               <a:ext uri="{FF2B5EF4-FFF2-40B4-BE49-F238E27FC236}">
-                <a16:creationId xmlns:a16="http://schemas.microsoft.com/office/drawing/2014/main" id="{476D97A8-18F6-4F29-A17E-E3A8ADD5A2A6}"/>
+                <a16:creationId xmlns:a16="http://schemas.microsoft.com/office/drawing/2014/main" id="{B2272C1D-0562-4096-9315-02FB6053D642}"/>
               </a:ext>
             </a:extLst>
           </p:cNvPr>
@@ -25907,7 +25905,7 @@
           <p:cNvPr id="13" name="">
             <a:extLst xmlns:a="http://schemas.openxmlformats.org/drawingml/2006/main">
               <a:ext uri="{FF2B5EF4-FFF2-40B4-BE49-F238E27FC236}">
-                <a16:creationId xmlns:a16="http://schemas.microsoft.com/office/drawing/2014/main" id="{651D19BD-01B8-4C8C-913C-99F7A2069B9E}"/>
+                <a16:creationId xmlns:a16="http://schemas.microsoft.com/office/drawing/2014/main" id="{40BC3447-EAD4-465F-9C66-0A6849896F62}"/>
               </a:ext>
             </a:extLst>
           </p:cNvPr>
@@ -25940,7 +25938,7 @@
           <p:cNvPr id="14" name="">
             <a:extLst xmlns:a="http://schemas.openxmlformats.org/drawingml/2006/main">
               <a:ext uri="{FF2B5EF4-FFF2-40B4-BE49-F238E27FC236}">
-                <a16:creationId xmlns:a16="http://schemas.microsoft.com/office/drawing/2014/main" id="{6F27CBB9-4933-463E-879F-47B7E2CA3761}"/>
+                <a16:creationId xmlns:a16="http://schemas.microsoft.com/office/drawing/2014/main" id="{BA1C1989-463C-47DF-B32B-1ED722F6CA42}"/>
               </a:ext>
             </a:extLst>
           </p:cNvPr>
@@ -25975,7 +25973,7 @@
           <p:cNvPr id="15" name="">
             <a:extLst xmlns:a="http://schemas.openxmlformats.org/drawingml/2006/main">
               <a:ext uri="{FF2B5EF4-FFF2-40B4-BE49-F238E27FC236}">
-                <a16:creationId xmlns:a16="http://schemas.microsoft.com/office/drawing/2014/main" id="{9882A80D-E5C5-43E6-B303-064A5E3081C5}"/>
+                <a16:creationId xmlns:a16="http://schemas.microsoft.com/office/drawing/2014/main" id="{0584B259-25D7-4587-841B-94C1712BE73D}"/>
               </a:ext>
             </a:extLst>
           </p:cNvPr>
@@ -26039,7 +26037,7 @@
           <p:cNvPr id="16" name="">
             <a:extLst xmlns:a="http://schemas.openxmlformats.org/drawingml/2006/main">
               <a:ext uri="{FF2B5EF4-FFF2-40B4-BE49-F238E27FC236}">
-                <a16:creationId xmlns:a16="http://schemas.microsoft.com/office/drawing/2014/main" id="{74C5F01D-0411-4ECA-93AD-5712E97A6EC1}"/>
+                <a16:creationId xmlns:a16="http://schemas.microsoft.com/office/drawing/2014/main" id="{44EF4CC0-1364-44F5-A508-4A942AA81A54}"/>
               </a:ext>
             </a:extLst>
           </p:cNvPr>
@@ -26074,7 +26072,7 @@
           <p:cNvPr id="17" name="">
             <a:extLst xmlns:a="http://schemas.openxmlformats.org/drawingml/2006/main">
               <a:ext uri="{FF2B5EF4-FFF2-40B4-BE49-F238E27FC236}">
-                <a16:creationId xmlns:a16="http://schemas.microsoft.com/office/drawing/2014/main" id="{72895104-A578-454D-9699-996FFF9029E2}"/>
+                <a16:creationId xmlns:a16="http://schemas.microsoft.com/office/drawing/2014/main" id="{110048E5-D082-403E-8BBE-41BBC9F81524}"/>
               </a:ext>
             </a:extLst>
           </p:cNvPr>
@@ -26138,7 +26136,7 @@
           <p:cNvPr id="18" name="">
             <a:extLst xmlns:a="http://schemas.openxmlformats.org/drawingml/2006/main">
               <a:ext uri="{FF2B5EF4-FFF2-40B4-BE49-F238E27FC236}">
-                <a16:creationId xmlns:a16="http://schemas.microsoft.com/office/drawing/2014/main" id="{C6C5F9BD-773E-4A41-8C10-3233E4D4E829}"/>
+                <a16:creationId xmlns:a16="http://schemas.microsoft.com/office/drawing/2014/main" id="{C1CF85FE-F087-476C-8148-86E93587A97A}"/>
               </a:ext>
             </a:extLst>
           </p:cNvPr>
@@ -26173,7 +26171,7 @@
           <p:cNvPr id="19" name="">
             <a:extLst xmlns:a="http://schemas.openxmlformats.org/drawingml/2006/main">
               <a:ext uri="{FF2B5EF4-FFF2-40B4-BE49-F238E27FC236}">
-                <a16:creationId xmlns:a16="http://schemas.microsoft.com/office/drawing/2014/main" id="{EB021F37-C569-40B9-9ADF-94708A73464C}"/>
+                <a16:creationId xmlns:a16="http://schemas.microsoft.com/office/drawing/2014/main" id="{A45ED4FD-307A-424A-B0A1-09DD71DACD7A}"/>
               </a:ext>
             </a:extLst>
           </p:cNvPr>
@@ -26237,7 +26235,7 @@
           <p:cNvPr id="20" name="">
             <a:extLst xmlns:a="http://schemas.openxmlformats.org/drawingml/2006/main">
               <a:ext uri="{FF2B5EF4-FFF2-40B4-BE49-F238E27FC236}">
-                <a16:creationId xmlns:a16="http://schemas.microsoft.com/office/drawing/2014/main" id="{9B204860-F3A8-4D91-9D15-6CAC5D91E835}"/>
+                <a16:creationId xmlns:a16="http://schemas.microsoft.com/office/drawing/2014/main" id="{1D18621B-A594-4243-AD01-BF2D1C6B86CB}"/>
               </a:ext>
             </a:extLst>
           </p:cNvPr>
@@ -26272,7 +26270,7 @@
           <p:cNvPr id="21" name="">
             <a:extLst xmlns:a="http://schemas.openxmlformats.org/drawingml/2006/main">
               <a:ext uri="{FF2B5EF4-FFF2-40B4-BE49-F238E27FC236}">
-                <a16:creationId xmlns:a16="http://schemas.microsoft.com/office/drawing/2014/main" id="{DEF764E0-1AA8-4BF0-BB0B-28F4B58A3DAB}"/>
+                <a16:creationId xmlns:a16="http://schemas.microsoft.com/office/drawing/2014/main" id="{57E39ED4-CD3D-4328-88B7-4412969A1F89}"/>
               </a:ext>
             </a:extLst>
           </p:cNvPr>
@@ -26336,7 +26334,7 @@
           <p:cNvPr id="22" name="">
             <a:extLst xmlns:a="http://schemas.openxmlformats.org/drawingml/2006/main">
               <a:ext uri="{FF2B5EF4-FFF2-40B4-BE49-F238E27FC236}">
-                <a16:creationId xmlns:a16="http://schemas.microsoft.com/office/drawing/2014/main" id="{16811D8B-31D1-48C1-BB27-7E780399035B}"/>
+                <a16:creationId xmlns:a16="http://schemas.microsoft.com/office/drawing/2014/main" id="{001C5791-0332-4E16-B8A7-F8F113B09056}"/>
               </a:ext>
             </a:extLst>
           </p:cNvPr>
@@ -26371,7 +26369,7 @@
           <p:cNvPr id="23" name="">
             <a:extLst xmlns:a="http://schemas.openxmlformats.org/drawingml/2006/main">
               <a:ext uri="{FF2B5EF4-FFF2-40B4-BE49-F238E27FC236}">
-                <a16:creationId xmlns:a16="http://schemas.microsoft.com/office/drawing/2014/main" id="{A5788430-97C1-4A4C-9D9E-4B5B1F86E5E6}"/>
+                <a16:creationId xmlns:a16="http://schemas.microsoft.com/office/drawing/2014/main" id="{7DC1B6CE-8BA4-4A16-B465-864C1F19004B}"/>
               </a:ext>
             </a:extLst>
           </p:cNvPr>
@@ -26435,7 +26433,7 @@
           <p:cNvPr id="24" name="">
             <a:extLst xmlns:a="http://schemas.openxmlformats.org/drawingml/2006/main">
               <a:ext uri="{FF2B5EF4-FFF2-40B4-BE49-F238E27FC236}">
-                <a16:creationId xmlns:a16="http://schemas.microsoft.com/office/drawing/2014/main" id="{FDCEFB8E-37BC-4FE6-A64B-D06916E75BFC}"/>
+                <a16:creationId xmlns:a16="http://schemas.microsoft.com/office/drawing/2014/main" id="{8E310DC3-AD02-43A3-BE66-D643DDAFFC57}"/>
               </a:ext>
             </a:extLst>
           </p:cNvPr>
@@ -26470,7 +26468,7 @@
           <p:cNvPr id="25" name="">
             <a:extLst xmlns:a="http://schemas.openxmlformats.org/drawingml/2006/main">
               <a:ext uri="{FF2B5EF4-FFF2-40B4-BE49-F238E27FC236}">
-                <a16:creationId xmlns:a16="http://schemas.microsoft.com/office/drawing/2014/main" id="{0A94922C-3250-426F-97A9-7027A6E2642E}"/>
+                <a16:creationId xmlns:a16="http://schemas.microsoft.com/office/drawing/2014/main" id="{6B8DB278-3E07-4EAB-8049-EE770FA81218}"/>
               </a:ext>
             </a:extLst>
           </p:cNvPr>
@@ -26534,7 +26532,7 @@
           <p:cNvPr id="26" name="">
             <a:extLst xmlns:a="http://schemas.openxmlformats.org/drawingml/2006/main">
               <a:ext uri="{FF2B5EF4-FFF2-40B4-BE49-F238E27FC236}">
-                <a16:creationId xmlns:a16="http://schemas.microsoft.com/office/drawing/2014/main" id="{5CC3B75B-6ABB-4FB3-BB07-E00D0D589FC4}"/>
+                <a16:creationId xmlns:a16="http://schemas.microsoft.com/office/drawing/2014/main" id="{FCB3FF56-90FE-4205-BF6C-60451C4CB258}"/>
               </a:ext>
             </a:extLst>
           </p:cNvPr>
@@ -26598,7 +26596,7 @@
           <p:cNvPr id="27" name="">
             <a:extLst xmlns:a="http://schemas.openxmlformats.org/drawingml/2006/main">
               <a:ext uri="{FF2B5EF4-FFF2-40B4-BE49-F238E27FC236}">
-                <a16:creationId xmlns:a16="http://schemas.microsoft.com/office/drawing/2014/main" id="{DA3D30DA-D111-4BBC-AC53-B7BDE9646C24}"/>
+                <a16:creationId xmlns:a16="http://schemas.microsoft.com/office/drawing/2014/main" id="{0B7A7654-D82A-4069-850B-27BCBE8F3616}"/>
               </a:ext>
             </a:extLst>
           </p:cNvPr>
@@ -26662,7 +26660,7 @@
           <p:cNvPr id="28" name="">
             <a:extLst xmlns:a="http://schemas.openxmlformats.org/drawingml/2006/main">
               <a:ext uri="{FF2B5EF4-FFF2-40B4-BE49-F238E27FC236}">
-                <a16:creationId xmlns:a16="http://schemas.microsoft.com/office/drawing/2014/main" id="{1F6AC61F-F313-45B1-879F-31680C14D915}"/>
+                <a16:creationId xmlns:a16="http://schemas.microsoft.com/office/drawing/2014/main" id="{444085E5-8EE7-40BC-A64F-E23BAAFEC69F}"/>
               </a:ext>
             </a:extLst>
           </p:cNvPr>
@@ -26697,7 +26695,7 @@
           <p:cNvPr id="29" name="">
             <a:extLst xmlns:a="http://schemas.openxmlformats.org/drawingml/2006/main">
               <a:ext uri="{FF2B5EF4-FFF2-40B4-BE49-F238E27FC236}">
-                <a16:creationId xmlns:a16="http://schemas.microsoft.com/office/drawing/2014/main" id="{CD9774D1-9DB3-4CDA-A9A8-DB95337C838C}"/>
+                <a16:creationId xmlns:a16="http://schemas.microsoft.com/office/drawing/2014/main" id="{985D2ADA-ACD0-46AA-9B47-A19124A352A9}"/>
               </a:ext>
             </a:extLst>
           </p:cNvPr>
@@ -26732,7 +26730,7 @@
           <p:cNvPr id="30" name="">
             <a:extLst xmlns:a="http://schemas.openxmlformats.org/drawingml/2006/main">
               <a:ext uri="{FF2B5EF4-FFF2-40B4-BE49-F238E27FC236}">
-                <a16:creationId xmlns:a16="http://schemas.microsoft.com/office/drawing/2014/main" id="{0696204C-CF89-4F22-B6BB-CC80BF9DF11C}"/>
+                <a16:creationId xmlns:a16="http://schemas.microsoft.com/office/drawing/2014/main" id="{24A93F4C-FB20-4F11-96DF-8E21941866C1}"/>
               </a:ext>
             </a:extLst>
           </p:cNvPr>
@@ -26767,7 +26765,7 @@
           <p:cNvPr id="31" name="kicker-06-marker">
             <a:extLst xmlns:a="http://schemas.openxmlformats.org/drawingml/2006/main">
               <a:ext uri="{FF2B5EF4-FFF2-40B4-BE49-F238E27FC236}">
-                <a16:creationId xmlns:a16="http://schemas.microsoft.com/office/drawing/2014/main" id="{0ABB6A2A-8C6F-4034-A519-C06DB5F751BF}"/>
+                <a16:creationId xmlns:a16="http://schemas.microsoft.com/office/drawing/2014/main" id="{71757B99-A480-4309-A37E-4AEAC0579746}"/>
               </a:ext>
             </a:extLst>
           </p:cNvPr>
@@ -26802,7 +26800,7 @@
           <p:cNvPr id="32" name="kicker-06-label">
             <a:extLst xmlns:a="http://schemas.openxmlformats.org/drawingml/2006/main">
               <a:ext uri="{FF2B5EF4-FFF2-40B4-BE49-F238E27FC236}">
-                <a16:creationId xmlns:a16="http://schemas.microsoft.com/office/drawing/2014/main" id="{B837D68C-9034-49C7-93AA-CD461F4C9B14}"/>
+                <a16:creationId xmlns:a16="http://schemas.microsoft.com/office/drawing/2014/main" id="{3D117353-A4A6-4BCA-B784-756CFF2AC604}"/>
               </a:ext>
             </a:extLst>
           </p:cNvPr>
@@ -26866,7 +26864,7 @@
           <p:cNvPr id="33" name="">
             <a:extLst xmlns:a="http://schemas.openxmlformats.org/drawingml/2006/main">
               <a:ext uri="{FF2B5EF4-FFF2-40B4-BE49-F238E27FC236}">
-                <a16:creationId xmlns:a16="http://schemas.microsoft.com/office/drawing/2014/main" id="{950B4527-4EF5-44AF-95A8-3D7163BF539F}"/>
+                <a16:creationId xmlns:a16="http://schemas.microsoft.com/office/drawing/2014/main" id="{C85F452A-124B-41DF-B0F5-D1659C0BCAFD}"/>
               </a:ext>
             </a:extLst>
           </p:cNvPr>
@@ -26930,7 +26928,7 @@
           <p:cNvPr id="34" name="">
             <a:extLst xmlns:a="http://schemas.openxmlformats.org/drawingml/2006/main">
               <a:ext uri="{FF2B5EF4-FFF2-40B4-BE49-F238E27FC236}">
-                <a16:creationId xmlns:a16="http://schemas.microsoft.com/office/drawing/2014/main" id="{2C148DDD-F84E-4C35-B3AD-35F40F5379B7}"/>
+                <a16:creationId xmlns:a16="http://schemas.microsoft.com/office/drawing/2014/main" id="{1891D34B-DC46-44C2-8684-8F1BBFEF3FD0}"/>
               </a:ext>
             </a:extLst>
           </p:cNvPr>
@@ -26994,7 +26992,7 @@
           <p:cNvPr id="35" name="">
             <a:extLst xmlns:a="http://schemas.openxmlformats.org/drawingml/2006/main">
               <a:ext uri="{FF2B5EF4-FFF2-40B4-BE49-F238E27FC236}">
-                <a16:creationId xmlns:a16="http://schemas.microsoft.com/office/drawing/2014/main" id="{39EBB11F-FEDB-4CFB-ACC8-71BF92D92151}"/>
+                <a16:creationId xmlns:a16="http://schemas.microsoft.com/office/drawing/2014/main" id="{4BFD7728-A5AB-4169-823A-194DBACA15F8}"/>
               </a:ext>
             </a:extLst>
           </p:cNvPr>
@@ -27029,7 +27027,7 @@
           <p:cNvPr id="36" name="">
             <a:extLst xmlns:a="http://schemas.openxmlformats.org/drawingml/2006/main">
               <a:ext uri="{FF2B5EF4-FFF2-40B4-BE49-F238E27FC236}">
-                <a16:creationId xmlns:a16="http://schemas.microsoft.com/office/drawing/2014/main" id="{15830623-B3DA-4554-BD21-871D0489FCDD}"/>
+                <a16:creationId xmlns:a16="http://schemas.microsoft.com/office/drawing/2014/main" id="{2991AB1D-C680-44C3-9052-91124F76D5B9}"/>
               </a:ext>
             </a:extLst>
           </p:cNvPr>
@@ -27064,7 +27062,7 @@
           <p:cNvPr id="37" name="">
             <a:extLst xmlns:a="http://schemas.openxmlformats.org/drawingml/2006/main">
               <a:ext uri="{FF2B5EF4-FFF2-40B4-BE49-F238E27FC236}">
-                <a16:creationId xmlns:a16="http://schemas.microsoft.com/office/drawing/2014/main" id="{F5FACC31-F9A4-40CB-A298-25A8CD44C4C0}"/>
+                <a16:creationId xmlns:a16="http://schemas.microsoft.com/office/drawing/2014/main" id="{6CEC6020-6268-441F-85A4-21531DC668C2}"/>
               </a:ext>
             </a:extLst>
           </p:cNvPr>
@@ -27099,7 +27097,7 @@
           <p:cNvPr id="38" name="">
             <a:extLst xmlns:a="http://schemas.openxmlformats.org/drawingml/2006/main">
               <a:ext uri="{FF2B5EF4-FFF2-40B4-BE49-F238E27FC236}">
-                <a16:creationId xmlns:a16="http://schemas.microsoft.com/office/drawing/2014/main" id="{5BE4F9F7-AE3F-47F8-9943-FA5C5B588AD2}"/>
+                <a16:creationId xmlns:a16="http://schemas.microsoft.com/office/drawing/2014/main" id="{15E4FB14-675E-4AE2-81BA-9AA29A4BB38F}"/>
               </a:ext>
             </a:extLst>
           </p:cNvPr>
@@ -27134,7 +27132,7 @@
           <p:cNvPr id="39" name="">
             <a:extLst xmlns:a="http://schemas.openxmlformats.org/drawingml/2006/main">
               <a:ext uri="{FF2B5EF4-FFF2-40B4-BE49-F238E27FC236}">
-                <a16:creationId xmlns:a16="http://schemas.microsoft.com/office/drawing/2014/main" id="{44592206-D8E8-420B-83F2-6A3955671556}"/>
+                <a16:creationId xmlns:a16="http://schemas.microsoft.com/office/drawing/2014/main" id="{52527B43-1356-4C6C-B213-3628B40671AB}"/>
               </a:ext>
             </a:extLst>
           </p:cNvPr>
@@ -27198,7 +27196,7 @@
           <p:cNvPr id="40" name="">
             <a:extLst xmlns:a="http://schemas.openxmlformats.org/drawingml/2006/main">
               <a:ext uri="{FF2B5EF4-FFF2-40B4-BE49-F238E27FC236}">
-                <a16:creationId xmlns:a16="http://schemas.microsoft.com/office/drawing/2014/main" id="{40155796-700D-4988-8250-A13D51DD8471}"/>
+                <a16:creationId xmlns:a16="http://schemas.microsoft.com/office/drawing/2014/main" id="{105F8CC1-5A04-4390-852F-114794B54963}"/>
               </a:ext>
             </a:extLst>
           </p:cNvPr>
@@ -27262,7 +27260,7 @@
           <p:cNvPr id="41" name="">
             <a:extLst xmlns:a="http://schemas.openxmlformats.org/drawingml/2006/main">
               <a:ext uri="{FF2B5EF4-FFF2-40B4-BE49-F238E27FC236}">
-                <a16:creationId xmlns:a16="http://schemas.microsoft.com/office/drawing/2014/main" id="{80E64A8C-32E6-4ECD-AD09-10CE796349F2}"/>
+                <a16:creationId xmlns:a16="http://schemas.microsoft.com/office/drawing/2014/main" id="{6E0060BB-1CDE-40EE-988F-E394FE41D1EB}"/>
               </a:ext>
             </a:extLst>
           </p:cNvPr>
@@ -27324,7 +27322,7 @@
     </p:spTree>
     <p:extLst>
       <p:ext uri="{BB962C8B-B14F-4D97-AF65-F5344CB8AC3E}">
-        <p14:creationId xmlns:p14="http://schemas.microsoft.com/office/powerpoint/2010/main" val="879821761"/>
+        <p14:creationId xmlns:p14="http://schemas.microsoft.com/office/powerpoint/2010/main" val="1401265101"/>
       </p:ext>
     </p:extLst>
   </p:cSld>
@@ -27348,7 +27346,7 @@
           <p:cNvPr id="1" name="">
             <a:extLst xmlns:a="http://schemas.openxmlformats.org/drawingml/2006/main">
               <a:ext uri="{FF2B5EF4-FFF2-40B4-BE49-F238E27FC236}">
-                <a16:creationId xmlns:a16="http://schemas.microsoft.com/office/drawing/2014/main" id="{EDA091C9-A73B-4A29-B788-79E54758FED0}"/>
+                <a16:creationId xmlns:a16="http://schemas.microsoft.com/office/drawing/2014/main" id="{A4A10E92-4560-4622-9741-FC825BF95A40}"/>
               </a:ext>
             </a:extLst>
           </p:cNvPr>
@@ -27383,7 +27381,7 @@
           <p:cNvPr id="2" name="">
             <a:extLst xmlns:a="http://schemas.openxmlformats.org/drawingml/2006/main">
               <a:ext uri="{FF2B5EF4-FFF2-40B4-BE49-F238E27FC236}">
-                <a16:creationId xmlns:a16="http://schemas.microsoft.com/office/drawing/2014/main" id="{2D8E2608-C71C-46C7-90B6-BCA1E123D0DA}"/>
+                <a16:creationId xmlns:a16="http://schemas.microsoft.com/office/drawing/2014/main" id="{C84DE4F7-9C91-455F-96CA-536847941210}"/>
               </a:ext>
             </a:extLst>
           </p:cNvPr>
@@ -27418,7 +27416,7 @@
           <p:cNvPr id="3" name="">
             <a:extLst xmlns:a="http://schemas.openxmlformats.org/drawingml/2006/main">
               <a:ext uri="{FF2B5EF4-FFF2-40B4-BE49-F238E27FC236}">
-                <a16:creationId xmlns:a16="http://schemas.microsoft.com/office/drawing/2014/main" id="{997BBEC4-FFD1-4F9A-9CB7-03DD8D09FF71}"/>
+                <a16:creationId xmlns:a16="http://schemas.microsoft.com/office/drawing/2014/main" id="{5A6F9580-F1AF-4730-A576-8689FB880DA7}"/>
               </a:ext>
             </a:extLst>
           </p:cNvPr>
@@ -27453,7 +27451,7 @@
           <p:cNvPr id="4" name="kicker-06-marker">
             <a:extLst xmlns:a="http://schemas.openxmlformats.org/drawingml/2006/main">
               <a:ext uri="{FF2B5EF4-FFF2-40B4-BE49-F238E27FC236}">
-                <a16:creationId xmlns:a16="http://schemas.microsoft.com/office/drawing/2014/main" id="{6C27D3E5-53A1-4DDB-A397-566334801773}"/>
+                <a16:creationId xmlns:a16="http://schemas.microsoft.com/office/drawing/2014/main" id="{5ABC6692-5CBC-42A8-A734-4159C32FB5AD}"/>
               </a:ext>
             </a:extLst>
           </p:cNvPr>
@@ -27488,7 +27486,7 @@
           <p:cNvPr id="5" name="kicker-06-label">
             <a:extLst xmlns:a="http://schemas.openxmlformats.org/drawingml/2006/main">
               <a:ext uri="{FF2B5EF4-FFF2-40B4-BE49-F238E27FC236}">
-                <a16:creationId xmlns:a16="http://schemas.microsoft.com/office/drawing/2014/main" id="{CDA150C9-3F53-43D7-9B10-0810519815AD}"/>
+                <a16:creationId xmlns:a16="http://schemas.microsoft.com/office/drawing/2014/main" id="{663FCBEF-FF87-44F5-863B-1B909EC5D4AE}"/>
               </a:ext>
             </a:extLst>
           </p:cNvPr>
@@ -27552,7 +27550,7 @@
           <p:cNvPr id="6" name="">
             <a:extLst xmlns:a="http://schemas.openxmlformats.org/drawingml/2006/main">
               <a:ext uri="{FF2B5EF4-FFF2-40B4-BE49-F238E27FC236}">
-                <a16:creationId xmlns:a16="http://schemas.microsoft.com/office/drawing/2014/main" id="{DBAEAEF5-29B7-4412-868B-FC9B88D5E0B4}"/>
+                <a16:creationId xmlns:a16="http://schemas.microsoft.com/office/drawing/2014/main" id="{C8791614-B870-4B08-BB03-125714B53B4F}"/>
               </a:ext>
             </a:extLst>
           </p:cNvPr>
@@ -27616,7 +27614,7 @@
           <p:cNvPr id="7" name="">
             <a:extLst xmlns:a="http://schemas.openxmlformats.org/drawingml/2006/main">
               <a:ext uri="{FF2B5EF4-FFF2-40B4-BE49-F238E27FC236}">
-                <a16:creationId xmlns:a16="http://schemas.microsoft.com/office/drawing/2014/main" id="{090294EB-364A-4AA0-8678-32A79F165591}"/>
+                <a16:creationId xmlns:a16="http://schemas.microsoft.com/office/drawing/2014/main" id="{15C519C1-053D-4537-B7D7-4243B5518422}"/>
               </a:ext>
             </a:extLst>
           </p:cNvPr>
@@ -27680,7 +27678,7 @@
           <p:cNvPr id="8" name="">
             <a:extLst xmlns:a="http://schemas.openxmlformats.org/drawingml/2006/main">
               <a:ext uri="{FF2B5EF4-FFF2-40B4-BE49-F238E27FC236}">
-                <a16:creationId xmlns:a16="http://schemas.microsoft.com/office/drawing/2014/main" id="{218950C2-EB45-4A1B-96BC-162E4EA75775}"/>
+                <a16:creationId xmlns:a16="http://schemas.microsoft.com/office/drawing/2014/main" id="{B9645E63-D197-40E8-BB4B-E3F8323A76B5}"/>
               </a:ext>
             </a:extLst>
           </p:cNvPr>
@@ -27715,7 +27713,7 @@
           <p:cNvPr id="9" name="">
             <a:extLst xmlns:a="http://schemas.openxmlformats.org/drawingml/2006/main">
               <a:ext uri="{FF2B5EF4-FFF2-40B4-BE49-F238E27FC236}">
-                <a16:creationId xmlns:a16="http://schemas.microsoft.com/office/drawing/2014/main" id="{E3A28D85-6BC7-4CA4-9F9E-561C20CE5C73}"/>
+                <a16:creationId xmlns:a16="http://schemas.microsoft.com/office/drawing/2014/main" id="{86D570EF-674B-4D32-8DB1-BB754BC89D9E}"/>
               </a:ext>
             </a:extLst>
           </p:cNvPr>
@@ -27779,7 +27777,7 @@
           <p:cNvPr id="10" name="">
             <a:extLst xmlns:a="http://schemas.openxmlformats.org/drawingml/2006/main">
               <a:ext uri="{FF2B5EF4-FFF2-40B4-BE49-F238E27FC236}">
-                <a16:creationId xmlns:a16="http://schemas.microsoft.com/office/drawing/2014/main" id="{0178DF62-0834-4BCD-9FDF-F7B9C8B68851}"/>
+                <a16:creationId xmlns:a16="http://schemas.microsoft.com/office/drawing/2014/main" id="{2508FEC3-83D6-4311-83AD-009E5EB68014}"/>
               </a:ext>
             </a:extLst>
           </p:cNvPr>
@@ -27843,7 +27841,7 @@
           <p:cNvPr id="11" name="">
             <a:extLst xmlns:a="http://schemas.openxmlformats.org/drawingml/2006/main">
               <a:ext uri="{FF2B5EF4-FFF2-40B4-BE49-F238E27FC236}">
-                <a16:creationId xmlns:a16="http://schemas.microsoft.com/office/drawing/2014/main" id="{A8CA4C95-09D3-49A7-A107-3068D13E845D}"/>
+                <a16:creationId xmlns:a16="http://schemas.microsoft.com/office/drawing/2014/main" id="{206E6622-7A8C-46B1-B413-A7D9CEAAF682}"/>
               </a:ext>
             </a:extLst>
           </p:cNvPr>
@@ -27907,7 +27905,7 @@
           <p:cNvPr id="12" name="">
             <a:extLst xmlns:a="http://schemas.openxmlformats.org/drawingml/2006/main">
               <a:ext uri="{FF2B5EF4-FFF2-40B4-BE49-F238E27FC236}">
-                <a16:creationId xmlns:a16="http://schemas.microsoft.com/office/drawing/2014/main" id="{474AF9D4-1AC5-41BE-AB9F-3D81AD377230}"/>
+                <a16:creationId xmlns:a16="http://schemas.microsoft.com/office/drawing/2014/main" id="{0F7BF45C-EC64-4160-B4A9-068B5A766DD1}"/>
               </a:ext>
             </a:extLst>
           </p:cNvPr>
@@ -27940,7 +27938,7 @@
           <p:cNvPr id="13" name="">
             <a:extLst xmlns:a="http://schemas.openxmlformats.org/drawingml/2006/main">
               <a:ext uri="{FF2B5EF4-FFF2-40B4-BE49-F238E27FC236}">
-                <a16:creationId xmlns:a16="http://schemas.microsoft.com/office/drawing/2014/main" id="{32F511AF-AE87-4FDF-B2E2-A14C036A12E5}"/>
+                <a16:creationId xmlns:a16="http://schemas.microsoft.com/office/drawing/2014/main" id="{27FA57FA-3CDE-4FF9-AD28-A1A32DC16AA8}"/>
               </a:ext>
             </a:extLst>
           </p:cNvPr>
@@ -28004,7 +28002,7 @@
           <p:cNvPr id="14" name="">
             <a:extLst xmlns:a="http://schemas.openxmlformats.org/drawingml/2006/main">
               <a:ext uri="{FF2B5EF4-FFF2-40B4-BE49-F238E27FC236}">
-                <a16:creationId xmlns:a16="http://schemas.microsoft.com/office/drawing/2014/main" id="{EAB7B8DE-BBA7-4230-AAFB-3D85E517DD71}"/>
+                <a16:creationId xmlns:a16="http://schemas.microsoft.com/office/drawing/2014/main" id="{9CED1511-C374-489D-955F-B65D545636E2}"/>
               </a:ext>
             </a:extLst>
           </p:cNvPr>
@@ -28039,7 +28037,7 @@
           <p:cNvPr id="15" name="">
             <a:extLst xmlns:a="http://schemas.openxmlformats.org/drawingml/2006/main">
               <a:ext uri="{FF2B5EF4-FFF2-40B4-BE49-F238E27FC236}">
-                <a16:creationId xmlns:a16="http://schemas.microsoft.com/office/drawing/2014/main" id="{FEF800FD-145F-44F5-BAC1-F42105DFC885}"/>
+                <a16:creationId xmlns:a16="http://schemas.microsoft.com/office/drawing/2014/main" id="{A567D233-39B2-459C-BCB5-DFB874580E42}"/>
               </a:ext>
             </a:extLst>
           </p:cNvPr>
@@ -28093,7 +28091,7 @@
                 <a:ea typeface="Aptos"/>
                 <a:cs typeface="Aptos"/>
               </a:rPr>
-              <a:t>PROMPT STACK</a:t>
+              <a:t>QUESTION STACK</a:t>
             </a:r>
           </a:p>
         </p:txBody>
@@ -28103,7 +28101,7 @@
           <p:cNvPr id="16" name="">
             <a:extLst xmlns:a="http://schemas.openxmlformats.org/drawingml/2006/main">
               <a:ext uri="{FF2B5EF4-FFF2-40B4-BE49-F238E27FC236}">
-                <a16:creationId xmlns:a16="http://schemas.microsoft.com/office/drawing/2014/main" id="{5571590B-C9AE-463D-B84C-F66255580EF4}"/>
+                <a16:creationId xmlns:a16="http://schemas.microsoft.com/office/drawing/2014/main" id="{DDC4C238-14A1-4146-89FE-BBF393250F5A}"/>
               </a:ext>
             </a:extLst>
           </p:cNvPr>
@@ -28138,7 +28136,7 @@
           <p:cNvPr id="17" name="">
             <a:extLst xmlns:a="http://schemas.openxmlformats.org/drawingml/2006/main">
               <a:ext uri="{FF2B5EF4-FFF2-40B4-BE49-F238E27FC236}">
-                <a16:creationId xmlns:a16="http://schemas.microsoft.com/office/drawing/2014/main" id="{14E81290-6261-475E-BF05-CB8A9C56F3BE}"/>
+                <a16:creationId xmlns:a16="http://schemas.microsoft.com/office/drawing/2014/main" id="{3219F0AC-5858-435A-AE45-83D4391957E4}"/>
               </a:ext>
             </a:extLst>
           </p:cNvPr>
@@ -28202,7 +28200,7 @@
           <p:cNvPr id="18" name="">
             <a:extLst xmlns:a="http://schemas.openxmlformats.org/drawingml/2006/main">
               <a:ext uri="{FF2B5EF4-FFF2-40B4-BE49-F238E27FC236}">
-                <a16:creationId xmlns:a16="http://schemas.microsoft.com/office/drawing/2014/main" id="{56C98A55-5717-4CE4-A573-AFF3B2B7E1B8}"/>
+                <a16:creationId xmlns:a16="http://schemas.microsoft.com/office/drawing/2014/main" id="{1114F8BC-5768-4EEE-9587-2B2343EA1F93}"/>
               </a:ext>
             </a:extLst>
           </p:cNvPr>
@@ -28237,7 +28235,7 @@
           <p:cNvPr id="19" name="">
             <a:extLst xmlns:a="http://schemas.openxmlformats.org/drawingml/2006/main">
               <a:ext uri="{FF2B5EF4-FFF2-40B4-BE49-F238E27FC236}">
-                <a16:creationId xmlns:a16="http://schemas.microsoft.com/office/drawing/2014/main" id="{421757EA-5C16-4CF1-B54E-526F71951B12}"/>
+                <a16:creationId xmlns:a16="http://schemas.microsoft.com/office/drawing/2014/main" id="{58C67DE5-89C7-4032-B4BA-C4F9BC0627F2}"/>
               </a:ext>
             </a:extLst>
           </p:cNvPr>
@@ -28301,7 +28299,7 @@
           <p:cNvPr id="20" name="">
             <a:extLst xmlns:a="http://schemas.openxmlformats.org/drawingml/2006/main">
               <a:ext uri="{FF2B5EF4-FFF2-40B4-BE49-F238E27FC236}">
-                <a16:creationId xmlns:a16="http://schemas.microsoft.com/office/drawing/2014/main" id="{AE8FCD56-0ADE-4E61-9650-3BF45DEAA3B8}"/>
+                <a16:creationId xmlns:a16="http://schemas.microsoft.com/office/drawing/2014/main" id="{65B20835-69BF-45B7-8B8A-9913FD859197}"/>
               </a:ext>
             </a:extLst>
           </p:cNvPr>
@@ -28336,7 +28334,7 @@
           <p:cNvPr id="21" name="">
             <a:extLst xmlns:a="http://schemas.openxmlformats.org/drawingml/2006/main">
               <a:ext uri="{FF2B5EF4-FFF2-40B4-BE49-F238E27FC236}">
-                <a16:creationId xmlns:a16="http://schemas.microsoft.com/office/drawing/2014/main" id="{DDD4C6B1-2702-48D8-AEC9-22E465467DB2}"/>
+                <a16:creationId xmlns:a16="http://schemas.microsoft.com/office/drawing/2014/main" id="{4E965F6A-1F8D-4C5D-B8BF-D64B6ABB812E}"/>
               </a:ext>
             </a:extLst>
           </p:cNvPr>
@@ -28400,7 +28398,7 @@
           <p:cNvPr id="22" name="">
             <a:extLst xmlns:a="http://schemas.openxmlformats.org/drawingml/2006/main">
               <a:ext uri="{FF2B5EF4-FFF2-40B4-BE49-F238E27FC236}">
-                <a16:creationId xmlns:a16="http://schemas.microsoft.com/office/drawing/2014/main" id="{1AD1D305-79A9-4740-BCC4-74918338A204}"/>
+                <a16:creationId xmlns:a16="http://schemas.microsoft.com/office/drawing/2014/main" id="{6717BA65-2F3C-4478-B52D-BFAEEFFB8C45}"/>
               </a:ext>
             </a:extLst>
           </p:cNvPr>
@@ -28435,7 +28433,7 @@
           <p:cNvPr id="23" name="">
             <a:extLst xmlns:a="http://schemas.openxmlformats.org/drawingml/2006/main">
               <a:ext uri="{FF2B5EF4-FFF2-40B4-BE49-F238E27FC236}">
-                <a16:creationId xmlns:a16="http://schemas.microsoft.com/office/drawing/2014/main" id="{D53EB7B1-8F56-4DF2-A486-02B8189A6B7F}"/>
+                <a16:creationId xmlns:a16="http://schemas.microsoft.com/office/drawing/2014/main" id="{AFF9F012-B553-4195-B0BD-82F53BE3F573}"/>
               </a:ext>
             </a:extLst>
           </p:cNvPr>
@@ -28499,7 +28497,7 @@
           <p:cNvPr id="24" name="">
             <a:extLst xmlns:a="http://schemas.openxmlformats.org/drawingml/2006/main">
               <a:ext uri="{FF2B5EF4-FFF2-40B4-BE49-F238E27FC236}">
-                <a16:creationId xmlns:a16="http://schemas.microsoft.com/office/drawing/2014/main" id="{777C82FC-933F-4BE8-A62B-6A0929276247}"/>
+                <a16:creationId xmlns:a16="http://schemas.microsoft.com/office/drawing/2014/main" id="{4BE6037F-455E-41F6-B14D-4972389D2CB7}"/>
               </a:ext>
             </a:extLst>
           </p:cNvPr>
@@ -28534,7 +28532,7 @@
           <p:cNvPr id="25" name="">
             <a:extLst xmlns:a="http://schemas.openxmlformats.org/drawingml/2006/main">
               <a:ext uri="{FF2B5EF4-FFF2-40B4-BE49-F238E27FC236}">
-                <a16:creationId xmlns:a16="http://schemas.microsoft.com/office/drawing/2014/main" id="{ADE986BC-066F-4D32-8E17-8E29B2512612}"/>
+                <a16:creationId xmlns:a16="http://schemas.microsoft.com/office/drawing/2014/main" id="{53ABA9E5-35CD-4112-83D4-23C8D0CEE3DA}"/>
               </a:ext>
             </a:extLst>
           </p:cNvPr>
@@ -28598,7 +28596,7 @@
           <p:cNvPr id="26" name="">
             <a:extLst xmlns:a="http://schemas.openxmlformats.org/drawingml/2006/main">
               <a:ext uri="{FF2B5EF4-FFF2-40B4-BE49-F238E27FC236}">
-                <a16:creationId xmlns:a16="http://schemas.microsoft.com/office/drawing/2014/main" id="{2142C38D-E2A1-4B2D-8351-E3A609C4DA2F}"/>
+                <a16:creationId xmlns:a16="http://schemas.microsoft.com/office/drawing/2014/main" id="{86DA954B-0CE5-4AB2-ADA9-2CA7A2E1B499}"/>
               </a:ext>
             </a:extLst>
           </p:cNvPr>
@@ -28633,7 +28631,7 @@
           <p:cNvPr id="27" name="">
             <a:extLst xmlns:a="http://schemas.openxmlformats.org/drawingml/2006/main">
               <a:ext uri="{FF2B5EF4-FFF2-40B4-BE49-F238E27FC236}">
-                <a16:creationId xmlns:a16="http://schemas.microsoft.com/office/drawing/2014/main" id="{DC58CA20-F28E-4E68-915B-0C959576AF8C}"/>
+                <a16:creationId xmlns:a16="http://schemas.microsoft.com/office/drawing/2014/main" id="{AD0EFD33-0A9F-4AC1-98D2-3E4B4DCBAEDB}"/>
               </a:ext>
             </a:extLst>
           </p:cNvPr>
@@ -28697,7 +28695,7 @@
           <p:cNvPr id="28" name="">
             <a:extLst xmlns:a="http://schemas.openxmlformats.org/drawingml/2006/main">
               <a:ext uri="{FF2B5EF4-FFF2-40B4-BE49-F238E27FC236}">
-                <a16:creationId xmlns:a16="http://schemas.microsoft.com/office/drawing/2014/main" id="{7A4528FF-23BC-4DF7-AE60-B7CC1FC5E7E9}"/>
+                <a16:creationId xmlns:a16="http://schemas.microsoft.com/office/drawing/2014/main" id="{FA897EB6-1A0F-41FF-A6C2-776DAEBAEFD6}"/>
               </a:ext>
             </a:extLst>
           </p:cNvPr>
@@ -28732,7 +28730,7 @@
           <p:cNvPr id="29" name="">
             <a:extLst xmlns:a="http://schemas.openxmlformats.org/drawingml/2006/main">
               <a:ext uri="{FF2B5EF4-FFF2-40B4-BE49-F238E27FC236}">
-                <a16:creationId xmlns:a16="http://schemas.microsoft.com/office/drawing/2014/main" id="{1F3771BF-0859-45E6-804D-A7648D2082B2}"/>
+                <a16:creationId xmlns:a16="http://schemas.microsoft.com/office/drawing/2014/main" id="{84C005E5-F0E1-432D-AC9A-BECA3B3AE20F}"/>
               </a:ext>
             </a:extLst>
           </p:cNvPr>
@@ -28796,7 +28794,7 @@
           <p:cNvPr id="30" name="">
             <a:extLst xmlns:a="http://schemas.openxmlformats.org/drawingml/2006/main">
               <a:ext uri="{FF2B5EF4-FFF2-40B4-BE49-F238E27FC236}">
-                <a16:creationId xmlns:a16="http://schemas.microsoft.com/office/drawing/2014/main" id="{ED20DB02-08F5-4638-8629-FF7564564A90}"/>
+                <a16:creationId xmlns:a16="http://schemas.microsoft.com/office/drawing/2014/main" id="{A8B24315-2289-4541-A817-C01D665C14D9}"/>
               </a:ext>
             </a:extLst>
           </p:cNvPr>
@@ -28860,7 +28858,7 @@
           <p:cNvPr id="31" name="">
             <a:extLst xmlns:a="http://schemas.openxmlformats.org/drawingml/2006/main">
               <a:ext uri="{FF2B5EF4-FFF2-40B4-BE49-F238E27FC236}">
-                <a16:creationId xmlns:a16="http://schemas.microsoft.com/office/drawing/2014/main" id="{773EDC49-C295-4ECB-BD15-3C02E7F137CC}"/>
+                <a16:creationId xmlns:a16="http://schemas.microsoft.com/office/drawing/2014/main" id="{7C60F7B1-2ADE-469B-A536-50F0AEDD5B20}"/>
               </a:ext>
             </a:extLst>
           </p:cNvPr>
@@ -28922,7 +28920,7 @@
     </p:spTree>
     <p:extLst>
       <p:ext uri="{BB962C8B-B14F-4D97-AF65-F5344CB8AC3E}">
-        <p14:creationId xmlns:p14="http://schemas.microsoft.com/office/powerpoint/2010/main" val="998742096"/>
+        <p14:creationId xmlns:p14="http://schemas.microsoft.com/office/powerpoint/2010/main" val="78517255"/>
       </p:ext>
     </p:extLst>
   </p:cSld>
@@ -28946,7 +28944,7 @@
           <p:cNvPr id="1" name="">
             <a:extLst xmlns:a="http://schemas.openxmlformats.org/drawingml/2006/main">
               <a:ext uri="{FF2B5EF4-FFF2-40B4-BE49-F238E27FC236}">
-                <a16:creationId xmlns:a16="http://schemas.microsoft.com/office/drawing/2014/main" id="{B926986F-A02A-431E-8970-7FDCB59F4C0F}"/>
+                <a16:creationId xmlns:a16="http://schemas.microsoft.com/office/drawing/2014/main" id="{00D1EA0F-13C6-481C-B1EB-CA7F83AD2607}"/>
               </a:ext>
             </a:extLst>
           </p:cNvPr>
@@ -28981,7 +28979,7 @@
           <p:cNvPr id="2" name="">
             <a:extLst xmlns:a="http://schemas.openxmlformats.org/drawingml/2006/main">
               <a:ext uri="{FF2B5EF4-FFF2-40B4-BE49-F238E27FC236}">
-                <a16:creationId xmlns:a16="http://schemas.microsoft.com/office/drawing/2014/main" id="{82B9DB61-B2F7-47D2-BEC9-DC8660DDA062}"/>
+                <a16:creationId xmlns:a16="http://schemas.microsoft.com/office/drawing/2014/main" id="{71B85793-1E7B-4E6B-B29D-BEFD227AC46E}"/>
               </a:ext>
             </a:extLst>
           </p:cNvPr>
@@ -29016,7 +29014,7 @@
           <p:cNvPr id="3" name="">
             <a:extLst xmlns:a="http://schemas.openxmlformats.org/drawingml/2006/main">
               <a:ext uri="{FF2B5EF4-FFF2-40B4-BE49-F238E27FC236}">
-                <a16:creationId xmlns:a16="http://schemas.microsoft.com/office/drawing/2014/main" id="{5126D679-43F2-4ACF-9294-3FB1717B6C06}"/>
+                <a16:creationId xmlns:a16="http://schemas.microsoft.com/office/drawing/2014/main" id="{E84E89AE-0BD5-4A1B-9A37-CEEC4E97E121}"/>
               </a:ext>
             </a:extLst>
           </p:cNvPr>
@@ -29051,7 +29049,7 @@
           <p:cNvPr id="4" name="kicker-06-marker">
             <a:extLst xmlns:a="http://schemas.openxmlformats.org/drawingml/2006/main">
               <a:ext uri="{FF2B5EF4-FFF2-40B4-BE49-F238E27FC236}">
-                <a16:creationId xmlns:a16="http://schemas.microsoft.com/office/drawing/2014/main" id="{A4F90BA6-D21C-404D-864B-252C93E4A020}"/>
+                <a16:creationId xmlns:a16="http://schemas.microsoft.com/office/drawing/2014/main" id="{2CB3ABDC-D8E7-4106-8198-2470BB3CD354}"/>
               </a:ext>
             </a:extLst>
           </p:cNvPr>
@@ -29086,7 +29084,7 @@
           <p:cNvPr id="5" name="kicker-06-label">
             <a:extLst xmlns:a="http://schemas.openxmlformats.org/drawingml/2006/main">
               <a:ext uri="{FF2B5EF4-FFF2-40B4-BE49-F238E27FC236}">
-                <a16:creationId xmlns:a16="http://schemas.microsoft.com/office/drawing/2014/main" id="{8BCDF9C5-BAAD-40BB-BB21-CB3FE313D421}"/>
+                <a16:creationId xmlns:a16="http://schemas.microsoft.com/office/drawing/2014/main" id="{BEB492C6-4A0F-445A-A4F2-7AE5C8064914}"/>
               </a:ext>
             </a:extLst>
           </p:cNvPr>
@@ -29150,7 +29148,7 @@
           <p:cNvPr id="6" name="">
             <a:extLst xmlns:a="http://schemas.openxmlformats.org/drawingml/2006/main">
               <a:ext uri="{FF2B5EF4-FFF2-40B4-BE49-F238E27FC236}">
-                <a16:creationId xmlns:a16="http://schemas.microsoft.com/office/drawing/2014/main" id="{5FA519D9-C089-4295-9529-2EB6B571F5FB}"/>
+                <a16:creationId xmlns:a16="http://schemas.microsoft.com/office/drawing/2014/main" id="{1527DF1B-56BC-4BC0-89E5-1868346F0570}"/>
               </a:ext>
             </a:extLst>
           </p:cNvPr>
@@ -29214,7 +29212,7 @@
           <p:cNvPr id="7" name="">
             <a:extLst xmlns:a="http://schemas.openxmlformats.org/drawingml/2006/main">
               <a:ext uri="{FF2B5EF4-FFF2-40B4-BE49-F238E27FC236}">
-                <a16:creationId xmlns:a16="http://schemas.microsoft.com/office/drawing/2014/main" id="{34B85C6F-E370-4FA5-8BBC-52194879E9C8}"/>
+                <a16:creationId xmlns:a16="http://schemas.microsoft.com/office/drawing/2014/main" id="{8EE18704-492D-48AA-B7C1-234FDCDF0EF6}"/>
               </a:ext>
             </a:extLst>
           </p:cNvPr>
@@ -29278,7 +29276,7 @@
           <p:cNvPr id="8" name="">
             <a:extLst xmlns:a="http://schemas.openxmlformats.org/drawingml/2006/main">
               <a:ext uri="{FF2B5EF4-FFF2-40B4-BE49-F238E27FC236}">
-                <a16:creationId xmlns:a16="http://schemas.microsoft.com/office/drawing/2014/main" id="{A3FBC4DD-632C-4ADB-9377-D68888EF1891}"/>
+                <a16:creationId xmlns:a16="http://schemas.microsoft.com/office/drawing/2014/main" id="{23D92ED4-C67D-428C-A51A-BC9AEC14811F}"/>
               </a:ext>
             </a:extLst>
           </p:cNvPr>
@@ -29313,7 +29311,7 @@
           <p:cNvPr id="9" name="">
             <a:extLst xmlns:a="http://schemas.openxmlformats.org/drawingml/2006/main">
               <a:ext uri="{FF2B5EF4-FFF2-40B4-BE49-F238E27FC236}">
-                <a16:creationId xmlns:a16="http://schemas.microsoft.com/office/drawing/2014/main" id="{42BA06BB-19AD-4661-A8E2-2CD5D8142F2C}"/>
+                <a16:creationId xmlns:a16="http://schemas.microsoft.com/office/drawing/2014/main" id="{BA1F8B66-0F86-489B-BC8E-F3AC29BA54EE}"/>
               </a:ext>
             </a:extLst>
           </p:cNvPr>
@@ -29377,7 +29375,7 @@
           <p:cNvPr id="10" name="">
             <a:extLst xmlns:a="http://schemas.openxmlformats.org/drawingml/2006/main">
               <a:ext uri="{FF2B5EF4-FFF2-40B4-BE49-F238E27FC236}">
-                <a16:creationId xmlns:a16="http://schemas.microsoft.com/office/drawing/2014/main" id="{7C99D1D9-C6DF-4E6C-8B45-C737B491A072}"/>
+                <a16:creationId xmlns:a16="http://schemas.microsoft.com/office/drawing/2014/main" id="{101DFACA-C430-4A77-A6D1-727F204058F5}"/>
               </a:ext>
             </a:extLst>
           </p:cNvPr>
@@ -29441,7 +29439,7 @@
           <p:cNvPr id="11" name="">
             <a:extLst xmlns:a="http://schemas.openxmlformats.org/drawingml/2006/main">
               <a:ext uri="{FF2B5EF4-FFF2-40B4-BE49-F238E27FC236}">
-                <a16:creationId xmlns:a16="http://schemas.microsoft.com/office/drawing/2014/main" id="{0185DB06-C069-44C4-A7E0-FEAC86B10E2F}"/>
+                <a16:creationId xmlns:a16="http://schemas.microsoft.com/office/drawing/2014/main" id="{DFD0C5B8-FDD4-441A-BB9A-A75F7AA884F6}"/>
               </a:ext>
             </a:extLst>
           </p:cNvPr>
@@ -29505,7 +29503,7 @@
           <p:cNvPr id="12" name="">
             <a:extLst xmlns:a="http://schemas.openxmlformats.org/drawingml/2006/main">
               <a:ext uri="{FF2B5EF4-FFF2-40B4-BE49-F238E27FC236}">
-                <a16:creationId xmlns:a16="http://schemas.microsoft.com/office/drawing/2014/main" id="{E9387B1B-ADE5-4CE1-A764-0236F5CAC103}"/>
+                <a16:creationId xmlns:a16="http://schemas.microsoft.com/office/drawing/2014/main" id="{21629DC5-87E9-47F5-877C-06895DD6F137}"/>
               </a:ext>
             </a:extLst>
           </p:cNvPr>
@@ -29538,7 +29536,7 @@
           <p:cNvPr id="13" name="">
             <a:extLst xmlns:a="http://schemas.openxmlformats.org/drawingml/2006/main">
               <a:ext uri="{FF2B5EF4-FFF2-40B4-BE49-F238E27FC236}">
-                <a16:creationId xmlns:a16="http://schemas.microsoft.com/office/drawing/2014/main" id="{1CEF3AFF-B489-4C6A-AF0A-0E7C456279D6}"/>
+                <a16:creationId xmlns:a16="http://schemas.microsoft.com/office/drawing/2014/main" id="{C017B7A5-1418-4A00-8E69-849D84F9D1E2}"/>
               </a:ext>
             </a:extLst>
           </p:cNvPr>
@@ -29573,7 +29571,7 @@
           <p:cNvPr id="14" name="">
             <a:extLst xmlns:a="http://schemas.openxmlformats.org/drawingml/2006/main">
               <a:ext uri="{FF2B5EF4-FFF2-40B4-BE49-F238E27FC236}">
-                <a16:creationId xmlns:a16="http://schemas.microsoft.com/office/drawing/2014/main" id="{2AA56690-E024-4FC4-A925-CB3C3F8E17D2}"/>
+                <a16:creationId xmlns:a16="http://schemas.microsoft.com/office/drawing/2014/main" id="{446082DD-9F2E-4CFC-A0B5-22CB5BDA53ED}"/>
               </a:ext>
             </a:extLst>
           </p:cNvPr>
@@ -29637,7 +29635,7 @@
           <p:cNvPr id="15" name="">
             <a:extLst xmlns:a="http://schemas.openxmlformats.org/drawingml/2006/main">
               <a:ext uri="{FF2B5EF4-FFF2-40B4-BE49-F238E27FC236}">
-                <a16:creationId xmlns:a16="http://schemas.microsoft.com/office/drawing/2014/main" id="{2C6CA39C-7004-4E77-9F01-6AB4195DE600}"/>
+                <a16:creationId xmlns:a16="http://schemas.microsoft.com/office/drawing/2014/main" id="{2E7977EB-9F56-4F0C-8F54-435D4E41B982}"/>
               </a:ext>
             </a:extLst>
           </p:cNvPr>
@@ -29701,7 +29699,7 @@
           <p:cNvPr id="16" name="">
             <a:extLst xmlns:a="http://schemas.openxmlformats.org/drawingml/2006/main">
               <a:ext uri="{FF2B5EF4-FFF2-40B4-BE49-F238E27FC236}">
-                <a16:creationId xmlns:a16="http://schemas.microsoft.com/office/drawing/2014/main" id="{E1495C0D-B047-4FBC-AC69-CE5322FA8222}"/>
+                <a16:creationId xmlns:a16="http://schemas.microsoft.com/office/drawing/2014/main" id="{A08CDBE8-9C4A-485A-890A-A54EC94ED5F4}"/>
               </a:ext>
             </a:extLst>
           </p:cNvPr>
@@ -29736,7 +29734,7 @@
           <p:cNvPr id="17" name="">
             <a:extLst xmlns:a="http://schemas.openxmlformats.org/drawingml/2006/main">
               <a:ext uri="{FF2B5EF4-FFF2-40B4-BE49-F238E27FC236}">
-                <a16:creationId xmlns:a16="http://schemas.microsoft.com/office/drawing/2014/main" id="{1E91E263-E834-48F5-BAB3-F9DCE20BE74F}"/>
+                <a16:creationId xmlns:a16="http://schemas.microsoft.com/office/drawing/2014/main" id="{46B2D668-3538-4084-BCDB-7B64AE3799E3}"/>
               </a:ext>
             </a:extLst>
           </p:cNvPr>
@@ -29800,7 +29798,7 @@
           <p:cNvPr id="18" name="">
             <a:extLst xmlns:a="http://schemas.openxmlformats.org/drawingml/2006/main">
               <a:ext uri="{FF2B5EF4-FFF2-40B4-BE49-F238E27FC236}">
-                <a16:creationId xmlns:a16="http://schemas.microsoft.com/office/drawing/2014/main" id="{25AB00F2-25BD-4D14-8DB5-65CD7BEDA711}"/>
+                <a16:creationId xmlns:a16="http://schemas.microsoft.com/office/drawing/2014/main" id="{DD2C87D0-F73B-4A36-BA35-23E677FEABCB}"/>
               </a:ext>
             </a:extLst>
           </p:cNvPr>
@@ -29864,7 +29862,7 @@
           <p:cNvPr id="19" name="">
             <a:extLst xmlns:a="http://schemas.openxmlformats.org/drawingml/2006/main">
               <a:ext uri="{FF2B5EF4-FFF2-40B4-BE49-F238E27FC236}">
-                <a16:creationId xmlns:a16="http://schemas.microsoft.com/office/drawing/2014/main" id="{85579FDE-CB18-47A8-93EE-8BA3E5CC21C5}"/>
+                <a16:creationId xmlns:a16="http://schemas.microsoft.com/office/drawing/2014/main" id="{A0FC9B8B-FCF2-4454-BDE7-6827AACE9901}"/>
               </a:ext>
             </a:extLst>
           </p:cNvPr>
@@ -29897,7 +29895,7 @@
           <p:cNvPr id="20" name="">
             <a:extLst xmlns:a="http://schemas.openxmlformats.org/drawingml/2006/main">
               <a:ext uri="{FF2B5EF4-FFF2-40B4-BE49-F238E27FC236}">
-                <a16:creationId xmlns:a16="http://schemas.microsoft.com/office/drawing/2014/main" id="{DA73A119-7886-48A8-99D5-875F273037BF}"/>
+                <a16:creationId xmlns:a16="http://schemas.microsoft.com/office/drawing/2014/main" id="{DDAC1823-09F2-4290-93D9-7990F475C06C}"/>
               </a:ext>
             </a:extLst>
           </p:cNvPr>
@@ -29932,7 +29930,7 @@
           <p:cNvPr id="21" name="">
             <a:extLst xmlns:a="http://schemas.openxmlformats.org/drawingml/2006/main">
               <a:ext uri="{FF2B5EF4-FFF2-40B4-BE49-F238E27FC236}">
-                <a16:creationId xmlns:a16="http://schemas.microsoft.com/office/drawing/2014/main" id="{8CA017C2-6CF2-4C7B-A01C-F1491B05D981}"/>
+                <a16:creationId xmlns:a16="http://schemas.microsoft.com/office/drawing/2014/main" id="{8A3C338E-0538-4ED4-8786-949F8B45A03A}"/>
               </a:ext>
             </a:extLst>
           </p:cNvPr>
@@ -29996,7 +29994,7 @@
           <p:cNvPr id="22" name="">
             <a:extLst xmlns:a="http://schemas.openxmlformats.org/drawingml/2006/main">
               <a:ext uri="{FF2B5EF4-FFF2-40B4-BE49-F238E27FC236}">
-                <a16:creationId xmlns:a16="http://schemas.microsoft.com/office/drawing/2014/main" id="{6E384D84-4B31-42BF-AA87-91D053E86408}"/>
+                <a16:creationId xmlns:a16="http://schemas.microsoft.com/office/drawing/2014/main" id="{C46F69B7-9E7B-4563-9FB6-45171676F6BF}"/>
               </a:ext>
             </a:extLst>
           </p:cNvPr>
@@ -30029,7 +30027,7 @@
           <p:cNvPr id="23" name="">
             <a:extLst xmlns:a="http://schemas.openxmlformats.org/drawingml/2006/main">
               <a:ext uri="{FF2B5EF4-FFF2-40B4-BE49-F238E27FC236}">
-                <a16:creationId xmlns:a16="http://schemas.microsoft.com/office/drawing/2014/main" id="{B08EF4CA-EFB5-4174-A081-C0ABFE6FAA37}"/>
+                <a16:creationId xmlns:a16="http://schemas.microsoft.com/office/drawing/2014/main" id="{4E3733E7-58B3-4D59-B9CA-C6520A729A9D}"/>
               </a:ext>
             </a:extLst>
           </p:cNvPr>
@@ -30093,7 +30091,7 @@
           <p:cNvPr id="24" name="">
             <a:extLst xmlns:a="http://schemas.openxmlformats.org/drawingml/2006/main">
               <a:ext uri="{FF2B5EF4-FFF2-40B4-BE49-F238E27FC236}">
-                <a16:creationId xmlns:a16="http://schemas.microsoft.com/office/drawing/2014/main" id="{09EA60E3-7FCB-4C9A-BC35-F2512BEDD9B6}"/>
+                <a16:creationId xmlns:a16="http://schemas.microsoft.com/office/drawing/2014/main" id="{B3EC577A-C1B6-45D8-821B-1F1B060069DE}"/>
               </a:ext>
             </a:extLst>
           </p:cNvPr>
@@ -30157,7 +30155,7 @@
           <p:cNvPr id="25" name="">
             <a:extLst xmlns:a="http://schemas.openxmlformats.org/drawingml/2006/main">
               <a:ext uri="{FF2B5EF4-FFF2-40B4-BE49-F238E27FC236}">
-                <a16:creationId xmlns:a16="http://schemas.microsoft.com/office/drawing/2014/main" id="{96FFF5D7-C4F2-42BA-9CFE-23B4B4C29A6E}"/>
+                <a16:creationId xmlns:a16="http://schemas.microsoft.com/office/drawing/2014/main" id="{40CF52A7-21A1-46B4-B37A-5CE078B33482}"/>
               </a:ext>
             </a:extLst>
           </p:cNvPr>
@@ -30190,7 +30188,7 @@
           <p:cNvPr id="26" name="">
             <a:extLst xmlns:a="http://schemas.openxmlformats.org/drawingml/2006/main">
               <a:ext uri="{FF2B5EF4-FFF2-40B4-BE49-F238E27FC236}">
-                <a16:creationId xmlns:a16="http://schemas.microsoft.com/office/drawing/2014/main" id="{057268B6-8D51-46E8-91AF-F79C616BDCF9}"/>
+                <a16:creationId xmlns:a16="http://schemas.microsoft.com/office/drawing/2014/main" id="{A3E1AD24-3705-4C36-9316-B7601344D9A1}"/>
               </a:ext>
             </a:extLst>
           </p:cNvPr>
@@ -30254,7 +30252,7 @@
           <p:cNvPr id="27" name="">
             <a:extLst xmlns:a="http://schemas.openxmlformats.org/drawingml/2006/main">
               <a:ext uri="{FF2B5EF4-FFF2-40B4-BE49-F238E27FC236}">
-                <a16:creationId xmlns:a16="http://schemas.microsoft.com/office/drawing/2014/main" id="{AB4535E5-BA3A-4236-BA6B-B04918B34126}"/>
+                <a16:creationId xmlns:a16="http://schemas.microsoft.com/office/drawing/2014/main" id="{7B758E34-357D-4C7A-A5A4-3CC38D1784C7}"/>
               </a:ext>
             </a:extLst>
           </p:cNvPr>
@@ -30318,7 +30316,7 @@
           <p:cNvPr id="28" name="">
             <a:extLst xmlns:a="http://schemas.openxmlformats.org/drawingml/2006/main">
               <a:ext uri="{FF2B5EF4-FFF2-40B4-BE49-F238E27FC236}">
-                <a16:creationId xmlns:a16="http://schemas.microsoft.com/office/drawing/2014/main" id="{B5ABB717-F136-4F01-9ACD-CD7D43FF15AE}"/>
+                <a16:creationId xmlns:a16="http://schemas.microsoft.com/office/drawing/2014/main" id="{E8E0E052-4AFF-4805-8E4F-59499B91FAB9}"/>
               </a:ext>
             </a:extLst>
           </p:cNvPr>
@@ -30351,7 +30349,7 @@
           <p:cNvPr id="29" name="">
             <a:extLst xmlns:a="http://schemas.openxmlformats.org/drawingml/2006/main">
               <a:ext uri="{FF2B5EF4-FFF2-40B4-BE49-F238E27FC236}">
-                <a16:creationId xmlns:a16="http://schemas.microsoft.com/office/drawing/2014/main" id="{FC6BEBC1-59A6-44F3-8E3D-FCD7C0514D4C}"/>
+                <a16:creationId xmlns:a16="http://schemas.microsoft.com/office/drawing/2014/main" id="{A3225BA3-284D-4AD2-AFF7-593E4551C0FC}"/>
               </a:ext>
             </a:extLst>
           </p:cNvPr>
@@ -30415,7 +30413,7 @@
           <p:cNvPr id="30" name="">
             <a:extLst xmlns:a="http://schemas.openxmlformats.org/drawingml/2006/main">
               <a:ext uri="{FF2B5EF4-FFF2-40B4-BE49-F238E27FC236}">
-                <a16:creationId xmlns:a16="http://schemas.microsoft.com/office/drawing/2014/main" id="{DA09AF68-D91A-44FB-8E3E-8B59A60EA772}"/>
+                <a16:creationId xmlns:a16="http://schemas.microsoft.com/office/drawing/2014/main" id="{332AB61D-7A0F-485F-A152-EADDA0D0064F}"/>
               </a:ext>
             </a:extLst>
           </p:cNvPr>
@@ -30479,7 +30477,7 @@
           <p:cNvPr id="31" name="">
             <a:extLst xmlns:a="http://schemas.openxmlformats.org/drawingml/2006/main">
               <a:ext uri="{FF2B5EF4-FFF2-40B4-BE49-F238E27FC236}">
-                <a16:creationId xmlns:a16="http://schemas.microsoft.com/office/drawing/2014/main" id="{25B77E4E-ABA7-4D39-8F1D-609D17387D4E}"/>
+                <a16:creationId xmlns:a16="http://schemas.microsoft.com/office/drawing/2014/main" id="{B2204112-8CC9-4F99-89AA-AE4FF9A3C2E5}"/>
               </a:ext>
             </a:extLst>
           </p:cNvPr>
@@ -30514,7 +30512,7 @@
           <p:cNvPr id="32" name="">
             <a:extLst xmlns:a="http://schemas.openxmlformats.org/drawingml/2006/main">
               <a:ext uri="{FF2B5EF4-FFF2-40B4-BE49-F238E27FC236}">
-                <a16:creationId xmlns:a16="http://schemas.microsoft.com/office/drawing/2014/main" id="{78AE5E7A-79E4-4506-8B34-390EDC6C321E}"/>
+                <a16:creationId xmlns:a16="http://schemas.microsoft.com/office/drawing/2014/main" id="{1FA4B671-1BB9-4BAA-B0DC-C6A746672E90}"/>
               </a:ext>
             </a:extLst>
           </p:cNvPr>
@@ -30578,7 +30576,7 @@
           <p:cNvPr id="33" name="">
             <a:extLst xmlns:a="http://schemas.openxmlformats.org/drawingml/2006/main">
               <a:ext uri="{FF2B5EF4-FFF2-40B4-BE49-F238E27FC236}">
-                <a16:creationId xmlns:a16="http://schemas.microsoft.com/office/drawing/2014/main" id="{5DAD114E-BE85-4339-8CF9-C94AA1316FB8}"/>
+                <a16:creationId xmlns:a16="http://schemas.microsoft.com/office/drawing/2014/main" id="{81B8A17E-9814-4197-9F05-F583BFE96E76}"/>
               </a:ext>
             </a:extLst>
           </p:cNvPr>
@@ -30642,7 +30640,7 @@
           <p:cNvPr id="34" name="">
             <a:extLst xmlns:a="http://schemas.openxmlformats.org/drawingml/2006/main">
               <a:ext uri="{FF2B5EF4-FFF2-40B4-BE49-F238E27FC236}">
-                <a16:creationId xmlns:a16="http://schemas.microsoft.com/office/drawing/2014/main" id="{94274C57-1F7F-4035-A46C-AABA720D8B6A}"/>
+                <a16:creationId xmlns:a16="http://schemas.microsoft.com/office/drawing/2014/main" id="{24D23BF2-3CCA-48D3-857F-DB3C22C38A70}"/>
               </a:ext>
             </a:extLst>
           </p:cNvPr>
@@ -30704,7 +30702,7 @@
     </p:spTree>
     <p:extLst>
       <p:ext uri="{BB962C8B-B14F-4D97-AF65-F5344CB8AC3E}">
-        <p14:creationId xmlns:p14="http://schemas.microsoft.com/office/powerpoint/2010/main" val="61604120"/>
+        <p14:creationId xmlns:p14="http://schemas.microsoft.com/office/powerpoint/2010/main" val="1788694394"/>
       </p:ext>
     </p:extLst>
   </p:cSld>
@@ -30728,7 +30726,7 @@
           <p:cNvPr id="1" name="">
             <a:extLst xmlns:a="http://schemas.openxmlformats.org/drawingml/2006/main">
               <a:ext uri="{FF2B5EF4-FFF2-40B4-BE49-F238E27FC236}">
-                <a16:creationId xmlns:a16="http://schemas.microsoft.com/office/drawing/2014/main" id="{8F6BB8D6-F10E-4EFA-AC9D-6DD2288243B6}"/>
+                <a16:creationId xmlns:a16="http://schemas.microsoft.com/office/drawing/2014/main" id="{21D4E70A-245F-436A-BC1E-2E8D1BE24DA9}"/>
               </a:ext>
             </a:extLst>
           </p:cNvPr>
@@ -30763,7 +30761,7 @@
           <p:cNvPr id="2" name="">
             <a:extLst xmlns:a="http://schemas.openxmlformats.org/drawingml/2006/main">
               <a:ext uri="{FF2B5EF4-FFF2-40B4-BE49-F238E27FC236}">
-                <a16:creationId xmlns:a16="http://schemas.microsoft.com/office/drawing/2014/main" id="{ADF22D64-D271-47D9-A118-379AF9C4D352}"/>
+                <a16:creationId xmlns:a16="http://schemas.microsoft.com/office/drawing/2014/main" id="{5C3E427F-8213-451D-B684-DFC93B94A638}"/>
               </a:ext>
             </a:extLst>
           </p:cNvPr>
@@ -30798,7 +30796,7 @@
           <p:cNvPr id="3" name="">
             <a:extLst xmlns:a="http://schemas.openxmlformats.org/drawingml/2006/main">
               <a:ext uri="{FF2B5EF4-FFF2-40B4-BE49-F238E27FC236}">
-                <a16:creationId xmlns:a16="http://schemas.microsoft.com/office/drawing/2014/main" id="{523A9AD1-2C71-423B-AAC6-96D5899510FD}"/>
+                <a16:creationId xmlns:a16="http://schemas.microsoft.com/office/drawing/2014/main" id="{78D45318-8E39-4C35-9D7D-598C154A3A70}"/>
               </a:ext>
             </a:extLst>
           </p:cNvPr>
@@ -30833,7 +30831,7 @@
           <p:cNvPr id="4" name="kicker-06-marker">
             <a:extLst xmlns:a="http://schemas.openxmlformats.org/drawingml/2006/main">
               <a:ext uri="{FF2B5EF4-FFF2-40B4-BE49-F238E27FC236}">
-                <a16:creationId xmlns:a16="http://schemas.microsoft.com/office/drawing/2014/main" id="{C4D50365-F72D-4BE1-95F5-023C88FA856F}"/>
+                <a16:creationId xmlns:a16="http://schemas.microsoft.com/office/drawing/2014/main" id="{52559E07-7E8D-45DB-B86E-C264E5CC4B3B}"/>
               </a:ext>
             </a:extLst>
           </p:cNvPr>
@@ -30868,7 +30866,7 @@
           <p:cNvPr id="5" name="kicker-06-label">
             <a:extLst xmlns:a="http://schemas.openxmlformats.org/drawingml/2006/main">
               <a:ext uri="{FF2B5EF4-FFF2-40B4-BE49-F238E27FC236}">
-                <a16:creationId xmlns:a16="http://schemas.microsoft.com/office/drawing/2014/main" id="{07ECDAC5-B6DC-4CEE-AC34-634926A70158}"/>
+                <a16:creationId xmlns:a16="http://schemas.microsoft.com/office/drawing/2014/main" id="{E8EBFC81-0D41-4863-BE24-0E29BEDB6ABA}"/>
               </a:ext>
             </a:extLst>
           </p:cNvPr>
@@ -30932,7 +30930,7 @@
           <p:cNvPr id="6" name="">
             <a:extLst xmlns:a="http://schemas.openxmlformats.org/drawingml/2006/main">
               <a:ext uri="{FF2B5EF4-FFF2-40B4-BE49-F238E27FC236}">
-                <a16:creationId xmlns:a16="http://schemas.microsoft.com/office/drawing/2014/main" id="{1A90C5EE-DFDD-4686-9D3C-58A446B8C8E9}"/>
+                <a16:creationId xmlns:a16="http://schemas.microsoft.com/office/drawing/2014/main" id="{60CFDC74-7913-4DE1-AC4C-864DD01031DC}"/>
               </a:ext>
             </a:extLst>
           </p:cNvPr>
@@ -30996,7 +30994,7 @@
           <p:cNvPr id="7" name="">
             <a:extLst xmlns:a="http://schemas.openxmlformats.org/drawingml/2006/main">
               <a:ext uri="{FF2B5EF4-FFF2-40B4-BE49-F238E27FC236}">
-                <a16:creationId xmlns:a16="http://schemas.microsoft.com/office/drawing/2014/main" id="{8BF26374-7F61-4F0A-93B4-A7B977D52914}"/>
+                <a16:creationId xmlns:a16="http://schemas.microsoft.com/office/drawing/2014/main" id="{DF957F53-D1B2-477B-A5F0-7250762F4FE1}"/>
               </a:ext>
             </a:extLst>
           </p:cNvPr>
@@ -31060,7 +31058,7 @@
           <p:cNvPr id="8" name="">
             <a:extLst xmlns:a="http://schemas.openxmlformats.org/drawingml/2006/main">
               <a:ext uri="{FF2B5EF4-FFF2-40B4-BE49-F238E27FC236}">
-                <a16:creationId xmlns:a16="http://schemas.microsoft.com/office/drawing/2014/main" id="{AD780938-D3EA-4D5E-97D8-A9568579EFCC}"/>
+                <a16:creationId xmlns:a16="http://schemas.microsoft.com/office/drawing/2014/main" id="{25B81C77-C37C-43B7-8D65-CDDAEE4661DC}"/>
               </a:ext>
             </a:extLst>
           </p:cNvPr>
@@ -31095,7 +31093,7 @@
           <p:cNvPr id="9" name="">
             <a:extLst xmlns:a="http://schemas.openxmlformats.org/drawingml/2006/main">
               <a:ext uri="{FF2B5EF4-FFF2-40B4-BE49-F238E27FC236}">
-                <a16:creationId xmlns:a16="http://schemas.microsoft.com/office/drawing/2014/main" id="{143A5EEF-4D85-43DA-A791-1CE7A597CBFA}"/>
+                <a16:creationId xmlns:a16="http://schemas.microsoft.com/office/drawing/2014/main" id="{426EF1CB-7F94-47D3-9FF0-243E9320643C}"/>
               </a:ext>
             </a:extLst>
           </p:cNvPr>
@@ -31159,7 +31157,7 @@
           <p:cNvPr id="10" name="">
             <a:extLst xmlns:a="http://schemas.openxmlformats.org/drawingml/2006/main">
               <a:ext uri="{FF2B5EF4-FFF2-40B4-BE49-F238E27FC236}">
-                <a16:creationId xmlns:a16="http://schemas.microsoft.com/office/drawing/2014/main" id="{E600C624-D1AC-43E0-AAEA-DE15B6317F67}"/>
+                <a16:creationId xmlns:a16="http://schemas.microsoft.com/office/drawing/2014/main" id="{4804EA0E-45AD-471D-BFB0-FE7AA44FA46B}"/>
               </a:ext>
             </a:extLst>
           </p:cNvPr>
@@ -31223,7 +31221,7 @@
           <p:cNvPr id="11" name="">
             <a:extLst xmlns:a="http://schemas.openxmlformats.org/drawingml/2006/main">
               <a:ext uri="{FF2B5EF4-FFF2-40B4-BE49-F238E27FC236}">
-                <a16:creationId xmlns:a16="http://schemas.microsoft.com/office/drawing/2014/main" id="{DD3D7C89-6824-42E2-B129-0237330206DE}"/>
+                <a16:creationId xmlns:a16="http://schemas.microsoft.com/office/drawing/2014/main" id="{1488301D-2896-4A3A-9D89-486713540618}"/>
               </a:ext>
             </a:extLst>
           </p:cNvPr>
@@ -31287,7 +31285,7 @@
           <p:cNvPr id="12" name="">
             <a:extLst xmlns:a="http://schemas.openxmlformats.org/drawingml/2006/main">
               <a:ext uri="{FF2B5EF4-FFF2-40B4-BE49-F238E27FC236}">
-                <a16:creationId xmlns:a16="http://schemas.microsoft.com/office/drawing/2014/main" id="{9994A1CF-BF39-46E5-8779-6EF47F7314BD}"/>
+                <a16:creationId xmlns:a16="http://schemas.microsoft.com/office/drawing/2014/main" id="{0C296F14-AED9-4722-840F-8157F5DB5B18}"/>
               </a:ext>
             </a:extLst>
           </p:cNvPr>
@@ -31322,7 +31320,7 @@
           <p:cNvPr id="13" name="">
             <a:extLst xmlns:a="http://schemas.openxmlformats.org/drawingml/2006/main">
               <a:ext uri="{FF2B5EF4-FFF2-40B4-BE49-F238E27FC236}">
-                <a16:creationId xmlns:a16="http://schemas.microsoft.com/office/drawing/2014/main" id="{9A573799-52F3-437A-AF7F-5164A58D6442}"/>
+                <a16:creationId xmlns:a16="http://schemas.microsoft.com/office/drawing/2014/main" id="{9F600B1B-E6F3-4A87-82A3-09FD8CE5672D}"/>
               </a:ext>
             </a:extLst>
           </p:cNvPr>
@@ -31355,7 +31353,7 @@
           <p:cNvPr id="14" name="">
             <a:extLst xmlns:a="http://schemas.openxmlformats.org/drawingml/2006/main">
               <a:ext uri="{FF2B5EF4-FFF2-40B4-BE49-F238E27FC236}">
-                <a16:creationId xmlns:a16="http://schemas.microsoft.com/office/drawing/2014/main" id="{E70B1BF4-C4D4-4B08-9B9A-496D9AE2EEA3}"/>
+                <a16:creationId xmlns:a16="http://schemas.microsoft.com/office/drawing/2014/main" id="{A8D42364-5746-467B-AD0D-4FED6F87C05C}"/>
               </a:ext>
             </a:extLst>
           </p:cNvPr>
@@ -31390,7 +31388,7 @@
           <p:cNvPr id="15" name="">
             <a:extLst xmlns:a="http://schemas.openxmlformats.org/drawingml/2006/main">
               <a:ext uri="{FF2B5EF4-FFF2-40B4-BE49-F238E27FC236}">
-                <a16:creationId xmlns:a16="http://schemas.microsoft.com/office/drawing/2014/main" id="{31DA95DD-2064-46FD-8B7E-006D972E2B40}"/>
+                <a16:creationId xmlns:a16="http://schemas.microsoft.com/office/drawing/2014/main" id="{D4FC5400-E69E-4F52-A1C7-265FF7EE7924}"/>
               </a:ext>
             </a:extLst>
           </p:cNvPr>
@@ -31454,7 +31452,7 @@
           <p:cNvPr id="16" name="">
             <a:extLst xmlns:a="http://schemas.openxmlformats.org/drawingml/2006/main">
               <a:ext uri="{FF2B5EF4-FFF2-40B4-BE49-F238E27FC236}">
-                <a16:creationId xmlns:a16="http://schemas.microsoft.com/office/drawing/2014/main" id="{878342D9-4102-4533-AAA6-5EC96EA645ED}"/>
+                <a16:creationId xmlns:a16="http://schemas.microsoft.com/office/drawing/2014/main" id="{ADF51469-CB60-4C6B-AE28-F39DA4472364}"/>
               </a:ext>
             </a:extLst>
           </p:cNvPr>
@@ -31487,7 +31485,7 @@
           <p:cNvPr id="17" name="">
             <a:extLst xmlns:a="http://schemas.openxmlformats.org/drawingml/2006/main">
               <a:ext uri="{FF2B5EF4-FFF2-40B4-BE49-F238E27FC236}">
-                <a16:creationId xmlns:a16="http://schemas.microsoft.com/office/drawing/2014/main" id="{5AAC1E16-22D4-4291-ADF5-E858BB65E3AD}"/>
+                <a16:creationId xmlns:a16="http://schemas.microsoft.com/office/drawing/2014/main" id="{540747FF-A036-45EC-86EB-15A2F1445F43}"/>
               </a:ext>
             </a:extLst>
           </p:cNvPr>
@@ -31551,7 +31549,7 @@
           <p:cNvPr id="18" name="">
             <a:extLst xmlns:a="http://schemas.openxmlformats.org/drawingml/2006/main">
               <a:ext uri="{FF2B5EF4-FFF2-40B4-BE49-F238E27FC236}">
-                <a16:creationId xmlns:a16="http://schemas.microsoft.com/office/drawing/2014/main" id="{7DDB4C1B-F503-413A-BF33-81506881B01B}"/>
+                <a16:creationId xmlns:a16="http://schemas.microsoft.com/office/drawing/2014/main" id="{B617E456-5303-4C34-B8DD-16B59182C32B}"/>
               </a:ext>
             </a:extLst>
           </p:cNvPr>
@@ -31615,7 +31613,7 @@
           <p:cNvPr id="19" name="">
             <a:extLst xmlns:a="http://schemas.openxmlformats.org/drawingml/2006/main">
               <a:ext uri="{FF2B5EF4-FFF2-40B4-BE49-F238E27FC236}">
-                <a16:creationId xmlns:a16="http://schemas.microsoft.com/office/drawing/2014/main" id="{3BE721AD-3B18-4EDD-B83D-2F5C88AFE1E2}"/>
+                <a16:creationId xmlns:a16="http://schemas.microsoft.com/office/drawing/2014/main" id="{D7BB7DAE-EB40-445F-8F91-FE80919A4DA0}"/>
               </a:ext>
             </a:extLst>
           </p:cNvPr>
@@ -31648,7 +31646,7 @@
           <p:cNvPr id="20" name="">
             <a:extLst xmlns:a="http://schemas.openxmlformats.org/drawingml/2006/main">
               <a:ext uri="{FF2B5EF4-FFF2-40B4-BE49-F238E27FC236}">
-                <a16:creationId xmlns:a16="http://schemas.microsoft.com/office/drawing/2014/main" id="{394BEFBE-A7C8-49CF-9FF3-C13AEC5F3AF2}"/>
+                <a16:creationId xmlns:a16="http://schemas.microsoft.com/office/drawing/2014/main" id="{D27CE0E8-E021-4CDD-997E-B9DED2F27262}"/>
               </a:ext>
             </a:extLst>
           </p:cNvPr>
@@ -31712,7 +31710,7 @@
           <p:cNvPr id="21" name="">
             <a:extLst xmlns:a="http://schemas.openxmlformats.org/drawingml/2006/main">
               <a:ext uri="{FF2B5EF4-FFF2-40B4-BE49-F238E27FC236}">
-                <a16:creationId xmlns:a16="http://schemas.microsoft.com/office/drawing/2014/main" id="{DA2BA52C-7680-4564-9E7A-788E49CFDAD4}"/>
+                <a16:creationId xmlns:a16="http://schemas.microsoft.com/office/drawing/2014/main" id="{6BFFA9E2-346D-4F0B-ABDE-92EF78A9EDAE}"/>
               </a:ext>
             </a:extLst>
           </p:cNvPr>
@@ -31776,7 +31774,7 @@
           <p:cNvPr id="22" name="">
             <a:extLst xmlns:a="http://schemas.openxmlformats.org/drawingml/2006/main">
               <a:ext uri="{FF2B5EF4-FFF2-40B4-BE49-F238E27FC236}">
-                <a16:creationId xmlns:a16="http://schemas.microsoft.com/office/drawing/2014/main" id="{71BCAEAE-F611-497E-9C2E-ACC12C8768C1}"/>
+                <a16:creationId xmlns:a16="http://schemas.microsoft.com/office/drawing/2014/main" id="{2BA66A25-850A-4F7A-8DF4-7A811C4509B7}"/>
               </a:ext>
             </a:extLst>
           </p:cNvPr>
@@ -31809,7 +31807,7 @@
           <p:cNvPr id="23" name="">
             <a:extLst xmlns:a="http://schemas.openxmlformats.org/drawingml/2006/main">
               <a:ext uri="{FF2B5EF4-FFF2-40B4-BE49-F238E27FC236}">
-                <a16:creationId xmlns:a16="http://schemas.microsoft.com/office/drawing/2014/main" id="{938729EE-DEBF-402C-952F-3E6EFBF68745}"/>
+                <a16:creationId xmlns:a16="http://schemas.microsoft.com/office/drawing/2014/main" id="{BDBD6729-798B-4714-AD99-D2970E4603CF}"/>
               </a:ext>
             </a:extLst>
           </p:cNvPr>
@@ -31873,7 +31871,7 @@
           <p:cNvPr id="24" name="">
             <a:extLst xmlns:a="http://schemas.openxmlformats.org/drawingml/2006/main">
               <a:ext uri="{FF2B5EF4-FFF2-40B4-BE49-F238E27FC236}">
-                <a16:creationId xmlns:a16="http://schemas.microsoft.com/office/drawing/2014/main" id="{CA1A449E-EBB7-4199-89AD-D1F1DFACDAB7}"/>
+                <a16:creationId xmlns:a16="http://schemas.microsoft.com/office/drawing/2014/main" id="{B9CE35C2-1D22-4543-A144-ECB8BEE43A27}"/>
               </a:ext>
             </a:extLst>
           </p:cNvPr>
@@ -31937,7 +31935,7 @@
           <p:cNvPr id="25" name="">
             <a:extLst xmlns:a="http://schemas.openxmlformats.org/drawingml/2006/main">
               <a:ext uri="{FF2B5EF4-FFF2-40B4-BE49-F238E27FC236}">
-                <a16:creationId xmlns:a16="http://schemas.microsoft.com/office/drawing/2014/main" id="{07FB2177-8B46-4527-B132-C143943AEE03}"/>
+                <a16:creationId xmlns:a16="http://schemas.microsoft.com/office/drawing/2014/main" id="{F2EE1DCD-5BE2-4297-B862-F691FF14A655}"/>
               </a:ext>
             </a:extLst>
           </p:cNvPr>
@@ -31972,7 +31970,7 @@
           <p:cNvPr id="26" name="">
             <a:extLst xmlns:a="http://schemas.openxmlformats.org/drawingml/2006/main">
               <a:ext uri="{FF2B5EF4-FFF2-40B4-BE49-F238E27FC236}">
-                <a16:creationId xmlns:a16="http://schemas.microsoft.com/office/drawing/2014/main" id="{7CB32463-A6D0-4A83-88C9-BA1B0E14834E}"/>
+                <a16:creationId xmlns:a16="http://schemas.microsoft.com/office/drawing/2014/main" id="{DE58391F-BADD-43BA-823A-739D8CE4D33D}"/>
               </a:ext>
             </a:extLst>
           </p:cNvPr>
@@ -32036,7 +32034,7 @@
           <p:cNvPr id="27" name="">
             <a:extLst xmlns:a="http://schemas.openxmlformats.org/drawingml/2006/main">
               <a:ext uri="{FF2B5EF4-FFF2-40B4-BE49-F238E27FC236}">
-                <a16:creationId xmlns:a16="http://schemas.microsoft.com/office/drawing/2014/main" id="{8B0F16E0-DFF2-40C7-9FED-E43E1876A46B}"/>
+                <a16:creationId xmlns:a16="http://schemas.microsoft.com/office/drawing/2014/main" id="{DEADD1F7-3662-4D7C-9847-19ABD6785A32}"/>
               </a:ext>
             </a:extLst>
           </p:cNvPr>
@@ -32069,7 +32067,7 @@
           <p:cNvPr id="28" name="">
             <a:extLst xmlns:a="http://schemas.openxmlformats.org/drawingml/2006/main">
               <a:ext uri="{FF2B5EF4-FFF2-40B4-BE49-F238E27FC236}">
-                <a16:creationId xmlns:a16="http://schemas.microsoft.com/office/drawing/2014/main" id="{264827C1-651E-44C5-BB06-920A47534BFF}"/>
+                <a16:creationId xmlns:a16="http://schemas.microsoft.com/office/drawing/2014/main" id="{AEC2DF64-672F-4C2A-AAD4-560B9B82F22E}"/>
               </a:ext>
             </a:extLst>
           </p:cNvPr>
@@ -32133,7 +32131,7 @@
           <p:cNvPr id="29" name="">
             <a:extLst xmlns:a="http://schemas.openxmlformats.org/drawingml/2006/main">
               <a:ext uri="{FF2B5EF4-FFF2-40B4-BE49-F238E27FC236}">
-                <a16:creationId xmlns:a16="http://schemas.microsoft.com/office/drawing/2014/main" id="{F59FF452-015B-4EF5-BA20-C78731E543FC}"/>
+                <a16:creationId xmlns:a16="http://schemas.microsoft.com/office/drawing/2014/main" id="{48AFB469-1A4E-43DB-8EB7-855359B9173A}"/>
               </a:ext>
             </a:extLst>
           </p:cNvPr>
@@ -32197,7 +32195,7 @@
           <p:cNvPr id="30" name="">
             <a:extLst xmlns:a="http://schemas.openxmlformats.org/drawingml/2006/main">
               <a:ext uri="{FF2B5EF4-FFF2-40B4-BE49-F238E27FC236}">
-                <a16:creationId xmlns:a16="http://schemas.microsoft.com/office/drawing/2014/main" id="{D696E606-0128-4318-A10A-9312A362BBC5}"/>
+                <a16:creationId xmlns:a16="http://schemas.microsoft.com/office/drawing/2014/main" id="{293D3BF5-28EE-48BF-B79C-58EAC67EC48A}"/>
               </a:ext>
             </a:extLst>
           </p:cNvPr>
@@ -32230,7 +32228,7 @@
           <p:cNvPr id="31" name="">
             <a:extLst xmlns:a="http://schemas.openxmlformats.org/drawingml/2006/main">
               <a:ext uri="{FF2B5EF4-FFF2-40B4-BE49-F238E27FC236}">
-                <a16:creationId xmlns:a16="http://schemas.microsoft.com/office/drawing/2014/main" id="{D7653392-35D0-4790-94A6-FA6DC6FD088F}"/>
+                <a16:creationId xmlns:a16="http://schemas.microsoft.com/office/drawing/2014/main" id="{F94C1985-06DC-4C4B-8D5A-A7D23B9EE3BA}"/>
               </a:ext>
             </a:extLst>
           </p:cNvPr>
@@ -32294,7 +32292,7 @@
           <p:cNvPr id="32" name="">
             <a:extLst xmlns:a="http://schemas.openxmlformats.org/drawingml/2006/main">
               <a:ext uri="{FF2B5EF4-FFF2-40B4-BE49-F238E27FC236}">
-                <a16:creationId xmlns:a16="http://schemas.microsoft.com/office/drawing/2014/main" id="{9B2B1294-8C1D-48DF-B166-EF8C53FB9426}"/>
+                <a16:creationId xmlns:a16="http://schemas.microsoft.com/office/drawing/2014/main" id="{53E677A9-5920-4831-8AF2-B01304554A1F}"/>
               </a:ext>
             </a:extLst>
           </p:cNvPr>
@@ -32358,7 +32356,7 @@
           <p:cNvPr id="33" name="">
             <a:extLst xmlns:a="http://schemas.openxmlformats.org/drawingml/2006/main">
               <a:ext uri="{FF2B5EF4-FFF2-40B4-BE49-F238E27FC236}">
-                <a16:creationId xmlns:a16="http://schemas.microsoft.com/office/drawing/2014/main" id="{D23E8A07-05FB-4B0E-9446-2FCEE8CB99F7}"/>
+                <a16:creationId xmlns:a16="http://schemas.microsoft.com/office/drawing/2014/main" id="{54F07196-997A-4673-9D89-2C87B805CC74}"/>
               </a:ext>
             </a:extLst>
           </p:cNvPr>
@@ -32391,7 +32389,7 @@
           <p:cNvPr id="34" name="">
             <a:extLst xmlns:a="http://schemas.openxmlformats.org/drawingml/2006/main">
               <a:ext uri="{FF2B5EF4-FFF2-40B4-BE49-F238E27FC236}">
-                <a16:creationId xmlns:a16="http://schemas.microsoft.com/office/drawing/2014/main" id="{AE5291DF-CA55-4F0C-90F9-D17D052BF31E}"/>
+                <a16:creationId xmlns:a16="http://schemas.microsoft.com/office/drawing/2014/main" id="{A46E4675-A49A-421C-8865-C5F23E07466A}"/>
               </a:ext>
             </a:extLst>
           </p:cNvPr>
@@ -32455,7 +32453,7 @@
           <p:cNvPr id="35" name="">
             <a:extLst xmlns:a="http://schemas.openxmlformats.org/drawingml/2006/main">
               <a:ext uri="{FF2B5EF4-FFF2-40B4-BE49-F238E27FC236}">
-                <a16:creationId xmlns:a16="http://schemas.microsoft.com/office/drawing/2014/main" id="{A8AF5CA1-41E5-4E30-A5CD-6455C5A71D6E}"/>
+                <a16:creationId xmlns:a16="http://schemas.microsoft.com/office/drawing/2014/main" id="{FA46FA77-789B-4209-BC45-E9DC2BCD5299}"/>
               </a:ext>
             </a:extLst>
           </p:cNvPr>
@@ -32519,7 +32517,7 @@
           <p:cNvPr id="36" name="">
             <a:extLst xmlns:a="http://schemas.openxmlformats.org/drawingml/2006/main">
               <a:ext uri="{FF2B5EF4-FFF2-40B4-BE49-F238E27FC236}">
-                <a16:creationId xmlns:a16="http://schemas.microsoft.com/office/drawing/2014/main" id="{0DD827AC-C9EF-445D-801A-03FD50DEFEA2}"/>
+                <a16:creationId xmlns:a16="http://schemas.microsoft.com/office/drawing/2014/main" id="{00808680-08A0-4954-90E2-03D4E85F175B}"/>
               </a:ext>
             </a:extLst>
           </p:cNvPr>
@@ -32554,7 +32552,7 @@
           <p:cNvPr id="37" name="">
             <a:extLst xmlns:a="http://schemas.openxmlformats.org/drawingml/2006/main">
               <a:ext uri="{FF2B5EF4-FFF2-40B4-BE49-F238E27FC236}">
-                <a16:creationId xmlns:a16="http://schemas.microsoft.com/office/drawing/2014/main" id="{56705702-4B81-447A-97B9-9C5C897E1B29}"/>
+                <a16:creationId xmlns:a16="http://schemas.microsoft.com/office/drawing/2014/main" id="{37135583-F978-4A95-8B62-FB9C3EFEFDEB}"/>
               </a:ext>
             </a:extLst>
           </p:cNvPr>
@@ -32618,7 +32616,7 @@
           <p:cNvPr id="38" name="">
             <a:extLst xmlns:a="http://schemas.openxmlformats.org/drawingml/2006/main">
               <a:ext uri="{FF2B5EF4-FFF2-40B4-BE49-F238E27FC236}">
-                <a16:creationId xmlns:a16="http://schemas.microsoft.com/office/drawing/2014/main" id="{DC5B43AC-A4A6-4A09-A785-E2D94C91577B}"/>
+                <a16:creationId xmlns:a16="http://schemas.microsoft.com/office/drawing/2014/main" id="{96DE91F4-2557-440F-BA93-4B5EC8D8EBC6}"/>
               </a:ext>
             </a:extLst>
           </p:cNvPr>
@@ -32682,7 +32680,7 @@
           <p:cNvPr id="39" name="">
             <a:extLst xmlns:a="http://schemas.openxmlformats.org/drawingml/2006/main">
               <a:ext uri="{FF2B5EF4-FFF2-40B4-BE49-F238E27FC236}">
-                <a16:creationId xmlns:a16="http://schemas.microsoft.com/office/drawing/2014/main" id="{DDDE80DF-9D53-4C8B-8867-306F963E90E2}"/>
+                <a16:creationId xmlns:a16="http://schemas.microsoft.com/office/drawing/2014/main" id="{C6D21EA4-5BBE-4812-9B5E-351054413CFA}"/>
               </a:ext>
             </a:extLst>
           </p:cNvPr>
@@ -32746,7 +32744,7 @@
           <p:cNvPr id="40" name="">
             <a:extLst xmlns:a="http://schemas.openxmlformats.org/drawingml/2006/main">
               <a:ext uri="{FF2B5EF4-FFF2-40B4-BE49-F238E27FC236}">
-                <a16:creationId xmlns:a16="http://schemas.microsoft.com/office/drawing/2014/main" id="{E8718EE5-4CA2-464A-B9B9-6A1483162BD8}"/>
+                <a16:creationId xmlns:a16="http://schemas.microsoft.com/office/drawing/2014/main" id="{5E968C20-987C-4880-B7FE-F4173CBDF69E}"/>
               </a:ext>
             </a:extLst>
           </p:cNvPr>
@@ -32781,7 +32779,7 @@
           <p:cNvPr id="41" name="">
             <a:extLst xmlns:a="http://schemas.openxmlformats.org/drawingml/2006/main">
               <a:ext uri="{FF2B5EF4-FFF2-40B4-BE49-F238E27FC236}">
-                <a16:creationId xmlns:a16="http://schemas.microsoft.com/office/drawing/2014/main" id="{EB003115-F170-438B-80C0-488C965B3AA9}"/>
+                <a16:creationId xmlns:a16="http://schemas.microsoft.com/office/drawing/2014/main" id="{12E5C9DE-298D-4967-9BD3-469F1C291F10}"/>
               </a:ext>
             </a:extLst>
           </p:cNvPr>
@@ -32816,7 +32814,7 @@
           <p:cNvPr id="42" name="">
             <a:extLst xmlns:a="http://schemas.openxmlformats.org/drawingml/2006/main">
               <a:ext uri="{FF2B5EF4-FFF2-40B4-BE49-F238E27FC236}">
-                <a16:creationId xmlns:a16="http://schemas.microsoft.com/office/drawing/2014/main" id="{DD36AD6C-26C5-4451-9653-547BBC583CAB}"/>
+                <a16:creationId xmlns:a16="http://schemas.microsoft.com/office/drawing/2014/main" id="{DCDBF57B-D37B-4129-B7DA-0EC45CD5D4C8}"/>
               </a:ext>
             </a:extLst>
           </p:cNvPr>
@@ -32851,7 +32849,7 @@
           <p:cNvPr id="43" name="kicker-06-marker">
             <a:extLst xmlns:a="http://schemas.openxmlformats.org/drawingml/2006/main">
               <a:ext uri="{FF2B5EF4-FFF2-40B4-BE49-F238E27FC236}">
-                <a16:creationId xmlns:a16="http://schemas.microsoft.com/office/drawing/2014/main" id="{FA552232-8415-4F53-97F0-E394B9D7A24A}"/>
+                <a16:creationId xmlns:a16="http://schemas.microsoft.com/office/drawing/2014/main" id="{540D745A-691E-4405-A291-CC0F3DA85424}"/>
               </a:ext>
             </a:extLst>
           </p:cNvPr>
@@ -32886,7 +32884,7 @@
           <p:cNvPr id="44" name="kicker-06-label">
             <a:extLst xmlns:a="http://schemas.openxmlformats.org/drawingml/2006/main">
               <a:ext uri="{FF2B5EF4-FFF2-40B4-BE49-F238E27FC236}">
-                <a16:creationId xmlns:a16="http://schemas.microsoft.com/office/drawing/2014/main" id="{21289480-CF56-4D16-870E-DE5CBB559B58}"/>
+                <a16:creationId xmlns:a16="http://schemas.microsoft.com/office/drawing/2014/main" id="{3859A2A1-214E-4D6D-8F9E-FF5473D997F0}"/>
               </a:ext>
             </a:extLst>
           </p:cNvPr>
@@ -32950,7 +32948,7 @@
           <p:cNvPr id="45" name="">
             <a:extLst xmlns:a="http://schemas.openxmlformats.org/drawingml/2006/main">
               <a:ext uri="{FF2B5EF4-FFF2-40B4-BE49-F238E27FC236}">
-                <a16:creationId xmlns:a16="http://schemas.microsoft.com/office/drawing/2014/main" id="{FA58EA40-9C96-4D84-B1E7-66B5C087979F}"/>
+                <a16:creationId xmlns:a16="http://schemas.microsoft.com/office/drawing/2014/main" id="{D227C8B9-8B15-44F5-922A-054E5397616C}"/>
               </a:ext>
             </a:extLst>
           </p:cNvPr>
@@ -33014,7 +33012,7 @@
           <p:cNvPr id="46" name="">
             <a:extLst xmlns:a="http://schemas.openxmlformats.org/drawingml/2006/main">
               <a:ext uri="{FF2B5EF4-FFF2-40B4-BE49-F238E27FC236}">
-                <a16:creationId xmlns:a16="http://schemas.microsoft.com/office/drawing/2014/main" id="{C1A5C8BB-C592-4891-B33B-9704CF0DAD3B}"/>
+                <a16:creationId xmlns:a16="http://schemas.microsoft.com/office/drawing/2014/main" id="{D20B0D91-B0CB-4625-867D-E843893058A7}"/>
               </a:ext>
             </a:extLst>
           </p:cNvPr>
@@ -33078,7 +33076,7 @@
           <p:cNvPr id="47" name="">
             <a:extLst xmlns:a="http://schemas.openxmlformats.org/drawingml/2006/main">
               <a:ext uri="{FF2B5EF4-FFF2-40B4-BE49-F238E27FC236}">
-                <a16:creationId xmlns:a16="http://schemas.microsoft.com/office/drawing/2014/main" id="{46C150B3-1299-4215-8FAF-0C7BD07ECC32}"/>
+                <a16:creationId xmlns:a16="http://schemas.microsoft.com/office/drawing/2014/main" id="{9E72D9FE-33F4-4022-8D61-7300F5681387}"/>
               </a:ext>
             </a:extLst>
           </p:cNvPr>
@@ -33113,7 +33111,7 @@
           <p:cNvPr id="48" name="">
             <a:extLst xmlns:a="http://schemas.openxmlformats.org/drawingml/2006/main">
               <a:ext uri="{FF2B5EF4-FFF2-40B4-BE49-F238E27FC236}">
-                <a16:creationId xmlns:a16="http://schemas.microsoft.com/office/drawing/2014/main" id="{5C216061-B598-4FFF-A9B6-B77F1C52D4D8}"/>
+                <a16:creationId xmlns:a16="http://schemas.microsoft.com/office/drawing/2014/main" id="{6E3A5EA5-7D26-4109-ADD2-C3EF27FC4299}"/>
               </a:ext>
             </a:extLst>
           </p:cNvPr>
@@ -33148,7 +33146,7 @@
           <p:cNvPr id="49" name="">
             <a:extLst xmlns:a="http://schemas.openxmlformats.org/drawingml/2006/main">
               <a:ext uri="{FF2B5EF4-FFF2-40B4-BE49-F238E27FC236}">
-                <a16:creationId xmlns:a16="http://schemas.microsoft.com/office/drawing/2014/main" id="{0B86F8BB-442B-47A4-A278-CECED45265E1}"/>
+                <a16:creationId xmlns:a16="http://schemas.microsoft.com/office/drawing/2014/main" id="{50D4E224-E299-4A15-BF6A-D11B1F0565C5}"/>
               </a:ext>
             </a:extLst>
           </p:cNvPr>
@@ -33183,7 +33181,7 @@
           <p:cNvPr id="50" name="">
             <a:extLst xmlns:a="http://schemas.openxmlformats.org/drawingml/2006/main">
               <a:ext uri="{FF2B5EF4-FFF2-40B4-BE49-F238E27FC236}">
-                <a16:creationId xmlns:a16="http://schemas.microsoft.com/office/drawing/2014/main" id="{0B2BA567-1D2B-4540-8BFD-C391B22129F5}"/>
+                <a16:creationId xmlns:a16="http://schemas.microsoft.com/office/drawing/2014/main" id="{FA84AE37-D0FB-467E-B691-F1AC29B01345}"/>
               </a:ext>
             </a:extLst>
           </p:cNvPr>
@@ -33218,7 +33216,7 @@
           <p:cNvPr id="51" name="">
             <a:extLst xmlns:a="http://schemas.openxmlformats.org/drawingml/2006/main">
               <a:ext uri="{FF2B5EF4-FFF2-40B4-BE49-F238E27FC236}">
-                <a16:creationId xmlns:a16="http://schemas.microsoft.com/office/drawing/2014/main" id="{7DBD0337-8C8C-4A44-BC7C-2A1F3BBD1EB1}"/>
+                <a16:creationId xmlns:a16="http://schemas.microsoft.com/office/drawing/2014/main" id="{C2897DD4-9997-4161-BCAD-287DAA81B9D2}"/>
               </a:ext>
             </a:extLst>
           </p:cNvPr>
@@ -33282,7 +33280,7 @@
           <p:cNvPr id="52" name="">
             <a:extLst xmlns:a="http://schemas.openxmlformats.org/drawingml/2006/main">
               <a:ext uri="{FF2B5EF4-FFF2-40B4-BE49-F238E27FC236}">
-                <a16:creationId xmlns:a16="http://schemas.microsoft.com/office/drawing/2014/main" id="{6412DEB0-4332-4485-8D79-2C4000AAE123}"/>
+                <a16:creationId xmlns:a16="http://schemas.microsoft.com/office/drawing/2014/main" id="{99D46DDB-3885-40CF-9B06-EFCEA946E91E}"/>
               </a:ext>
             </a:extLst>
           </p:cNvPr>
@@ -33346,7 +33344,7 @@
           <p:cNvPr id="53" name="">
             <a:extLst xmlns:a="http://schemas.openxmlformats.org/drawingml/2006/main">
               <a:ext uri="{FF2B5EF4-FFF2-40B4-BE49-F238E27FC236}">
-                <a16:creationId xmlns:a16="http://schemas.microsoft.com/office/drawing/2014/main" id="{7862F590-3530-4D37-B2D1-8CAB093E35E4}"/>
+                <a16:creationId xmlns:a16="http://schemas.microsoft.com/office/drawing/2014/main" id="{90A81D71-83CA-4B4D-A565-95B97D3C3465}"/>
               </a:ext>
             </a:extLst>
           </p:cNvPr>
@@ -33408,7 +33406,7 @@
     </p:spTree>
     <p:extLst>
       <p:ext uri="{BB962C8B-B14F-4D97-AF65-F5344CB8AC3E}">
-        <p14:creationId xmlns:p14="http://schemas.microsoft.com/office/powerpoint/2010/main" val="1281538279"/>
+        <p14:creationId xmlns:p14="http://schemas.microsoft.com/office/powerpoint/2010/main" val="1653954072"/>
       </p:ext>
     </p:extLst>
   </p:cSld>
